--- a/PPT_Perception/temp/task/task3_task.pptx
+++ b/PPT_Perception/temp/task/task3_task.pptx
@@ -12,60 +12,60 @@
     <p:handoutMasterId r:id="rId59"/>
   </p:handoutMasterIdLst>
   <p:sldIdLst>
-    <p:sldId id="2859" r:id="rId4"/>
-    <p:sldId id="2912" r:id="rId5"/>
-    <p:sldId id="2911" r:id="rId6"/>
-    <p:sldId id="2910" r:id="rId7"/>
-    <p:sldId id="2909" r:id="rId8"/>
-    <p:sldId id="2908" r:id="rId9"/>
-    <p:sldId id="2907" r:id="rId10"/>
-    <p:sldId id="2906" r:id="rId11"/>
-    <p:sldId id="2905" r:id="rId12"/>
-    <p:sldId id="2904" r:id="rId13"/>
-    <p:sldId id="2903" r:id="rId14"/>
-    <p:sldId id="2902" r:id="rId15"/>
-    <p:sldId id="2901" r:id="rId16"/>
-    <p:sldId id="2900" r:id="rId17"/>
-    <p:sldId id="2899" r:id="rId18"/>
-    <p:sldId id="2898" r:id="rId19"/>
-    <p:sldId id="2897" r:id="rId20"/>
-    <p:sldId id="2896" r:id="rId21"/>
-    <p:sldId id="2895" r:id="rId22"/>
-    <p:sldId id="2894" r:id="rId23"/>
-    <p:sldId id="2893" r:id="rId24"/>
-    <p:sldId id="2892" r:id="rId25"/>
-    <p:sldId id="2891" r:id="rId26"/>
-    <p:sldId id="2890" r:id="rId27"/>
-    <p:sldId id="2889" r:id="rId28"/>
-    <p:sldId id="2888" r:id="rId29"/>
-    <p:sldId id="2887" r:id="rId30"/>
-    <p:sldId id="2886" r:id="rId31"/>
-    <p:sldId id="2885" r:id="rId32"/>
-    <p:sldId id="2884" r:id="rId33"/>
-    <p:sldId id="2883" r:id="rId34"/>
-    <p:sldId id="2882" r:id="rId35"/>
-    <p:sldId id="2881" r:id="rId36"/>
-    <p:sldId id="2880" r:id="rId37"/>
-    <p:sldId id="2879" r:id="rId38"/>
-    <p:sldId id="2878" r:id="rId39"/>
-    <p:sldId id="2877" r:id="rId40"/>
-    <p:sldId id="2876" r:id="rId41"/>
-    <p:sldId id="2875" r:id="rId42"/>
-    <p:sldId id="2874" r:id="rId43"/>
-    <p:sldId id="2873" r:id="rId44"/>
-    <p:sldId id="2872" r:id="rId45"/>
-    <p:sldId id="2871" r:id="rId46"/>
-    <p:sldId id="2870" r:id="rId47"/>
-    <p:sldId id="2869" r:id="rId48"/>
-    <p:sldId id="2868" r:id="rId49"/>
-    <p:sldId id="2867" r:id="rId50"/>
-    <p:sldId id="2866" r:id="rId51"/>
-    <p:sldId id="2865" r:id="rId52"/>
-    <p:sldId id="2864" r:id="rId53"/>
-    <p:sldId id="2863" r:id="rId54"/>
-    <p:sldId id="2862" r:id="rId55"/>
-    <p:sldId id="2861" r:id="rId56"/>
-    <p:sldId id="2860" r:id="rId57"/>
+    <p:sldId id="2880" r:id="rId4"/>
+    <p:sldId id="2933" r:id="rId5"/>
+    <p:sldId id="2932" r:id="rId6"/>
+    <p:sldId id="2931" r:id="rId7"/>
+    <p:sldId id="2930" r:id="rId8"/>
+    <p:sldId id="2929" r:id="rId9"/>
+    <p:sldId id="2928" r:id="rId10"/>
+    <p:sldId id="2927" r:id="rId11"/>
+    <p:sldId id="2926" r:id="rId12"/>
+    <p:sldId id="2925" r:id="rId13"/>
+    <p:sldId id="2924" r:id="rId14"/>
+    <p:sldId id="2923" r:id="rId15"/>
+    <p:sldId id="2922" r:id="rId16"/>
+    <p:sldId id="2921" r:id="rId17"/>
+    <p:sldId id="2920" r:id="rId18"/>
+    <p:sldId id="2919" r:id="rId19"/>
+    <p:sldId id="2918" r:id="rId20"/>
+    <p:sldId id="2917" r:id="rId21"/>
+    <p:sldId id="2916" r:id="rId22"/>
+    <p:sldId id="2915" r:id="rId23"/>
+    <p:sldId id="2914" r:id="rId24"/>
+    <p:sldId id="2913" r:id="rId25"/>
+    <p:sldId id="2912" r:id="rId26"/>
+    <p:sldId id="2911" r:id="rId27"/>
+    <p:sldId id="2910" r:id="rId28"/>
+    <p:sldId id="2909" r:id="rId29"/>
+    <p:sldId id="2908" r:id="rId30"/>
+    <p:sldId id="2907" r:id="rId31"/>
+    <p:sldId id="2906" r:id="rId32"/>
+    <p:sldId id="2905" r:id="rId33"/>
+    <p:sldId id="2904" r:id="rId34"/>
+    <p:sldId id="2903" r:id="rId35"/>
+    <p:sldId id="2902" r:id="rId36"/>
+    <p:sldId id="2901" r:id="rId37"/>
+    <p:sldId id="2900" r:id="rId38"/>
+    <p:sldId id="2899" r:id="rId39"/>
+    <p:sldId id="2898" r:id="rId40"/>
+    <p:sldId id="2897" r:id="rId41"/>
+    <p:sldId id="2896" r:id="rId42"/>
+    <p:sldId id="2895" r:id="rId43"/>
+    <p:sldId id="2894" r:id="rId44"/>
+    <p:sldId id="2893" r:id="rId45"/>
+    <p:sldId id="2892" r:id="rId46"/>
+    <p:sldId id="2891" r:id="rId47"/>
+    <p:sldId id="2890" r:id="rId48"/>
+    <p:sldId id="2889" r:id="rId49"/>
+    <p:sldId id="2888" r:id="rId50"/>
+    <p:sldId id="2887" r:id="rId51"/>
+    <p:sldId id="2886" r:id="rId52"/>
+    <p:sldId id="2885" r:id="rId53"/>
+    <p:sldId id="2884" r:id="rId54"/>
+    <p:sldId id="2883" r:id="rId55"/>
+    <p:sldId id="2882" r:id="rId56"/>
+    <p:sldId id="2881" r:id="rId57"/>
   </p:sldIdLst>
   <p:sldSz cx="12192000" cy="6858000"/>
   <p:notesSz cx="6858000" cy="9144000"/>
@@ -170,12 +170,12 @@
   <p:extLst>
     <p:ext uri="{EFAFB233-063F-42B5-8137-9DF3F51BA10A}">
       <p15:sldGuideLst xmlns:p15="http://schemas.microsoft.com/office/powerpoint/2012/main">
-        <p15:guide id="1" orient="horz" pos="1816" userDrawn="1">
+        <p15:guide id="1" orient="horz" pos="1798" userDrawn="1">
           <p15:clr>
             <a:srgbClr val="A4A3A4"/>
           </p15:clr>
         </p15:guide>
-        <p15:guide id="2" pos="3670" userDrawn="1">
+        <p15:guide id="2" pos="3656" userDrawn="1">
           <p15:clr>
             <a:srgbClr val="A4A3A4"/>
           </p15:clr>
@@ -6921,7 +6921,7 @@
       </p:grpSpPr>
       <p:sp>
         <p:nvSpPr>
-          <p:cNvPr id="12" name="圆角矩形 34"/>
+          <p:cNvPr id="21" name="任意多边形 44"/>
           <p:cNvSpPr/>
           <p:nvPr>
             <p:custDataLst>
@@ -6930,190 +6930,9 @@
           </p:nvPr>
         </p:nvSpPr>
         <p:spPr>
-          <a:xfrm rot="2700000">
-            <a:off x="4053840" y="2520315"/>
-            <a:ext cx="1509395" cy="1517015"/>
-          </a:xfrm>
-          <a:prstGeom prst="roundRect">
-            <a:avLst>
-              <a:gd name="adj" fmla="val 6319"/>
-            </a:avLst>
-          </a:prstGeom>
-          <a:solidFill>
-            <a:schemeClr val="bg1">
-              <a:lumMod val="95000"/>
-            </a:schemeClr>
-          </a:solidFill>
-          <a:ln>
-            <a:noFill/>
-          </a:ln>
-          <a:effectLst>
-            <a:outerShdw blurRad="152400" dist="63500" dir="8100000" algn="tl" rotWithShape="0">
-              <a:prstClr val="black">
-                <a:alpha val="30000"/>
-              </a:prstClr>
-            </a:outerShdw>
-          </a:effectLst>
-          <a:scene3d>
-            <a:camera prst="orthographicFront"/>
-            <a:lightRig rig="threePt" dir="t"/>
-          </a:scene3d>
-          <a:sp3d prstMaterial="softEdge">
-            <a:bevelT w="38100" h="6350"/>
-          </a:sp3d>
-        </p:spPr>
-        <p:style>
-          <a:lnRef idx="2">
-            <a:schemeClr val="accent1">
-              <a:shade val="50000"/>
-            </a:schemeClr>
-          </a:lnRef>
-          <a:fillRef idx="1">
-            <a:schemeClr val="accent1"/>
-          </a:fillRef>
-          <a:effectRef idx="0">
-            <a:schemeClr val="accent1"/>
-          </a:effectRef>
-          <a:fontRef idx="minor">
-            <a:schemeClr val="lt1"/>
-          </a:fontRef>
-        </p:style>
-        <p:txBody>
-          <a:bodyPr rtlCol="0" anchor="ctr"/>
-          <a:lstStyle/>
-          <a:p>
-            <a:pPr marL="0" marR="0" lvl="0" indent="0" algn="ctr" defTabSz="914400" rtl="0" eaLnBrk="1" fontAlgn="auto" latinLnBrk="0" hangingPunct="1">
-              <a:lnSpc>
-                <a:spcPct val="100000"/>
-              </a:lnSpc>
-              <a:spcBef>
-                <a:spcPts val="0"/>
-              </a:spcBef>
-              <a:spcAft>
-                <a:spcPts val="0"/>
-              </a:spcAft>
-              <a:buClrTx/>
-              <a:buSzTx/>
-              <a:buFontTx/>
-              <a:buNone/>
-              <a:defRPr/>
-            </a:pPr>
-            <a:endParaRPr kumimoji="0" lang="zh-CN" altLang="en-US" sz="2800" b="0" i="0" u="none" strike="noStrike" kern="1200" cap="none" spc="0" normalizeH="0" baseline="0" noProof="0" dirty="0">
-              <a:ln>
-                <a:noFill/>
-              </a:ln>
-              <a:solidFill>
-                <a:prstClr val="white"/>
-              </a:solidFill>
-              <a:effectLst/>
-              <a:uLnTx/>
-              <a:uFillTx/>
-              <a:latin typeface="DIN-BoldItalic" pitchFamily="50" charset="0"/>
-              <a:ea typeface="微软雅黑" panose="020B0503020204020204" pitchFamily="34" charset="-122"/>
-              <a:cs typeface="+mn-cs"/>
-            </a:endParaRPr>
-          </a:p>
-        </p:txBody>
-      </p:sp>
-      <p:sp>
-        <p:nvSpPr>
-          <p:cNvPr id="2" name="圆角矩形 38"/>
-          <p:cNvSpPr/>
-          <p:nvPr>
-            <p:custDataLst>
-              <p:tags r:id="rId2"/>
-            </p:custDataLst>
-          </p:nvPr>
-        </p:nvSpPr>
-        <p:spPr>
-          <a:xfrm rot="2700000">
-            <a:off x="4272915" y="2696845"/>
-            <a:ext cx="1068070" cy="1068070"/>
-          </a:xfrm>
-          <a:prstGeom prst="roundRect">
-            <a:avLst>
-              <a:gd name="adj" fmla="val 6319"/>
-            </a:avLst>
-          </a:prstGeom>
-          <a:solidFill>
-            <a:schemeClr val="tx1">
-              <a:lumMod val="65000"/>
-              <a:lumOff val="35000"/>
-            </a:schemeClr>
-          </a:solidFill>
-          <a:ln>
-            <a:solidFill>
-              <a:schemeClr val="accent1"/>
-            </a:solidFill>
-          </a:ln>
-        </p:spPr>
-        <p:style>
-          <a:lnRef idx="2">
-            <a:schemeClr val="accent1">
-              <a:shade val="50000"/>
-            </a:schemeClr>
-          </a:lnRef>
-          <a:fillRef idx="1">
-            <a:schemeClr val="accent1"/>
-          </a:fillRef>
-          <a:effectRef idx="0">
-            <a:schemeClr val="accent1"/>
-          </a:effectRef>
-          <a:fontRef idx="minor">
-            <a:schemeClr val="lt1"/>
-          </a:fontRef>
-        </p:style>
-        <p:txBody>
-          <a:bodyPr rtlCol="0" anchor="ctr"/>
-          <a:lstStyle/>
-          <a:p>
-            <a:pPr marL="0" marR="0" lvl="0" indent="0" algn="ctr" defTabSz="914400" rtl="0" eaLnBrk="1" fontAlgn="auto" latinLnBrk="0" hangingPunct="1">
-              <a:lnSpc>
-                <a:spcPct val="100000"/>
-              </a:lnSpc>
-              <a:spcBef>
-                <a:spcPts val="0"/>
-              </a:spcBef>
-              <a:spcAft>
-                <a:spcPts val="0"/>
-              </a:spcAft>
-              <a:buClrTx/>
-              <a:buSzTx/>
-              <a:buFontTx/>
-              <a:buNone/>
-              <a:defRPr/>
-            </a:pPr>
-            <a:endParaRPr kumimoji="0" lang="zh-CN" altLang="en-US" sz="1800" b="0" i="0" u="none" strike="noStrike" kern="1200" cap="none" spc="0" normalizeH="0" baseline="0" noProof="0" dirty="0">
-              <a:ln>
-                <a:noFill/>
-              </a:ln>
-              <a:solidFill>
-                <a:prstClr val="white"/>
-              </a:solidFill>
-              <a:effectLst/>
-              <a:uLnTx/>
-              <a:uFillTx/>
-              <a:latin typeface="等线" panose="02010600030101010101" charset="-122"/>
-              <a:ea typeface="微软雅黑" panose="020B0503020204020204" pitchFamily="34" charset="-122"/>
-              <a:cs typeface="+mn-cs"/>
-            </a:endParaRPr>
-          </a:p>
-        </p:txBody>
-      </p:sp>
-      <p:sp>
-        <p:nvSpPr>
-          <p:cNvPr id="21" name="任意多边形 44"/>
-          <p:cNvSpPr/>
-          <p:nvPr>
-            <p:custDataLst>
-              <p:tags r:id="rId3"/>
-            </p:custDataLst>
-          </p:nvPr>
-        </p:nvSpPr>
-        <p:spPr>
           <a:xfrm flipV="1">
-            <a:off x="4055110" y="3601085"/>
-            <a:ext cx="1842770" cy="1015365"/>
+            <a:off x="7538194" y="4134567"/>
+            <a:ext cx="1941223" cy="1149108"/>
           </a:xfrm>
           <a:custGeom>
             <a:avLst/>
@@ -7215,77 +7034,31 @@
           </a:p>
         </p:txBody>
       </p:sp>
-      <p:sp>
-        <p:nvSpPr>
-          <p:cNvPr id="10" name="文本框 9"/>
-          <p:cNvSpPr txBox="1"/>
-          <p:nvPr>
-            <p:custDataLst>
-              <p:tags r:id="rId4"/>
-            </p:custDataLst>
-          </p:nvPr>
-        </p:nvSpPr>
-        <p:spPr>
-          <a:xfrm>
-            <a:off x="4513479" y="2762250"/>
-            <a:ext cx="682625" cy="1014730"/>
-          </a:xfrm>
-          <a:prstGeom prst="rect">
-            <a:avLst/>
-          </a:prstGeom>
-          <a:noFill/>
-        </p:spPr>
-        <p:txBody>
-          <a:bodyPr wrap="square" rtlCol="0">
-            <a:spAutoFit/>
-          </a:bodyPr>
-          <a:lstStyle/>
-          <a:p>
-            <a:r>
-              <a:rPr lang="en-US" altLang="zh-CN" sz="6000" b="1">
-                <a:solidFill>
-                  <a:schemeClr val="bg1"/>
-                </a:solidFill>
-                <a:latin typeface="+mj-ea"/>
-                <a:ea typeface="+mj-ea"/>
-              </a:rPr>
-              <a:t>2</a:t>
-            </a:r>
-            <a:endParaRPr lang="en-US" altLang="zh-CN" sz="6000" b="1">
-              <a:solidFill>
-                <a:schemeClr val="bg1"/>
-              </a:solidFill>
-              <a:latin typeface="+mj-ea"/>
-              <a:ea typeface="+mj-ea"/>
-            </a:endParaRPr>
-          </a:p>
-        </p:txBody>
-      </p:sp>
       <p:grpSp>
         <p:nvGrpSpPr>
-          <p:cNvPr id="11" name="组合 10"/>
+          <p:cNvPr id="7" name="组合 6"/>
           <p:cNvGrpSpPr/>
           <p:nvPr>
             <p:custDataLst>
-              <p:tags r:id="rId5"/>
+              <p:tags r:id="rId2"/>
             </p:custDataLst>
           </p:nvPr>
         </p:nvGrpSpPr>
         <p:grpSpPr>
           <a:xfrm>
-            <a:off x="1248410" y="2000885"/>
-            <a:ext cx="1597025" cy="1935480"/>
-            <a:chOff x="4536" y="3212"/>
-            <a:chExt cx="3287" cy="4048"/>
+            <a:off x="7391459" y="2641172"/>
+            <a:ext cx="1892947" cy="1892947"/>
+            <a:chOff x="4536" y="4280"/>
+            <a:chExt cx="2980" cy="2980"/>
           </a:xfrm>
         </p:grpSpPr>
         <p:sp>
           <p:nvSpPr>
-            <p:cNvPr id="13" name="圆角矩形 34"/>
+            <p:cNvPr id="12" name="圆角矩形 34"/>
             <p:cNvSpPr/>
             <p:nvPr>
               <p:custDataLst>
-                <p:tags r:id="rId6"/>
+                <p:tags r:id="rId3"/>
               </p:custDataLst>
             </p:nvPr>
           </p:nvSpPr>
@@ -7377,11 +7150,419 @@
         </p:sp>
         <p:sp>
           <p:nvSpPr>
-            <p:cNvPr id="14" name="圆角矩形 38"/>
+            <p:cNvPr id="16" name="圆角矩形 38"/>
             <p:cNvSpPr/>
             <p:nvPr>
               <p:custDataLst>
-                <p:tags r:id="rId7"/>
+                <p:tags r:id="rId4"/>
+              </p:custDataLst>
+            </p:nvPr>
+          </p:nvSpPr>
+          <p:spPr>
+            <a:xfrm rot="2700000">
+              <a:off x="4943" y="4671"/>
+              <a:ext cx="2185" cy="2185"/>
+            </a:xfrm>
+            <a:prstGeom prst="roundRect">
+              <a:avLst>
+                <a:gd name="adj" fmla="val 6319"/>
+              </a:avLst>
+            </a:prstGeom>
+            <a:solidFill>
+              <a:schemeClr val="tx1">
+                <a:lumMod val="65000"/>
+                <a:lumOff val="35000"/>
+              </a:schemeClr>
+            </a:solidFill>
+            <a:ln>
+              <a:noFill/>
+            </a:ln>
+          </p:spPr>
+          <p:style>
+            <a:lnRef idx="2">
+              <a:schemeClr val="accent1">
+                <a:shade val="50000"/>
+              </a:schemeClr>
+            </a:lnRef>
+            <a:fillRef idx="1">
+              <a:schemeClr val="accent1"/>
+            </a:fillRef>
+            <a:effectRef idx="0">
+              <a:schemeClr val="accent1"/>
+            </a:effectRef>
+            <a:fontRef idx="minor">
+              <a:schemeClr val="lt1"/>
+            </a:fontRef>
+          </p:style>
+          <p:txBody>
+            <a:bodyPr rtlCol="0" anchor="ctr"/>
+            <a:lstStyle/>
+            <a:p>
+              <a:pPr marL="0" marR="0" lvl="0" indent="0" algn="ctr" defTabSz="914400" rtl="0" eaLnBrk="1" fontAlgn="auto" latinLnBrk="0" hangingPunct="1">
+                <a:lnSpc>
+                  <a:spcPct val="100000"/>
+                </a:lnSpc>
+                <a:spcBef>
+                  <a:spcPts val="0"/>
+                </a:spcBef>
+                <a:spcAft>
+                  <a:spcPts val="0"/>
+                </a:spcAft>
+                <a:buClrTx/>
+                <a:buSzTx/>
+                <a:buFontTx/>
+                <a:buNone/>
+                <a:defRPr/>
+              </a:pPr>
+              <a:endParaRPr kumimoji="0" lang="zh-CN" altLang="en-US" sz="1800" b="0" i="0" u="none" strike="noStrike" kern="1200" cap="none" spc="0" normalizeH="0" baseline="0" noProof="0" dirty="0">
+                <a:ln>
+                  <a:noFill/>
+                </a:ln>
+                <a:solidFill>
+                  <a:prstClr val="white"/>
+                </a:solidFill>
+                <a:effectLst/>
+                <a:uLnTx/>
+                <a:uFillTx/>
+                <a:latin typeface="等线" panose="02010600030101010101" charset="-122"/>
+                <a:ea typeface="微软雅黑" panose="020B0503020204020204" pitchFamily="34" charset="-122"/>
+                <a:cs typeface="+mn-cs"/>
+              </a:endParaRPr>
+            </a:p>
+          </p:txBody>
+        </p:sp>
+      </p:grpSp>
+      <p:sp>
+        <p:nvSpPr>
+          <p:cNvPr id="52" name="文本框1"/>
+          <p:cNvSpPr txBox="1"/>
+          <p:nvPr>
+            <p:custDataLst>
+              <p:tags r:id="rId5"/>
+            </p:custDataLst>
+          </p:nvPr>
+        </p:nvSpPr>
+        <p:spPr>
+          <a:xfrm>
+            <a:off x="6184076" y="5350373"/>
+            <a:ext cx="4320000" cy="460375"/>
+          </a:xfrm>
+          <a:prstGeom prst="rect">
+            <a:avLst/>
+          </a:prstGeom>
+          <a:noFill/>
+        </p:spPr>
+        <p:txBody>
+          <a:bodyPr wrap="square" rtlCol="0">
+            <a:spAutoFit/>
+          </a:bodyPr>
+          <a:lstStyle/>
+          <a:p>
+            <a:pPr lvl="0" algn="ctr">
+              <a:buClrTx/>
+              <a:buSzTx/>
+              <a:buFontTx/>
+            </a:pPr>
+            <a:r>
+              <a:rPr lang="en-US" sz="2400" dirty="0" smtClean="0">
+                <a:cs typeface="+mn-ea"/>
+                <a:sym typeface="+mn-lt"/>
+              </a:rPr>
+              <a:t>Transformer </a:t>
+            </a:r>
+            <a:r>
+              <a:rPr lang="zh-CN" altLang="en-US" sz="2400" dirty="0" smtClean="0">
+                <a:cs typeface="+mn-ea"/>
+                <a:sym typeface="+mn-lt"/>
+              </a:rPr>
+              <a:t>中的词嵌入与位置编码</a:t>
+            </a:r>
+            <a:endParaRPr lang="zh-CN" altLang="en-US" sz="2400" dirty="0" smtClean="0">
+              <a:cs typeface="+mn-ea"/>
+              <a:sym typeface="+mn-lt"/>
+            </a:endParaRPr>
+          </a:p>
+        </p:txBody>
+      </p:sp>
+      <p:sp>
+        <p:nvSpPr>
+          <p:cNvPr id="10" name="文本框 9"/>
+          <p:cNvSpPr txBox="1"/>
+          <p:nvPr>
+            <p:custDataLst>
+              <p:tags r:id="rId6"/>
+            </p:custDataLst>
+          </p:nvPr>
+        </p:nvSpPr>
+        <p:spPr>
+          <a:xfrm>
+            <a:off x="7981576" y="3119490"/>
+            <a:ext cx="682858" cy="1014730"/>
+          </a:xfrm>
+          <a:prstGeom prst="rect">
+            <a:avLst/>
+          </a:prstGeom>
+          <a:noFill/>
+        </p:spPr>
+        <p:txBody>
+          <a:bodyPr wrap="square" rtlCol="0">
+            <a:spAutoFit/>
+          </a:bodyPr>
+          <a:lstStyle/>
+          <a:p>
+            <a:r>
+              <a:rPr lang="en-US" altLang="zh-CN" sz="6000" b="1">
+                <a:solidFill>
+                  <a:schemeClr val="bg1"/>
+                </a:solidFill>
+                <a:latin typeface="+mj-ea"/>
+                <a:ea typeface="+mj-ea"/>
+              </a:rPr>
+              <a:t>2</a:t>
+            </a:r>
+            <a:endParaRPr lang="en-US" altLang="zh-CN" sz="6000" b="1">
+              <a:solidFill>
+                <a:schemeClr val="bg1"/>
+              </a:solidFill>
+              <a:latin typeface="+mj-ea"/>
+              <a:ea typeface="+mj-ea"/>
+            </a:endParaRPr>
+          </a:p>
+        </p:txBody>
+      </p:sp>
+      <p:sp>
+        <p:nvSpPr>
+          <p:cNvPr id="35" name="文本框 34"/>
+          <p:cNvSpPr txBox="1"/>
+          <p:nvPr/>
+        </p:nvSpPr>
+        <p:spPr>
+          <a:xfrm>
+            <a:off x="0" y="793750"/>
+            <a:ext cx="1351262" cy="2061210"/>
+          </a:xfrm>
+          <a:prstGeom prst="rect">
+            <a:avLst/>
+          </a:prstGeom>
+          <a:noFill/>
+        </p:spPr>
+        <p:txBody>
+          <a:bodyPr wrap="square" rtlCol="0">
+            <a:spAutoFit/>
+            <a:scene3d>
+              <a:camera prst="orthographicFront"/>
+              <a:lightRig rig="threePt" dir="t"/>
+            </a:scene3d>
+            <a:sp3d contourW="12700"/>
+          </a:bodyPr>
+          <a:lstStyle/>
+          <a:p>
+            <a:pPr algn="ctr"/>
+            <a:r>
+              <a:rPr lang="en-US" altLang="zh-CN" sz="3200" dirty="0" smtClean="0">
+                <a:solidFill>
+                  <a:srgbClr val="3F396C"/>
+                </a:solidFill>
+                <a:latin typeface="思源宋体" panose="02020700000000000000" charset="-122"/>
+                <a:ea typeface="思源宋体" panose="02020700000000000000" charset="-122"/>
+              </a:rPr>
+              <a:t>04</a:t>
+            </a:r>
+            <a:endParaRPr lang="en-US" altLang="zh-CN" sz="3200" dirty="0" smtClean="0">
+              <a:solidFill>
+                <a:srgbClr val="3F396C"/>
+              </a:solidFill>
+              <a:latin typeface="思源宋体" panose="02020700000000000000" charset="-122"/>
+              <a:ea typeface="思源宋体" panose="02020700000000000000" charset="-122"/>
+            </a:endParaRPr>
+          </a:p>
+        </p:txBody>
+      </p:sp>
+      <p:sp>
+        <p:nvSpPr>
+          <p:cNvPr id="8" name="文本框1"/>
+          <p:cNvSpPr txBox="1"/>
+          <p:nvPr>
+            <p:custDataLst>
+              <p:tags r:id="rId7"/>
+            </p:custDataLst>
+          </p:nvPr>
+        </p:nvSpPr>
+        <p:spPr>
+          <a:xfrm>
+            <a:off x="1483995" y="5350510"/>
+            <a:ext cx="4320000" cy="460375"/>
+          </a:xfrm>
+          <a:prstGeom prst="rect">
+            <a:avLst/>
+          </a:prstGeom>
+          <a:noFill/>
+        </p:spPr>
+        <p:txBody>
+          <a:bodyPr wrap="square" rtlCol="0">
+            <a:spAutoFit/>
+          </a:bodyPr>
+          <a:lstStyle/>
+          <a:p>
+            <a:pPr marL="0" marR="0" lvl="0" indent="0" algn="ctr" defTabSz="914400" rtl="0" eaLnBrk="1" fontAlgn="auto" latinLnBrk="0" hangingPunct="1">
+              <a:lnSpc>
+                <a:spcPct val="100000"/>
+              </a:lnSpc>
+              <a:spcBef>
+                <a:spcPts val="0"/>
+              </a:spcBef>
+              <a:spcAft>
+                <a:spcPts val="0"/>
+              </a:spcAft>
+              <a:buClrTx/>
+              <a:buSzTx/>
+              <a:buFontTx/>
+              <a:buNone/>
+              <a:defRPr/>
+            </a:pPr>
+            <a:r>
+              <a:rPr lang="zh-CN" altLang="zh-CN" sz="2400" b="1" dirty="0" smtClean="0">
+                <a:solidFill>
+                  <a:srgbClr val="0064D2"/>
+                </a:solidFill>
+                <a:latin typeface="微软雅黑" panose="020B0503020204020204" pitchFamily="34" charset="-122"/>
+                <a:ea typeface="微软雅黑" panose="020B0503020204020204" pitchFamily="34" charset="-122"/>
+                <a:sym typeface="+mn-ea"/>
+              </a:rPr>
+              <a:t>使用不同的分词器实现分词</a:t>
+            </a:r>
+            <a:endParaRPr lang="zh-CN" altLang="zh-CN" sz="2400" b="1" dirty="0" smtClean="0">
+              <a:solidFill>
+                <a:srgbClr val="0064D2"/>
+              </a:solidFill>
+              <a:latin typeface="微软雅黑" panose="020B0503020204020204" pitchFamily="34" charset="-122"/>
+              <a:ea typeface="微软雅黑" panose="020B0503020204020204" pitchFamily="34" charset="-122"/>
+              <a:sym typeface="+mn-ea"/>
+            </a:endParaRPr>
+          </a:p>
+        </p:txBody>
+      </p:sp>
+      <p:grpSp>
+        <p:nvGrpSpPr>
+          <p:cNvPr id="2" name="组合 1"/>
+          <p:cNvGrpSpPr/>
+          <p:nvPr>
+            <p:custDataLst>
+              <p:tags r:id="rId8"/>
+            </p:custDataLst>
+          </p:nvPr>
+        </p:nvGrpSpPr>
+        <p:grpSpPr>
+          <a:xfrm>
+            <a:off x="2691210" y="2004060"/>
+            <a:ext cx="2087958" cy="2571359"/>
+            <a:chOff x="4536" y="3212"/>
+            <a:chExt cx="3287" cy="4048"/>
+          </a:xfrm>
+        </p:grpSpPr>
+        <p:sp>
+          <p:nvSpPr>
+            <p:cNvPr id="3" name="圆角矩形 34"/>
+            <p:cNvSpPr/>
+            <p:nvPr>
+              <p:custDataLst>
+                <p:tags r:id="rId9"/>
+              </p:custDataLst>
+            </p:nvPr>
+          </p:nvSpPr>
+          <p:spPr>
+            <a:xfrm rot="2700000">
+              <a:off x="4536" y="4280"/>
+              <a:ext cx="2980" cy="2980"/>
+            </a:xfrm>
+            <a:prstGeom prst="roundRect">
+              <a:avLst>
+                <a:gd name="adj" fmla="val 6319"/>
+              </a:avLst>
+            </a:prstGeom>
+            <a:solidFill>
+              <a:schemeClr val="bg1">
+                <a:lumMod val="95000"/>
+              </a:schemeClr>
+            </a:solidFill>
+            <a:ln>
+              <a:noFill/>
+            </a:ln>
+            <a:effectLst>
+              <a:outerShdw blurRad="152400" dist="63500" dir="8100000" algn="tl" rotWithShape="0">
+                <a:prstClr val="black">
+                  <a:alpha val="30000"/>
+                </a:prstClr>
+              </a:outerShdw>
+            </a:effectLst>
+            <a:scene3d>
+              <a:camera prst="orthographicFront"/>
+              <a:lightRig rig="threePt" dir="t"/>
+            </a:scene3d>
+            <a:sp3d prstMaterial="softEdge">
+              <a:bevelT w="38100" h="6350"/>
+            </a:sp3d>
+          </p:spPr>
+          <p:style>
+            <a:lnRef idx="2">
+              <a:schemeClr val="accent1">
+                <a:shade val="50000"/>
+              </a:schemeClr>
+            </a:lnRef>
+            <a:fillRef idx="1">
+              <a:schemeClr val="accent1"/>
+            </a:fillRef>
+            <a:effectRef idx="0">
+              <a:schemeClr val="accent1"/>
+            </a:effectRef>
+            <a:fontRef idx="minor">
+              <a:schemeClr val="lt1"/>
+            </a:fontRef>
+          </p:style>
+          <p:txBody>
+            <a:bodyPr rtlCol="0" anchor="ctr"/>
+            <a:lstStyle/>
+            <a:p>
+              <a:pPr marL="0" marR="0" lvl="0" indent="0" algn="ctr" defTabSz="914400" rtl="0" eaLnBrk="1" fontAlgn="auto" latinLnBrk="0" hangingPunct="1">
+                <a:lnSpc>
+                  <a:spcPct val="100000"/>
+                </a:lnSpc>
+                <a:spcBef>
+                  <a:spcPts val="0"/>
+                </a:spcBef>
+                <a:spcAft>
+                  <a:spcPts val="0"/>
+                </a:spcAft>
+                <a:buClrTx/>
+                <a:buSzTx/>
+                <a:buFontTx/>
+                <a:buNone/>
+                <a:defRPr/>
+              </a:pPr>
+              <a:endParaRPr kumimoji="0" lang="zh-CN" altLang="en-US" sz="2800" b="0" i="0" u="none" strike="noStrike" kern="1200" cap="none" spc="0" normalizeH="0" baseline="0" noProof="0" dirty="0">
+                <a:ln>
+                  <a:noFill/>
+                </a:ln>
+                <a:solidFill>
+                  <a:prstClr val="white"/>
+                </a:solidFill>
+                <a:effectLst/>
+                <a:uLnTx/>
+                <a:uFillTx/>
+                <a:latin typeface="DIN-BoldItalic" pitchFamily="50" charset="0"/>
+                <a:ea typeface="微软雅黑" panose="020B0503020204020204" pitchFamily="34" charset="-122"/>
+                <a:cs typeface="+mn-cs"/>
+              </a:endParaRPr>
+            </a:p>
+          </p:txBody>
+        </p:sp>
+        <p:sp>
+          <p:nvSpPr>
+            <p:cNvPr id="4" name="圆角矩形 38"/>
+            <p:cNvSpPr/>
+            <p:nvPr>
+              <p:custDataLst>
+                <p:tags r:id="rId10"/>
               </p:custDataLst>
             </p:nvPr>
           </p:nvSpPr>
@@ -7459,9 +7640,13 @@
         </p:sp>
         <p:sp>
           <p:nvSpPr>
-            <p:cNvPr id="15" name="任意多边形 42"/>
+            <p:cNvPr id="6" name="任意多边形 42"/>
             <p:cNvSpPr/>
-            <p:nvPr/>
+            <p:nvPr>
+              <p:custDataLst>
+                <p:tags r:id="rId11"/>
+              </p:custDataLst>
+            </p:nvPr>
           </p:nvSpPr>
           <p:spPr>
             <a:xfrm>
@@ -7571,18 +7756,18 @@
       </p:grpSp>
       <p:sp>
         <p:nvSpPr>
-          <p:cNvPr id="17" name="文本框 16"/>
+          <p:cNvPr id="9" name="文本框 8"/>
           <p:cNvSpPr txBox="1"/>
           <p:nvPr>
             <p:custDataLst>
-              <p:tags r:id="rId8"/>
+              <p:tags r:id="rId12"/>
             </p:custDataLst>
           </p:nvPr>
         </p:nvSpPr>
         <p:spPr>
           <a:xfrm>
-            <a:off x="1662430" y="2762250"/>
-            <a:ext cx="541020" cy="949325"/>
+            <a:off x="3281327" y="3153168"/>
+            <a:ext cx="682858" cy="1014730"/>
           </a:xfrm>
           <a:prstGeom prst="rect">
             <a:avLst/>
@@ -7591,7 +7776,7 @@
         </p:spPr>
         <p:txBody>
           <a:bodyPr wrap="square" rtlCol="0">
-            <a:noAutofit/>
+            <a:spAutoFit/>
           </a:bodyPr>
           <a:lstStyle/>
           <a:p>
@@ -7617,18 +7802,14 @@
       </p:sp>
       <p:sp>
         <p:nvSpPr>
-          <p:cNvPr id="3" name="文本框1"/>
+          <p:cNvPr id="17" name="文本框 16"/>
           <p:cNvSpPr txBox="1"/>
-          <p:nvPr>
-            <p:custDataLst>
-              <p:tags r:id="rId9"/>
-            </p:custDataLst>
-          </p:nvPr>
-        </p:nvSpPr>
-        <p:spPr>
-          <a:xfrm>
-            <a:off x="3457869" y="4770120"/>
-            <a:ext cx="2700000" cy="460375"/>
+          <p:nvPr/>
+        </p:nvSpPr>
+        <p:spPr>
+          <a:xfrm>
+            <a:off x="1278000" y="792000"/>
+            <a:ext cx="3932555" cy="583565"/>
           </a:xfrm>
           <a:prstGeom prst="rect">
             <a:avLst/>
@@ -7638,10 +7819,40 @@
         <p:txBody>
           <a:bodyPr wrap="square" rtlCol="0">
             <a:spAutoFit/>
+            <a:scene3d>
+              <a:camera prst="orthographicFront"/>
+              <a:lightRig rig="threePt" dir="t"/>
+            </a:scene3d>
+            <a:sp3d contourW="12700"/>
           </a:bodyPr>
-          <a:lstStyle/>
-          <a:p>
-            <a:pPr marL="0" marR="0" lvl="0" indent="0" algn="ctr" defTabSz="914400" rtl="0" eaLnBrk="1" fontAlgn="auto" latinLnBrk="0" hangingPunct="1">
+          <a:lstStyle>
+            <a:defPPr>
+              <a:defRPr lang="en-US"/>
+            </a:defPPr>
+            <a:lvl1pPr algn="ctr">
+              <a:defRPr sz="3200">
+                <a:gradFill>
+                  <a:gsLst>
+                    <a:gs pos="0">
+                      <a:schemeClr val="tx1">
+                        <a:lumMod val="50000"/>
+                        <a:lumOff val="50000"/>
+                      </a:schemeClr>
+                    </a:gs>
+                    <a:gs pos="100000">
+                      <a:schemeClr val="tx1">
+                        <a:lumMod val="85000"/>
+                        <a:lumOff val="15000"/>
+                      </a:schemeClr>
+                    </a:gs>
+                  </a:gsLst>
+                  <a:lin ang="5400000" scaled="1"/>
+                </a:gradFill>
+              </a:defRPr>
+            </a:lvl1pPr>
+          </a:lstStyle>
+          <a:p>
+            <a:pPr marL="0" marR="0" lvl="0" indent="0" algn="l" defTabSz="914400" rtl="0" eaLnBrk="1" fontAlgn="auto" latinLnBrk="0" hangingPunct="1">
               <a:lnSpc>
                 <a:spcPct val="100000"/>
               </a:lnSpc>
@@ -7658,52 +7869,68 @@
               <a:defRPr/>
             </a:pPr>
             <a:r>
-              <a:rPr lang="en-US" altLang="zh-CN" sz="2400" dirty="0" smtClean="0">
+              <a:rPr lang="zh-CN" altLang="zh-CN" b="1" dirty="0">
                 <a:solidFill>
-                  <a:schemeClr val="tx1"/>
+                  <a:schemeClr val="accent1">
+                    <a:lumMod val="75000"/>
+                  </a:schemeClr>
                 </a:solidFill>
                 <a:latin typeface="微软雅黑" panose="020B0503020204020204" pitchFamily="34" charset="-122"/>
                 <a:ea typeface="微软雅黑" panose="020B0503020204020204" pitchFamily="34" charset="-122"/>
-                <a:sym typeface="+mn-ea"/>
-              </a:rPr>
-              <a:t>Transformer </a:t>
-            </a:r>
-            <a:r>
-              <a:rPr lang="zh-CN" altLang="en-US" sz="2400" dirty="0" smtClean="0">
-                <a:solidFill>
-                  <a:schemeClr val="tx1"/>
-                </a:solidFill>
-                <a:latin typeface="微软雅黑" panose="020B0503020204020204" pitchFamily="34" charset="-122"/>
-                <a:ea typeface="微软雅黑" panose="020B0503020204020204" pitchFamily="34" charset="-122"/>
-                <a:sym typeface="+mn-ea"/>
-              </a:rPr>
-              <a:t>中的词嵌入与位置编码</a:t>
-            </a:r>
-            <a:endParaRPr lang="zh-CN" altLang="en-US" sz="2400" dirty="0" smtClean="0">
+                <a:cs typeface="微软雅黑" panose="020B0503020204020204" pitchFamily="34" charset="-122"/>
+                <a:sym typeface="+mn-lt"/>
+              </a:rPr>
+              <a:t>任务实施</a:t>
+            </a:r>
+            <a:endParaRPr lang="zh-CN" altLang="zh-CN" b="1" dirty="0">
               <a:solidFill>
-                <a:schemeClr val="tx1"/>
+                <a:schemeClr val="accent1">
+                  <a:lumMod val="75000"/>
+                </a:schemeClr>
               </a:solidFill>
               <a:latin typeface="微软雅黑" panose="020B0503020204020204" pitchFamily="34" charset="-122"/>
               <a:ea typeface="微软雅黑" panose="020B0503020204020204" pitchFamily="34" charset="-122"/>
-              <a:sym typeface="+mn-ea"/>
+              <a:cs typeface="微软雅黑" panose="020B0503020204020204" pitchFamily="34" charset="-122"/>
+              <a:sym typeface="+mn-lt"/>
             </a:endParaRPr>
           </a:p>
         </p:txBody>
       </p:sp>
-      <p:sp>
-        <p:nvSpPr>
-          <p:cNvPr id="4" name="文本框1"/>
+    </p:spTree>
+  </p:cSld>
+  <p:clrMapOvr>
+    <a:masterClrMapping/>
+  </p:clrMapOvr>
+</p:sld>
+</file>
+
+<file path=ppt/slides/slide10.xml><?xml version="1.0" encoding="utf-8"?>
+<p:sld xmlns:a="http://schemas.openxmlformats.org/drawingml/2006/main" xmlns:r="http://schemas.openxmlformats.org/officeDocument/2006/relationships" xmlns:p="http://schemas.openxmlformats.org/presentationml/2006/main">
+  <p:cSld>
+    <p:spTree>
+      <p:nvGrpSpPr>
+        <p:cNvPr id="1" name=""/>
+        <p:cNvGrpSpPr/>
+        <p:nvPr/>
+      </p:nvGrpSpPr>
+      <p:grpSpPr>
+        <a:xfrm>
+          <a:off x="0" y="0"/>
+          <a:ext cx="0" cy="0"/>
+          <a:chOff x="0" y="0"/>
+          <a:chExt cx="0" cy="0"/>
+        </a:xfrm>
+      </p:grpSpPr>
+      <p:sp>
+        <p:nvSpPr>
+          <p:cNvPr id="3" name="文本框 2"/>
           <p:cNvSpPr txBox="1"/>
-          <p:nvPr>
-            <p:custDataLst>
-              <p:tags r:id="rId10"/>
-            </p:custDataLst>
-          </p:nvPr>
-        </p:nvSpPr>
-        <p:spPr>
-          <a:xfrm>
-            <a:off x="622292" y="4770120"/>
-            <a:ext cx="2700000" cy="460800"/>
+          <p:nvPr/>
+        </p:nvSpPr>
+        <p:spPr>
+          <a:xfrm>
+            <a:off x="1175385" y="1377315"/>
+            <a:ext cx="9841230" cy="2282190"/>
           </a:xfrm>
           <a:prstGeom prst="rect">
             <a:avLst/>
@@ -7711,91 +7938,177 @@
           <a:noFill/>
         </p:spPr>
         <p:txBody>
-          <a:bodyPr wrap="square" rtlCol="0">
+          <a:bodyPr wrap="square" rtlCol="0" anchor="t">
             <a:noAutofit/>
           </a:bodyPr>
           <a:lstStyle/>
           <a:p>
-            <a:pPr marL="0" marR="0" lvl="0" indent="0" algn="ctr" defTabSz="914400" rtl="0" eaLnBrk="1" fontAlgn="auto" latinLnBrk="0" hangingPunct="1">
+            <a:pPr indent="457200" fontAlgn="auto">
               <a:lnSpc>
-                <a:spcPct val="100000"/>
+                <a:spcPct val="150000"/>
               </a:lnSpc>
-              <a:spcBef>
-                <a:spcPts val="0"/>
-              </a:spcBef>
-              <a:spcAft>
-                <a:spcPts val="0"/>
-              </a:spcAft>
-              <a:buClrTx/>
-              <a:buSzTx/>
-              <a:buFontTx/>
-              <a:buNone/>
-              <a:defRPr/>
             </a:pPr>
             <a:r>
-              <a:rPr lang="zh-CN" altLang="zh-CN" sz="2400" b="1" dirty="0" smtClean="0">
-                <a:solidFill>
-                  <a:srgbClr val="0064D2"/>
-                </a:solidFill>
-                <a:latin typeface="微软雅黑" panose="020B0503020204020204" pitchFamily="34" charset="-122"/>
-                <a:ea typeface="微软雅黑" panose="020B0503020204020204" pitchFamily="34" charset="-122"/>
-                <a:sym typeface="+mn-ea"/>
-              </a:rPr>
-              <a:t>使用不同的分词器实现分词</a:t>
-            </a:r>
-            <a:endParaRPr lang="zh-CN" altLang="zh-CN" sz="2400" b="1" dirty="0" smtClean="0">
-              <a:solidFill>
-                <a:srgbClr val="0064D2"/>
-              </a:solidFill>
+              <a:rPr lang="en-US" dirty="0" smtClean="0">
+                <a:latin typeface="微软雅黑" panose="020B0503020204020204" pitchFamily="34" charset="-122"/>
+                <a:ea typeface="微软雅黑" panose="020B0503020204020204" pitchFamily="34" charset="-122"/>
+                <a:cs typeface="微软雅黑" panose="020B0503020204020204" pitchFamily="34" charset="-122"/>
+              </a:rPr>
+              <a:t> tokenizer</a:t>
+            </a:r>
+            <a:r>
+              <a:rPr lang="zh-CN" altLang="en-US" dirty="0" smtClean="0">
+                <a:latin typeface="微软雅黑" panose="020B0503020204020204" pitchFamily="34" charset="-122"/>
+                <a:ea typeface="微软雅黑" panose="020B0503020204020204" pitchFamily="34" charset="-122"/>
+                <a:cs typeface="微软雅黑" panose="020B0503020204020204" pitchFamily="34" charset="-122"/>
+              </a:rPr>
+              <a:t>进行分词</a:t>
+            </a:r>
+            <a:r>
+              <a:rPr lang="en-US" altLang="zh-CN" dirty="0" smtClean="0">
+                <a:latin typeface="微软雅黑" panose="020B0503020204020204" pitchFamily="34" charset="-122"/>
+                <a:ea typeface="微软雅黑" panose="020B0503020204020204" pitchFamily="34" charset="-122"/>
+                <a:cs typeface="微软雅黑" panose="020B0503020204020204" pitchFamily="34" charset="-122"/>
+              </a:rPr>
+              <a:t>
+Qwen</a:t>
+            </a:r>
+            <a:r>
+              <a:rPr lang="zh-CN" altLang="en-US" dirty="0" smtClean="0">
+                <a:latin typeface="微软雅黑" panose="020B0503020204020204" pitchFamily="34" charset="-122"/>
+                <a:ea typeface="微软雅黑" panose="020B0503020204020204" pitchFamily="34" charset="-122"/>
+                <a:cs typeface="微软雅黑" panose="020B0503020204020204" pitchFamily="34" charset="-122"/>
+              </a:rPr>
+              <a:t>（通义千问）是阿里巴巴集团旗下的通义实验室自主研发的超大规模语言模型。它能够回答问题、创作文字，支持多语言交流，并具备逻辑推理、编程、内容生成等多种能力。</a:t>
+            </a:r>
+            <a:r>
+              <a:rPr lang="en-US" altLang="zh-CN" dirty="0" smtClean="0">
+                <a:latin typeface="微软雅黑" panose="020B0503020204020204" pitchFamily="34" charset="-122"/>
+                <a:ea typeface="微软雅黑" panose="020B0503020204020204" pitchFamily="34" charset="-122"/>
+                <a:cs typeface="微软雅黑" panose="020B0503020204020204" pitchFamily="34" charset="-122"/>
+              </a:rPr>
+              <a:t>Qwen</a:t>
+            </a:r>
+            <a:r>
+              <a:rPr lang="zh-CN" altLang="en-US" dirty="0" smtClean="0">
+                <a:latin typeface="微软雅黑" panose="020B0503020204020204" pitchFamily="34" charset="-122"/>
+                <a:ea typeface="微软雅黑" panose="020B0503020204020204" pitchFamily="34" charset="-122"/>
+                <a:cs typeface="微软雅黑" panose="020B0503020204020204" pitchFamily="34" charset="-122"/>
+              </a:rPr>
+              <a:t>通过大量互联网文本进行训练，拥有广泛的知识和强大的语言理解与表达能力，适用于多种应用场景，如智能客服、内容创作、教育辅助等。而</a:t>
+            </a:r>
+            <a:r>
+              <a:rPr lang="en-US" altLang="zh-CN" dirty="0" smtClean="0">
+                <a:latin typeface="微软雅黑" panose="020B0503020204020204" pitchFamily="34" charset="-122"/>
+                <a:ea typeface="微软雅黑" panose="020B0503020204020204" pitchFamily="34" charset="-122"/>
+                <a:cs typeface="微软雅黑" panose="020B0503020204020204" pitchFamily="34" charset="-122"/>
+              </a:rPr>
+              <a:t>Qwen tokenizer</a:t>
+            </a:r>
+            <a:r>
+              <a:rPr lang="zh-CN" altLang="en-US" dirty="0" smtClean="0">
+                <a:latin typeface="微软雅黑" panose="020B0503020204020204" pitchFamily="34" charset="-122"/>
+                <a:ea typeface="微软雅黑" panose="020B0503020204020204" pitchFamily="34" charset="-122"/>
+                <a:cs typeface="微软雅黑" panose="020B0503020204020204" pitchFamily="34" charset="-122"/>
+              </a:rPr>
+              <a:t>是与</a:t>
+            </a:r>
+            <a:r>
+              <a:rPr lang="en-US" altLang="zh-CN" dirty="0" smtClean="0">
+                <a:latin typeface="微软雅黑" panose="020B0503020204020204" pitchFamily="34" charset="-122"/>
+                <a:ea typeface="微软雅黑" panose="020B0503020204020204" pitchFamily="34" charset="-122"/>
+                <a:cs typeface="微软雅黑" panose="020B0503020204020204" pitchFamily="34" charset="-122"/>
+              </a:rPr>
+              <a:t>Qwen</a:t>
+            </a:r>
+            <a:r>
+              <a:rPr lang="zh-CN" altLang="en-US" dirty="0" smtClean="0">
+                <a:latin typeface="微软雅黑" panose="020B0503020204020204" pitchFamily="34" charset="-122"/>
+                <a:ea typeface="微软雅黑" panose="020B0503020204020204" pitchFamily="34" charset="-122"/>
+                <a:cs typeface="微软雅黑" panose="020B0503020204020204" pitchFamily="34" charset="-122"/>
+              </a:rPr>
+              <a:t>大模型配套使用的分词器。</a:t>
+            </a:r>
+            <a:r>
+              <a:rPr lang="en-US" altLang="zh-CN" dirty="0" smtClean="0">
+                <a:latin typeface="微软雅黑" panose="020B0503020204020204" pitchFamily="34" charset="-122"/>
+                <a:ea typeface="微软雅黑" panose="020B0503020204020204" pitchFamily="34" charset="-122"/>
+                <a:cs typeface="微软雅黑" panose="020B0503020204020204" pitchFamily="34" charset="-122"/>
+              </a:rPr>
+              <a:t>
+Qwen</a:t>
+            </a:r>
+            <a:r>
+              <a:rPr lang="zh-CN" altLang="en-US" dirty="0" smtClean="0">
+                <a:latin typeface="微软雅黑" panose="020B0503020204020204" pitchFamily="34" charset="-122"/>
+                <a:ea typeface="微软雅黑" panose="020B0503020204020204" pitchFamily="34" charset="-122"/>
+                <a:cs typeface="微软雅黑" panose="020B0503020204020204" pitchFamily="34" charset="-122"/>
+              </a:rPr>
+              <a:t>分词器属于</a:t>
+            </a:r>
+            <a:r>
+              <a:rPr lang="en-US" altLang="zh-CN" dirty="0" smtClean="0">
+                <a:latin typeface="微软雅黑" panose="020B0503020204020204" pitchFamily="34" charset="-122"/>
+                <a:ea typeface="微软雅黑" panose="020B0503020204020204" pitchFamily="34" charset="-122"/>
+                <a:cs typeface="微软雅黑" panose="020B0503020204020204" pitchFamily="34" charset="-122"/>
+              </a:rPr>
+              <a:t>SentencePiece</a:t>
+            </a:r>
+            <a:r>
+              <a:rPr lang="zh-CN" altLang="en-US" dirty="0" smtClean="0">
+                <a:latin typeface="微软雅黑" panose="020B0503020204020204" pitchFamily="34" charset="-122"/>
+                <a:ea typeface="微软雅黑" panose="020B0503020204020204" pitchFamily="34" charset="-122"/>
+                <a:cs typeface="微软雅黑" panose="020B0503020204020204" pitchFamily="34" charset="-122"/>
+              </a:rPr>
+              <a:t>（</a:t>
+            </a:r>
+            <a:r>
+              <a:rPr lang="en-US" altLang="zh-CN" dirty="0" smtClean="0">
+                <a:latin typeface="微软雅黑" panose="020B0503020204020204" pitchFamily="34" charset="-122"/>
+                <a:ea typeface="微软雅黑" panose="020B0503020204020204" pitchFamily="34" charset="-122"/>
+                <a:cs typeface="微软雅黑" panose="020B0503020204020204" pitchFamily="34" charset="-122"/>
+              </a:rPr>
+              <a:t>Unigram</a:t>
+            </a:r>
+            <a:r>
+              <a:rPr lang="zh-CN" altLang="en-US" dirty="0" smtClean="0">
+                <a:latin typeface="微软雅黑" panose="020B0503020204020204" pitchFamily="34" charset="-122"/>
+                <a:ea typeface="微软雅黑" panose="020B0503020204020204" pitchFamily="34" charset="-122"/>
+                <a:cs typeface="微软雅黑" panose="020B0503020204020204" pitchFamily="34" charset="-122"/>
+              </a:rPr>
+              <a:t>）分词器。</a:t>
+            </a:r>
+            <a:r>
+              <a:rPr lang="en-US" altLang="zh-CN" dirty="0" smtClean="0">
+                <a:latin typeface="微软雅黑" panose="020B0503020204020204" pitchFamily="34" charset="-122"/>
+                <a:ea typeface="微软雅黑" panose="020B0503020204020204" pitchFamily="34" charset="-122"/>
+                <a:cs typeface="微软雅黑" panose="020B0503020204020204" pitchFamily="34" charset="-122"/>
+              </a:rPr>
+              <a:t>Sen</a:t>
+            </a:r>
+            <a:endParaRPr lang="en-US" altLang="zh-CN" dirty="0" smtClean="0">
               <a:latin typeface="微软雅黑" panose="020B0503020204020204" pitchFamily="34" charset="-122"/>
               <a:ea typeface="微软雅黑" panose="020B0503020204020204" pitchFamily="34" charset="-122"/>
-              <a:sym typeface="+mn-ea"/>
+              <a:cs typeface="微软雅黑" panose="020B0503020204020204" pitchFamily="34" charset="-122"/>
             </a:endParaRPr>
           </a:p>
         </p:txBody>
       </p:sp>
       <p:sp>
         <p:nvSpPr>
-          <p:cNvPr id="5" name="圆角矩形 34"/>
+          <p:cNvPr id="6" name="矩形 5"/>
           <p:cNvSpPr/>
-          <p:nvPr>
-            <p:custDataLst>
-              <p:tags r:id="rId11"/>
-            </p:custDataLst>
-          </p:nvPr>
-        </p:nvSpPr>
-        <p:spPr>
-          <a:xfrm rot="2700000">
-            <a:off x="6995795" y="2531745"/>
-            <a:ext cx="1492885" cy="1393825"/>
-          </a:xfrm>
-          <a:prstGeom prst="roundRect">
-            <a:avLst>
-              <a:gd name="adj" fmla="val 6319"/>
-            </a:avLst>
+          <p:nvPr/>
+        </p:nvSpPr>
+        <p:spPr>
+          <a:xfrm>
+            <a:off x="1954896" y="3657124"/>
+            <a:ext cx="8211454" cy="2991484"/>
+          </a:xfrm>
+          <a:prstGeom prst="rect">
+            <a:avLst/>
           </a:prstGeom>
-          <a:solidFill>
-            <a:schemeClr val="bg1">
-              <a:lumMod val="95000"/>
-            </a:schemeClr>
-          </a:solidFill>
-          <a:ln>
-            <a:noFill/>
-          </a:ln>
-          <a:effectLst>
-            <a:outerShdw blurRad="152400" dist="63500" dir="8100000" algn="tl" rotWithShape="0">
-              <a:prstClr val="black">
-                <a:alpha val="30000"/>
-              </a:prstClr>
-            </a:outerShdw>
-          </a:effectLst>
-          <a:scene3d>
-            <a:camera prst="orthographicFront"/>
-            <a:lightRig rig="threePt" dir="t"/>
-          </a:scene3d>
-          <a:sp3d prstMaterial="softEdge">
-            <a:bevelT w="38100" h="6350"/>
-          </a:sp3d>
+          <a:noFill/>
         </p:spPr>
         <p:style>
           <a:lnRef idx="2">
@@ -7817,7 +8130,124 @@
           <a:bodyPr rtlCol="0" anchor="ctr"/>
           <a:lstStyle/>
           <a:p>
-            <a:pPr marL="0" marR="0" lvl="0" indent="0" algn="ctr" defTabSz="914400" rtl="0" eaLnBrk="1" fontAlgn="auto" latinLnBrk="0" hangingPunct="1">
+            <a:pPr algn="ctr"/>
+            <a:r>
+              <a:rPr lang="zh-CN" altLang="en-US" dirty="0">
+                <a:solidFill>
+                  <a:schemeClr val="tx1"/>
+                </a:solidFill>
+              </a:rPr>
+              <a:t>教材对步骤图片</a:t>
+            </a:r>
+            <a:endParaRPr lang="zh-CN" altLang="en-US" dirty="0">
+              <a:solidFill>
+                <a:schemeClr val="tx1"/>
+              </a:solidFill>
+            </a:endParaRPr>
+          </a:p>
+        </p:txBody>
+      </p:sp>
+      <p:sp>
+        <p:nvSpPr>
+          <p:cNvPr id="2" name="文本框 1"/>
+          <p:cNvSpPr txBox="1"/>
+          <p:nvPr/>
+        </p:nvSpPr>
+        <p:spPr>
+          <a:xfrm>
+            <a:off x="0" y="793750"/>
+            <a:ext cx="1351262" cy="583565"/>
+          </a:xfrm>
+          <a:prstGeom prst="rect">
+            <a:avLst/>
+          </a:prstGeom>
+          <a:noFill/>
+        </p:spPr>
+        <p:txBody>
+          <a:bodyPr wrap="square" rtlCol="0">
+            <a:spAutoFit/>
+            <a:scene3d>
+              <a:camera prst="orthographicFront"/>
+              <a:lightRig rig="threePt" dir="t"/>
+            </a:scene3d>
+            <a:sp3d contourW="12700"/>
+          </a:bodyPr>
+          <a:lstStyle/>
+          <a:p>
+            <a:pPr algn="ctr"/>
+            <a:r>
+              <a:rPr lang="en-US" sz="3200" dirty="0" smtClean="0">
+                <a:solidFill>
+                  <a:srgbClr val="3F396C"/>
+                </a:solidFill>
+                <a:latin typeface="思源宋体" panose="02020700000000000000" charset="-122"/>
+                <a:ea typeface="思源宋体" panose="02020700000000000000" charset="-122"/>
+              </a:rPr>
+              <a:t>04</a:t>
+            </a:r>
+            <a:endParaRPr lang="en-US" sz="3200" dirty="0" smtClean="0">
+              <a:solidFill>
+                <a:srgbClr val="3F396C"/>
+              </a:solidFill>
+              <a:latin typeface="思源宋体" panose="02020700000000000000" charset="-122"/>
+              <a:ea typeface="思源宋体" panose="02020700000000000000" charset="-122"/>
+            </a:endParaRPr>
+          </a:p>
+        </p:txBody>
+      </p:sp>
+      <p:sp>
+        <p:nvSpPr>
+          <p:cNvPr id="17" name="文本框 16"/>
+          <p:cNvSpPr txBox="1"/>
+          <p:nvPr/>
+        </p:nvSpPr>
+        <p:spPr>
+          <a:xfrm>
+            <a:off x="1278000" y="792000"/>
+            <a:ext cx="3932555" cy="583565"/>
+          </a:xfrm>
+          <a:prstGeom prst="rect">
+            <a:avLst/>
+          </a:prstGeom>
+          <a:noFill/>
+        </p:spPr>
+        <p:txBody>
+          <a:bodyPr wrap="square" rtlCol="0">
+            <a:spAutoFit/>
+            <a:scene3d>
+              <a:camera prst="orthographicFront"/>
+              <a:lightRig rig="threePt" dir="t"/>
+            </a:scene3d>
+            <a:sp3d contourW="12700"/>
+          </a:bodyPr>
+          <a:lstStyle>
+            <a:defPPr>
+              <a:defRPr lang="en-US"/>
+            </a:defPPr>
+            <a:lvl1pPr algn="ctr">
+              <a:defRPr sz="3200">
+                <a:gradFill>
+                  <a:gsLst>
+                    <a:gs pos="0">
+                      <a:schemeClr val="tx1">
+                        <a:lumMod val="50000"/>
+                        <a:lumOff val="50000"/>
+                      </a:schemeClr>
+                    </a:gs>
+                    <a:gs pos="100000">
+                      <a:schemeClr val="tx1">
+                        <a:lumMod val="85000"/>
+                        <a:lumOff val="15000"/>
+                      </a:schemeClr>
+                    </a:gs>
+                  </a:gsLst>
+                  <a:lin ang="5400000" scaled="1"/>
+                </a:gradFill>
+              </a:defRPr>
+            </a:lvl1pPr>
+          </a:lstStyle>
+          <a:p>
+            <a:pPr marL="0" marR="0" lvl="0" indent="0" algn="l" defTabSz="914400" rtl="0" eaLnBrk="1" fontAlgn="auto" latinLnBrk="0" hangingPunct="1">
               <a:lnSpc>
                 <a:spcPct val="100000"/>
               </a:lnSpc>
@@ -7833,54 +8263,220 @@
               <a:buNone/>
               <a:defRPr/>
             </a:pPr>
-            <a:endParaRPr kumimoji="0" lang="zh-CN" altLang="en-US" sz="2800" b="0" i="0" u="none" strike="noStrike" kern="1200" cap="none" spc="0" normalizeH="0" baseline="0" noProof="0" dirty="0">
-              <a:ln>
-                <a:noFill/>
-              </a:ln>
+            <a:r>
+              <a:rPr lang="zh-CN" altLang="en-US" b="1" dirty="0">
+                <a:solidFill>
+                  <a:schemeClr val="accent1">
+                    <a:lumMod val="75000"/>
+                  </a:schemeClr>
+                </a:solidFill>
+                <a:latin typeface="微软雅黑" panose="020B0503020204020204" pitchFamily="34" charset="-122"/>
+                <a:ea typeface="微软雅黑" panose="020B0503020204020204" pitchFamily="34" charset="-122"/>
+                <a:cs typeface="微软雅黑" panose="020B0503020204020204" pitchFamily="34" charset="-122"/>
+                <a:sym typeface="+mn-lt"/>
+              </a:rPr>
+              <a:t>任务</a:t>
+            </a:r>
+            <a:r>
+              <a:rPr lang="zh-CN" altLang="en-US" b="1" dirty="0">
+                <a:solidFill>
+                  <a:schemeClr val="accent1">
+                    <a:lumMod val="75000"/>
+                  </a:schemeClr>
+                </a:solidFill>
+                <a:latin typeface="微软雅黑" panose="020B0503020204020204" pitchFamily="34" charset="-122"/>
+                <a:ea typeface="微软雅黑" panose="020B0503020204020204" pitchFamily="34" charset="-122"/>
+                <a:cs typeface="微软雅黑" panose="020B0503020204020204" pitchFamily="34" charset="-122"/>
+                <a:sym typeface="+mn-lt"/>
+              </a:rPr>
+              <a:t>实施</a:t>
+            </a:r>
+            <a:endParaRPr lang="zh-CN" altLang="en-US" b="1" dirty="0">
               <a:solidFill>
-                <a:prstClr val="white"/>
+                <a:schemeClr val="accent1">
+                  <a:lumMod val="75000"/>
+                </a:schemeClr>
               </a:solidFill>
-              <a:effectLst/>
-              <a:uLnTx/>
-              <a:uFillTx/>
-              <a:latin typeface="DIN-BoldItalic" pitchFamily="50" charset="0"/>
+              <a:latin typeface="微软雅黑" panose="020B0503020204020204" pitchFamily="34" charset="-122"/>
               <a:ea typeface="微软雅黑" panose="020B0503020204020204" pitchFamily="34" charset="-122"/>
-              <a:cs typeface="+mn-cs"/>
+              <a:cs typeface="微软雅黑" panose="020B0503020204020204" pitchFamily="34" charset="-122"/>
+              <a:sym typeface="+mn-lt"/>
             </a:endParaRPr>
           </a:p>
         </p:txBody>
       </p:sp>
-      <p:sp>
-        <p:nvSpPr>
-          <p:cNvPr id="6" name="圆角矩形 38"/>
+    </p:spTree>
+  </p:cSld>
+  <p:clrMapOvr>
+    <a:masterClrMapping/>
+  </p:clrMapOvr>
+</p:sld>
+</file>
+
+<file path=ppt/slides/slide11.xml><?xml version="1.0" encoding="utf-8"?>
+<p:sld xmlns:a="http://schemas.openxmlformats.org/drawingml/2006/main" xmlns:r="http://schemas.openxmlformats.org/officeDocument/2006/relationships" xmlns:p="http://schemas.openxmlformats.org/presentationml/2006/main">
+  <p:cSld>
+    <p:spTree>
+      <p:nvGrpSpPr>
+        <p:cNvPr id="1" name=""/>
+        <p:cNvGrpSpPr/>
+        <p:nvPr/>
+      </p:nvGrpSpPr>
+      <p:grpSpPr>
+        <a:xfrm>
+          <a:off x="0" y="0"/>
+          <a:ext cx="0" cy="0"/>
+          <a:chOff x="0" y="0"/>
+          <a:chExt cx="0" cy="0"/>
+        </a:xfrm>
+      </p:grpSpPr>
+      <p:sp>
+        <p:nvSpPr>
+          <p:cNvPr id="3" name="文本框 2"/>
+          <p:cNvSpPr txBox="1"/>
+          <p:nvPr/>
+        </p:nvSpPr>
+        <p:spPr>
+          <a:xfrm>
+            <a:off x="155575" y="1777365"/>
+            <a:ext cx="5502275" cy="4629150"/>
+          </a:xfrm>
+          <a:prstGeom prst="rect">
+            <a:avLst/>
+          </a:prstGeom>
+          <a:noFill/>
+        </p:spPr>
+        <p:txBody>
+          <a:bodyPr wrap="square" rtlCol="0" anchor="t">
+            <a:noAutofit/>
+          </a:bodyPr>
+          <a:lstStyle/>
+          <a:p>
+            <a:pPr indent="457200" fontAlgn="auto">
+              <a:lnSpc>
+                <a:spcPct val="150000"/>
+              </a:lnSpc>
+            </a:pPr>
+            <a:r>
+              <a:rPr lang="en-US" dirty="0" smtClean="0">
+                <a:latin typeface="微软雅黑" panose="020B0503020204020204" pitchFamily="34" charset="-122"/>
+                <a:ea typeface="微软雅黑" panose="020B0503020204020204" pitchFamily="34" charset="-122"/>
+                <a:cs typeface="微软雅黑" panose="020B0503020204020204" pitchFamily="34" charset="-122"/>
+              </a:rPr>
+              <a:t>tencePiece </a:t>
+            </a:r>
+            <a:r>
+              <a:rPr lang="zh-CN" altLang="en-US" dirty="0" smtClean="0">
+                <a:latin typeface="微软雅黑" panose="020B0503020204020204" pitchFamily="34" charset="-122"/>
+                <a:ea typeface="微软雅黑" panose="020B0503020204020204" pitchFamily="34" charset="-122"/>
+                <a:cs typeface="微软雅黑" panose="020B0503020204020204" pitchFamily="34" charset="-122"/>
+              </a:rPr>
+              <a:t>是一种无监督的子词（</a:t>
+            </a:r>
+            <a:r>
+              <a:rPr lang="en-US" altLang="zh-CN" dirty="0" smtClean="0">
+                <a:latin typeface="微软雅黑" panose="020B0503020204020204" pitchFamily="34" charset="-122"/>
+                <a:ea typeface="微软雅黑" panose="020B0503020204020204" pitchFamily="34" charset="-122"/>
+                <a:cs typeface="微软雅黑" panose="020B0503020204020204" pitchFamily="34" charset="-122"/>
+              </a:rPr>
+              <a:t>subword</a:t>
+            </a:r>
+            <a:r>
+              <a:rPr lang="zh-CN" altLang="en-US" dirty="0" smtClean="0">
+                <a:latin typeface="微软雅黑" panose="020B0503020204020204" pitchFamily="34" charset="-122"/>
+                <a:ea typeface="微软雅黑" panose="020B0503020204020204" pitchFamily="34" charset="-122"/>
+                <a:cs typeface="微软雅黑" panose="020B0503020204020204" pitchFamily="34" charset="-122"/>
+              </a:rPr>
+              <a:t>）分词算法，它不需要依赖任何人工编写的词典或规则。它可以直接从原始文本中学习出一个</a:t>
+            </a:r>
+            <a:r>
+              <a:rPr lang="en-US" altLang="zh-CN" dirty="0" smtClean="0">
+                <a:latin typeface="微软雅黑" panose="020B0503020204020204" pitchFamily="34" charset="-122"/>
+                <a:ea typeface="微软雅黑" panose="020B0503020204020204" pitchFamily="34" charset="-122"/>
+                <a:cs typeface="微软雅黑" panose="020B0503020204020204" pitchFamily="34" charset="-122"/>
+              </a:rPr>
+              <a:t>“</a:t>
+            </a:r>
+            <a:r>
+              <a:rPr lang="zh-CN" altLang="en-US" dirty="0" smtClean="0">
+                <a:latin typeface="微软雅黑" panose="020B0503020204020204" pitchFamily="34" charset="-122"/>
+                <a:ea typeface="微软雅黑" panose="020B0503020204020204" pitchFamily="34" charset="-122"/>
+                <a:cs typeface="微软雅黑" panose="020B0503020204020204" pitchFamily="34" charset="-122"/>
+              </a:rPr>
+              <a:t>词汇表</a:t>
+            </a:r>
+            <a:r>
+              <a:rPr lang="en-US" altLang="zh-CN" dirty="0" smtClean="0">
+                <a:latin typeface="微软雅黑" panose="020B0503020204020204" pitchFamily="34" charset="-122"/>
+                <a:ea typeface="微软雅黑" panose="020B0503020204020204" pitchFamily="34" charset="-122"/>
+                <a:cs typeface="微软雅黑" panose="020B0503020204020204" pitchFamily="34" charset="-122"/>
+              </a:rPr>
+              <a:t>”</a:t>
+            </a:r>
+            <a:r>
+              <a:rPr lang="zh-CN" altLang="en-US" dirty="0" smtClean="0">
+                <a:latin typeface="微软雅黑" panose="020B0503020204020204" pitchFamily="34" charset="-122"/>
+                <a:ea typeface="微软雅黑" panose="020B0503020204020204" pitchFamily="34" charset="-122"/>
+                <a:cs typeface="微软雅黑" panose="020B0503020204020204" pitchFamily="34" charset="-122"/>
+              </a:rPr>
+              <a:t>，然后根据这个词汇表把句子切分成一个个</a:t>
+            </a:r>
+            <a:r>
+              <a:rPr lang="en-US" altLang="zh-CN" dirty="0" smtClean="0">
+                <a:latin typeface="微软雅黑" panose="020B0503020204020204" pitchFamily="34" charset="-122"/>
+                <a:ea typeface="微软雅黑" panose="020B0503020204020204" pitchFamily="34" charset="-122"/>
+                <a:cs typeface="微软雅黑" panose="020B0503020204020204" pitchFamily="34" charset="-122"/>
+              </a:rPr>
+              <a:t> token</a:t>
+            </a:r>
+            <a:r>
+              <a:rPr lang="zh-CN" altLang="en-US" dirty="0" smtClean="0">
+                <a:latin typeface="微软雅黑" panose="020B0503020204020204" pitchFamily="34" charset="-122"/>
+                <a:ea typeface="微软雅黑" panose="020B0503020204020204" pitchFamily="34" charset="-122"/>
+                <a:cs typeface="微软雅黑" panose="020B0503020204020204" pitchFamily="34" charset="-122"/>
+              </a:rPr>
+              <a:t>（也就是模型能理解的最小单位）。类似于人类学语言：刚开始听不懂一句话的意思，但通过不断听和统计，慢慢学会哪些是常用词、哪些是组合词。</a:t>
+            </a:r>
+            <a:r>
+              <a:rPr lang="en-US" altLang="zh-CN" dirty="0" smtClean="0">
+                <a:latin typeface="微软雅黑" panose="020B0503020204020204" pitchFamily="34" charset="-122"/>
+                <a:ea typeface="微软雅黑" panose="020B0503020204020204" pitchFamily="34" charset="-122"/>
+                <a:cs typeface="微软雅黑" panose="020B0503020204020204" pitchFamily="34" charset="-122"/>
+              </a:rPr>
+              <a:t>
+SentencePiece</a:t>
+            </a:r>
+            <a:r>
+              <a:rPr lang="zh-CN" altLang="en-US" dirty="0" smtClean="0">
+                <a:latin typeface="微软雅黑" panose="020B0503020204020204" pitchFamily="34" charset="-122"/>
+                <a:ea typeface="微软雅黑" panose="020B0503020204020204" pitchFamily="34" charset="-122"/>
+                <a:cs typeface="微软雅黑" panose="020B0503020204020204" pitchFamily="34" charset="-122"/>
+              </a:rPr>
+              <a:t>分词器的工作流程可以通过一个具体例子来说明。首先在训练阶段，模型需要从大量语料中学习常用的子词组合，例如训练语</a:t>
+            </a:r>
+            <a:endParaRPr lang="zh-CN" altLang="en-US" dirty="0" smtClean="0">
+              <a:latin typeface="微软雅黑" panose="020B0503020204020204" pitchFamily="34" charset="-122"/>
+              <a:ea typeface="微软雅黑" panose="020B0503020204020204" pitchFamily="34" charset="-122"/>
+              <a:cs typeface="微软雅黑" panose="020B0503020204020204" pitchFamily="34" charset="-122"/>
+            </a:endParaRPr>
+          </a:p>
+        </p:txBody>
+      </p:sp>
+      <p:sp>
+        <p:nvSpPr>
+          <p:cNvPr id="6" name="矩形 5"/>
           <p:cNvSpPr/>
-          <p:nvPr>
-            <p:custDataLst>
-              <p:tags r:id="rId12"/>
-            </p:custDataLst>
-          </p:nvPr>
-        </p:nvSpPr>
-        <p:spPr>
-          <a:xfrm rot="2700000">
-            <a:off x="7209155" y="2696845"/>
-            <a:ext cx="1068070" cy="1068070"/>
-          </a:xfrm>
-          <a:prstGeom prst="roundRect">
-            <a:avLst>
-              <a:gd name="adj" fmla="val 6319"/>
-            </a:avLst>
+          <p:nvPr/>
+        </p:nvSpPr>
+        <p:spPr>
+          <a:xfrm>
+            <a:off x="5797550" y="1776888"/>
+            <a:ext cx="5911850" cy="4630261"/>
+          </a:xfrm>
+          <a:prstGeom prst="rect">
+            <a:avLst/>
           </a:prstGeom>
-          <a:solidFill>
-            <a:schemeClr val="tx1">
-              <a:lumMod val="65000"/>
-              <a:lumOff val="35000"/>
-            </a:schemeClr>
-          </a:solidFill>
-          <a:ln>
-            <a:solidFill>
-              <a:schemeClr val="accent1"/>
-            </a:solidFill>
-          </a:ln>
+          <a:noFill/>
         </p:spPr>
         <p:style>
           <a:lnRef idx="2">
@@ -7902,7 +8498,124 @@
           <a:bodyPr rtlCol="0" anchor="ctr"/>
           <a:lstStyle/>
           <a:p>
-            <a:pPr marL="0" marR="0" lvl="0" indent="0" algn="ctr" defTabSz="914400" rtl="0" eaLnBrk="1" fontAlgn="auto" latinLnBrk="0" hangingPunct="1">
+            <a:pPr algn="ctr"/>
+            <a:r>
+              <a:rPr lang="zh-CN" altLang="en-US" dirty="0" smtClean="0">
+                <a:solidFill>
+                  <a:schemeClr val="tx1"/>
+                </a:solidFill>
+              </a:rPr>
+              <a:t>教材对步骤图片</a:t>
+            </a:r>
+            <a:endParaRPr lang="zh-CN" altLang="en-US" dirty="0">
+              <a:solidFill>
+                <a:schemeClr val="tx1"/>
+              </a:solidFill>
+            </a:endParaRPr>
+          </a:p>
+        </p:txBody>
+      </p:sp>
+      <p:sp>
+        <p:nvSpPr>
+          <p:cNvPr id="4" name="文本框 3"/>
+          <p:cNvSpPr txBox="1"/>
+          <p:nvPr/>
+        </p:nvSpPr>
+        <p:spPr>
+          <a:xfrm>
+            <a:off x="0" y="793750"/>
+            <a:ext cx="1351262" cy="583565"/>
+          </a:xfrm>
+          <a:prstGeom prst="rect">
+            <a:avLst/>
+          </a:prstGeom>
+          <a:noFill/>
+        </p:spPr>
+        <p:txBody>
+          <a:bodyPr wrap="square" rtlCol="0">
+            <a:spAutoFit/>
+            <a:scene3d>
+              <a:camera prst="orthographicFront"/>
+              <a:lightRig rig="threePt" dir="t"/>
+            </a:scene3d>
+            <a:sp3d contourW="12700"/>
+          </a:bodyPr>
+          <a:lstStyle/>
+          <a:p>
+            <a:pPr algn="ctr"/>
+            <a:r>
+              <a:rPr lang="en-US" sz="3200" dirty="0" smtClean="0">
+                <a:solidFill>
+                  <a:srgbClr val="3F396C"/>
+                </a:solidFill>
+                <a:latin typeface="思源宋体" panose="02020700000000000000" charset="-122"/>
+                <a:ea typeface="思源宋体" panose="02020700000000000000" charset="-122"/>
+              </a:rPr>
+              <a:t>04</a:t>
+            </a:r>
+            <a:endParaRPr lang="en-US" sz="3200" dirty="0" smtClean="0">
+              <a:solidFill>
+                <a:srgbClr val="3F396C"/>
+              </a:solidFill>
+              <a:latin typeface="思源宋体" panose="02020700000000000000" charset="-122"/>
+              <a:ea typeface="思源宋体" panose="02020700000000000000" charset="-122"/>
+            </a:endParaRPr>
+          </a:p>
+        </p:txBody>
+      </p:sp>
+      <p:sp>
+        <p:nvSpPr>
+          <p:cNvPr id="17" name="文本框 16"/>
+          <p:cNvSpPr txBox="1"/>
+          <p:nvPr/>
+        </p:nvSpPr>
+        <p:spPr>
+          <a:xfrm>
+            <a:off x="1278000" y="792000"/>
+            <a:ext cx="3932555" cy="583565"/>
+          </a:xfrm>
+          <a:prstGeom prst="rect">
+            <a:avLst/>
+          </a:prstGeom>
+          <a:noFill/>
+        </p:spPr>
+        <p:txBody>
+          <a:bodyPr wrap="square" rtlCol="0">
+            <a:spAutoFit/>
+            <a:scene3d>
+              <a:camera prst="orthographicFront"/>
+              <a:lightRig rig="threePt" dir="t"/>
+            </a:scene3d>
+            <a:sp3d contourW="12700"/>
+          </a:bodyPr>
+          <a:lstStyle>
+            <a:defPPr>
+              <a:defRPr lang="en-US"/>
+            </a:defPPr>
+            <a:lvl1pPr algn="ctr">
+              <a:defRPr sz="3200">
+                <a:gradFill>
+                  <a:gsLst>
+                    <a:gs pos="0">
+                      <a:schemeClr val="tx1">
+                        <a:lumMod val="50000"/>
+                        <a:lumOff val="50000"/>
+                      </a:schemeClr>
+                    </a:gs>
+                    <a:gs pos="100000">
+                      <a:schemeClr val="tx1">
+                        <a:lumMod val="85000"/>
+                        <a:lumOff val="15000"/>
+                      </a:schemeClr>
+                    </a:gs>
+                  </a:gsLst>
+                  <a:lin ang="5400000" scaled="1"/>
+                </a:gradFill>
+              </a:defRPr>
+            </a:lvl1pPr>
+          </a:lstStyle>
+          <a:p>
+            <a:pPr marL="0" marR="0" lvl="0" indent="0" algn="l" defTabSz="914400" rtl="0" eaLnBrk="1" fontAlgn="auto" latinLnBrk="0" hangingPunct="1">
               <a:lnSpc>
                 <a:spcPct val="100000"/>
               </a:lnSpc>
@@ -7918,65 +8631,659 @@
               <a:buNone/>
               <a:defRPr/>
             </a:pPr>
-            <a:endParaRPr kumimoji="0" lang="zh-CN" altLang="en-US" sz="1800" b="0" i="0" u="none" strike="noStrike" kern="1200" cap="none" spc="0" normalizeH="0" baseline="0" noProof="0" dirty="0">
-              <a:ln>
-                <a:noFill/>
-              </a:ln>
+            <a:r>
+              <a:rPr lang="zh-CN" altLang="en-US" b="1" dirty="0">
+                <a:solidFill>
+                  <a:schemeClr val="accent1">
+                    <a:lumMod val="75000"/>
+                  </a:schemeClr>
+                </a:solidFill>
+                <a:latin typeface="微软雅黑" panose="020B0503020204020204" pitchFamily="34" charset="-122"/>
+                <a:ea typeface="微软雅黑" panose="020B0503020204020204" pitchFamily="34" charset="-122"/>
+                <a:cs typeface="微软雅黑" panose="020B0503020204020204" pitchFamily="34" charset="-122"/>
+                <a:sym typeface="+mn-lt"/>
+              </a:rPr>
+              <a:t>任务</a:t>
+            </a:r>
+            <a:r>
+              <a:rPr lang="zh-CN" altLang="en-US" b="1" dirty="0">
+                <a:solidFill>
+                  <a:schemeClr val="accent1">
+                    <a:lumMod val="75000"/>
+                  </a:schemeClr>
+                </a:solidFill>
+                <a:latin typeface="微软雅黑" panose="020B0503020204020204" pitchFamily="34" charset="-122"/>
+                <a:ea typeface="微软雅黑" panose="020B0503020204020204" pitchFamily="34" charset="-122"/>
+                <a:cs typeface="微软雅黑" panose="020B0503020204020204" pitchFamily="34" charset="-122"/>
+                <a:sym typeface="+mn-lt"/>
+              </a:rPr>
+              <a:t>实施</a:t>
+            </a:r>
+            <a:endParaRPr lang="zh-CN" altLang="en-US" b="1" dirty="0">
               <a:solidFill>
-                <a:prstClr val="white"/>
+                <a:schemeClr val="accent1">
+                  <a:lumMod val="75000"/>
+                </a:schemeClr>
               </a:solidFill>
-              <a:effectLst/>
-              <a:uLnTx/>
-              <a:uFillTx/>
-              <a:latin typeface="等线" panose="02010600030101010101" charset="-122"/>
+              <a:latin typeface="微软雅黑" panose="020B0503020204020204" pitchFamily="34" charset="-122"/>
               <a:ea typeface="微软雅黑" panose="020B0503020204020204" pitchFamily="34" charset="-122"/>
-              <a:cs typeface="+mn-cs"/>
+              <a:cs typeface="微软雅黑" panose="020B0503020204020204" pitchFamily="34" charset="-122"/>
+              <a:sym typeface="+mn-lt"/>
             </a:endParaRPr>
           </a:p>
         </p:txBody>
       </p:sp>
-      <p:sp>
-        <p:nvSpPr>
-          <p:cNvPr id="8" name="圆角矩形 34"/>
+    </p:spTree>
+  </p:cSld>
+  <p:clrMapOvr>
+    <a:masterClrMapping/>
+  </p:clrMapOvr>
+</p:sld>
+</file>
+
+<file path=ppt/slides/slide12.xml><?xml version="1.0" encoding="utf-8"?>
+<p:sld xmlns:a="http://schemas.openxmlformats.org/drawingml/2006/main" xmlns:r="http://schemas.openxmlformats.org/officeDocument/2006/relationships" xmlns:p="http://schemas.openxmlformats.org/presentationml/2006/main">
+  <p:cSld>
+    <p:spTree>
+      <p:nvGrpSpPr>
+        <p:cNvPr id="1" name=""/>
+        <p:cNvGrpSpPr/>
+        <p:nvPr/>
+      </p:nvGrpSpPr>
+      <p:grpSpPr>
+        <a:xfrm>
+          <a:off x="0" y="0"/>
+          <a:ext cx="0" cy="0"/>
+          <a:chOff x="0" y="0"/>
+          <a:chExt cx="0" cy="0"/>
+        </a:xfrm>
+      </p:grpSpPr>
+      <p:sp>
+        <p:nvSpPr>
+          <p:cNvPr id="3" name="文本框 2"/>
+          <p:cNvSpPr txBox="1"/>
+          <p:nvPr/>
+        </p:nvSpPr>
+        <p:spPr>
+          <a:xfrm>
+            <a:off x="1175385" y="1377315"/>
+            <a:ext cx="9841230" cy="2282190"/>
+          </a:xfrm>
+          <a:prstGeom prst="rect">
+            <a:avLst/>
+          </a:prstGeom>
+          <a:noFill/>
+        </p:spPr>
+        <p:txBody>
+          <a:bodyPr wrap="square" rtlCol="0" anchor="t">
+            <a:noAutofit/>
+          </a:bodyPr>
+          <a:lstStyle/>
+          <a:p>
+            <a:pPr indent="457200" fontAlgn="auto">
+              <a:lnSpc>
+                <a:spcPct val="150000"/>
+              </a:lnSpc>
+            </a:pPr>
+            <a:r>
+              <a:rPr lang="zh-CN" dirty="0" smtClean="0">
+                <a:latin typeface="微软雅黑" panose="020B0503020204020204" pitchFamily="34" charset="-122"/>
+                <a:ea typeface="微软雅黑" panose="020B0503020204020204" pitchFamily="34" charset="-122"/>
+                <a:cs typeface="微软雅黑" panose="020B0503020204020204" pitchFamily="34" charset="-122"/>
+              </a:rPr>
+              <a:t>料包含</a:t>
+            </a:r>
+            <a:r>
+              <a:rPr lang="en-US" altLang="zh-CN" dirty="0" smtClean="0">
+                <a:latin typeface="微软雅黑" panose="020B0503020204020204" pitchFamily="34" charset="-122"/>
+                <a:ea typeface="微软雅黑" panose="020B0503020204020204" pitchFamily="34" charset="-122"/>
+                <a:cs typeface="微软雅黑" panose="020B0503020204020204" pitchFamily="34" charset="-122"/>
+              </a:rPr>
+              <a:t>“</a:t>
+            </a:r>
+            <a:r>
+              <a:rPr lang="zh-CN" altLang="en-US" dirty="0" smtClean="0">
+                <a:latin typeface="微软雅黑" panose="020B0503020204020204" pitchFamily="34" charset="-122"/>
+                <a:ea typeface="微软雅黑" panose="020B0503020204020204" pitchFamily="34" charset="-122"/>
+                <a:cs typeface="微软雅黑" panose="020B0503020204020204" pitchFamily="34" charset="-122"/>
+              </a:rPr>
+              <a:t>我正在学习人工智能和无人驾驶技术</a:t>
+            </a:r>
+            <a:r>
+              <a:rPr lang="en-US" altLang="zh-CN" dirty="0" smtClean="0">
+                <a:latin typeface="微软雅黑" panose="020B0503020204020204" pitchFamily="34" charset="-122"/>
+                <a:ea typeface="微软雅黑" panose="020B0503020204020204" pitchFamily="34" charset="-122"/>
+                <a:cs typeface="微软雅黑" panose="020B0503020204020204" pitchFamily="34" charset="-122"/>
+              </a:rPr>
+              <a:t>”</a:t>
+            </a:r>
+            <a:r>
+              <a:rPr lang="zh-CN" altLang="en-US" dirty="0" smtClean="0">
+                <a:latin typeface="微软雅黑" panose="020B0503020204020204" pitchFamily="34" charset="-122"/>
+                <a:ea typeface="微软雅黑" panose="020B0503020204020204" pitchFamily="34" charset="-122"/>
+                <a:cs typeface="微软雅黑" panose="020B0503020204020204" pitchFamily="34" charset="-122"/>
+              </a:rPr>
+              <a:t>、</a:t>
+            </a:r>
+            <a:r>
+              <a:rPr lang="en-US" altLang="zh-CN" dirty="0" smtClean="0">
+                <a:latin typeface="微软雅黑" panose="020B0503020204020204" pitchFamily="34" charset="-122"/>
+                <a:ea typeface="微软雅黑" panose="020B0503020204020204" pitchFamily="34" charset="-122"/>
+                <a:cs typeface="微软雅黑" panose="020B0503020204020204" pitchFamily="34" charset="-122"/>
+              </a:rPr>
+              <a:t>“</a:t>
+            </a:r>
+            <a:r>
+              <a:rPr lang="zh-CN" altLang="en-US" dirty="0" smtClean="0">
+                <a:latin typeface="微软雅黑" panose="020B0503020204020204" pitchFamily="34" charset="-122"/>
+                <a:ea typeface="微软雅黑" panose="020B0503020204020204" pitchFamily="34" charset="-122"/>
+                <a:cs typeface="微软雅黑" panose="020B0503020204020204" pitchFamily="34" charset="-122"/>
+              </a:rPr>
+              <a:t>无人驾驶是未来交通的重要发展方向</a:t>
+            </a:r>
+            <a:r>
+              <a:rPr lang="en-US" altLang="zh-CN" dirty="0" smtClean="0">
+                <a:latin typeface="微软雅黑" panose="020B0503020204020204" pitchFamily="34" charset="-122"/>
+                <a:ea typeface="微软雅黑" panose="020B0503020204020204" pitchFamily="34" charset="-122"/>
+                <a:cs typeface="微软雅黑" panose="020B0503020204020204" pitchFamily="34" charset="-122"/>
+              </a:rPr>
+              <a:t>”</a:t>
+            </a:r>
+            <a:r>
+              <a:rPr lang="zh-CN" altLang="en-US" dirty="0" smtClean="0">
+                <a:latin typeface="微软雅黑" panose="020B0503020204020204" pitchFamily="34" charset="-122"/>
+                <a:ea typeface="微软雅黑" panose="020B0503020204020204" pitchFamily="34" charset="-122"/>
+                <a:cs typeface="微软雅黑" panose="020B0503020204020204" pitchFamily="34" charset="-122"/>
+              </a:rPr>
+              <a:t>、</a:t>
+            </a:r>
+            <a:r>
+              <a:rPr lang="en-US" altLang="zh-CN" dirty="0" smtClean="0">
+                <a:latin typeface="微软雅黑" panose="020B0503020204020204" pitchFamily="34" charset="-122"/>
+                <a:ea typeface="微软雅黑" panose="020B0503020204020204" pitchFamily="34" charset="-122"/>
+                <a:cs typeface="微软雅黑" panose="020B0503020204020204" pitchFamily="34" charset="-122"/>
+              </a:rPr>
+              <a:t>“</a:t>
+            </a:r>
+            <a:r>
+              <a:rPr lang="zh-CN" altLang="en-US" dirty="0" smtClean="0">
+                <a:latin typeface="微软雅黑" panose="020B0503020204020204" pitchFamily="34" charset="-122"/>
+                <a:ea typeface="微软雅黑" panose="020B0503020204020204" pitchFamily="34" charset="-122"/>
+                <a:cs typeface="微软雅黑" panose="020B0503020204020204" pitchFamily="34" charset="-122"/>
+              </a:rPr>
+              <a:t>汽车是我们日常生活中常见的交通工具</a:t>
+            </a:r>
+            <a:r>
+              <a:rPr lang="en-US" altLang="zh-CN" dirty="0" smtClean="0">
+                <a:latin typeface="微软雅黑" panose="020B0503020204020204" pitchFamily="34" charset="-122"/>
+                <a:ea typeface="微软雅黑" panose="020B0503020204020204" pitchFamily="34" charset="-122"/>
+                <a:cs typeface="微软雅黑" panose="020B0503020204020204" pitchFamily="34" charset="-122"/>
+              </a:rPr>
+              <a:t>”</a:t>
+            </a:r>
+            <a:r>
+              <a:rPr lang="zh-CN" altLang="en-US" dirty="0" smtClean="0">
+                <a:latin typeface="微软雅黑" panose="020B0503020204020204" pitchFamily="34" charset="-122"/>
+                <a:ea typeface="微软雅黑" panose="020B0503020204020204" pitchFamily="34" charset="-122"/>
+                <a:cs typeface="微软雅黑" panose="020B0503020204020204" pitchFamily="34" charset="-122"/>
+              </a:rPr>
+              <a:t>、</a:t>
+            </a:r>
+            <a:r>
+              <a:rPr lang="en-US" altLang="zh-CN" dirty="0" smtClean="0">
+                <a:latin typeface="微软雅黑" panose="020B0503020204020204" pitchFamily="34" charset="-122"/>
+                <a:ea typeface="微软雅黑" panose="020B0503020204020204" pitchFamily="34" charset="-122"/>
+                <a:cs typeface="微软雅黑" panose="020B0503020204020204" pitchFamily="34" charset="-122"/>
+              </a:rPr>
+              <a:t>“</a:t>
+            </a:r>
+            <a:r>
+              <a:rPr lang="zh-CN" altLang="en-US" dirty="0" smtClean="0">
+                <a:latin typeface="微软雅黑" panose="020B0503020204020204" pitchFamily="34" charset="-122"/>
+                <a:ea typeface="微软雅黑" panose="020B0503020204020204" pitchFamily="34" charset="-122"/>
+                <a:cs typeface="微软雅黑" panose="020B0503020204020204" pitchFamily="34" charset="-122"/>
+              </a:rPr>
+              <a:t>无人机和无人超市也属于智能系统的一部分</a:t>
+            </a:r>
+            <a:r>
+              <a:rPr lang="en-US" altLang="zh-CN" dirty="0" smtClean="0">
+                <a:latin typeface="微软雅黑" panose="020B0503020204020204" pitchFamily="34" charset="-122"/>
+                <a:ea typeface="微软雅黑" panose="020B0503020204020204" pitchFamily="34" charset="-122"/>
+                <a:cs typeface="微软雅黑" panose="020B0503020204020204" pitchFamily="34" charset="-122"/>
+              </a:rPr>
+              <a:t>”</a:t>
+            </a:r>
+            <a:r>
+              <a:rPr lang="zh-CN" altLang="en-US" dirty="0" smtClean="0">
+                <a:latin typeface="微软雅黑" panose="020B0503020204020204" pitchFamily="34" charset="-122"/>
+                <a:ea typeface="微软雅黑" panose="020B0503020204020204" pitchFamily="34" charset="-122"/>
+                <a:cs typeface="微软雅黑" panose="020B0503020204020204" pitchFamily="34" charset="-122"/>
+              </a:rPr>
+              <a:t>以及</a:t>
+            </a:r>
+            <a:r>
+              <a:rPr lang="en-US" altLang="zh-CN" dirty="0" smtClean="0">
+                <a:latin typeface="微软雅黑" panose="020B0503020204020204" pitchFamily="34" charset="-122"/>
+                <a:ea typeface="微软雅黑" panose="020B0503020204020204" pitchFamily="34" charset="-122"/>
+                <a:cs typeface="微软雅黑" panose="020B0503020204020204" pitchFamily="34" charset="-122"/>
+              </a:rPr>
+              <a:t>“</a:t>
+            </a:r>
+            <a:r>
+              <a:rPr lang="zh-CN" altLang="en-US" dirty="0" smtClean="0">
+                <a:latin typeface="微软雅黑" panose="020B0503020204020204" pitchFamily="34" charset="-122"/>
+                <a:ea typeface="微软雅黑" panose="020B0503020204020204" pitchFamily="34" charset="-122"/>
+                <a:cs typeface="微软雅黑" panose="020B0503020204020204" pitchFamily="34" charset="-122"/>
+              </a:rPr>
+              <a:t>驾驶是一项需要专注的技能</a:t>
+            </a:r>
+            <a:r>
+              <a:rPr lang="en-US" altLang="zh-CN" dirty="0" smtClean="0">
+                <a:latin typeface="微软雅黑" panose="020B0503020204020204" pitchFamily="34" charset="-122"/>
+                <a:ea typeface="微软雅黑" panose="020B0503020204020204" pitchFamily="34" charset="-122"/>
+                <a:cs typeface="微软雅黑" panose="020B0503020204020204" pitchFamily="34" charset="-122"/>
+              </a:rPr>
+              <a:t>”</a:t>
+            </a:r>
+            <a:r>
+              <a:rPr lang="zh-CN" altLang="en-US" dirty="0" smtClean="0">
+                <a:latin typeface="微软雅黑" panose="020B0503020204020204" pitchFamily="34" charset="-122"/>
+                <a:ea typeface="微软雅黑" panose="020B0503020204020204" pitchFamily="34" charset="-122"/>
+                <a:cs typeface="微软雅黑" panose="020B0503020204020204" pitchFamily="34" charset="-122"/>
+              </a:rPr>
+              <a:t>等句子。通过统计这些句子中字符或子词共现的频率，模型构建出一个子词表，其中收录了</a:t>
+            </a:r>
+            <a:r>
+              <a:rPr lang="en-US" altLang="zh-CN" dirty="0" smtClean="0">
+                <a:latin typeface="微软雅黑" panose="020B0503020204020204" pitchFamily="34" charset="-122"/>
+                <a:ea typeface="微软雅黑" panose="020B0503020204020204" pitchFamily="34" charset="-122"/>
+                <a:cs typeface="微软雅黑" panose="020B0503020204020204" pitchFamily="34" charset="-122"/>
+              </a:rPr>
+              <a:t>“</a:t>
+            </a:r>
+            <a:r>
+              <a:rPr lang="zh-CN" altLang="en-US" dirty="0" smtClean="0">
+                <a:latin typeface="微软雅黑" panose="020B0503020204020204" pitchFamily="34" charset="-122"/>
+                <a:ea typeface="微软雅黑" panose="020B0503020204020204" pitchFamily="34" charset="-122"/>
+                <a:cs typeface="微软雅黑" panose="020B0503020204020204" pitchFamily="34" charset="-122"/>
+              </a:rPr>
+              <a:t>无</a:t>
+            </a:r>
+            <a:r>
+              <a:rPr lang="en-US" altLang="zh-CN" dirty="0" smtClean="0">
+                <a:latin typeface="微软雅黑" panose="020B0503020204020204" pitchFamily="34" charset="-122"/>
+                <a:ea typeface="微软雅黑" panose="020B0503020204020204" pitchFamily="34" charset="-122"/>
+                <a:cs typeface="微软雅黑" panose="020B0503020204020204" pitchFamily="34" charset="-122"/>
+              </a:rPr>
+              <a:t>”</a:t>
+            </a:r>
+            <a:r>
+              <a:rPr lang="zh-CN" altLang="en-US" dirty="0" smtClean="0">
+                <a:latin typeface="微软雅黑" panose="020B0503020204020204" pitchFamily="34" charset="-122"/>
+                <a:ea typeface="微软雅黑" panose="020B0503020204020204" pitchFamily="34" charset="-122"/>
+                <a:cs typeface="微软雅黑" panose="020B0503020204020204" pitchFamily="34" charset="-122"/>
+              </a:rPr>
+              <a:t>、</a:t>
+            </a:r>
+            <a:r>
+              <a:rPr lang="en-US" altLang="zh-CN" dirty="0" smtClean="0">
+                <a:latin typeface="微软雅黑" panose="020B0503020204020204" pitchFamily="34" charset="-122"/>
+                <a:ea typeface="微软雅黑" panose="020B0503020204020204" pitchFamily="34" charset="-122"/>
+                <a:cs typeface="微软雅黑" panose="020B0503020204020204" pitchFamily="34" charset="-122"/>
+              </a:rPr>
+              <a:t>“</a:t>
+            </a:r>
+            <a:r>
+              <a:rPr lang="zh-CN" altLang="en-US" dirty="0" smtClean="0">
+                <a:latin typeface="微软雅黑" panose="020B0503020204020204" pitchFamily="34" charset="-122"/>
+                <a:ea typeface="微软雅黑" panose="020B0503020204020204" pitchFamily="34" charset="-122"/>
+                <a:cs typeface="微软雅黑" panose="020B0503020204020204" pitchFamily="34" charset="-122"/>
+              </a:rPr>
+              <a:t>人</a:t>
+            </a:r>
+            <a:r>
+              <a:rPr lang="en-US" altLang="zh-CN" dirty="0" smtClean="0">
+                <a:latin typeface="微软雅黑" panose="020B0503020204020204" pitchFamily="34" charset="-122"/>
+                <a:ea typeface="微软雅黑" panose="020B0503020204020204" pitchFamily="34" charset="-122"/>
+                <a:cs typeface="微软雅黑" panose="020B0503020204020204" pitchFamily="34" charset="-122"/>
+              </a:rPr>
+              <a:t>”</a:t>
+            </a:r>
+            <a:r>
+              <a:rPr lang="zh-CN" altLang="en-US" dirty="0" smtClean="0">
+                <a:latin typeface="微软雅黑" panose="020B0503020204020204" pitchFamily="34" charset="-122"/>
+                <a:ea typeface="微软雅黑" panose="020B0503020204020204" pitchFamily="34" charset="-122"/>
+                <a:cs typeface="微软雅黑" panose="020B0503020204020204" pitchFamily="34" charset="-122"/>
+              </a:rPr>
+              <a:t>、</a:t>
+            </a:r>
+            <a:r>
+              <a:rPr lang="en-US" altLang="zh-CN" dirty="0" smtClean="0">
+                <a:latin typeface="微软雅黑" panose="020B0503020204020204" pitchFamily="34" charset="-122"/>
+                <a:ea typeface="微软雅黑" panose="020B0503020204020204" pitchFamily="34" charset="-122"/>
+                <a:cs typeface="微软雅黑" panose="020B0503020204020204" pitchFamily="34" charset="-122"/>
+              </a:rPr>
+              <a:t>“</a:t>
+            </a:r>
+            <a:r>
+              <a:rPr lang="zh-CN" altLang="en-US" dirty="0" smtClean="0">
+                <a:latin typeface="微软雅黑" panose="020B0503020204020204" pitchFamily="34" charset="-122"/>
+                <a:ea typeface="微软雅黑" panose="020B0503020204020204" pitchFamily="34" charset="-122"/>
+                <a:cs typeface="微软雅黑" panose="020B0503020204020204" pitchFamily="34" charset="-122"/>
+              </a:rPr>
+              <a:t>无人</a:t>
+            </a:r>
+            <a:r>
+              <a:rPr lang="en-US" altLang="zh-CN" dirty="0" smtClean="0">
+                <a:latin typeface="微软雅黑" panose="020B0503020204020204" pitchFamily="34" charset="-122"/>
+                <a:ea typeface="微软雅黑" panose="020B0503020204020204" pitchFamily="34" charset="-122"/>
+                <a:cs typeface="微软雅黑" panose="020B0503020204020204" pitchFamily="34" charset="-122"/>
+              </a:rPr>
+              <a:t>”</a:t>
+            </a:r>
+            <a:r>
+              <a:rPr lang="zh-CN" altLang="en-US" dirty="0" smtClean="0">
+                <a:latin typeface="微软雅黑" panose="020B0503020204020204" pitchFamily="34" charset="-122"/>
+                <a:ea typeface="微软雅黑" panose="020B0503020204020204" pitchFamily="34" charset="-122"/>
+                <a:cs typeface="微软雅黑" panose="020B0503020204020204" pitchFamily="34" charset="-122"/>
+              </a:rPr>
+              <a:t>、</a:t>
+            </a:r>
+            <a:r>
+              <a:rPr lang="en-US" altLang="zh-CN" dirty="0" smtClean="0">
+                <a:latin typeface="微软雅黑" panose="020B0503020204020204" pitchFamily="34" charset="-122"/>
+                <a:ea typeface="微软雅黑" panose="020B0503020204020204" pitchFamily="34" charset="-122"/>
+                <a:cs typeface="微软雅黑" panose="020B0503020204020204" pitchFamily="34" charset="-122"/>
+              </a:rPr>
+              <a:t>“</a:t>
+            </a:r>
+            <a:r>
+              <a:rPr lang="zh-CN" altLang="en-US" dirty="0" smtClean="0">
+                <a:latin typeface="微软雅黑" panose="020B0503020204020204" pitchFamily="34" charset="-122"/>
+                <a:ea typeface="微软雅黑" panose="020B0503020204020204" pitchFamily="34" charset="-122"/>
+                <a:cs typeface="微软雅黑" panose="020B0503020204020204" pitchFamily="34" charset="-122"/>
+              </a:rPr>
+              <a:t>驾驶</a:t>
+            </a:r>
+            <a:r>
+              <a:rPr lang="en-US" altLang="zh-CN" dirty="0" smtClean="0">
+                <a:latin typeface="微软雅黑" panose="020B0503020204020204" pitchFamily="34" charset="-122"/>
+                <a:ea typeface="微软雅黑" panose="020B0503020204020204" pitchFamily="34" charset="-122"/>
+                <a:cs typeface="微软雅黑" panose="020B0503020204020204" pitchFamily="34" charset="-122"/>
+              </a:rPr>
+              <a:t>”</a:t>
+            </a:r>
+            <a:r>
+              <a:rPr lang="zh-CN" altLang="en-US" dirty="0" smtClean="0">
+                <a:latin typeface="微软雅黑" panose="020B0503020204020204" pitchFamily="34" charset="-122"/>
+                <a:ea typeface="微软雅黑" panose="020B0503020204020204" pitchFamily="34" charset="-122"/>
+                <a:cs typeface="微软雅黑" panose="020B0503020204020204" pitchFamily="34" charset="-122"/>
+              </a:rPr>
+              <a:t>、</a:t>
+            </a:r>
+            <a:r>
+              <a:rPr lang="en-US" altLang="zh-CN" dirty="0" smtClean="0">
+                <a:latin typeface="微软雅黑" panose="020B0503020204020204" pitchFamily="34" charset="-122"/>
+                <a:ea typeface="微软雅黑" panose="020B0503020204020204" pitchFamily="34" charset="-122"/>
+                <a:cs typeface="微软雅黑" panose="020B0503020204020204" pitchFamily="34" charset="-122"/>
+              </a:rPr>
+              <a:t>“</a:t>
+            </a:r>
+            <a:r>
+              <a:rPr lang="zh-CN" altLang="en-US" dirty="0" smtClean="0">
+                <a:latin typeface="微软雅黑" panose="020B0503020204020204" pitchFamily="34" charset="-122"/>
+                <a:ea typeface="微软雅黑" panose="020B0503020204020204" pitchFamily="34" charset="-122"/>
+                <a:cs typeface="微软雅黑" panose="020B0503020204020204" pitchFamily="34" charset="-122"/>
+              </a:rPr>
+              <a:t>汽车</a:t>
+            </a:r>
+            <a:r>
+              <a:rPr lang="en-US" altLang="zh-CN" dirty="0" smtClean="0">
+                <a:latin typeface="微软雅黑" panose="020B0503020204020204" pitchFamily="34" charset="-122"/>
+                <a:ea typeface="微软雅黑" panose="020B0503020204020204" pitchFamily="34" charset="-122"/>
+                <a:cs typeface="微软雅黑" panose="020B0503020204020204" pitchFamily="34" charset="-122"/>
+              </a:rPr>
+              <a:t>”</a:t>
+            </a:r>
+            <a:r>
+              <a:rPr lang="zh-CN" altLang="en-US" dirty="0" smtClean="0">
+                <a:latin typeface="微软雅黑" panose="020B0503020204020204" pitchFamily="34" charset="-122"/>
+                <a:ea typeface="微软雅黑" panose="020B0503020204020204" pitchFamily="34" charset="-122"/>
+                <a:cs typeface="微软雅黑" panose="020B0503020204020204" pitchFamily="34" charset="-122"/>
+              </a:rPr>
+              <a:t>、</a:t>
+            </a:r>
+            <a:r>
+              <a:rPr lang="en-US" altLang="zh-CN" dirty="0" smtClean="0">
+                <a:latin typeface="微软雅黑" panose="020B0503020204020204" pitchFamily="34" charset="-122"/>
+                <a:ea typeface="微软雅黑" panose="020B0503020204020204" pitchFamily="34" charset="-122"/>
+                <a:cs typeface="微软雅黑" panose="020B0503020204020204" pitchFamily="34" charset="-122"/>
+              </a:rPr>
+              <a:t>“</a:t>
+            </a:r>
+            <a:r>
+              <a:rPr lang="zh-CN" altLang="en-US" dirty="0" smtClean="0">
+                <a:latin typeface="微软雅黑" panose="020B0503020204020204" pitchFamily="34" charset="-122"/>
+                <a:ea typeface="微软雅黑" panose="020B0503020204020204" pitchFamily="34" charset="-122"/>
+                <a:cs typeface="微软雅黑" panose="020B0503020204020204" pitchFamily="34" charset="-122"/>
+              </a:rPr>
+              <a:t>交通</a:t>
+            </a:r>
+            <a:r>
+              <a:rPr lang="en-US" altLang="zh-CN" dirty="0" smtClean="0">
+                <a:latin typeface="微软雅黑" panose="020B0503020204020204" pitchFamily="34" charset="-122"/>
+                <a:ea typeface="微软雅黑" panose="020B0503020204020204" pitchFamily="34" charset="-122"/>
+                <a:cs typeface="微软雅黑" panose="020B0503020204020204" pitchFamily="34" charset="-122"/>
+              </a:rPr>
+              <a:t>”</a:t>
+            </a:r>
+            <a:r>
+              <a:rPr lang="zh-CN" altLang="en-US" dirty="0" smtClean="0">
+                <a:latin typeface="微软雅黑" panose="020B0503020204020204" pitchFamily="34" charset="-122"/>
+                <a:ea typeface="微软雅黑" panose="020B0503020204020204" pitchFamily="34" charset="-122"/>
+                <a:cs typeface="微软雅黑" panose="020B0503020204020204" pitchFamily="34" charset="-122"/>
+              </a:rPr>
+              <a:t>、</a:t>
+            </a:r>
+            <a:r>
+              <a:rPr lang="en-US" altLang="zh-CN" dirty="0" smtClean="0">
+                <a:latin typeface="微软雅黑" panose="020B0503020204020204" pitchFamily="34" charset="-122"/>
+                <a:ea typeface="微软雅黑" panose="020B0503020204020204" pitchFamily="34" charset="-122"/>
+                <a:cs typeface="微软雅黑" panose="020B0503020204020204" pitchFamily="34" charset="-122"/>
+              </a:rPr>
+              <a:t>“</a:t>
+            </a:r>
+            <a:r>
+              <a:rPr lang="zh-CN" altLang="en-US" dirty="0" smtClean="0">
+                <a:latin typeface="微软雅黑" panose="020B0503020204020204" pitchFamily="34" charset="-122"/>
+                <a:ea typeface="微软雅黑" panose="020B0503020204020204" pitchFamily="34" charset="-122"/>
+                <a:cs typeface="微软雅黑" panose="020B0503020204020204" pitchFamily="34" charset="-122"/>
+              </a:rPr>
+              <a:t>工具</a:t>
+            </a:r>
+            <a:r>
+              <a:rPr lang="en-US" altLang="zh-CN" dirty="0" smtClean="0">
+                <a:latin typeface="微软雅黑" panose="020B0503020204020204" pitchFamily="34" charset="-122"/>
+                <a:ea typeface="微软雅黑" panose="020B0503020204020204" pitchFamily="34" charset="-122"/>
+                <a:cs typeface="微软雅黑" panose="020B0503020204020204" pitchFamily="34" charset="-122"/>
+              </a:rPr>
+              <a:t>”</a:t>
+            </a:r>
+            <a:r>
+              <a:rPr lang="zh-CN" altLang="en-US" dirty="0" smtClean="0">
+                <a:latin typeface="微软雅黑" panose="020B0503020204020204" pitchFamily="34" charset="-122"/>
+                <a:ea typeface="微软雅黑" panose="020B0503020204020204" pitchFamily="34" charset="-122"/>
+                <a:cs typeface="微软雅黑" panose="020B0503020204020204" pitchFamily="34" charset="-122"/>
+              </a:rPr>
+              <a:t>、</a:t>
+            </a:r>
+            <a:r>
+              <a:rPr lang="en-US" altLang="zh-CN" dirty="0" smtClean="0">
+                <a:latin typeface="微软雅黑" panose="020B0503020204020204" pitchFamily="34" charset="-122"/>
+                <a:ea typeface="微软雅黑" panose="020B0503020204020204" pitchFamily="34" charset="-122"/>
+                <a:cs typeface="微软雅黑" panose="020B0503020204020204" pitchFamily="34" charset="-122"/>
+              </a:rPr>
+              <a:t>“</a:t>
+            </a:r>
+            <a:r>
+              <a:rPr lang="zh-CN" altLang="en-US" dirty="0" smtClean="0">
+                <a:latin typeface="微软雅黑" panose="020B0503020204020204" pitchFamily="34" charset="-122"/>
+                <a:ea typeface="微软雅黑" panose="020B0503020204020204" pitchFamily="34" charset="-122"/>
+                <a:cs typeface="微软雅黑" panose="020B0503020204020204" pitchFamily="34" charset="-122"/>
+              </a:rPr>
+              <a:t>未来</a:t>
+            </a:r>
+            <a:r>
+              <a:rPr lang="en-US" altLang="zh-CN" dirty="0" smtClean="0">
+                <a:latin typeface="微软雅黑" panose="020B0503020204020204" pitchFamily="34" charset="-122"/>
+                <a:ea typeface="微软雅黑" panose="020B0503020204020204" pitchFamily="34" charset="-122"/>
+                <a:cs typeface="微软雅黑" panose="020B0503020204020204" pitchFamily="34" charset="-122"/>
+              </a:rPr>
+              <a:t>”</a:t>
+            </a:r>
+            <a:r>
+              <a:rPr lang="zh-CN" altLang="en-US" dirty="0" smtClean="0">
+                <a:latin typeface="微软雅黑" panose="020B0503020204020204" pitchFamily="34" charset="-122"/>
+                <a:ea typeface="微软雅黑" panose="020B0503020204020204" pitchFamily="34" charset="-122"/>
+                <a:cs typeface="微软雅黑" panose="020B0503020204020204" pitchFamily="34" charset="-122"/>
+              </a:rPr>
+              <a:t>等常见组合。当模型进入推理阶段并遇到新句子</a:t>
+            </a:r>
+            <a:r>
+              <a:rPr lang="en-US" altLang="zh-CN" dirty="0" smtClean="0">
+                <a:latin typeface="微软雅黑" panose="020B0503020204020204" pitchFamily="34" charset="-122"/>
+                <a:ea typeface="微软雅黑" panose="020B0503020204020204" pitchFamily="34" charset="-122"/>
+                <a:cs typeface="微软雅黑" panose="020B0503020204020204" pitchFamily="34" charset="-122"/>
+              </a:rPr>
+              <a:t>“</a:t>
+            </a:r>
+            <a:r>
+              <a:rPr lang="zh-CN" altLang="en-US" dirty="0" smtClean="0">
+                <a:latin typeface="微软雅黑" panose="020B0503020204020204" pitchFamily="34" charset="-122"/>
+                <a:ea typeface="微软雅黑" panose="020B0503020204020204" pitchFamily="34" charset="-122"/>
+                <a:cs typeface="微软雅黑" panose="020B0503020204020204" pitchFamily="34" charset="-122"/>
+              </a:rPr>
+              <a:t>无人驾驶汽车</a:t>
+            </a:r>
+            <a:r>
+              <a:rPr lang="en-US" altLang="zh-CN" dirty="0" smtClean="0">
+                <a:latin typeface="微软雅黑" panose="020B0503020204020204" pitchFamily="34" charset="-122"/>
+                <a:ea typeface="微软雅黑" panose="020B0503020204020204" pitchFamily="34" charset="-122"/>
+                <a:cs typeface="微软雅黑" panose="020B0503020204020204" pitchFamily="34" charset="-122"/>
+              </a:rPr>
+              <a:t>”</a:t>
+            </a:r>
+            <a:r>
+              <a:rPr lang="zh-CN" altLang="en-US" dirty="0" smtClean="0">
+                <a:latin typeface="微软雅黑" panose="020B0503020204020204" pitchFamily="34" charset="-122"/>
+                <a:ea typeface="微软雅黑" panose="020B0503020204020204" pitchFamily="34" charset="-122"/>
+                <a:cs typeface="微软雅黑" panose="020B0503020204020204" pitchFamily="34" charset="-122"/>
+              </a:rPr>
+              <a:t>时，它会尝试多种可能的切分方式，比如</a:t>
+            </a:r>
+            <a:r>
+              <a:rPr lang="en-US" altLang="zh-CN" dirty="0" smtClean="0">
+                <a:latin typeface="微软雅黑" panose="020B0503020204020204" pitchFamily="34" charset="-122"/>
+                <a:ea typeface="微软雅黑" panose="020B0503020204020204" pitchFamily="34" charset="-122"/>
+                <a:cs typeface="微软雅黑" panose="020B0503020204020204" pitchFamily="34" charset="-122"/>
+              </a:rPr>
+              <a:t>“</a:t>
+            </a:r>
+            <a:r>
+              <a:rPr lang="zh-CN" altLang="en-US" dirty="0" smtClean="0">
+                <a:latin typeface="微软雅黑" panose="020B0503020204020204" pitchFamily="34" charset="-122"/>
+                <a:ea typeface="微软雅黑" panose="020B0503020204020204" pitchFamily="34" charset="-122"/>
+                <a:cs typeface="微软雅黑" panose="020B0503020204020204" pitchFamily="34" charset="-122"/>
+              </a:rPr>
+              <a:t>无</a:t>
+            </a:r>
+            <a:r>
+              <a:rPr lang="en-US" altLang="zh-CN" dirty="0" smtClean="0">
+                <a:latin typeface="微软雅黑" panose="020B0503020204020204" pitchFamily="34" charset="-122"/>
+                <a:ea typeface="微软雅黑" panose="020B0503020204020204" pitchFamily="34" charset="-122"/>
+                <a:cs typeface="微软雅黑" panose="020B0503020204020204" pitchFamily="34" charset="-122"/>
+              </a:rPr>
+              <a:t>/</a:t>
+            </a:r>
+            <a:r>
+              <a:rPr lang="zh-CN" altLang="en-US" dirty="0" smtClean="0">
+                <a:latin typeface="微软雅黑" panose="020B0503020204020204" pitchFamily="34" charset="-122"/>
+                <a:ea typeface="微软雅黑" panose="020B0503020204020204" pitchFamily="34" charset="-122"/>
+                <a:cs typeface="微软雅黑" panose="020B0503020204020204" pitchFamily="34" charset="-122"/>
+              </a:rPr>
+              <a:t>人</a:t>
+            </a:r>
+            <a:r>
+              <a:rPr lang="en-US" altLang="zh-CN" dirty="0" smtClean="0">
+                <a:latin typeface="微软雅黑" panose="020B0503020204020204" pitchFamily="34" charset="-122"/>
+                <a:ea typeface="微软雅黑" panose="020B0503020204020204" pitchFamily="34" charset="-122"/>
+                <a:cs typeface="微软雅黑" panose="020B0503020204020204" pitchFamily="34" charset="-122"/>
+              </a:rPr>
+              <a:t>/</a:t>
+            </a:r>
+            <a:r>
+              <a:rPr lang="zh-CN" altLang="en-US" dirty="0" smtClean="0">
+                <a:latin typeface="微软雅黑" panose="020B0503020204020204" pitchFamily="34" charset="-122"/>
+                <a:ea typeface="微软雅黑" panose="020B0503020204020204" pitchFamily="34" charset="-122"/>
+                <a:cs typeface="微软雅黑" panose="020B0503020204020204" pitchFamily="34" charset="-122"/>
+              </a:rPr>
+              <a:t>驾驶</a:t>
+            </a:r>
+            <a:r>
+              <a:rPr lang="en-US" altLang="zh-CN" dirty="0" smtClean="0">
+                <a:latin typeface="微软雅黑" panose="020B0503020204020204" pitchFamily="34" charset="-122"/>
+                <a:ea typeface="微软雅黑" panose="020B0503020204020204" pitchFamily="34" charset="-122"/>
+                <a:cs typeface="微软雅黑" panose="020B0503020204020204" pitchFamily="34" charset="-122"/>
+              </a:rPr>
+              <a:t>/</a:t>
+            </a:r>
+            <a:r>
+              <a:rPr lang="zh-CN" altLang="en-US" dirty="0" smtClean="0">
+                <a:latin typeface="微软雅黑" panose="020B0503020204020204" pitchFamily="34" charset="-122"/>
+                <a:ea typeface="微软雅黑" panose="020B0503020204020204" pitchFamily="34" charset="-122"/>
+                <a:cs typeface="微软雅黑" panose="020B0503020204020204" pitchFamily="34" charset="-122"/>
+              </a:rPr>
+              <a:t>汽车</a:t>
+            </a:r>
+            <a:r>
+              <a:rPr lang="en-US" altLang="zh-CN" dirty="0" smtClean="0">
+                <a:latin typeface="微软雅黑" panose="020B0503020204020204" pitchFamily="34" charset="-122"/>
+                <a:ea typeface="微软雅黑" panose="020B0503020204020204" pitchFamily="34" charset="-122"/>
+                <a:cs typeface="微软雅黑" panose="020B0503020204020204" pitchFamily="34" charset="-122"/>
+              </a:rPr>
+              <a:t>”</a:t>
+            </a:r>
+            <a:r>
+              <a:rPr lang="zh-CN" altLang="en-US" dirty="0" smtClean="0">
+                <a:latin typeface="微软雅黑" panose="020B0503020204020204" pitchFamily="34" charset="-122"/>
+                <a:ea typeface="微软雅黑" panose="020B0503020204020204" pitchFamily="34" charset="-122"/>
+                <a:cs typeface="微软雅黑" panose="020B0503020204020204" pitchFamily="34" charset="-122"/>
+              </a:rPr>
+              <a:t>、</a:t>
+            </a:r>
+            <a:endParaRPr lang="zh-CN" altLang="en-US" dirty="0" smtClean="0">
+              <a:latin typeface="微软雅黑" panose="020B0503020204020204" pitchFamily="34" charset="-122"/>
+              <a:ea typeface="微软雅黑" panose="020B0503020204020204" pitchFamily="34" charset="-122"/>
+              <a:cs typeface="微软雅黑" panose="020B0503020204020204" pitchFamily="34" charset="-122"/>
+            </a:endParaRPr>
+          </a:p>
+        </p:txBody>
+      </p:sp>
+      <p:sp>
+        <p:nvSpPr>
+          <p:cNvPr id="6" name="矩形 5"/>
           <p:cNvSpPr/>
-          <p:nvPr>
-            <p:custDataLst>
-              <p:tags r:id="rId13"/>
-            </p:custDataLst>
-          </p:nvPr>
-        </p:nvSpPr>
-        <p:spPr>
-          <a:xfrm rot="2700000">
-            <a:off x="9720580" y="2510790"/>
-            <a:ext cx="1454785" cy="1449070"/>
-          </a:xfrm>
-          <a:prstGeom prst="roundRect">
-            <a:avLst>
-              <a:gd name="adj" fmla="val 6319"/>
-            </a:avLst>
+          <p:nvPr/>
+        </p:nvSpPr>
+        <p:spPr>
+          <a:xfrm>
+            <a:off x="1954896" y="3657124"/>
+            <a:ext cx="8211454" cy="2991484"/>
+          </a:xfrm>
+          <a:prstGeom prst="rect">
+            <a:avLst/>
           </a:prstGeom>
-          <a:solidFill>
-            <a:schemeClr val="bg1">
-              <a:lumMod val="95000"/>
-            </a:schemeClr>
-          </a:solidFill>
-          <a:ln>
-            <a:noFill/>
-          </a:ln>
-          <a:effectLst>
-            <a:outerShdw blurRad="152400" dist="63500" dir="8100000" algn="tl" rotWithShape="0">
-              <a:prstClr val="black">
-                <a:alpha val="30000"/>
-              </a:prstClr>
-            </a:outerShdw>
-          </a:effectLst>
-          <a:scene3d>
-            <a:camera prst="orthographicFront"/>
-            <a:lightRig rig="threePt" dir="t"/>
-          </a:scene3d>
-          <a:sp3d prstMaterial="softEdge">
-            <a:bevelT w="38100" h="6350"/>
-          </a:sp3d>
+          <a:noFill/>
         </p:spPr>
         <p:style>
           <a:lnRef idx="2">
@@ -7998,7 +9305,124 @@
           <a:bodyPr rtlCol="0" anchor="ctr"/>
           <a:lstStyle/>
           <a:p>
-            <a:pPr marL="0" marR="0" lvl="0" indent="0" algn="ctr" defTabSz="914400" rtl="0" eaLnBrk="1" fontAlgn="auto" latinLnBrk="0" hangingPunct="1">
+            <a:pPr algn="ctr"/>
+            <a:r>
+              <a:rPr lang="zh-CN" altLang="en-US" dirty="0">
+                <a:solidFill>
+                  <a:schemeClr val="tx1"/>
+                </a:solidFill>
+              </a:rPr>
+              <a:t>教材对步骤图片</a:t>
+            </a:r>
+            <a:endParaRPr lang="zh-CN" altLang="en-US" dirty="0">
+              <a:solidFill>
+                <a:schemeClr val="tx1"/>
+              </a:solidFill>
+            </a:endParaRPr>
+          </a:p>
+        </p:txBody>
+      </p:sp>
+      <p:sp>
+        <p:nvSpPr>
+          <p:cNvPr id="2" name="文本框 1"/>
+          <p:cNvSpPr txBox="1"/>
+          <p:nvPr/>
+        </p:nvSpPr>
+        <p:spPr>
+          <a:xfrm>
+            <a:off x="0" y="793750"/>
+            <a:ext cx="1351262" cy="583565"/>
+          </a:xfrm>
+          <a:prstGeom prst="rect">
+            <a:avLst/>
+          </a:prstGeom>
+          <a:noFill/>
+        </p:spPr>
+        <p:txBody>
+          <a:bodyPr wrap="square" rtlCol="0">
+            <a:spAutoFit/>
+            <a:scene3d>
+              <a:camera prst="orthographicFront"/>
+              <a:lightRig rig="threePt" dir="t"/>
+            </a:scene3d>
+            <a:sp3d contourW="12700"/>
+          </a:bodyPr>
+          <a:lstStyle/>
+          <a:p>
+            <a:pPr algn="ctr"/>
+            <a:r>
+              <a:rPr lang="en-US" sz="3200" dirty="0" smtClean="0">
+                <a:solidFill>
+                  <a:srgbClr val="3F396C"/>
+                </a:solidFill>
+                <a:latin typeface="思源宋体" panose="02020700000000000000" charset="-122"/>
+                <a:ea typeface="思源宋体" panose="02020700000000000000" charset="-122"/>
+              </a:rPr>
+              <a:t>04</a:t>
+            </a:r>
+            <a:endParaRPr lang="en-US" sz="3200" dirty="0" smtClean="0">
+              <a:solidFill>
+                <a:srgbClr val="3F396C"/>
+              </a:solidFill>
+              <a:latin typeface="思源宋体" panose="02020700000000000000" charset="-122"/>
+              <a:ea typeface="思源宋体" panose="02020700000000000000" charset="-122"/>
+            </a:endParaRPr>
+          </a:p>
+        </p:txBody>
+      </p:sp>
+      <p:sp>
+        <p:nvSpPr>
+          <p:cNvPr id="17" name="文本框 16"/>
+          <p:cNvSpPr txBox="1"/>
+          <p:nvPr/>
+        </p:nvSpPr>
+        <p:spPr>
+          <a:xfrm>
+            <a:off x="1278000" y="792000"/>
+            <a:ext cx="3932555" cy="583565"/>
+          </a:xfrm>
+          <a:prstGeom prst="rect">
+            <a:avLst/>
+          </a:prstGeom>
+          <a:noFill/>
+        </p:spPr>
+        <p:txBody>
+          <a:bodyPr wrap="square" rtlCol="0">
+            <a:spAutoFit/>
+            <a:scene3d>
+              <a:camera prst="orthographicFront"/>
+              <a:lightRig rig="threePt" dir="t"/>
+            </a:scene3d>
+            <a:sp3d contourW="12700"/>
+          </a:bodyPr>
+          <a:lstStyle>
+            <a:defPPr>
+              <a:defRPr lang="en-US"/>
+            </a:defPPr>
+            <a:lvl1pPr algn="ctr">
+              <a:defRPr sz="3200">
+                <a:gradFill>
+                  <a:gsLst>
+                    <a:gs pos="0">
+                      <a:schemeClr val="tx1">
+                        <a:lumMod val="50000"/>
+                        <a:lumOff val="50000"/>
+                      </a:schemeClr>
+                    </a:gs>
+                    <a:gs pos="100000">
+                      <a:schemeClr val="tx1">
+                        <a:lumMod val="85000"/>
+                        <a:lumOff val="15000"/>
+                      </a:schemeClr>
+                    </a:gs>
+                  </a:gsLst>
+                  <a:lin ang="5400000" scaled="1"/>
+                </a:gradFill>
+              </a:defRPr>
+            </a:lvl1pPr>
+          </a:lstStyle>
+          <a:p>
+            <a:pPr marL="0" marR="0" lvl="0" indent="0" algn="l" defTabSz="914400" rtl="0" eaLnBrk="1" fontAlgn="auto" latinLnBrk="0" hangingPunct="1">
               <a:lnSpc>
                 <a:spcPct val="100000"/>
               </a:lnSpc>
@@ -8014,54 +9438,608 @@
               <a:buNone/>
               <a:defRPr/>
             </a:pPr>
-            <a:endParaRPr kumimoji="0" lang="zh-CN" altLang="en-US" sz="2800" b="0" i="0" u="none" strike="noStrike" kern="1200" cap="none" spc="0" normalizeH="0" baseline="0" noProof="0" dirty="0">
-              <a:ln>
-                <a:noFill/>
-              </a:ln>
+            <a:r>
+              <a:rPr lang="zh-CN" altLang="en-US" b="1" dirty="0">
+                <a:solidFill>
+                  <a:schemeClr val="accent1">
+                    <a:lumMod val="75000"/>
+                  </a:schemeClr>
+                </a:solidFill>
+                <a:latin typeface="微软雅黑" panose="020B0503020204020204" pitchFamily="34" charset="-122"/>
+                <a:ea typeface="微软雅黑" panose="020B0503020204020204" pitchFamily="34" charset="-122"/>
+                <a:cs typeface="微软雅黑" panose="020B0503020204020204" pitchFamily="34" charset="-122"/>
+                <a:sym typeface="+mn-lt"/>
+              </a:rPr>
+              <a:t>任务</a:t>
+            </a:r>
+            <a:r>
+              <a:rPr lang="zh-CN" altLang="en-US" b="1" dirty="0">
+                <a:solidFill>
+                  <a:schemeClr val="accent1">
+                    <a:lumMod val="75000"/>
+                  </a:schemeClr>
+                </a:solidFill>
+                <a:latin typeface="微软雅黑" panose="020B0503020204020204" pitchFamily="34" charset="-122"/>
+                <a:ea typeface="微软雅黑" panose="020B0503020204020204" pitchFamily="34" charset="-122"/>
+                <a:cs typeface="微软雅黑" panose="020B0503020204020204" pitchFamily="34" charset="-122"/>
+                <a:sym typeface="+mn-lt"/>
+              </a:rPr>
+              <a:t>实施</a:t>
+            </a:r>
+            <a:endParaRPr lang="zh-CN" altLang="en-US" b="1" dirty="0">
               <a:solidFill>
-                <a:prstClr val="white"/>
+                <a:schemeClr val="accent1">
+                  <a:lumMod val="75000"/>
+                </a:schemeClr>
               </a:solidFill>
-              <a:effectLst/>
-              <a:uLnTx/>
-              <a:uFillTx/>
-              <a:latin typeface="DIN-BoldItalic" pitchFamily="50" charset="0"/>
+              <a:latin typeface="微软雅黑" panose="020B0503020204020204" pitchFamily="34" charset="-122"/>
               <a:ea typeface="微软雅黑" panose="020B0503020204020204" pitchFamily="34" charset="-122"/>
-              <a:cs typeface="+mn-cs"/>
+              <a:cs typeface="微软雅黑" panose="020B0503020204020204" pitchFamily="34" charset="-122"/>
+              <a:sym typeface="+mn-lt"/>
             </a:endParaRPr>
           </a:p>
         </p:txBody>
       </p:sp>
-      <p:sp>
-        <p:nvSpPr>
-          <p:cNvPr id="7" name="圆角矩形 38"/>
+    </p:spTree>
+  </p:cSld>
+  <p:clrMapOvr>
+    <a:masterClrMapping/>
+  </p:clrMapOvr>
+</p:sld>
+</file>
+
+<file path=ppt/slides/slide13.xml><?xml version="1.0" encoding="utf-8"?>
+<p:sld xmlns:a="http://schemas.openxmlformats.org/drawingml/2006/main" xmlns:r="http://schemas.openxmlformats.org/officeDocument/2006/relationships" xmlns:p="http://schemas.openxmlformats.org/presentationml/2006/main">
+  <p:cSld>
+    <p:spTree>
+      <p:nvGrpSpPr>
+        <p:cNvPr id="1" name=""/>
+        <p:cNvGrpSpPr/>
+        <p:nvPr/>
+      </p:nvGrpSpPr>
+      <p:grpSpPr>
+        <a:xfrm>
+          <a:off x="0" y="0"/>
+          <a:ext cx="0" cy="0"/>
+          <a:chOff x="0" y="0"/>
+          <a:chExt cx="0" cy="0"/>
+        </a:xfrm>
+      </p:grpSpPr>
+      <p:sp>
+        <p:nvSpPr>
+          <p:cNvPr id="3" name="文本框 2"/>
+          <p:cNvSpPr txBox="1"/>
+          <p:nvPr/>
+        </p:nvSpPr>
+        <p:spPr>
+          <a:xfrm>
+            <a:off x="155575" y="1777365"/>
+            <a:ext cx="5502275" cy="4629150"/>
+          </a:xfrm>
+          <a:prstGeom prst="rect">
+            <a:avLst/>
+          </a:prstGeom>
+          <a:noFill/>
+        </p:spPr>
+        <p:txBody>
+          <a:bodyPr wrap="square" rtlCol="0" anchor="t">
+            <a:noAutofit/>
+          </a:bodyPr>
+          <a:lstStyle/>
+          <a:p>
+            <a:pPr indent="457200" fontAlgn="auto">
+              <a:lnSpc>
+                <a:spcPct val="150000"/>
+              </a:lnSpc>
+            </a:pPr>
+            <a:r>
+              <a:rPr lang="en-US" dirty="0" smtClean="0">
+                <a:latin typeface="微软雅黑" panose="020B0503020204020204" pitchFamily="34" charset="-122"/>
+                <a:ea typeface="微软雅黑" panose="020B0503020204020204" pitchFamily="34" charset="-122"/>
+                <a:cs typeface="微软雅黑" panose="020B0503020204020204" pitchFamily="34" charset="-122"/>
+              </a:rPr>
+              <a:t>“</a:t>
+            </a:r>
+            <a:r>
+              <a:rPr lang="zh-CN" altLang="en-US" dirty="0" smtClean="0">
+                <a:latin typeface="微软雅黑" panose="020B0503020204020204" pitchFamily="34" charset="-122"/>
+                <a:ea typeface="微软雅黑" panose="020B0503020204020204" pitchFamily="34" charset="-122"/>
+                <a:cs typeface="微软雅黑" panose="020B0503020204020204" pitchFamily="34" charset="-122"/>
+              </a:rPr>
+              <a:t>无人</a:t>
+            </a:r>
+            <a:r>
+              <a:rPr lang="en-US" altLang="zh-CN" dirty="0" smtClean="0">
+                <a:latin typeface="微软雅黑" panose="020B0503020204020204" pitchFamily="34" charset="-122"/>
+                <a:ea typeface="微软雅黑" panose="020B0503020204020204" pitchFamily="34" charset="-122"/>
+                <a:cs typeface="微软雅黑" panose="020B0503020204020204" pitchFamily="34" charset="-122"/>
+              </a:rPr>
+              <a:t>/</a:t>
+            </a:r>
+            <a:r>
+              <a:rPr lang="zh-CN" altLang="en-US" dirty="0" smtClean="0">
+                <a:latin typeface="微软雅黑" panose="020B0503020204020204" pitchFamily="34" charset="-122"/>
+                <a:ea typeface="微软雅黑" panose="020B0503020204020204" pitchFamily="34" charset="-122"/>
+                <a:cs typeface="微软雅黑" panose="020B0503020204020204" pitchFamily="34" charset="-122"/>
+              </a:rPr>
+              <a:t>驾驶</a:t>
+            </a:r>
+            <a:r>
+              <a:rPr lang="en-US" altLang="zh-CN" dirty="0" smtClean="0">
+                <a:latin typeface="微软雅黑" panose="020B0503020204020204" pitchFamily="34" charset="-122"/>
+                <a:ea typeface="微软雅黑" panose="020B0503020204020204" pitchFamily="34" charset="-122"/>
+                <a:cs typeface="微软雅黑" panose="020B0503020204020204" pitchFamily="34" charset="-122"/>
+              </a:rPr>
+              <a:t>/</a:t>
+            </a:r>
+            <a:r>
+              <a:rPr lang="zh-CN" altLang="en-US" dirty="0" smtClean="0">
+                <a:latin typeface="微软雅黑" panose="020B0503020204020204" pitchFamily="34" charset="-122"/>
+                <a:ea typeface="微软雅黑" panose="020B0503020204020204" pitchFamily="34" charset="-122"/>
+                <a:cs typeface="微软雅黑" panose="020B0503020204020204" pitchFamily="34" charset="-122"/>
+              </a:rPr>
+              <a:t>汽车</a:t>
+            </a:r>
+            <a:r>
+              <a:rPr lang="en-US" altLang="zh-CN" dirty="0" smtClean="0">
+                <a:latin typeface="微软雅黑" panose="020B0503020204020204" pitchFamily="34" charset="-122"/>
+                <a:ea typeface="微软雅黑" panose="020B0503020204020204" pitchFamily="34" charset="-122"/>
+                <a:cs typeface="微软雅黑" panose="020B0503020204020204" pitchFamily="34" charset="-122"/>
+              </a:rPr>
+              <a:t>”</a:t>
+            </a:r>
+            <a:r>
+              <a:rPr lang="zh-CN" altLang="en-US" dirty="0" smtClean="0">
+                <a:latin typeface="微软雅黑" panose="020B0503020204020204" pitchFamily="34" charset="-122"/>
+                <a:ea typeface="微软雅黑" panose="020B0503020204020204" pitchFamily="34" charset="-122"/>
+                <a:cs typeface="微软雅黑" panose="020B0503020204020204" pitchFamily="34" charset="-122"/>
+              </a:rPr>
+              <a:t>或</a:t>
+            </a:r>
+            <a:r>
+              <a:rPr lang="en-US" altLang="zh-CN" dirty="0" smtClean="0">
+                <a:latin typeface="微软雅黑" panose="020B0503020204020204" pitchFamily="34" charset="-122"/>
+                <a:ea typeface="微软雅黑" panose="020B0503020204020204" pitchFamily="34" charset="-122"/>
+                <a:cs typeface="微软雅黑" panose="020B0503020204020204" pitchFamily="34" charset="-122"/>
+              </a:rPr>
+              <a:t>“</a:t>
+            </a:r>
+            <a:r>
+              <a:rPr lang="zh-CN" altLang="en-US" dirty="0" smtClean="0">
+                <a:latin typeface="微软雅黑" panose="020B0503020204020204" pitchFamily="34" charset="-122"/>
+                <a:ea typeface="微软雅黑" panose="020B0503020204020204" pitchFamily="34" charset="-122"/>
+                <a:cs typeface="微软雅黑" panose="020B0503020204020204" pitchFamily="34" charset="-122"/>
+              </a:rPr>
+              <a:t>无人驾驶</a:t>
+            </a:r>
+            <a:r>
+              <a:rPr lang="en-US" altLang="zh-CN" dirty="0" smtClean="0">
+                <a:latin typeface="微软雅黑" panose="020B0503020204020204" pitchFamily="34" charset="-122"/>
+                <a:ea typeface="微软雅黑" panose="020B0503020204020204" pitchFamily="34" charset="-122"/>
+                <a:cs typeface="微软雅黑" panose="020B0503020204020204" pitchFamily="34" charset="-122"/>
+              </a:rPr>
+              <a:t>/</a:t>
+            </a:r>
+            <a:r>
+              <a:rPr lang="zh-CN" altLang="en-US" dirty="0" smtClean="0">
+                <a:latin typeface="微软雅黑" panose="020B0503020204020204" pitchFamily="34" charset="-122"/>
+                <a:ea typeface="微软雅黑" panose="020B0503020204020204" pitchFamily="34" charset="-122"/>
+                <a:cs typeface="微软雅黑" panose="020B0503020204020204" pitchFamily="34" charset="-122"/>
+              </a:rPr>
+              <a:t>汽车</a:t>
+            </a:r>
+            <a:r>
+              <a:rPr lang="en-US" altLang="zh-CN" dirty="0" smtClean="0">
+                <a:latin typeface="微软雅黑" panose="020B0503020204020204" pitchFamily="34" charset="-122"/>
+                <a:ea typeface="微软雅黑" panose="020B0503020204020204" pitchFamily="34" charset="-122"/>
+                <a:cs typeface="微软雅黑" panose="020B0503020204020204" pitchFamily="34" charset="-122"/>
+              </a:rPr>
+              <a:t>”</a:t>
+            </a:r>
+            <a:r>
+              <a:rPr lang="zh-CN" altLang="en-US" dirty="0" smtClean="0">
+                <a:latin typeface="微软雅黑" panose="020B0503020204020204" pitchFamily="34" charset="-122"/>
+                <a:ea typeface="微软雅黑" panose="020B0503020204020204" pitchFamily="34" charset="-122"/>
+                <a:cs typeface="微软雅黑" panose="020B0503020204020204" pitchFamily="34" charset="-122"/>
+              </a:rPr>
+              <a:t>等，然后根据训练阶段学到的概率分布，选择概率最高的切分结果。由于</a:t>
+            </a:r>
+            <a:r>
+              <a:rPr lang="en-US" altLang="zh-CN" dirty="0" smtClean="0">
+                <a:latin typeface="微软雅黑" panose="020B0503020204020204" pitchFamily="34" charset="-122"/>
+                <a:ea typeface="微软雅黑" panose="020B0503020204020204" pitchFamily="34" charset="-122"/>
+                <a:cs typeface="微软雅黑" panose="020B0503020204020204" pitchFamily="34" charset="-122"/>
+              </a:rPr>
+              <a:t>“</a:t>
+            </a:r>
+            <a:r>
+              <a:rPr lang="zh-CN" altLang="en-US" dirty="0" smtClean="0">
+                <a:latin typeface="微软雅黑" panose="020B0503020204020204" pitchFamily="34" charset="-122"/>
+                <a:ea typeface="微软雅黑" panose="020B0503020204020204" pitchFamily="34" charset="-122"/>
+                <a:cs typeface="微软雅黑" panose="020B0503020204020204" pitchFamily="34" charset="-122"/>
+              </a:rPr>
+              <a:t>无人</a:t>
+            </a:r>
+            <a:r>
+              <a:rPr lang="en-US" altLang="zh-CN" dirty="0" smtClean="0">
+                <a:latin typeface="微软雅黑" panose="020B0503020204020204" pitchFamily="34" charset="-122"/>
+                <a:ea typeface="微软雅黑" panose="020B0503020204020204" pitchFamily="34" charset="-122"/>
+                <a:cs typeface="微软雅黑" panose="020B0503020204020204" pitchFamily="34" charset="-122"/>
+              </a:rPr>
+              <a:t>”</a:t>
+            </a:r>
+            <a:r>
+              <a:rPr lang="zh-CN" altLang="en-US" dirty="0" smtClean="0">
+                <a:latin typeface="微软雅黑" panose="020B0503020204020204" pitchFamily="34" charset="-122"/>
+                <a:ea typeface="微软雅黑" panose="020B0503020204020204" pitchFamily="34" charset="-122"/>
+                <a:cs typeface="微软雅黑" panose="020B0503020204020204" pitchFamily="34" charset="-122"/>
+              </a:rPr>
+              <a:t>、</a:t>
+            </a:r>
+            <a:r>
+              <a:rPr lang="en-US" altLang="zh-CN" dirty="0" smtClean="0">
+                <a:latin typeface="微软雅黑" panose="020B0503020204020204" pitchFamily="34" charset="-122"/>
+                <a:ea typeface="微软雅黑" panose="020B0503020204020204" pitchFamily="34" charset="-122"/>
+                <a:cs typeface="微软雅黑" panose="020B0503020204020204" pitchFamily="34" charset="-122"/>
+              </a:rPr>
+              <a:t>“</a:t>
+            </a:r>
+            <a:r>
+              <a:rPr lang="zh-CN" altLang="en-US" dirty="0" smtClean="0">
+                <a:latin typeface="微软雅黑" panose="020B0503020204020204" pitchFamily="34" charset="-122"/>
+                <a:ea typeface="微软雅黑" panose="020B0503020204020204" pitchFamily="34" charset="-122"/>
+                <a:cs typeface="微软雅黑" panose="020B0503020204020204" pitchFamily="34" charset="-122"/>
+              </a:rPr>
+              <a:t>驾驶</a:t>
+            </a:r>
+            <a:r>
+              <a:rPr lang="en-US" altLang="zh-CN" dirty="0" smtClean="0">
+                <a:latin typeface="微软雅黑" panose="020B0503020204020204" pitchFamily="34" charset="-122"/>
+                <a:ea typeface="微软雅黑" panose="020B0503020204020204" pitchFamily="34" charset="-122"/>
+                <a:cs typeface="微软雅黑" panose="020B0503020204020204" pitchFamily="34" charset="-122"/>
+              </a:rPr>
+              <a:t>”</a:t>
+            </a:r>
+            <a:r>
+              <a:rPr lang="zh-CN" altLang="en-US" dirty="0" smtClean="0">
+                <a:latin typeface="微软雅黑" panose="020B0503020204020204" pitchFamily="34" charset="-122"/>
+                <a:ea typeface="微软雅黑" panose="020B0503020204020204" pitchFamily="34" charset="-122"/>
+                <a:cs typeface="微软雅黑" panose="020B0503020204020204" pitchFamily="34" charset="-122"/>
+              </a:rPr>
+              <a:t>和</a:t>
+            </a:r>
+            <a:r>
+              <a:rPr lang="en-US" altLang="zh-CN" dirty="0" smtClean="0">
+                <a:latin typeface="微软雅黑" panose="020B0503020204020204" pitchFamily="34" charset="-122"/>
+                <a:ea typeface="微软雅黑" panose="020B0503020204020204" pitchFamily="34" charset="-122"/>
+                <a:cs typeface="微软雅黑" panose="020B0503020204020204" pitchFamily="34" charset="-122"/>
+              </a:rPr>
+              <a:t>“</a:t>
+            </a:r>
+            <a:r>
+              <a:rPr lang="zh-CN" altLang="en-US" dirty="0" smtClean="0">
+                <a:latin typeface="微软雅黑" panose="020B0503020204020204" pitchFamily="34" charset="-122"/>
+                <a:ea typeface="微软雅黑" panose="020B0503020204020204" pitchFamily="34" charset="-122"/>
+                <a:cs typeface="微软雅黑" panose="020B0503020204020204" pitchFamily="34" charset="-122"/>
+              </a:rPr>
+              <a:t>汽车</a:t>
+            </a:r>
+            <a:r>
+              <a:rPr lang="en-US" altLang="zh-CN" dirty="0" smtClean="0">
+                <a:latin typeface="微软雅黑" panose="020B0503020204020204" pitchFamily="34" charset="-122"/>
+                <a:ea typeface="微软雅黑" panose="020B0503020204020204" pitchFamily="34" charset="-122"/>
+                <a:cs typeface="微软雅黑" panose="020B0503020204020204" pitchFamily="34" charset="-122"/>
+              </a:rPr>
+              <a:t>”</a:t>
+            </a:r>
+            <a:r>
+              <a:rPr lang="zh-CN" altLang="en-US" dirty="0" smtClean="0">
+                <a:latin typeface="微软雅黑" panose="020B0503020204020204" pitchFamily="34" charset="-122"/>
+                <a:ea typeface="微软雅黑" panose="020B0503020204020204" pitchFamily="34" charset="-122"/>
+                <a:cs typeface="微软雅黑" panose="020B0503020204020204" pitchFamily="34" charset="-122"/>
+              </a:rPr>
+              <a:t>在训练语料中频繁出现，模型最终会选择将它们各自作为一个子词进行切分，得到</a:t>
+            </a:r>
+            <a:r>
+              <a:rPr lang="en-US" altLang="zh-CN" dirty="0" smtClean="0">
+                <a:latin typeface="微软雅黑" panose="020B0503020204020204" pitchFamily="34" charset="-122"/>
+                <a:ea typeface="微软雅黑" panose="020B0503020204020204" pitchFamily="34" charset="-122"/>
+                <a:cs typeface="微软雅黑" panose="020B0503020204020204" pitchFamily="34" charset="-122"/>
+              </a:rPr>
+              <a:t>“</a:t>
+            </a:r>
+            <a:r>
+              <a:rPr lang="zh-CN" altLang="en-US" dirty="0" smtClean="0">
+                <a:latin typeface="微软雅黑" panose="020B0503020204020204" pitchFamily="34" charset="-122"/>
+                <a:ea typeface="微软雅黑" panose="020B0503020204020204" pitchFamily="34" charset="-122"/>
+                <a:cs typeface="微软雅黑" panose="020B0503020204020204" pitchFamily="34" charset="-122"/>
+              </a:rPr>
+              <a:t>无人</a:t>
+            </a:r>
+            <a:r>
+              <a:rPr lang="en-US" altLang="zh-CN" dirty="0" smtClean="0">
+                <a:latin typeface="微软雅黑" panose="020B0503020204020204" pitchFamily="34" charset="-122"/>
+                <a:ea typeface="微软雅黑" panose="020B0503020204020204" pitchFamily="34" charset="-122"/>
+                <a:cs typeface="微软雅黑" panose="020B0503020204020204" pitchFamily="34" charset="-122"/>
+              </a:rPr>
+              <a:t>”</a:t>
+            </a:r>
+            <a:r>
+              <a:rPr lang="zh-CN" altLang="en-US" dirty="0" smtClean="0">
+                <a:latin typeface="微软雅黑" panose="020B0503020204020204" pitchFamily="34" charset="-122"/>
+                <a:ea typeface="微软雅黑" panose="020B0503020204020204" pitchFamily="34" charset="-122"/>
+                <a:cs typeface="微软雅黑" panose="020B0503020204020204" pitchFamily="34" charset="-122"/>
+              </a:rPr>
+              <a:t>、</a:t>
+            </a:r>
+            <a:r>
+              <a:rPr lang="en-US" altLang="zh-CN" dirty="0" smtClean="0">
+                <a:latin typeface="微软雅黑" panose="020B0503020204020204" pitchFamily="34" charset="-122"/>
+                <a:ea typeface="微软雅黑" panose="020B0503020204020204" pitchFamily="34" charset="-122"/>
+                <a:cs typeface="微软雅黑" panose="020B0503020204020204" pitchFamily="34" charset="-122"/>
+              </a:rPr>
+              <a:t>“</a:t>
+            </a:r>
+            <a:r>
+              <a:rPr lang="zh-CN" altLang="en-US" dirty="0" smtClean="0">
+                <a:latin typeface="微软雅黑" panose="020B0503020204020204" pitchFamily="34" charset="-122"/>
+                <a:ea typeface="微软雅黑" panose="020B0503020204020204" pitchFamily="34" charset="-122"/>
+                <a:cs typeface="微软雅黑" panose="020B0503020204020204" pitchFamily="34" charset="-122"/>
+              </a:rPr>
+              <a:t>驾驶</a:t>
+            </a:r>
+            <a:r>
+              <a:rPr lang="en-US" altLang="zh-CN" dirty="0" smtClean="0">
+                <a:latin typeface="微软雅黑" panose="020B0503020204020204" pitchFamily="34" charset="-122"/>
+                <a:ea typeface="微软雅黑" panose="020B0503020204020204" pitchFamily="34" charset="-122"/>
+                <a:cs typeface="微软雅黑" panose="020B0503020204020204" pitchFamily="34" charset="-122"/>
+              </a:rPr>
+              <a:t>”</a:t>
+            </a:r>
+            <a:r>
+              <a:rPr lang="zh-CN" altLang="en-US" dirty="0" smtClean="0">
+                <a:latin typeface="微软雅黑" panose="020B0503020204020204" pitchFamily="34" charset="-122"/>
+                <a:ea typeface="微软雅黑" panose="020B0503020204020204" pitchFamily="34" charset="-122"/>
+                <a:cs typeface="微软雅黑" panose="020B0503020204020204" pitchFamily="34" charset="-122"/>
+              </a:rPr>
+              <a:t>、</a:t>
+            </a:r>
+            <a:r>
+              <a:rPr lang="en-US" altLang="zh-CN" dirty="0" smtClean="0">
+                <a:latin typeface="微软雅黑" panose="020B0503020204020204" pitchFamily="34" charset="-122"/>
+                <a:ea typeface="微软雅黑" panose="020B0503020204020204" pitchFamily="34" charset="-122"/>
+                <a:cs typeface="微软雅黑" panose="020B0503020204020204" pitchFamily="34" charset="-122"/>
+              </a:rPr>
+              <a:t>“</a:t>
+            </a:r>
+            <a:r>
+              <a:rPr lang="zh-CN" altLang="en-US" dirty="0" smtClean="0">
+                <a:latin typeface="微软雅黑" panose="020B0503020204020204" pitchFamily="34" charset="-122"/>
+                <a:ea typeface="微软雅黑" panose="020B0503020204020204" pitchFamily="34" charset="-122"/>
+                <a:cs typeface="微软雅黑" panose="020B0503020204020204" pitchFamily="34" charset="-122"/>
+              </a:rPr>
+              <a:t>汽车</a:t>
+            </a:r>
+            <a:r>
+              <a:rPr lang="en-US" altLang="zh-CN" dirty="0" smtClean="0">
+                <a:latin typeface="微软雅黑" panose="020B0503020204020204" pitchFamily="34" charset="-122"/>
+                <a:ea typeface="微软雅黑" panose="020B0503020204020204" pitchFamily="34" charset="-122"/>
+                <a:cs typeface="微软雅黑" panose="020B0503020204020204" pitchFamily="34" charset="-122"/>
+              </a:rPr>
+              <a:t>”</a:t>
+            </a:r>
+            <a:r>
+              <a:rPr lang="zh-CN" altLang="en-US" dirty="0" smtClean="0">
+                <a:latin typeface="微软雅黑" panose="020B0503020204020204" pitchFamily="34" charset="-122"/>
+                <a:ea typeface="微软雅黑" panose="020B0503020204020204" pitchFamily="34" charset="-122"/>
+                <a:cs typeface="微软雅黑" panose="020B0503020204020204" pitchFamily="34" charset="-122"/>
+              </a:rPr>
+              <a:t>这样的分词结果。</a:t>
+            </a:r>
+            <a:r>
+              <a:rPr lang="en-US" altLang="zh-CN" dirty="0" smtClean="0">
+                <a:latin typeface="微软雅黑" panose="020B0503020204020204" pitchFamily="34" charset="-122"/>
+                <a:ea typeface="微软雅黑" panose="020B0503020204020204" pitchFamily="34" charset="-122"/>
+                <a:cs typeface="微软雅黑" panose="020B0503020204020204" pitchFamily="34" charset="-122"/>
+              </a:rPr>
+              <a:t>
+</a:t>
+            </a:r>
+            <a:r>
+              <a:rPr lang="zh-CN" altLang="en-US" dirty="0" smtClean="0">
+                <a:latin typeface="微软雅黑" panose="020B0503020204020204" pitchFamily="34" charset="-122"/>
+                <a:ea typeface="微软雅黑" panose="020B0503020204020204" pitchFamily="34" charset="-122"/>
+                <a:cs typeface="微软雅黑" panose="020B0503020204020204" pitchFamily="34" charset="-122"/>
+              </a:rPr>
+              <a:t>利用</a:t>
+            </a:r>
+            <a:r>
+              <a:rPr lang="en-US" altLang="zh-CN" dirty="0" smtClean="0">
+                <a:latin typeface="微软雅黑" panose="020B0503020204020204" pitchFamily="34" charset="-122"/>
+                <a:ea typeface="微软雅黑" panose="020B0503020204020204" pitchFamily="34" charset="-122"/>
+                <a:cs typeface="微软雅黑" panose="020B0503020204020204" pitchFamily="34" charset="-122"/>
+              </a:rPr>
+              <a:t>Qwen tokenizer</a:t>
+            </a:r>
+            <a:r>
+              <a:rPr lang="zh-CN" altLang="en-US" dirty="0" smtClean="0">
+                <a:latin typeface="微软雅黑" panose="020B0503020204020204" pitchFamily="34" charset="-122"/>
+                <a:ea typeface="微软雅黑" panose="020B0503020204020204" pitchFamily="34" charset="-122"/>
+                <a:cs typeface="微软雅黑" panose="020B0503020204020204" pitchFamily="34" charset="-122"/>
+              </a:rPr>
+              <a:t>进行中文分词</a:t>
+            </a:r>
+            <a:r>
+              <a:rPr lang="en-US" altLang="zh-CN" dirty="0" smtClean="0">
+                <a:latin typeface="微软雅黑" panose="020B0503020204020204" pitchFamily="34" charset="-122"/>
+                <a:ea typeface="微软雅黑" panose="020B0503020204020204" pitchFamily="34" charset="-122"/>
+                <a:cs typeface="微软雅黑" panose="020B0503020204020204" pitchFamily="34" charset="-122"/>
+              </a:rPr>
+              <a:t>
+</a:t>
+            </a:r>
+            <a:r>
+              <a:rPr lang="zh-CN" altLang="en-US" dirty="0" smtClean="0">
+                <a:latin typeface="微软雅黑" panose="020B0503020204020204" pitchFamily="34" charset="-122"/>
+                <a:ea typeface="微软雅黑" panose="020B0503020204020204" pitchFamily="34" charset="-122"/>
+                <a:cs typeface="微软雅黑" panose="020B0503020204020204" pitchFamily="34" charset="-122"/>
+              </a:rPr>
+              <a:t>执行该脚本：</a:t>
+            </a:r>
+            <a:r>
+              <a:rPr lang="en-US" altLang="zh-CN" dirty="0" smtClean="0">
+                <a:latin typeface="微软雅黑" panose="020B0503020204020204" pitchFamily="34" charset="-122"/>
+                <a:ea typeface="微软雅黑" panose="020B0503020204020204" pitchFamily="34" charset="-122"/>
+                <a:cs typeface="微软雅黑" panose="020B0503020204020204" pitchFamily="34" charset="-122"/>
+              </a:rPr>
+              <a:t>
+</a:t>
+            </a:r>
+            <a:r>
+              <a:rPr lang="zh-CN" altLang="en-US" dirty="0" smtClean="0">
+                <a:latin typeface="微软雅黑" panose="020B0503020204020204" pitchFamily="34" charset="-122"/>
+                <a:ea typeface="微软雅黑" panose="020B0503020204020204" pitchFamily="34" charset="-122"/>
+                <a:cs typeface="微软雅黑" panose="020B0503020204020204" pitchFamily="34" charset="-122"/>
+              </a:rPr>
+              <a:t>得到如图</a:t>
+            </a:r>
+            <a:r>
+              <a:rPr lang="en-US" altLang="zh-CN" dirty="0" smtClean="0">
+                <a:latin typeface="微软雅黑" panose="020B0503020204020204" pitchFamily="34" charset="-122"/>
+                <a:ea typeface="微软雅黑" panose="020B0503020204020204" pitchFamily="34" charset="-122"/>
+                <a:cs typeface="微软雅黑" panose="020B0503020204020204" pitchFamily="34" charset="-122"/>
+              </a:rPr>
+              <a:t> 1-3-5</a:t>
+            </a:r>
+            <a:r>
+              <a:rPr lang="zh-CN" altLang="en-US" dirty="0" smtClean="0">
+                <a:latin typeface="微软雅黑" panose="020B0503020204020204" pitchFamily="34" charset="-122"/>
+                <a:ea typeface="微软雅黑" panose="020B0503020204020204" pitchFamily="34" charset="-122"/>
+                <a:cs typeface="微软雅黑" panose="020B0503020204020204" pitchFamily="34" charset="-122"/>
+              </a:rPr>
+              <a:t>分词结果：</a:t>
+            </a:r>
+            <a:r>
+              <a:rPr lang="en-US" altLang="zh-CN" dirty="0" smtClean="0">
+                <a:latin typeface="微软雅黑" panose="020B0503020204020204" pitchFamily="34" charset="-122"/>
+                <a:ea typeface="微软雅黑" panose="020B0503020204020204" pitchFamily="34" charset="-122"/>
+                <a:cs typeface="微软雅黑" panose="020B0503020204020204" pitchFamily="34" charset="-122"/>
+              </a:rPr>
+              <a:t>
+</a:t>
+            </a:r>
+            <a:r>
+              <a:rPr lang="zh-CN" altLang="en-US" dirty="0" smtClean="0">
+                <a:latin typeface="微软雅黑" panose="020B0503020204020204" pitchFamily="34" charset="-122"/>
+                <a:ea typeface="微软雅黑" panose="020B0503020204020204" pitchFamily="34" charset="-122"/>
+                <a:cs typeface="微软雅黑" panose="020B0503020204020204" pitchFamily="34" charset="-122"/>
+              </a:rPr>
+              <a:t>图</a:t>
+            </a:r>
+            <a:r>
+              <a:rPr lang="en-US" altLang="zh-CN" dirty="0" smtClean="0">
+                <a:latin typeface="微软雅黑" panose="020B0503020204020204" pitchFamily="34" charset="-122"/>
+                <a:ea typeface="微软雅黑" panose="020B0503020204020204" pitchFamily="34" charset="-122"/>
+                <a:cs typeface="微软雅黑" panose="020B0503020204020204" pitchFamily="34" charset="-122"/>
+              </a:rPr>
+              <a:t> 1-3-5 Qwen tokenizer</a:t>
+            </a:r>
+            <a:r>
+              <a:rPr lang="zh-CN" altLang="en-US" dirty="0" smtClean="0">
+                <a:latin typeface="微软雅黑" panose="020B0503020204020204" pitchFamily="34" charset="-122"/>
+                <a:ea typeface="微软雅黑" panose="020B0503020204020204" pitchFamily="34" charset="-122"/>
+                <a:cs typeface="微软雅黑" panose="020B0503020204020204" pitchFamily="34" charset="-122"/>
+              </a:rPr>
+              <a:t>分词结果</a:t>
+            </a:r>
+            <a:r>
+              <a:rPr lang="en-US" altLang="zh-CN" dirty="0" smtClean="0">
+                <a:latin typeface="微软雅黑" panose="020B0503020204020204" pitchFamily="34" charset="-122"/>
+                <a:ea typeface="微软雅黑" panose="020B0503020204020204" pitchFamily="34" charset="-122"/>
+                <a:cs typeface="微软雅黑" panose="020B0503020204020204" pitchFamily="34" charset="-122"/>
+              </a:rPr>
+              <a:t>
+</a:t>
+            </a:r>
+            <a:r>
+              <a:rPr lang="zh-CN" altLang="en-US" dirty="0" smtClean="0">
+                <a:latin typeface="微软雅黑" panose="020B0503020204020204" pitchFamily="34" charset="-122"/>
+                <a:ea typeface="微软雅黑" panose="020B0503020204020204" pitchFamily="34" charset="-122"/>
+                <a:cs typeface="微软雅黑" panose="020B0503020204020204" pitchFamily="34" charset="-122"/>
+              </a:rPr>
+              <a:t>可以看出</a:t>
+            </a:r>
+            <a:r>
+              <a:rPr lang="en-US" altLang="zh-CN" dirty="0" smtClean="0">
+                <a:latin typeface="微软雅黑" panose="020B0503020204020204" pitchFamily="34" charset="-122"/>
+                <a:ea typeface="微软雅黑" panose="020B0503020204020204" pitchFamily="34" charset="-122"/>
+                <a:cs typeface="微软雅黑" panose="020B0503020204020204" pitchFamily="34" charset="-122"/>
+              </a:rPr>
+              <a:t>Qwen</a:t>
+            </a:r>
+            <a:r>
+              <a:rPr lang="zh-CN" altLang="en-US" dirty="0" smtClean="0">
+                <a:latin typeface="微软雅黑" panose="020B0503020204020204" pitchFamily="34" charset="-122"/>
+                <a:ea typeface="微软雅黑" panose="020B0503020204020204" pitchFamily="34" charset="-122"/>
+                <a:cs typeface="微软雅黑" panose="020B0503020204020204" pitchFamily="34" charset="-122"/>
+              </a:rPr>
+              <a:t>分词器得到的分词结果，能够较好的将</a:t>
+            </a:r>
+            <a:r>
+              <a:rPr lang="en-US" altLang="zh-CN" dirty="0" smtClean="0">
+                <a:latin typeface="微软雅黑" panose="020B0503020204020204" pitchFamily="34" charset="-122"/>
+                <a:ea typeface="微软雅黑" panose="020B0503020204020204" pitchFamily="34" charset="-122"/>
+                <a:cs typeface="微软雅黑" panose="020B0503020204020204" pitchFamily="34" charset="-122"/>
+              </a:rPr>
+              <a:t>“</a:t>
+            </a:r>
+            <a:r>
+              <a:rPr lang="zh-CN" altLang="en-US" dirty="0" smtClean="0">
+                <a:latin typeface="微软雅黑" panose="020B0503020204020204" pitchFamily="34" charset="-122"/>
+                <a:ea typeface="微软雅黑" panose="020B0503020204020204" pitchFamily="34" charset="-122"/>
+                <a:cs typeface="微软雅黑" panose="020B0503020204020204" pitchFamily="34" charset="-122"/>
+              </a:rPr>
+              <a:t>人工智能</a:t>
+            </a:r>
+            <a:r>
+              <a:rPr lang="en-US" altLang="zh-CN" dirty="0" smtClean="0">
+                <a:latin typeface="微软雅黑" panose="020B0503020204020204" pitchFamily="34" charset="-122"/>
+                <a:ea typeface="微软雅黑" panose="020B0503020204020204" pitchFamily="34" charset="-122"/>
+                <a:cs typeface="微软雅黑" panose="020B0503020204020204" pitchFamily="34" charset="-122"/>
+              </a:rPr>
+              <a:t>”</a:t>
+            </a:r>
+            <a:r>
+              <a:rPr lang="zh-CN" altLang="en-US" dirty="0" smtClean="0">
+                <a:latin typeface="微软雅黑" panose="020B0503020204020204" pitchFamily="34" charset="-122"/>
+                <a:ea typeface="微软雅黑" panose="020B0503020204020204" pitchFamily="34" charset="-122"/>
+                <a:cs typeface="微软雅黑" panose="020B0503020204020204" pitchFamily="34" charset="-122"/>
+              </a:rPr>
+              <a:t>等特定名词</a:t>
+            </a:r>
+            <a:endParaRPr lang="zh-CN" altLang="en-US" dirty="0" smtClean="0">
+              <a:latin typeface="微软雅黑" panose="020B0503020204020204" pitchFamily="34" charset="-122"/>
+              <a:ea typeface="微软雅黑" panose="020B0503020204020204" pitchFamily="34" charset="-122"/>
+              <a:cs typeface="微软雅黑" panose="020B0503020204020204" pitchFamily="34" charset="-122"/>
+            </a:endParaRPr>
+          </a:p>
+        </p:txBody>
+      </p:sp>
+      <p:sp>
+        <p:nvSpPr>
+          <p:cNvPr id="6" name="矩形 5"/>
           <p:cNvSpPr/>
-          <p:nvPr>
-            <p:custDataLst>
-              <p:tags r:id="rId14"/>
-            </p:custDataLst>
-          </p:nvPr>
-        </p:nvSpPr>
-        <p:spPr>
-          <a:xfrm rot="2700000">
-            <a:off x="9920605" y="2696210"/>
-            <a:ext cx="1068070" cy="1068070"/>
-          </a:xfrm>
-          <a:prstGeom prst="roundRect">
-            <a:avLst>
-              <a:gd name="adj" fmla="val 6319"/>
-            </a:avLst>
+          <p:nvPr/>
+        </p:nvSpPr>
+        <p:spPr>
+          <a:xfrm>
+            <a:off x="5797550" y="1776888"/>
+            <a:ext cx="5911850" cy="4630261"/>
+          </a:xfrm>
+          <a:prstGeom prst="rect">
+            <a:avLst/>
           </a:prstGeom>
-          <a:solidFill>
-            <a:schemeClr val="tx1">
-              <a:lumMod val="65000"/>
-              <a:lumOff val="35000"/>
-            </a:schemeClr>
-          </a:solidFill>
-          <a:ln>
-            <a:solidFill>
-              <a:schemeClr val="accent1"/>
-            </a:solidFill>
-          </a:ln>
+          <a:noFill/>
         </p:spPr>
         <p:style>
           <a:lnRef idx="2">
@@ -8083,7 +10061,124 @@
           <a:bodyPr rtlCol="0" anchor="ctr"/>
           <a:lstStyle/>
           <a:p>
-            <a:pPr marL="0" marR="0" lvl="0" indent="0" algn="ctr" defTabSz="914400" rtl="0" eaLnBrk="1" fontAlgn="auto" latinLnBrk="0" hangingPunct="1">
+            <a:pPr algn="ctr"/>
+            <a:r>
+              <a:rPr lang="zh-CN" altLang="en-US" dirty="0" smtClean="0">
+                <a:solidFill>
+                  <a:schemeClr val="tx1"/>
+                </a:solidFill>
+              </a:rPr>
+              <a:t>教材对步骤图片</a:t>
+            </a:r>
+            <a:endParaRPr lang="zh-CN" altLang="en-US" dirty="0">
+              <a:solidFill>
+                <a:schemeClr val="tx1"/>
+              </a:solidFill>
+            </a:endParaRPr>
+          </a:p>
+        </p:txBody>
+      </p:sp>
+      <p:sp>
+        <p:nvSpPr>
+          <p:cNvPr id="4" name="文本框 3"/>
+          <p:cNvSpPr txBox="1"/>
+          <p:nvPr/>
+        </p:nvSpPr>
+        <p:spPr>
+          <a:xfrm>
+            <a:off x="0" y="793750"/>
+            <a:ext cx="1351262" cy="583565"/>
+          </a:xfrm>
+          <a:prstGeom prst="rect">
+            <a:avLst/>
+          </a:prstGeom>
+          <a:noFill/>
+        </p:spPr>
+        <p:txBody>
+          <a:bodyPr wrap="square" rtlCol="0">
+            <a:spAutoFit/>
+            <a:scene3d>
+              <a:camera prst="orthographicFront"/>
+              <a:lightRig rig="threePt" dir="t"/>
+            </a:scene3d>
+            <a:sp3d contourW="12700"/>
+          </a:bodyPr>
+          <a:lstStyle/>
+          <a:p>
+            <a:pPr algn="ctr"/>
+            <a:r>
+              <a:rPr lang="en-US" sz="3200" dirty="0" smtClean="0">
+                <a:solidFill>
+                  <a:srgbClr val="3F396C"/>
+                </a:solidFill>
+                <a:latin typeface="思源宋体" panose="02020700000000000000" charset="-122"/>
+                <a:ea typeface="思源宋体" panose="02020700000000000000" charset="-122"/>
+              </a:rPr>
+              <a:t>04</a:t>
+            </a:r>
+            <a:endParaRPr lang="en-US" sz="3200" dirty="0" smtClean="0">
+              <a:solidFill>
+                <a:srgbClr val="3F396C"/>
+              </a:solidFill>
+              <a:latin typeface="思源宋体" panose="02020700000000000000" charset="-122"/>
+              <a:ea typeface="思源宋体" panose="02020700000000000000" charset="-122"/>
+            </a:endParaRPr>
+          </a:p>
+        </p:txBody>
+      </p:sp>
+      <p:sp>
+        <p:nvSpPr>
+          <p:cNvPr id="17" name="文本框 16"/>
+          <p:cNvSpPr txBox="1"/>
+          <p:nvPr/>
+        </p:nvSpPr>
+        <p:spPr>
+          <a:xfrm>
+            <a:off x="1278000" y="792000"/>
+            <a:ext cx="3932555" cy="583565"/>
+          </a:xfrm>
+          <a:prstGeom prst="rect">
+            <a:avLst/>
+          </a:prstGeom>
+          <a:noFill/>
+        </p:spPr>
+        <p:txBody>
+          <a:bodyPr wrap="square" rtlCol="0">
+            <a:spAutoFit/>
+            <a:scene3d>
+              <a:camera prst="orthographicFront"/>
+              <a:lightRig rig="threePt" dir="t"/>
+            </a:scene3d>
+            <a:sp3d contourW="12700"/>
+          </a:bodyPr>
+          <a:lstStyle>
+            <a:defPPr>
+              <a:defRPr lang="en-US"/>
+            </a:defPPr>
+            <a:lvl1pPr algn="ctr">
+              <a:defRPr sz="3200">
+                <a:gradFill>
+                  <a:gsLst>
+                    <a:gs pos="0">
+                      <a:schemeClr val="tx1">
+                        <a:lumMod val="50000"/>
+                        <a:lumOff val="50000"/>
+                      </a:schemeClr>
+                    </a:gs>
+                    <a:gs pos="100000">
+                      <a:schemeClr val="tx1">
+                        <a:lumMod val="85000"/>
+                        <a:lumOff val="15000"/>
+                      </a:schemeClr>
+                    </a:gs>
+                  </a:gsLst>
+                  <a:lin ang="5400000" scaled="1"/>
+                </a:gradFill>
+              </a:defRPr>
+            </a:lvl1pPr>
+          </a:lstStyle>
+          <a:p>
+            <a:pPr marL="0" marR="0" lvl="0" indent="0" algn="l" defTabSz="914400" rtl="0" eaLnBrk="1" fontAlgn="auto" latinLnBrk="0" hangingPunct="1">
               <a:lnSpc>
                 <a:spcPct val="100000"/>
               </a:lnSpc>
@@ -8099,37 +10194,83 @@
               <a:buNone/>
               <a:defRPr/>
             </a:pPr>
-            <a:endParaRPr kumimoji="0" lang="zh-CN" altLang="en-US" sz="1800" b="0" i="0" u="none" strike="noStrike" kern="1200" cap="none" spc="0" normalizeH="0" baseline="0" noProof="0" dirty="0">
-              <a:ln>
-                <a:noFill/>
-              </a:ln>
+            <a:r>
+              <a:rPr lang="zh-CN" altLang="en-US" b="1" dirty="0">
+                <a:solidFill>
+                  <a:schemeClr val="accent1">
+                    <a:lumMod val="75000"/>
+                  </a:schemeClr>
+                </a:solidFill>
+                <a:latin typeface="微软雅黑" panose="020B0503020204020204" pitchFamily="34" charset="-122"/>
+                <a:ea typeface="微软雅黑" panose="020B0503020204020204" pitchFamily="34" charset="-122"/>
+                <a:cs typeface="微软雅黑" panose="020B0503020204020204" pitchFamily="34" charset="-122"/>
+                <a:sym typeface="+mn-lt"/>
+              </a:rPr>
+              <a:t>任务</a:t>
+            </a:r>
+            <a:r>
+              <a:rPr lang="zh-CN" altLang="en-US" b="1" dirty="0">
+                <a:solidFill>
+                  <a:schemeClr val="accent1">
+                    <a:lumMod val="75000"/>
+                  </a:schemeClr>
+                </a:solidFill>
+                <a:latin typeface="微软雅黑" panose="020B0503020204020204" pitchFamily="34" charset="-122"/>
+                <a:ea typeface="微软雅黑" panose="020B0503020204020204" pitchFamily="34" charset="-122"/>
+                <a:cs typeface="微软雅黑" panose="020B0503020204020204" pitchFamily="34" charset="-122"/>
+                <a:sym typeface="+mn-lt"/>
+              </a:rPr>
+              <a:t>实施</a:t>
+            </a:r>
+            <a:endParaRPr lang="zh-CN" altLang="en-US" b="1" dirty="0">
               <a:solidFill>
-                <a:prstClr val="white"/>
+                <a:schemeClr val="accent1">
+                  <a:lumMod val="75000"/>
+                </a:schemeClr>
               </a:solidFill>
-              <a:effectLst/>
-              <a:uLnTx/>
-              <a:uFillTx/>
-              <a:latin typeface="等线" panose="02010600030101010101" charset="-122"/>
+              <a:latin typeface="微软雅黑" panose="020B0503020204020204" pitchFamily="34" charset="-122"/>
               <a:ea typeface="微软雅黑" panose="020B0503020204020204" pitchFamily="34" charset="-122"/>
-              <a:cs typeface="+mn-cs"/>
+              <a:cs typeface="微软雅黑" panose="020B0503020204020204" pitchFamily="34" charset="-122"/>
+              <a:sym typeface="+mn-lt"/>
             </a:endParaRPr>
           </a:p>
         </p:txBody>
       </p:sp>
-      <p:sp>
-        <p:nvSpPr>
-          <p:cNvPr id="9" name="文本框 8"/>
+    </p:spTree>
+  </p:cSld>
+  <p:clrMapOvr>
+    <a:masterClrMapping/>
+  </p:clrMapOvr>
+</p:sld>
+</file>
+
+<file path=ppt/slides/slide14.xml><?xml version="1.0" encoding="utf-8"?>
+<p:sld xmlns:a="http://schemas.openxmlformats.org/drawingml/2006/main" xmlns:r="http://schemas.openxmlformats.org/officeDocument/2006/relationships" xmlns:p="http://schemas.openxmlformats.org/presentationml/2006/main">
+  <p:cSld>
+    <p:spTree>
+      <p:nvGrpSpPr>
+        <p:cNvPr id="1" name=""/>
+        <p:cNvGrpSpPr/>
+        <p:nvPr/>
+      </p:nvGrpSpPr>
+      <p:grpSpPr>
+        <a:xfrm>
+          <a:off x="0" y="0"/>
+          <a:ext cx="0" cy="0"/>
+          <a:chOff x="0" y="0"/>
+          <a:chExt cx="0" cy="0"/>
+        </a:xfrm>
+      </p:grpSpPr>
+      <p:sp>
+        <p:nvSpPr>
+          <p:cNvPr id="3" name="文本框 2"/>
           <p:cNvSpPr txBox="1"/>
-          <p:nvPr>
-            <p:custDataLst>
-              <p:tags r:id="rId15"/>
-            </p:custDataLst>
-          </p:nvPr>
-        </p:nvSpPr>
-        <p:spPr>
-          <a:xfrm>
-            <a:off x="7457339" y="2762250"/>
-            <a:ext cx="682625" cy="1014730"/>
+          <p:nvPr/>
+        </p:nvSpPr>
+        <p:spPr>
+          <a:xfrm>
+            <a:off x="1175385" y="1377315"/>
+            <a:ext cx="9841230" cy="2282190"/>
           </a:xfrm>
           <a:prstGeom prst="rect">
             <a:avLst/>
@@ -8137,91 +10278,282 @@
           <a:noFill/>
         </p:spPr>
         <p:txBody>
-          <a:bodyPr wrap="square" rtlCol="0">
-            <a:spAutoFit/>
+          <a:bodyPr wrap="square" rtlCol="0" anchor="t">
+            <a:noAutofit/>
           </a:bodyPr>
           <a:lstStyle/>
           <a:p>
-            <a:r>
-              <a:rPr lang="en-US" altLang="zh-CN" sz="6000" b="1" dirty="0">
-                <a:solidFill>
-                  <a:schemeClr val="bg1"/>
-                </a:solidFill>
-                <a:latin typeface="+mj-ea"/>
-                <a:ea typeface="+mj-ea"/>
-              </a:rPr>
-              <a:t>3</a:t>
-            </a:r>
-            <a:endParaRPr lang="en-US" altLang="zh-CN" sz="6000" b="1" dirty="0">
-              <a:solidFill>
-                <a:schemeClr val="bg1"/>
-              </a:solidFill>
-              <a:latin typeface="+mj-ea"/>
-              <a:ea typeface="+mj-ea"/>
+            <a:pPr indent="457200" fontAlgn="auto">
+              <a:lnSpc>
+                <a:spcPct val="150000"/>
+              </a:lnSpc>
+            </a:pPr>
+            <a:r>
+              <a:rPr lang="zh-CN" dirty="0" smtClean="0">
+                <a:latin typeface="微软雅黑" panose="020B0503020204020204" pitchFamily="34" charset="-122"/>
+                <a:ea typeface="微软雅黑" panose="020B0503020204020204" pitchFamily="34" charset="-122"/>
+                <a:cs typeface="微软雅黑" panose="020B0503020204020204" pitchFamily="34" charset="-122"/>
+              </a:rPr>
+              <a:t>分为一个词汇，保持较好的切分粒度与分词结果。</a:t>
+            </a:r>
+            <a:endParaRPr lang="zh-CN" dirty="0" smtClean="0">
+              <a:latin typeface="微软雅黑" panose="020B0503020204020204" pitchFamily="34" charset="-122"/>
+              <a:ea typeface="微软雅黑" panose="020B0503020204020204" pitchFamily="34" charset="-122"/>
+              <a:cs typeface="微软雅黑" panose="020B0503020204020204" pitchFamily="34" charset="-122"/>
             </a:endParaRPr>
           </a:p>
         </p:txBody>
       </p:sp>
       <p:sp>
         <p:nvSpPr>
-          <p:cNvPr id="16" name="文本框 15"/>
-          <p:cNvSpPr txBox="1"/>
-          <p:nvPr>
-            <p:custDataLst>
-              <p:tags r:id="rId16"/>
-            </p:custDataLst>
-          </p:nvPr>
-        </p:nvSpPr>
-        <p:spPr>
-          <a:xfrm>
-            <a:off x="10102114" y="2696845"/>
-            <a:ext cx="682625" cy="1014730"/>
+          <p:cNvPr id="6" name="矩形 5"/>
+          <p:cNvSpPr/>
+          <p:nvPr/>
+        </p:nvSpPr>
+        <p:spPr>
+          <a:xfrm>
+            <a:off x="1954896" y="3657124"/>
+            <a:ext cx="8211454" cy="2991484"/>
           </a:xfrm>
           <a:prstGeom prst="rect">
             <a:avLst/>
           </a:prstGeom>
           <a:noFill/>
         </p:spPr>
+        <p:style>
+          <a:lnRef idx="2">
+            <a:schemeClr val="accent1">
+              <a:shade val="50000"/>
+            </a:schemeClr>
+          </a:lnRef>
+          <a:fillRef idx="1">
+            <a:schemeClr val="accent1"/>
+          </a:fillRef>
+          <a:effectRef idx="0">
+            <a:schemeClr val="accent1"/>
+          </a:effectRef>
+          <a:fontRef idx="minor">
+            <a:schemeClr val="lt1"/>
+          </a:fontRef>
+        </p:style>
+        <p:txBody>
+          <a:bodyPr rtlCol="0" anchor="ctr"/>
+          <a:lstStyle/>
+          <a:p>
+            <a:pPr algn="ctr"/>
+            <a:r>
+              <a:rPr lang="zh-CN" altLang="en-US" dirty="0">
+                <a:solidFill>
+                  <a:schemeClr val="tx1"/>
+                </a:solidFill>
+              </a:rPr>
+              <a:t>教材对步骤图片</a:t>
+            </a:r>
+            <a:endParaRPr lang="zh-CN" altLang="en-US" dirty="0">
+              <a:solidFill>
+                <a:schemeClr val="tx1"/>
+              </a:solidFill>
+            </a:endParaRPr>
+          </a:p>
+        </p:txBody>
+      </p:sp>
+      <p:sp>
+        <p:nvSpPr>
+          <p:cNvPr id="2" name="文本框 1"/>
+          <p:cNvSpPr txBox="1"/>
+          <p:nvPr/>
+        </p:nvSpPr>
+        <p:spPr>
+          <a:xfrm>
+            <a:off x="0" y="793750"/>
+            <a:ext cx="1351262" cy="583565"/>
+          </a:xfrm>
+          <a:prstGeom prst="rect">
+            <a:avLst/>
+          </a:prstGeom>
+          <a:noFill/>
+        </p:spPr>
         <p:txBody>
           <a:bodyPr wrap="square" rtlCol="0">
             <a:spAutoFit/>
+            <a:scene3d>
+              <a:camera prst="orthographicFront"/>
+              <a:lightRig rig="threePt" dir="t"/>
+            </a:scene3d>
+            <a:sp3d contourW="12700"/>
           </a:bodyPr>
           <a:lstStyle/>
           <a:p>
-            <a:r>
-              <a:rPr lang="en-US" altLang="zh-CN" sz="6000" b="1">
+            <a:pPr algn="ctr"/>
+            <a:r>
+              <a:rPr lang="en-US" sz="3200" dirty="0" smtClean="0">
                 <a:solidFill>
-                  <a:schemeClr val="bg1"/>
+                  <a:srgbClr val="3F396C"/>
                 </a:solidFill>
-                <a:latin typeface="+mj-ea"/>
-                <a:ea typeface="+mj-ea"/>
-              </a:rPr>
-              <a:t>4</a:t>
-            </a:r>
-            <a:endParaRPr lang="en-US" altLang="zh-CN" sz="6000" b="1">
+                <a:latin typeface="思源宋体" panose="02020700000000000000" charset="-122"/>
+                <a:ea typeface="思源宋体" panose="02020700000000000000" charset="-122"/>
+              </a:rPr>
+              <a:t>04</a:t>
+            </a:r>
+            <a:endParaRPr lang="en-US" sz="3200" dirty="0" smtClean="0">
               <a:solidFill>
-                <a:schemeClr val="bg1"/>
+                <a:srgbClr val="3F396C"/>
               </a:solidFill>
-              <a:latin typeface="+mj-ea"/>
-              <a:ea typeface="+mj-ea"/>
+              <a:latin typeface="思源宋体" panose="02020700000000000000" charset="-122"/>
+              <a:ea typeface="思源宋体" panose="02020700000000000000" charset="-122"/>
             </a:endParaRPr>
           </a:p>
         </p:txBody>
       </p:sp>
       <p:sp>
         <p:nvSpPr>
-          <p:cNvPr id="20" name="任意多边形 42"/>
+          <p:cNvPr id="17" name="文本框 16"/>
+          <p:cNvSpPr txBox="1"/>
+          <p:nvPr/>
+        </p:nvSpPr>
+        <p:spPr>
+          <a:xfrm>
+            <a:off x="1278000" y="792000"/>
+            <a:ext cx="3932555" cy="583565"/>
+          </a:xfrm>
+          <a:prstGeom prst="rect">
+            <a:avLst/>
+          </a:prstGeom>
+          <a:noFill/>
+        </p:spPr>
+        <p:txBody>
+          <a:bodyPr wrap="square" rtlCol="0">
+            <a:spAutoFit/>
+            <a:scene3d>
+              <a:camera prst="orthographicFront"/>
+              <a:lightRig rig="threePt" dir="t"/>
+            </a:scene3d>
+            <a:sp3d contourW="12700"/>
+          </a:bodyPr>
+          <a:lstStyle>
+            <a:defPPr>
+              <a:defRPr lang="en-US"/>
+            </a:defPPr>
+            <a:lvl1pPr algn="ctr">
+              <a:defRPr sz="3200">
+                <a:gradFill>
+                  <a:gsLst>
+                    <a:gs pos="0">
+                      <a:schemeClr val="tx1">
+                        <a:lumMod val="50000"/>
+                        <a:lumOff val="50000"/>
+                      </a:schemeClr>
+                    </a:gs>
+                    <a:gs pos="100000">
+                      <a:schemeClr val="tx1">
+                        <a:lumMod val="85000"/>
+                        <a:lumOff val="15000"/>
+                      </a:schemeClr>
+                    </a:gs>
+                  </a:gsLst>
+                  <a:lin ang="5400000" scaled="1"/>
+                </a:gradFill>
+              </a:defRPr>
+            </a:lvl1pPr>
+          </a:lstStyle>
+          <a:p>
+            <a:pPr marL="0" marR="0" lvl="0" indent="0" algn="l" defTabSz="914400" rtl="0" eaLnBrk="1" fontAlgn="auto" latinLnBrk="0" hangingPunct="1">
+              <a:lnSpc>
+                <a:spcPct val="100000"/>
+              </a:lnSpc>
+              <a:spcBef>
+                <a:spcPts val="0"/>
+              </a:spcBef>
+              <a:spcAft>
+                <a:spcPts val="0"/>
+              </a:spcAft>
+              <a:buClrTx/>
+              <a:buSzTx/>
+              <a:buFontTx/>
+              <a:buNone/>
+              <a:defRPr/>
+            </a:pPr>
+            <a:r>
+              <a:rPr lang="zh-CN" altLang="en-US" b="1" dirty="0">
+                <a:solidFill>
+                  <a:schemeClr val="accent1">
+                    <a:lumMod val="75000"/>
+                  </a:schemeClr>
+                </a:solidFill>
+                <a:latin typeface="微软雅黑" panose="020B0503020204020204" pitchFamily="34" charset="-122"/>
+                <a:ea typeface="微软雅黑" panose="020B0503020204020204" pitchFamily="34" charset="-122"/>
+                <a:cs typeface="微软雅黑" panose="020B0503020204020204" pitchFamily="34" charset="-122"/>
+                <a:sym typeface="+mn-lt"/>
+              </a:rPr>
+              <a:t>任务</a:t>
+            </a:r>
+            <a:r>
+              <a:rPr lang="zh-CN" altLang="en-US" b="1" dirty="0">
+                <a:solidFill>
+                  <a:schemeClr val="accent1">
+                    <a:lumMod val="75000"/>
+                  </a:schemeClr>
+                </a:solidFill>
+                <a:latin typeface="微软雅黑" panose="020B0503020204020204" pitchFamily="34" charset="-122"/>
+                <a:ea typeface="微软雅黑" panose="020B0503020204020204" pitchFamily="34" charset="-122"/>
+                <a:cs typeface="微软雅黑" panose="020B0503020204020204" pitchFamily="34" charset="-122"/>
+                <a:sym typeface="+mn-lt"/>
+              </a:rPr>
+              <a:t>实施</a:t>
+            </a:r>
+            <a:endParaRPr lang="zh-CN" altLang="en-US" b="1" dirty="0">
+              <a:solidFill>
+                <a:schemeClr val="accent1">
+                  <a:lumMod val="75000"/>
+                </a:schemeClr>
+              </a:solidFill>
+              <a:latin typeface="微软雅黑" panose="020B0503020204020204" pitchFamily="34" charset="-122"/>
+              <a:ea typeface="微软雅黑" panose="020B0503020204020204" pitchFamily="34" charset="-122"/>
+              <a:cs typeface="微软雅黑" panose="020B0503020204020204" pitchFamily="34" charset="-122"/>
+              <a:sym typeface="+mn-lt"/>
+            </a:endParaRPr>
+          </a:p>
+        </p:txBody>
+      </p:sp>
+    </p:spTree>
+  </p:cSld>
+  <p:clrMapOvr>
+    <a:masterClrMapping/>
+  </p:clrMapOvr>
+</p:sld>
+</file>
+
+<file path=ppt/slides/slide15.xml><?xml version="1.0" encoding="utf-8"?>
+<p:sld xmlns:a="http://schemas.openxmlformats.org/drawingml/2006/main" xmlns:r="http://schemas.openxmlformats.org/officeDocument/2006/relationships" xmlns:p="http://schemas.openxmlformats.org/presentationml/2006/main">
+  <p:cSld>
+    <p:spTree>
+      <p:nvGrpSpPr>
+        <p:cNvPr id="1" name=""/>
+        <p:cNvGrpSpPr/>
+        <p:nvPr/>
+      </p:nvGrpSpPr>
+      <p:grpSpPr>
+        <a:xfrm>
+          <a:off x="0" y="0"/>
+          <a:ext cx="0" cy="0"/>
+          <a:chOff x="0" y="0"/>
+          <a:chExt cx="0" cy="0"/>
+        </a:xfrm>
+      </p:grpSpPr>
+      <p:sp>
+        <p:nvSpPr>
+          <p:cNvPr id="21" name="任意多边形 44"/>
           <p:cNvSpPr/>
           <p:nvPr>
             <p:custDataLst>
-              <p:tags r:id="rId17"/>
+              <p:tags r:id="rId1"/>
             </p:custDataLst>
           </p:nvPr>
         </p:nvSpPr>
         <p:spPr>
-          <a:xfrm>
-            <a:off x="7089614" y="2000885"/>
-            <a:ext cx="1484791" cy="864942"/>
+          <a:xfrm flipV="1">
+            <a:off x="7538194" y="4134567"/>
+            <a:ext cx="1941223" cy="1149108"/>
           </a:xfrm>
           <a:custGeom>
             <a:avLst/>
@@ -8323,3414 +10655,31 @@
           </a:p>
         </p:txBody>
       </p:sp>
-      <p:sp>
-        <p:nvSpPr>
-          <p:cNvPr id="23" name="任意多边形 44"/>
-          <p:cNvSpPr/>
-          <p:nvPr>
-            <p:custDataLst>
-              <p:tags r:id="rId18"/>
-            </p:custDataLst>
-          </p:nvPr>
-        </p:nvSpPr>
-        <p:spPr>
-          <a:xfrm flipV="1">
-            <a:off x="9700260" y="3601085"/>
-            <a:ext cx="1842770" cy="1015365"/>
-          </a:xfrm>
-          <a:custGeom>
-            <a:avLst/>
-            <a:gdLst>
-              <a:gd name="connsiteX0" fmla="*/ 0 w 1940313"/>
-              <a:gd name="connsiteY0" fmla="*/ 791737 h 1148576"/>
-              <a:gd name="connsiteX1" fmla="*/ 791737 w 1940313"/>
-              <a:gd name="connsiteY1" fmla="*/ 0 h 1148576"/>
-              <a:gd name="connsiteX2" fmla="*/ 1940313 w 1940313"/>
-              <a:gd name="connsiteY2" fmla="*/ 1148576 h 1148576"/>
-            </a:gdLst>
-            <a:ahLst/>
-            <a:cxnLst>
-              <a:cxn ang="0">
-                <a:pos x="connsiteX0" y="connsiteY0"/>
-              </a:cxn>
-              <a:cxn ang="0">
-                <a:pos x="connsiteX1" y="connsiteY1"/>
-              </a:cxn>
-              <a:cxn ang="0">
-                <a:pos x="connsiteX2" y="connsiteY2"/>
-              </a:cxn>
-            </a:cxnLst>
-            <a:rect l="l" t="t" r="r" b="b"/>
-            <a:pathLst>
-              <a:path w="1940313" h="1148576">
-                <a:moveTo>
-                  <a:pt x="0" y="791737"/>
-                </a:moveTo>
-                <a:lnTo>
-                  <a:pt x="791737" y="0"/>
-                </a:lnTo>
-                <a:lnTo>
-                  <a:pt x="1940313" y="1148576"/>
-                </a:lnTo>
-              </a:path>
-            </a:pathLst>
-          </a:custGeom>
-          <a:noFill/>
-          <a:ln w="12700">
-            <a:solidFill>
-              <a:srgbClr val="8A8B8F"/>
-            </a:solidFill>
-            <a:prstDash val="dash"/>
-            <a:headEnd type="oval" w="med" len="med"/>
-            <a:tailEnd type="triangle" w="med" len="med"/>
-          </a:ln>
-        </p:spPr>
-        <p:style>
-          <a:lnRef idx="2">
-            <a:schemeClr val="accent1">
-              <a:shade val="50000"/>
-            </a:schemeClr>
-          </a:lnRef>
-          <a:fillRef idx="1">
-            <a:schemeClr val="accent1"/>
-          </a:fillRef>
-          <a:effectRef idx="0">
-            <a:schemeClr val="accent1"/>
-          </a:effectRef>
-          <a:fontRef idx="minor">
-            <a:schemeClr val="lt1"/>
-          </a:fontRef>
-        </p:style>
-        <p:txBody>
-          <a:bodyPr rtlCol="0" anchor="ctr"/>
-          <a:lstStyle/>
-          <a:p>
-            <a:pPr marL="0" marR="0" lvl="0" indent="0" algn="ctr" defTabSz="914400" rtl="0" eaLnBrk="1" fontAlgn="auto" latinLnBrk="0" hangingPunct="1">
-              <a:lnSpc>
-                <a:spcPct val="100000"/>
-              </a:lnSpc>
-              <a:spcBef>
-                <a:spcPts val="0"/>
-              </a:spcBef>
-              <a:spcAft>
-                <a:spcPts val="0"/>
-              </a:spcAft>
-              <a:buClrTx/>
-              <a:buSzTx/>
-              <a:buFontTx/>
-              <a:buNone/>
-              <a:defRPr/>
-            </a:pPr>
-            <a:endParaRPr kumimoji="0" lang="zh-CN" altLang="en-US" sz="1800" b="0" i="0" u="none" strike="noStrike" kern="1200" cap="none" spc="0" normalizeH="0" baseline="0" noProof="0" dirty="0">
-              <a:ln>
-                <a:noFill/>
-              </a:ln>
-              <a:solidFill>
-                <a:prstClr val="white"/>
-              </a:solidFill>
-              <a:effectLst/>
-              <a:uLnTx/>
-              <a:uFillTx/>
-              <a:latin typeface="等线" panose="02010600030101010101" charset="-122"/>
-              <a:ea typeface="微软雅黑" panose="020B0503020204020204" pitchFamily="34" charset="-122"/>
-              <a:cs typeface="+mn-cs"/>
-            </a:endParaRPr>
-          </a:p>
-        </p:txBody>
-      </p:sp>
-      <p:sp>
-        <p:nvSpPr>
-          <p:cNvPr id="24" name="文本框1"/>
-          <p:cNvSpPr txBox="1"/>
-          <p:nvPr>
-            <p:custDataLst>
-              <p:tags r:id="rId19"/>
-            </p:custDataLst>
-          </p:nvPr>
-        </p:nvSpPr>
-        <p:spPr>
-          <a:xfrm>
-            <a:off x="6392065" y="4769465"/>
-            <a:ext cx="2700000" cy="460800"/>
-          </a:xfrm>
-          <a:prstGeom prst="rect">
-            <a:avLst/>
-          </a:prstGeom>
-          <a:noFill/>
-        </p:spPr>
-        <p:txBody>
-          <a:bodyPr wrap="square" rtlCol="0">
-            <a:noAutofit/>
-          </a:bodyPr>
-          <a:lstStyle/>
-          <a:p>
-            <a:pPr marL="0" marR="0" lvl="0" indent="0" algn="ctr" defTabSz="914400" rtl="0" eaLnBrk="1" fontAlgn="auto" latinLnBrk="0" hangingPunct="1">
-              <a:lnSpc>
-                <a:spcPct val="100000"/>
-              </a:lnSpc>
-              <a:spcBef>
-                <a:spcPts val="0"/>
-              </a:spcBef>
-              <a:spcAft>
-                <a:spcPts val="0"/>
-              </a:spcAft>
-              <a:buClrTx/>
-              <a:buSzTx/>
-              <a:buFontTx/>
-              <a:buNone/>
-              <a:defRPr/>
-            </a:pPr>
-            <a:r>
-              <a:rPr lang="en-US" altLang="zh-CN" sz="2400" dirty="0" smtClean="0">
-                <a:solidFill>
-                  <a:schemeClr val="tx1"/>
-                </a:solidFill>
-                <a:latin typeface="微软雅黑" panose="020B0503020204020204" pitchFamily="34" charset="-122"/>
-                <a:ea typeface="微软雅黑" panose="020B0503020204020204" pitchFamily="34" charset="-122"/>
-                <a:sym typeface="+mn-ea"/>
-              </a:rPr>
-              <a:t>{{text:point_</a:t>
-            </a:r>
-            <a:r>
-              <a:rPr lang="en-US" altLang="zh-CN" sz="2400" dirty="0" smtClean="0">
-                <a:solidFill>
-                  <a:schemeClr val="tx1"/>
-                </a:solidFill>
-                <a:latin typeface="微软雅黑" panose="020B0503020204020204" pitchFamily="34" charset="-122"/>
-                <a:ea typeface="微软雅黑" panose="020B0503020204020204" pitchFamily="34" charset="-122"/>
-                <a:sym typeface="+mn-ea"/>
-              </a:rPr>
-              <a:t>three}}</a:t>
-            </a:r>
-            <a:endParaRPr lang="en-US" altLang="zh-CN" sz="2400" dirty="0" smtClean="0">
-              <a:solidFill>
-                <a:schemeClr val="tx1"/>
-              </a:solidFill>
-              <a:latin typeface="微软雅黑" panose="020B0503020204020204" pitchFamily="34" charset="-122"/>
-              <a:ea typeface="微软雅黑" panose="020B0503020204020204" pitchFamily="34" charset="-122"/>
-              <a:sym typeface="+mn-ea"/>
-            </a:endParaRPr>
-          </a:p>
-        </p:txBody>
-      </p:sp>
-      <p:sp>
-        <p:nvSpPr>
-          <p:cNvPr id="25" name="文本框1"/>
-          <p:cNvSpPr txBox="1"/>
-          <p:nvPr>
-            <p:custDataLst>
-              <p:tags r:id="rId20"/>
-            </p:custDataLst>
-          </p:nvPr>
-        </p:nvSpPr>
-        <p:spPr>
-          <a:xfrm>
-            <a:off x="9104439" y="4770120"/>
-            <a:ext cx="2700000" cy="460800"/>
-          </a:xfrm>
-          <a:prstGeom prst="rect">
-            <a:avLst/>
-          </a:prstGeom>
-          <a:noFill/>
-        </p:spPr>
-        <p:txBody>
-          <a:bodyPr wrap="square" rtlCol="0">
-            <a:noAutofit/>
-          </a:bodyPr>
-          <a:lstStyle/>
-          <a:p>
-            <a:pPr marL="0" marR="0" lvl="0" indent="0" algn="ctr" defTabSz="914400" rtl="0" eaLnBrk="1" fontAlgn="auto" latinLnBrk="0" hangingPunct="1">
-              <a:lnSpc>
-                <a:spcPct val="100000"/>
-              </a:lnSpc>
-              <a:spcBef>
-                <a:spcPts val="0"/>
-              </a:spcBef>
-              <a:spcAft>
-                <a:spcPts val="0"/>
-              </a:spcAft>
-              <a:buClrTx/>
-              <a:buSzTx/>
-              <a:buFontTx/>
-              <a:buNone/>
-              <a:defRPr/>
-            </a:pPr>
-            <a:r>
-              <a:rPr lang="en-US" altLang="zh-CN" sz="2400" dirty="0" smtClean="0">
-                <a:latin typeface="微软雅黑" panose="020B0503020204020204" pitchFamily="34" charset="-122"/>
-                <a:ea typeface="微软雅黑" panose="020B0503020204020204" pitchFamily="34" charset="-122"/>
-                <a:sym typeface="+mn-ea"/>
-              </a:rPr>
-              <a:t>{{text:point_</a:t>
-            </a:r>
-            <a:r>
-              <a:rPr lang="en-US" altLang="zh-CN" sz="2400" dirty="0" smtClean="0">
-                <a:latin typeface="微软雅黑" panose="020B0503020204020204" pitchFamily="34" charset="-122"/>
-                <a:ea typeface="微软雅黑" panose="020B0503020204020204" pitchFamily="34" charset="-122"/>
-                <a:sym typeface="+mn-ea"/>
-              </a:rPr>
-              <a:t>four}}</a:t>
-            </a:r>
-            <a:endParaRPr lang="zh-CN" altLang="en-US" sz="2400" dirty="0">
-              <a:latin typeface="微软雅黑" panose="020B0503020204020204" pitchFamily="34" charset="-122"/>
-              <a:ea typeface="微软雅黑" panose="020B0503020204020204" pitchFamily="34" charset="-122"/>
-              <a:sym typeface="+mn-lt"/>
-            </a:endParaRPr>
-          </a:p>
-        </p:txBody>
-      </p:sp>
-      <p:sp>
-        <p:nvSpPr>
-          <p:cNvPr id="19" name="文本框 18"/>
-          <p:cNvSpPr txBox="1"/>
-          <p:nvPr/>
-        </p:nvSpPr>
-        <p:spPr>
-          <a:xfrm>
-            <a:off x="0" y="793750"/>
-            <a:ext cx="1351262" cy="2061210"/>
-          </a:xfrm>
-          <a:prstGeom prst="rect">
-            <a:avLst/>
-          </a:prstGeom>
-          <a:noFill/>
-        </p:spPr>
-        <p:txBody>
-          <a:bodyPr wrap="square" rtlCol="0">
-            <a:spAutoFit/>
-            <a:scene3d>
-              <a:camera prst="orthographicFront"/>
-              <a:lightRig rig="threePt" dir="t"/>
-            </a:scene3d>
-            <a:sp3d contourW="12700"/>
-          </a:bodyPr>
-          <a:lstStyle/>
-          <a:p>
-            <a:pPr algn="ctr"/>
-            <a:r>
-              <a:rPr lang="en-US" altLang="zh-CN" sz="3200" dirty="0" smtClean="0">
-                <a:solidFill>
-                  <a:srgbClr val="3F396C"/>
-                </a:solidFill>
-                <a:latin typeface="思源宋体" panose="02020700000000000000" charset="-122"/>
-                <a:ea typeface="思源宋体" panose="02020700000000000000" charset="-122"/>
-              </a:rPr>
-              <a:t>04</a:t>
-            </a:r>
-            <a:endParaRPr lang="en-US" altLang="zh-CN" sz="3200" dirty="0" smtClean="0">
-              <a:solidFill>
-                <a:srgbClr val="3F396C"/>
-              </a:solidFill>
-              <a:latin typeface="思源宋体" panose="02020700000000000000" charset="-122"/>
-              <a:ea typeface="思源宋体" panose="02020700000000000000" charset="-122"/>
-            </a:endParaRPr>
-          </a:p>
-        </p:txBody>
-      </p:sp>
-      <p:sp>
-        <p:nvSpPr>
-          <p:cNvPr id="22" name="文本框 21"/>
-          <p:cNvSpPr txBox="1"/>
-          <p:nvPr/>
-        </p:nvSpPr>
-        <p:spPr>
-          <a:xfrm>
-            <a:off x="1278000" y="792000"/>
-            <a:ext cx="3932555" cy="583565"/>
-          </a:xfrm>
-          <a:prstGeom prst="rect">
-            <a:avLst/>
-          </a:prstGeom>
-          <a:noFill/>
-        </p:spPr>
-        <p:txBody>
-          <a:bodyPr wrap="square" rtlCol="0">
-            <a:spAutoFit/>
-            <a:scene3d>
-              <a:camera prst="orthographicFront"/>
-              <a:lightRig rig="threePt" dir="t"/>
-            </a:scene3d>
-            <a:sp3d contourW="12700"/>
-          </a:bodyPr>
-          <a:lstStyle>
-            <a:defPPr>
-              <a:defRPr lang="en-US"/>
-            </a:defPPr>
-            <a:lvl1pPr algn="ctr">
-              <a:defRPr sz="3200">
-                <a:gradFill>
-                  <a:gsLst>
-                    <a:gs pos="0">
-                      <a:schemeClr val="tx1">
-                        <a:lumMod val="50000"/>
-                        <a:lumOff val="50000"/>
-                      </a:schemeClr>
-                    </a:gs>
-                    <a:gs pos="100000">
-                      <a:schemeClr val="tx1">
-                        <a:lumMod val="85000"/>
-                        <a:lumOff val="15000"/>
-                      </a:schemeClr>
-                    </a:gs>
-                  </a:gsLst>
-                  <a:lin ang="5400000" scaled="1"/>
-                </a:gradFill>
-              </a:defRPr>
-            </a:lvl1pPr>
-          </a:lstStyle>
-          <a:p>
-            <a:pPr marL="0" marR="0" lvl="0" indent="0" algn="l" defTabSz="914400" rtl="0" eaLnBrk="1" fontAlgn="auto" latinLnBrk="0" hangingPunct="1">
-              <a:lnSpc>
-                <a:spcPct val="100000"/>
-              </a:lnSpc>
-              <a:spcBef>
-                <a:spcPts val="0"/>
-              </a:spcBef>
-              <a:spcAft>
-                <a:spcPts val="0"/>
-              </a:spcAft>
-              <a:buClrTx/>
-              <a:buSzTx/>
-              <a:buFontTx/>
-              <a:buNone/>
-              <a:defRPr/>
-            </a:pPr>
-            <a:r>
-              <a:rPr lang="zh-CN" altLang="zh-CN" b="1" dirty="0">
-                <a:solidFill>
-                  <a:schemeClr val="accent1">
-                    <a:lumMod val="75000"/>
-                  </a:schemeClr>
-                </a:solidFill>
-                <a:latin typeface="微软雅黑" panose="020B0503020204020204" pitchFamily="34" charset="-122"/>
-                <a:ea typeface="微软雅黑" panose="020B0503020204020204" pitchFamily="34" charset="-122"/>
-                <a:cs typeface="微软雅黑" panose="020B0503020204020204" pitchFamily="34" charset="-122"/>
-                <a:sym typeface="+mn-lt"/>
-              </a:rPr>
-              <a:t>任务实施</a:t>
-            </a:r>
-            <a:endParaRPr lang="zh-CN" altLang="zh-CN" b="1" dirty="0">
-              <a:solidFill>
-                <a:schemeClr val="accent1">
-                  <a:lumMod val="75000"/>
-                </a:schemeClr>
-              </a:solidFill>
-              <a:latin typeface="微软雅黑" panose="020B0503020204020204" pitchFamily="34" charset="-122"/>
-              <a:ea typeface="微软雅黑" panose="020B0503020204020204" pitchFamily="34" charset="-122"/>
-              <a:cs typeface="微软雅黑" panose="020B0503020204020204" pitchFamily="34" charset="-122"/>
-              <a:sym typeface="+mn-lt"/>
-            </a:endParaRPr>
-          </a:p>
-        </p:txBody>
-      </p:sp>
-    </p:spTree>
-  </p:cSld>
-  <p:clrMapOvr>
-    <a:masterClrMapping/>
-  </p:clrMapOvr>
-</p:sld>
-</file>
-
-<file path=ppt/slides/slide10.xml><?xml version="1.0" encoding="utf-8"?>
-<p:sld xmlns:a="http://schemas.openxmlformats.org/drawingml/2006/main" xmlns:r="http://schemas.openxmlformats.org/officeDocument/2006/relationships" xmlns:p="http://schemas.openxmlformats.org/presentationml/2006/main">
-  <p:cSld>
-    <p:spTree>
-      <p:nvGrpSpPr>
-        <p:cNvPr id="1" name=""/>
-        <p:cNvGrpSpPr/>
-        <p:nvPr/>
-      </p:nvGrpSpPr>
-      <p:grpSpPr>
-        <a:xfrm>
-          <a:off x="0" y="0"/>
-          <a:ext cx="0" cy="0"/>
-          <a:chOff x="0" y="0"/>
-          <a:chExt cx="0" cy="0"/>
-        </a:xfrm>
-      </p:grpSpPr>
-      <p:sp>
-        <p:nvSpPr>
-          <p:cNvPr id="3" name="文本框 2"/>
-          <p:cNvSpPr txBox="1"/>
-          <p:nvPr/>
-        </p:nvSpPr>
-        <p:spPr>
-          <a:xfrm>
-            <a:off x="1175385" y="1377315"/>
-            <a:ext cx="9841230" cy="2282190"/>
-          </a:xfrm>
-          <a:prstGeom prst="rect">
-            <a:avLst/>
-          </a:prstGeom>
-          <a:noFill/>
-        </p:spPr>
-        <p:txBody>
-          <a:bodyPr wrap="square" rtlCol="0" anchor="t">
-            <a:noAutofit/>
-          </a:bodyPr>
-          <a:lstStyle/>
-          <a:p>
-            <a:pPr indent="457200" fontAlgn="auto">
-              <a:lnSpc>
-                <a:spcPct val="150000"/>
-              </a:lnSpc>
-            </a:pPr>
-            <a:r>
-              <a:rPr lang="en-US" dirty="0" smtClean="0">
-                <a:latin typeface="微软雅黑" panose="020B0503020204020204" pitchFamily="34" charset="-122"/>
-                <a:ea typeface="微软雅黑" panose="020B0503020204020204" pitchFamily="34" charset="-122"/>
-                <a:cs typeface="微软雅黑" panose="020B0503020204020204" pitchFamily="34" charset="-122"/>
-              </a:rPr>
-              <a:t> tokenizer</a:t>
-            </a:r>
-            <a:r>
-              <a:rPr lang="zh-CN" altLang="en-US" dirty="0" smtClean="0">
-                <a:latin typeface="微软雅黑" panose="020B0503020204020204" pitchFamily="34" charset="-122"/>
-                <a:ea typeface="微软雅黑" panose="020B0503020204020204" pitchFamily="34" charset="-122"/>
-                <a:cs typeface="微软雅黑" panose="020B0503020204020204" pitchFamily="34" charset="-122"/>
-              </a:rPr>
-              <a:t>进行分词</a:t>
-            </a:r>
-            <a:r>
-              <a:rPr lang="en-US" altLang="zh-CN" dirty="0" smtClean="0">
-                <a:latin typeface="微软雅黑" panose="020B0503020204020204" pitchFamily="34" charset="-122"/>
-                <a:ea typeface="微软雅黑" panose="020B0503020204020204" pitchFamily="34" charset="-122"/>
-                <a:cs typeface="微软雅黑" panose="020B0503020204020204" pitchFamily="34" charset="-122"/>
-              </a:rPr>
-              <a:t>
-Qwen</a:t>
-            </a:r>
-            <a:r>
-              <a:rPr lang="zh-CN" altLang="en-US" dirty="0" smtClean="0">
-                <a:latin typeface="微软雅黑" panose="020B0503020204020204" pitchFamily="34" charset="-122"/>
-                <a:ea typeface="微软雅黑" panose="020B0503020204020204" pitchFamily="34" charset="-122"/>
-                <a:cs typeface="微软雅黑" panose="020B0503020204020204" pitchFamily="34" charset="-122"/>
-              </a:rPr>
-              <a:t>（通义千问）是阿里巴巴集团旗下的通义实验室自主研发的超大规模语言模型。它能够回答问题、创作文字，支持多语言交流，并具备逻辑推理、编程、内容生成等多种能力。</a:t>
-            </a:r>
-            <a:r>
-              <a:rPr lang="en-US" altLang="zh-CN" dirty="0" smtClean="0">
-                <a:latin typeface="微软雅黑" panose="020B0503020204020204" pitchFamily="34" charset="-122"/>
-                <a:ea typeface="微软雅黑" panose="020B0503020204020204" pitchFamily="34" charset="-122"/>
-                <a:cs typeface="微软雅黑" panose="020B0503020204020204" pitchFamily="34" charset="-122"/>
-              </a:rPr>
-              <a:t>Qwen</a:t>
-            </a:r>
-            <a:r>
-              <a:rPr lang="zh-CN" altLang="en-US" dirty="0" smtClean="0">
-                <a:latin typeface="微软雅黑" panose="020B0503020204020204" pitchFamily="34" charset="-122"/>
-                <a:ea typeface="微软雅黑" panose="020B0503020204020204" pitchFamily="34" charset="-122"/>
-                <a:cs typeface="微软雅黑" panose="020B0503020204020204" pitchFamily="34" charset="-122"/>
-              </a:rPr>
-              <a:t>通过大量互联网文本进行训练，拥有广泛的知识和强大的语言理解与表达能力，适用于多种应用场景，如智能客服、内容创作、教育辅助等。而</a:t>
-            </a:r>
-            <a:r>
-              <a:rPr lang="en-US" altLang="zh-CN" dirty="0" smtClean="0">
-                <a:latin typeface="微软雅黑" panose="020B0503020204020204" pitchFamily="34" charset="-122"/>
-                <a:ea typeface="微软雅黑" panose="020B0503020204020204" pitchFamily="34" charset="-122"/>
-                <a:cs typeface="微软雅黑" panose="020B0503020204020204" pitchFamily="34" charset="-122"/>
-              </a:rPr>
-              <a:t>Qwen tokenizer</a:t>
-            </a:r>
-            <a:r>
-              <a:rPr lang="zh-CN" altLang="en-US" dirty="0" smtClean="0">
-                <a:latin typeface="微软雅黑" panose="020B0503020204020204" pitchFamily="34" charset="-122"/>
-                <a:ea typeface="微软雅黑" panose="020B0503020204020204" pitchFamily="34" charset="-122"/>
-                <a:cs typeface="微软雅黑" panose="020B0503020204020204" pitchFamily="34" charset="-122"/>
-              </a:rPr>
-              <a:t>是与</a:t>
-            </a:r>
-            <a:r>
-              <a:rPr lang="en-US" altLang="zh-CN" dirty="0" smtClean="0">
-                <a:latin typeface="微软雅黑" panose="020B0503020204020204" pitchFamily="34" charset="-122"/>
-                <a:ea typeface="微软雅黑" panose="020B0503020204020204" pitchFamily="34" charset="-122"/>
-                <a:cs typeface="微软雅黑" panose="020B0503020204020204" pitchFamily="34" charset="-122"/>
-              </a:rPr>
-              <a:t>Qwen</a:t>
-            </a:r>
-            <a:r>
-              <a:rPr lang="zh-CN" altLang="en-US" dirty="0" smtClean="0">
-                <a:latin typeface="微软雅黑" panose="020B0503020204020204" pitchFamily="34" charset="-122"/>
-                <a:ea typeface="微软雅黑" panose="020B0503020204020204" pitchFamily="34" charset="-122"/>
-                <a:cs typeface="微软雅黑" panose="020B0503020204020204" pitchFamily="34" charset="-122"/>
-              </a:rPr>
-              <a:t>大模型配套使用的分词器。</a:t>
-            </a:r>
-            <a:r>
-              <a:rPr lang="en-US" altLang="zh-CN" dirty="0" smtClean="0">
-                <a:latin typeface="微软雅黑" panose="020B0503020204020204" pitchFamily="34" charset="-122"/>
-                <a:ea typeface="微软雅黑" panose="020B0503020204020204" pitchFamily="34" charset="-122"/>
-                <a:cs typeface="微软雅黑" panose="020B0503020204020204" pitchFamily="34" charset="-122"/>
-              </a:rPr>
-              <a:t>
-Qwen</a:t>
-            </a:r>
-            <a:r>
-              <a:rPr lang="zh-CN" altLang="en-US" dirty="0" smtClean="0">
-                <a:latin typeface="微软雅黑" panose="020B0503020204020204" pitchFamily="34" charset="-122"/>
-                <a:ea typeface="微软雅黑" panose="020B0503020204020204" pitchFamily="34" charset="-122"/>
-                <a:cs typeface="微软雅黑" panose="020B0503020204020204" pitchFamily="34" charset="-122"/>
-              </a:rPr>
-              <a:t>分词器属于</a:t>
-            </a:r>
-            <a:r>
-              <a:rPr lang="en-US" altLang="zh-CN" dirty="0" smtClean="0">
-                <a:latin typeface="微软雅黑" panose="020B0503020204020204" pitchFamily="34" charset="-122"/>
-                <a:ea typeface="微软雅黑" panose="020B0503020204020204" pitchFamily="34" charset="-122"/>
-                <a:cs typeface="微软雅黑" panose="020B0503020204020204" pitchFamily="34" charset="-122"/>
-              </a:rPr>
-              <a:t>SentencePiece</a:t>
-            </a:r>
-            <a:r>
-              <a:rPr lang="zh-CN" altLang="en-US" dirty="0" smtClean="0">
-                <a:latin typeface="微软雅黑" panose="020B0503020204020204" pitchFamily="34" charset="-122"/>
-                <a:ea typeface="微软雅黑" panose="020B0503020204020204" pitchFamily="34" charset="-122"/>
-                <a:cs typeface="微软雅黑" panose="020B0503020204020204" pitchFamily="34" charset="-122"/>
-              </a:rPr>
-              <a:t>（</a:t>
-            </a:r>
-            <a:r>
-              <a:rPr lang="en-US" altLang="zh-CN" dirty="0" smtClean="0">
-                <a:latin typeface="微软雅黑" panose="020B0503020204020204" pitchFamily="34" charset="-122"/>
-                <a:ea typeface="微软雅黑" panose="020B0503020204020204" pitchFamily="34" charset="-122"/>
-                <a:cs typeface="微软雅黑" panose="020B0503020204020204" pitchFamily="34" charset="-122"/>
-              </a:rPr>
-              <a:t>Unigram</a:t>
-            </a:r>
-            <a:r>
-              <a:rPr lang="zh-CN" altLang="en-US" dirty="0" smtClean="0">
-                <a:latin typeface="微软雅黑" panose="020B0503020204020204" pitchFamily="34" charset="-122"/>
-                <a:ea typeface="微软雅黑" panose="020B0503020204020204" pitchFamily="34" charset="-122"/>
-                <a:cs typeface="微软雅黑" panose="020B0503020204020204" pitchFamily="34" charset="-122"/>
-              </a:rPr>
-              <a:t>）分词器。</a:t>
-            </a:r>
-            <a:r>
-              <a:rPr lang="en-US" altLang="zh-CN" dirty="0" smtClean="0">
-                <a:latin typeface="微软雅黑" panose="020B0503020204020204" pitchFamily="34" charset="-122"/>
-                <a:ea typeface="微软雅黑" panose="020B0503020204020204" pitchFamily="34" charset="-122"/>
-                <a:cs typeface="微软雅黑" panose="020B0503020204020204" pitchFamily="34" charset="-122"/>
-              </a:rPr>
-              <a:t>Sen</a:t>
-            </a:r>
-            <a:endParaRPr lang="en-US" altLang="zh-CN" dirty="0" smtClean="0">
-              <a:latin typeface="微软雅黑" panose="020B0503020204020204" pitchFamily="34" charset="-122"/>
-              <a:ea typeface="微软雅黑" panose="020B0503020204020204" pitchFamily="34" charset="-122"/>
-              <a:cs typeface="微软雅黑" panose="020B0503020204020204" pitchFamily="34" charset="-122"/>
-            </a:endParaRPr>
-          </a:p>
-        </p:txBody>
-      </p:sp>
-      <p:sp>
-        <p:nvSpPr>
-          <p:cNvPr id="6" name="矩形 5"/>
-          <p:cNvSpPr/>
-          <p:nvPr/>
-        </p:nvSpPr>
-        <p:spPr>
-          <a:xfrm>
-            <a:off x="1954896" y="3657124"/>
-            <a:ext cx="8211454" cy="2991484"/>
-          </a:xfrm>
-          <a:prstGeom prst="rect">
-            <a:avLst/>
-          </a:prstGeom>
-          <a:noFill/>
-        </p:spPr>
-        <p:style>
-          <a:lnRef idx="2">
-            <a:schemeClr val="accent1">
-              <a:shade val="50000"/>
-            </a:schemeClr>
-          </a:lnRef>
-          <a:fillRef idx="1">
-            <a:schemeClr val="accent1"/>
-          </a:fillRef>
-          <a:effectRef idx="0">
-            <a:schemeClr val="accent1"/>
-          </a:effectRef>
-          <a:fontRef idx="minor">
-            <a:schemeClr val="lt1"/>
-          </a:fontRef>
-        </p:style>
-        <p:txBody>
-          <a:bodyPr rtlCol="0" anchor="ctr"/>
-          <a:lstStyle/>
-          <a:p>
-            <a:pPr algn="ctr"/>
-            <a:r>
-              <a:rPr lang="zh-CN" altLang="en-US" dirty="0">
-                <a:solidFill>
-                  <a:schemeClr val="tx1"/>
-                </a:solidFill>
-              </a:rPr>
-              <a:t>教材对步骤图片</a:t>
-            </a:r>
-            <a:endParaRPr lang="zh-CN" altLang="en-US" dirty="0">
-              <a:solidFill>
-                <a:schemeClr val="tx1"/>
-              </a:solidFill>
-            </a:endParaRPr>
-          </a:p>
-        </p:txBody>
-      </p:sp>
-      <p:sp>
-        <p:nvSpPr>
-          <p:cNvPr id="2" name="文本框 1"/>
-          <p:cNvSpPr txBox="1"/>
-          <p:nvPr/>
-        </p:nvSpPr>
-        <p:spPr>
-          <a:xfrm>
-            <a:off x="0" y="793750"/>
-            <a:ext cx="1351262" cy="583565"/>
-          </a:xfrm>
-          <a:prstGeom prst="rect">
-            <a:avLst/>
-          </a:prstGeom>
-          <a:noFill/>
-        </p:spPr>
-        <p:txBody>
-          <a:bodyPr wrap="square" rtlCol="0">
-            <a:spAutoFit/>
-            <a:scene3d>
-              <a:camera prst="orthographicFront"/>
-              <a:lightRig rig="threePt" dir="t"/>
-            </a:scene3d>
-            <a:sp3d contourW="12700"/>
-          </a:bodyPr>
-          <a:lstStyle/>
-          <a:p>
-            <a:pPr algn="ctr"/>
-            <a:r>
-              <a:rPr lang="en-US" sz="3200" dirty="0" smtClean="0">
-                <a:solidFill>
-                  <a:srgbClr val="3F396C"/>
-                </a:solidFill>
-                <a:latin typeface="思源宋体" panose="02020700000000000000" charset="-122"/>
-                <a:ea typeface="思源宋体" panose="02020700000000000000" charset="-122"/>
-              </a:rPr>
-              <a:t>04</a:t>
-            </a:r>
-            <a:endParaRPr lang="en-US" sz="3200" dirty="0" smtClean="0">
-              <a:solidFill>
-                <a:srgbClr val="3F396C"/>
-              </a:solidFill>
-              <a:latin typeface="思源宋体" panose="02020700000000000000" charset="-122"/>
-              <a:ea typeface="思源宋体" panose="02020700000000000000" charset="-122"/>
-            </a:endParaRPr>
-          </a:p>
-        </p:txBody>
-      </p:sp>
-      <p:sp>
-        <p:nvSpPr>
-          <p:cNvPr id="17" name="文本框 16"/>
-          <p:cNvSpPr txBox="1"/>
-          <p:nvPr/>
-        </p:nvSpPr>
-        <p:spPr>
-          <a:xfrm>
-            <a:off x="1278000" y="792000"/>
-            <a:ext cx="3932555" cy="583565"/>
-          </a:xfrm>
-          <a:prstGeom prst="rect">
-            <a:avLst/>
-          </a:prstGeom>
-          <a:noFill/>
-        </p:spPr>
-        <p:txBody>
-          <a:bodyPr wrap="square" rtlCol="0">
-            <a:spAutoFit/>
-            <a:scene3d>
-              <a:camera prst="orthographicFront"/>
-              <a:lightRig rig="threePt" dir="t"/>
-            </a:scene3d>
-            <a:sp3d contourW="12700"/>
-          </a:bodyPr>
-          <a:lstStyle>
-            <a:defPPr>
-              <a:defRPr lang="en-US"/>
-            </a:defPPr>
-            <a:lvl1pPr algn="ctr">
-              <a:defRPr sz="3200">
-                <a:gradFill>
-                  <a:gsLst>
-                    <a:gs pos="0">
-                      <a:schemeClr val="tx1">
-                        <a:lumMod val="50000"/>
-                        <a:lumOff val="50000"/>
-                      </a:schemeClr>
-                    </a:gs>
-                    <a:gs pos="100000">
-                      <a:schemeClr val="tx1">
-                        <a:lumMod val="85000"/>
-                        <a:lumOff val="15000"/>
-                      </a:schemeClr>
-                    </a:gs>
-                  </a:gsLst>
-                  <a:lin ang="5400000" scaled="1"/>
-                </a:gradFill>
-              </a:defRPr>
-            </a:lvl1pPr>
-          </a:lstStyle>
-          <a:p>
-            <a:pPr marL="0" marR="0" lvl="0" indent="0" algn="l" defTabSz="914400" rtl="0" eaLnBrk="1" fontAlgn="auto" latinLnBrk="0" hangingPunct="1">
-              <a:lnSpc>
-                <a:spcPct val="100000"/>
-              </a:lnSpc>
-              <a:spcBef>
-                <a:spcPts val="0"/>
-              </a:spcBef>
-              <a:spcAft>
-                <a:spcPts val="0"/>
-              </a:spcAft>
-              <a:buClrTx/>
-              <a:buSzTx/>
-              <a:buFontTx/>
-              <a:buNone/>
-              <a:defRPr/>
-            </a:pPr>
-            <a:r>
-              <a:rPr lang="zh-CN" altLang="en-US" b="1" dirty="0">
-                <a:solidFill>
-                  <a:schemeClr val="accent1">
-                    <a:lumMod val="75000"/>
-                  </a:schemeClr>
-                </a:solidFill>
-                <a:latin typeface="微软雅黑" panose="020B0503020204020204" pitchFamily="34" charset="-122"/>
-                <a:ea typeface="微软雅黑" panose="020B0503020204020204" pitchFamily="34" charset="-122"/>
-                <a:cs typeface="微软雅黑" panose="020B0503020204020204" pitchFamily="34" charset="-122"/>
-                <a:sym typeface="+mn-lt"/>
-              </a:rPr>
-              <a:t>任务</a:t>
-            </a:r>
-            <a:r>
-              <a:rPr lang="zh-CN" altLang="en-US" b="1" dirty="0">
-                <a:solidFill>
-                  <a:schemeClr val="accent1">
-                    <a:lumMod val="75000"/>
-                  </a:schemeClr>
-                </a:solidFill>
-                <a:latin typeface="微软雅黑" panose="020B0503020204020204" pitchFamily="34" charset="-122"/>
-                <a:ea typeface="微软雅黑" panose="020B0503020204020204" pitchFamily="34" charset="-122"/>
-                <a:cs typeface="微软雅黑" panose="020B0503020204020204" pitchFamily="34" charset="-122"/>
-                <a:sym typeface="+mn-lt"/>
-              </a:rPr>
-              <a:t>实施</a:t>
-            </a:r>
-            <a:endParaRPr lang="zh-CN" altLang="en-US" b="1" dirty="0">
-              <a:solidFill>
-                <a:schemeClr val="accent1">
-                  <a:lumMod val="75000"/>
-                </a:schemeClr>
-              </a:solidFill>
-              <a:latin typeface="微软雅黑" panose="020B0503020204020204" pitchFamily="34" charset="-122"/>
-              <a:ea typeface="微软雅黑" panose="020B0503020204020204" pitchFamily="34" charset="-122"/>
-              <a:cs typeface="微软雅黑" panose="020B0503020204020204" pitchFamily="34" charset="-122"/>
-              <a:sym typeface="+mn-lt"/>
-            </a:endParaRPr>
-          </a:p>
-        </p:txBody>
-      </p:sp>
-    </p:spTree>
-  </p:cSld>
-  <p:clrMapOvr>
-    <a:masterClrMapping/>
-  </p:clrMapOvr>
-</p:sld>
-</file>
-
-<file path=ppt/slides/slide11.xml><?xml version="1.0" encoding="utf-8"?>
-<p:sld xmlns:a="http://schemas.openxmlformats.org/drawingml/2006/main" xmlns:r="http://schemas.openxmlformats.org/officeDocument/2006/relationships" xmlns:p="http://schemas.openxmlformats.org/presentationml/2006/main">
-  <p:cSld>
-    <p:spTree>
-      <p:nvGrpSpPr>
-        <p:cNvPr id="1" name=""/>
-        <p:cNvGrpSpPr/>
-        <p:nvPr/>
-      </p:nvGrpSpPr>
-      <p:grpSpPr>
-        <a:xfrm>
-          <a:off x="0" y="0"/>
-          <a:ext cx="0" cy="0"/>
-          <a:chOff x="0" y="0"/>
-          <a:chExt cx="0" cy="0"/>
-        </a:xfrm>
-      </p:grpSpPr>
-      <p:sp>
-        <p:nvSpPr>
-          <p:cNvPr id="3" name="文本框 2"/>
-          <p:cNvSpPr txBox="1"/>
-          <p:nvPr/>
-        </p:nvSpPr>
-        <p:spPr>
-          <a:xfrm>
-            <a:off x="155575" y="1777365"/>
-            <a:ext cx="5502275" cy="4629150"/>
-          </a:xfrm>
-          <a:prstGeom prst="rect">
-            <a:avLst/>
-          </a:prstGeom>
-          <a:noFill/>
-        </p:spPr>
-        <p:txBody>
-          <a:bodyPr wrap="square" rtlCol="0" anchor="t">
-            <a:noAutofit/>
-          </a:bodyPr>
-          <a:lstStyle/>
-          <a:p>
-            <a:pPr indent="457200" fontAlgn="auto">
-              <a:lnSpc>
-                <a:spcPct val="150000"/>
-              </a:lnSpc>
-            </a:pPr>
-            <a:r>
-              <a:rPr lang="en-US" dirty="0" smtClean="0">
-                <a:latin typeface="微软雅黑" panose="020B0503020204020204" pitchFamily="34" charset="-122"/>
-                <a:ea typeface="微软雅黑" panose="020B0503020204020204" pitchFamily="34" charset="-122"/>
-                <a:cs typeface="微软雅黑" panose="020B0503020204020204" pitchFamily="34" charset="-122"/>
-              </a:rPr>
-              <a:t>tencePiece </a:t>
-            </a:r>
-            <a:r>
-              <a:rPr lang="zh-CN" altLang="en-US" dirty="0" smtClean="0">
-                <a:latin typeface="微软雅黑" panose="020B0503020204020204" pitchFamily="34" charset="-122"/>
-                <a:ea typeface="微软雅黑" panose="020B0503020204020204" pitchFamily="34" charset="-122"/>
-                <a:cs typeface="微软雅黑" panose="020B0503020204020204" pitchFamily="34" charset="-122"/>
-              </a:rPr>
-              <a:t>是一种无监督的子词（</a:t>
-            </a:r>
-            <a:r>
-              <a:rPr lang="en-US" altLang="zh-CN" dirty="0" smtClean="0">
-                <a:latin typeface="微软雅黑" panose="020B0503020204020204" pitchFamily="34" charset="-122"/>
-                <a:ea typeface="微软雅黑" panose="020B0503020204020204" pitchFamily="34" charset="-122"/>
-                <a:cs typeface="微软雅黑" panose="020B0503020204020204" pitchFamily="34" charset="-122"/>
-              </a:rPr>
-              <a:t>subword</a:t>
-            </a:r>
-            <a:r>
-              <a:rPr lang="zh-CN" altLang="en-US" dirty="0" smtClean="0">
-                <a:latin typeface="微软雅黑" panose="020B0503020204020204" pitchFamily="34" charset="-122"/>
-                <a:ea typeface="微软雅黑" panose="020B0503020204020204" pitchFamily="34" charset="-122"/>
-                <a:cs typeface="微软雅黑" panose="020B0503020204020204" pitchFamily="34" charset="-122"/>
-              </a:rPr>
-              <a:t>）分词算法，它不需要依赖任何人工编写的词典或规则。它可以直接从原始文本中学习出一个</a:t>
-            </a:r>
-            <a:r>
-              <a:rPr lang="en-US" altLang="zh-CN" dirty="0" smtClean="0">
-                <a:latin typeface="微软雅黑" panose="020B0503020204020204" pitchFamily="34" charset="-122"/>
-                <a:ea typeface="微软雅黑" panose="020B0503020204020204" pitchFamily="34" charset="-122"/>
-                <a:cs typeface="微软雅黑" panose="020B0503020204020204" pitchFamily="34" charset="-122"/>
-              </a:rPr>
-              <a:t>“</a:t>
-            </a:r>
-            <a:r>
-              <a:rPr lang="zh-CN" altLang="en-US" dirty="0" smtClean="0">
-                <a:latin typeface="微软雅黑" panose="020B0503020204020204" pitchFamily="34" charset="-122"/>
-                <a:ea typeface="微软雅黑" panose="020B0503020204020204" pitchFamily="34" charset="-122"/>
-                <a:cs typeface="微软雅黑" panose="020B0503020204020204" pitchFamily="34" charset="-122"/>
-              </a:rPr>
-              <a:t>词汇表</a:t>
-            </a:r>
-            <a:r>
-              <a:rPr lang="en-US" altLang="zh-CN" dirty="0" smtClean="0">
-                <a:latin typeface="微软雅黑" panose="020B0503020204020204" pitchFamily="34" charset="-122"/>
-                <a:ea typeface="微软雅黑" panose="020B0503020204020204" pitchFamily="34" charset="-122"/>
-                <a:cs typeface="微软雅黑" panose="020B0503020204020204" pitchFamily="34" charset="-122"/>
-              </a:rPr>
-              <a:t>”</a:t>
-            </a:r>
-            <a:r>
-              <a:rPr lang="zh-CN" altLang="en-US" dirty="0" smtClean="0">
-                <a:latin typeface="微软雅黑" panose="020B0503020204020204" pitchFamily="34" charset="-122"/>
-                <a:ea typeface="微软雅黑" panose="020B0503020204020204" pitchFamily="34" charset="-122"/>
-                <a:cs typeface="微软雅黑" panose="020B0503020204020204" pitchFamily="34" charset="-122"/>
-              </a:rPr>
-              <a:t>，然后根据这个词汇表把句子切分成一个个</a:t>
-            </a:r>
-            <a:r>
-              <a:rPr lang="en-US" altLang="zh-CN" dirty="0" smtClean="0">
-                <a:latin typeface="微软雅黑" panose="020B0503020204020204" pitchFamily="34" charset="-122"/>
-                <a:ea typeface="微软雅黑" panose="020B0503020204020204" pitchFamily="34" charset="-122"/>
-                <a:cs typeface="微软雅黑" panose="020B0503020204020204" pitchFamily="34" charset="-122"/>
-              </a:rPr>
-              <a:t> token</a:t>
-            </a:r>
-            <a:r>
-              <a:rPr lang="zh-CN" altLang="en-US" dirty="0" smtClean="0">
-                <a:latin typeface="微软雅黑" panose="020B0503020204020204" pitchFamily="34" charset="-122"/>
-                <a:ea typeface="微软雅黑" panose="020B0503020204020204" pitchFamily="34" charset="-122"/>
-                <a:cs typeface="微软雅黑" panose="020B0503020204020204" pitchFamily="34" charset="-122"/>
-              </a:rPr>
-              <a:t>（也就是模型能理解的最小单位）。类似于人类学语言：刚开始听不懂一句话的意思，但通过不断听和统计，慢慢学会哪些是常用词、哪些是组合词。</a:t>
-            </a:r>
-            <a:r>
-              <a:rPr lang="en-US" altLang="zh-CN" dirty="0" smtClean="0">
-                <a:latin typeface="微软雅黑" panose="020B0503020204020204" pitchFamily="34" charset="-122"/>
-                <a:ea typeface="微软雅黑" panose="020B0503020204020204" pitchFamily="34" charset="-122"/>
-                <a:cs typeface="微软雅黑" panose="020B0503020204020204" pitchFamily="34" charset="-122"/>
-              </a:rPr>
-              <a:t>
-SentencePiece</a:t>
-            </a:r>
-            <a:r>
-              <a:rPr lang="zh-CN" altLang="en-US" dirty="0" smtClean="0">
-                <a:latin typeface="微软雅黑" panose="020B0503020204020204" pitchFamily="34" charset="-122"/>
-                <a:ea typeface="微软雅黑" panose="020B0503020204020204" pitchFamily="34" charset="-122"/>
-                <a:cs typeface="微软雅黑" panose="020B0503020204020204" pitchFamily="34" charset="-122"/>
-              </a:rPr>
-              <a:t>分词器的工作流程可以通过一个具体例子来说明。首先在训练阶段，模型需要从大量语料中学习常用的子词组合，例如训练语</a:t>
-            </a:r>
-            <a:endParaRPr lang="zh-CN" altLang="en-US" dirty="0" smtClean="0">
-              <a:latin typeface="微软雅黑" panose="020B0503020204020204" pitchFamily="34" charset="-122"/>
-              <a:ea typeface="微软雅黑" panose="020B0503020204020204" pitchFamily="34" charset="-122"/>
-              <a:cs typeface="微软雅黑" panose="020B0503020204020204" pitchFamily="34" charset="-122"/>
-            </a:endParaRPr>
-          </a:p>
-        </p:txBody>
-      </p:sp>
-      <p:sp>
-        <p:nvSpPr>
-          <p:cNvPr id="6" name="矩形 5"/>
-          <p:cNvSpPr/>
-          <p:nvPr/>
-        </p:nvSpPr>
-        <p:spPr>
-          <a:xfrm>
-            <a:off x="5797550" y="1776888"/>
-            <a:ext cx="5911850" cy="4630261"/>
-          </a:xfrm>
-          <a:prstGeom prst="rect">
-            <a:avLst/>
-          </a:prstGeom>
-          <a:noFill/>
-        </p:spPr>
-        <p:style>
-          <a:lnRef idx="2">
-            <a:schemeClr val="accent1">
-              <a:shade val="50000"/>
-            </a:schemeClr>
-          </a:lnRef>
-          <a:fillRef idx="1">
-            <a:schemeClr val="accent1"/>
-          </a:fillRef>
-          <a:effectRef idx="0">
-            <a:schemeClr val="accent1"/>
-          </a:effectRef>
-          <a:fontRef idx="minor">
-            <a:schemeClr val="lt1"/>
-          </a:fontRef>
-        </p:style>
-        <p:txBody>
-          <a:bodyPr rtlCol="0" anchor="ctr"/>
-          <a:lstStyle/>
-          <a:p>
-            <a:pPr algn="ctr"/>
-            <a:r>
-              <a:rPr lang="zh-CN" altLang="en-US" dirty="0" smtClean="0">
-                <a:solidFill>
-                  <a:schemeClr val="tx1"/>
-                </a:solidFill>
-              </a:rPr>
-              <a:t>教材对步骤图片</a:t>
-            </a:r>
-            <a:endParaRPr lang="zh-CN" altLang="en-US" dirty="0">
-              <a:solidFill>
-                <a:schemeClr val="tx1"/>
-              </a:solidFill>
-            </a:endParaRPr>
-          </a:p>
-        </p:txBody>
-      </p:sp>
-      <p:sp>
-        <p:nvSpPr>
-          <p:cNvPr id="4" name="文本框 3"/>
-          <p:cNvSpPr txBox="1"/>
-          <p:nvPr/>
-        </p:nvSpPr>
-        <p:spPr>
-          <a:xfrm>
-            <a:off x="0" y="793750"/>
-            <a:ext cx="1351262" cy="583565"/>
-          </a:xfrm>
-          <a:prstGeom prst="rect">
-            <a:avLst/>
-          </a:prstGeom>
-          <a:noFill/>
-        </p:spPr>
-        <p:txBody>
-          <a:bodyPr wrap="square" rtlCol="0">
-            <a:spAutoFit/>
-            <a:scene3d>
-              <a:camera prst="orthographicFront"/>
-              <a:lightRig rig="threePt" dir="t"/>
-            </a:scene3d>
-            <a:sp3d contourW="12700"/>
-          </a:bodyPr>
-          <a:lstStyle/>
-          <a:p>
-            <a:pPr algn="ctr"/>
-            <a:r>
-              <a:rPr lang="en-US" sz="3200" dirty="0" smtClean="0">
-                <a:solidFill>
-                  <a:srgbClr val="3F396C"/>
-                </a:solidFill>
-                <a:latin typeface="思源宋体" panose="02020700000000000000" charset="-122"/>
-                <a:ea typeface="思源宋体" panose="02020700000000000000" charset="-122"/>
-              </a:rPr>
-              <a:t>04</a:t>
-            </a:r>
-            <a:endParaRPr lang="en-US" sz="3200" dirty="0" smtClean="0">
-              <a:solidFill>
-                <a:srgbClr val="3F396C"/>
-              </a:solidFill>
-              <a:latin typeface="思源宋体" panose="02020700000000000000" charset="-122"/>
-              <a:ea typeface="思源宋体" panose="02020700000000000000" charset="-122"/>
-            </a:endParaRPr>
-          </a:p>
-        </p:txBody>
-      </p:sp>
-      <p:sp>
-        <p:nvSpPr>
-          <p:cNvPr id="17" name="文本框 16"/>
-          <p:cNvSpPr txBox="1"/>
-          <p:nvPr/>
-        </p:nvSpPr>
-        <p:spPr>
-          <a:xfrm>
-            <a:off x="1278000" y="792000"/>
-            <a:ext cx="3932555" cy="583565"/>
-          </a:xfrm>
-          <a:prstGeom prst="rect">
-            <a:avLst/>
-          </a:prstGeom>
-          <a:noFill/>
-        </p:spPr>
-        <p:txBody>
-          <a:bodyPr wrap="square" rtlCol="0">
-            <a:spAutoFit/>
-            <a:scene3d>
-              <a:camera prst="orthographicFront"/>
-              <a:lightRig rig="threePt" dir="t"/>
-            </a:scene3d>
-            <a:sp3d contourW="12700"/>
-          </a:bodyPr>
-          <a:lstStyle>
-            <a:defPPr>
-              <a:defRPr lang="en-US"/>
-            </a:defPPr>
-            <a:lvl1pPr algn="ctr">
-              <a:defRPr sz="3200">
-                <a:gradFill>
-                  <a:gsLst>
-                    <a:gs pos="0">
-                      <a:schemeClr val="tx1">
-                        <a:lumMod val="50000"/>
-                        <a:lumOff val="50000"/>
-                      </a:schemeClr>
-                    </a:gs>
-                    <a:gs pos="100000">
-                      <a:schemeClr val="tx1">
-                        <a:lumMod val="85000"/>
-                        <a:lumOff val="15000"/>
-                      </a:schemeClr>
-                    </a:gs>
-                  </a:gsLst>
-                  <a:lin ang="5400000" scaled="1"/>
-                </a:gradFill>
-              </a:defRPr>
-            </a:lvl1pPr>
-          </a:lstStyle>
-          <a:p>
-            <a:pPr marL="0" marR="0" lvl="0" indent="0" algn="l" defTabSz="914400" rtl="0" eaLnBrk="1" fontAlgn="auto" latinLnBrk="0" hangingPunct="1">
-              <a:lnSpc>
-                <a:spcPct val="100000"/>
-              </a:lnSpc>
-              <a:spcBef>
-                <a:spcPts val="0"/>
-              </a:spcBef>
-              <a:spcAft>
-                <a:spcPts val="0"/>
-              </a:spcAft>
-              <a:buClrTx/>
-              <a:buSzTx/>
-              <a:buFontTx/>
-              <a:buNone/>
-              <a:defRPr/>
-            </a:pPr>
-            <a:r>
-              <a:rPr lang="zh-CN" altLang="en-US" b="1" dirty="0">
-                <a:solidFill>
-                  <a:schemeClr val="accent1">
-                    <a:lumMod val="75000"/>
-                  </a:schemeClr>
-                </a:solidFill>
-                <a:latin typeface="微软雅黑" panose="020B0503020204020204" pitchFamily="34" charset="-122"/>
-                <a:ea typeface="微软雅黑" panose="020B0503020204020204" pitchFamily="34" charset="-122"/>
-                <a:cs typeface="微软雅黑" panose="020B0503020204020204" pitchFamily="34" charset="-122"/>
-                <a:sym typeface="+mn-lt"/>
-              </a:rPr>
-              <a:t>任务</a:t>
-            </a:r>
-            <a:r>
-              <a:rPr lang="zh-CN" altLang="en-US" b="1" dirty="0">
-                <a:solidFill>
-                  <a:schemeClr val="accent1">
-                    <a:lumMod val="75000"/>
-                  </a:schemeClr>
-                </a:solidFill>
-                <a:latin typeface="微软雅黑" panose="020B0503020204020204" pitchFamily="34" charset="-122"/>
-                <a:ea typeface="微软雅黑" panose="020B0503020204020204" pitchFamily="34" charset="-122"/>
-                <a:cs typeface="微软雅黑" panose="020B0503020204020204" pitchFamily="34" charset="-122"/>
-                <a:sym typeface="+mn-lt"/>
-              </a:rPr>
-              <a:t>实施</a:t>
-            </a:r>
-            <a:endParaRPr lang="zh-CN" altLang="en-US" b="1" dirty="0">
-              <a:solidFill>
-                <a:schemeClr val="accent1">
-                  <a:lumMod val="75000"/>
-                </a:schemeClr>
-              </a:solidFill>
-              <a:latin typeface="微软雅黑" panose="020B0503020204020204" pitchFamily="34" charset="-122"/>
-              <a:ea typeface="微软雅黑" panose="020B0503020204020204" pitchFamily="34" charset="-122"/>
-              <a:cs typeface="微软雅黑" panose="020B0503020204020204" pitchFamily="34" charset="-122"/>
-              <a:sym typeface="+mn-lt"/>
-            </a:endParaRPr>
-          </a:p>
-        </p:txBody>
-      </p:sp>
-    </p:spTree>
-  </p:cSld>
-  <p:clrMapOvr>
-    <a:masterClrMapping/>
-  </p:clrMapOvr>
-</p:sld>
-</file>
-
-<file path=ppt/slides/slide12.xml><?xml version="1.0" encoding="utf-8"?>
-<p:sld xmlns:a="http://schemas.openxmlformats.org/drawingml/2006/main" xmlns:r="http://schemas.openxmlformats.org/officeDocument/2006/relationships" xmlns:p="http://schemas.openxmlformats.org/presentationml/2006/main">
-  <p:cSld>
-    <p:spTree>
-      <p:nvGrpSpPr>
-        <p:cNvPr id="1" name=""/>
-        <p:cNvGrpSpPr/>
-        <p:nvPr/>
-      </p:nvGrpSpPr>
-      <p:grpSpPr>
-        <a:xfrm>
-          <a:off x="0" y="0"/>
-          <a:ext cx="0" cy="0"/>
-          <a:chOff x="0" y="0"/>
-          <a:chExt cx="0" cy="0"/>
-        </a:xfrm>
-      </p:grpSpPr>
-      <p:sp>
-        <p:nvSpPr>
-          <p:cNvPr id="3" name="文本框 2"/>
-          <p:cNvSpPr txBox="1"/>
-          <p:nvPr/>
-        </p:nvSpPr>
-        <p:spPr>
-          <a:xfrm>
-            <a:off x="1175385" y="1377315"/>
-            <a:ext cx="9841230" cy="2282190"/>
-          </a:xfrm>
-          <a:prstGeom prst="rect">
-            <a:avLst/>
-          </a:prstGeom>
-          <a:noFill/>
-        </p:spPr>
-        <p:txBody>
-          <a:bodyPr wrap="square" rtlCol="0" anchor="t">
-            <a:noAutofit/>
-          </a:bodyPr>
-          <a:lstStyle/>
-          <a:p>
-            <a:pPr indent="457200" fontAlgn="auto">
-              <a:lnSpc>
-                <a:spcPct val="150000"/>
-              </a:lnSpc>
-            </a:pPr>
-            <a:r>
-              <a:rPr lang="zh-CN" dirty="0" smtClean="0">
-                <a:latin typeface="微软雅黑" panose="020B0503020204020204" pitchFamily="34" charset="-122"/>
-                <a:ea typeface="微软雅黑" panose="020B0503020204020204" pitchFamily="34" charset="-122"/>
-                <a:cs typeface="微软雅黑" panose="020B0503020204020204" pitchFamily="34" charset="-122"/>
-              </a:rPr>
-              <a:t>料包含</a:t>
-            </a:r>
-            <a:r>
-              <a:rPr lang="en-US" altLang="zh-CN" dirty="0" smtClean="0">
-                <a:latin typeface="微软雅黑" panose="020B0503020204020204" pitchFamily="34" charset="-122"/>
-                <a:ea typeface="微软雅黑" panose="020B0503020204020204" pitchFamily="34" charset="-122"/>
-                <a:cs typeface="微软雅黑" panose="020B0503020204020204" pitchFamily="34" charset="-122"/>
-              </a:rPr>
-              <a:t>“</a:t>
-            </a:r>
-            <a:r>
-              <a:rPr lang="zh-CN" altLang="en-US" dirty="0" smtClean="0">
-                <a:latin typeface="微软雅黑" panose="020B0503020204020204" pitchFamily="34" charset="-122"/>
-                <a:ea typeface="微软雅黑" panose="020B0503020204020204" pitchFamily="34" charset="-122"/>
-                <a:cs typeface="微软雅黑" panose="020B0503020204020204" pitchFamily="34" charset="-122"/>
-              </a:rPr>
-              <a:t>我正在学习人工智能和无人驾驶技术</a:t>
-            </a:r>
-            <a:r>
-              <a:rPr lang="en-US" altLang="zh-CN" dirty="0" smtClean="0">
-                <a:latin typeface="微软雅黑" panose="020B0503020204020204" pitchFamily="34" charset="-122"/>
-                <a:ea typeface="微软雅黑" panose="020B0503020204020204" pitchFamily="34" charset="-122"/>
-                <a:cs typeface="微软雅黑" panose="020B0503020204020204" pitchFamily="34" charset="-122"/>
-              </a:rPr>
-              <a:t>”</a:t>
-            </a:r>
-            <a:r>
-              <a:rPr lang="zh-CN" altLang="en-US" dirty="0" smtClean="0">
-                <a:latin typeface="微软雅黑" panose="020B0503020204020204" pitchFamily="34" charset="-122"/>
-                <a:ea typeface="微软雅黑" panose="020B0503020204020204" pitchFamily="34" charset="-122"/>
-                <a:cs typeface="微软雅黑" panose="020B0503020204020204" pitchFamily="34" charset="-122"/>
-              </a:rPr>
-              <a:t>、</a:t>
-            </a:r>
-            <a:r>
-              <a:rPr lang="en-US" altLang="zh-CN" dirty="0" smtClean="0">
-                <a:latin typeface="微软雅黑" panose="020B0503020204020204" pitchFamily="34" charset="-122"/>
-                <a:ea typeface="微软雅黑" panose="020B0503020204020204" pitchFamily="34" charset="-122"/>
-                <a:cs typeface="微软雅黑" panose="020B0503020204020204" pitchFamily="34" charset="-122"/>
-              </a:rPr>
-              <a:t>“</a:t>
-            </a:r>
-            <a:r>
-              <a:rPr lang="zh-CN" altLang="en-US" dirty="0" smtClean="0">
-                <a:latin typeface="微软雅黑" panose="020B0503020204020204" pitchFamily="34" charset="-122"/>
-                <a:ea typeface="微软雅黑" panose="020B0503020204020204" pitchFamily="34" charset="-122"/>
-                <a:cs typeface="微软雅黑" panose="020B0503020204020204" pitchFamily="34" charset="-122"/>
-              </a:rPr>
-              <a:t>无人驾驶是未来交通的重要发展方向</a:t>
-            </a:r>
-            <a:r>
-              <a:rPr lang="en-US" altLang="zh-CN" dirty="0" smtClean="0">
-                <a:latin typeface="微软雅黑" panose="020B0503020204020204" pitchFamily="34" charset="-122"/>
-                <a:ea typeface="微软雅黑" panose="020B0503020204020204" pitchFamily="34" charset="-122"/>
-                <a:cs typeface="微软雅黑" panose="020B0503020204020204" pitchFamily="34" charset="-122"/>
-              </a:rPr>
-              <a:t>”</a:t>
-            </a:r>
-            <a:r>
-              <a:rPr lang="zh-CN" altLang="en-US" dirty="0" smtClean="0">
-                <a:latin typeface="微软雅黑" panose="020B0503020204020204" pitchFamily="34" charset="-122"/>
-                <a:ea typeface="微软雅黑" panose="020B0503020204020204" pitchFamily="34" charset="-122"/>
-                <a:cs typeface="微软雅黑" panose="020B0503020204020204" pitchFamily="34" charset="-122"/>
-              </a:rPr>
-              <a:t>、</a:t>
-            </a:r>
-            <a:r>
-              <a:rPr lang="en-US" altLang="zh-CN" dirty="0" smtClean="0">
-                <a:latin typeface="微软雅黑" panose="020B0503020204020204" pitchFamily="34" charset="-122"/>
-                <a:ea typeface="微软雅黑" panose="020B0503020204020204" pitchFamily="34" charset="-122"/>
-                <a:cs typeface="微软雅黑" panose="020B0503020204020204" pitchFamily="34" charset="-122"/>
-              </a:rPr>
-              <a:t>“</a:t>
-            </a:r>
-            <a:r>
-              <a:rPr lang="zh-CN" altLang="en-US" dirty="0" smtClean="0">
-                <a:latin typeface="微软雅黑" panose="020B0503020204020204" pitchFamily="34" charset="-122"/>
-                <a:ea typeface="微软雅黑" panose="020B0503020204020204" pitchFamily="34" charset="-122"/>
-                <a:cs typeface="微软雅黑" panose="020B0503020204020204" pitchFamily="34" charset="-122"/>
-              </a:rPr>
-              <a:t>汽车是我们日常生活中常见的交通工具</a:t>
-            </a:r>
-            <a:r>
-              <a:rPr lang="en-US" altLang="zh-CN" dirty="0" smtClean="0">
-                <a:latin typeface="微软雅黑" panose="020B0503020204020204" pitchFamily="34" charset="-122"/>
-                <a:ea typeface="微软雅黑" panose="020B0503020204020204" pitchFamily="34" charset="-122"/>
-                <a:cs typeface="微软雅黑" panose="020B0503020204020204" pitchFamily="34" charset="-122"/>
-              </a:rPr>
-              <a:t>”</a:t>
-            </a:r>
-            <a:r>
-              <a:rPr lang="zh-CN" altLang="en-US" dirty="0" smtClean="0">
-                <a:latin typeface="微软雅黑" panose="020B0503020204020204" pitchFamily="34" charset="-122"/>
-                <a:ea typeface="微软雅黑" panose="020B0503020204020204" pitchFamily="34" charset="-122"/>
-                <a:cs typeface="微软雅黑" panose="020B0503020204020204" pitchFamily="34" charset="-122"/>
-              </a:rPr>
-              <a:t>、</a:t>
-            </a:r>
-            <a:r>
-              <a:rPr lang="en-US" altLang="zh-CN" dirty="0" smtClean="0">
-                <a:latin typeface="微软雅黑" panose="020B0503020204020204" pitchFamily="34" charset="-122"/>
-                <a:ea typeface="微软雅黑" panose="020B0503020204020204" pitchFamily="34" charset="-122"/>
-                <a:cs typeface="微软雅黑" panose="020B0503020204020204" pitchFamily="34" charset="-122"/>
-              </a:rPr>
-              <a:t>“</a:t>
-            </a:r>
-            <a:r>
-              <a:rPr lang="zh-CN" altLang="en-US" dirty="0" smtClean="0">
-                <a:latin typeface="微软雅黑" panose="020B0503020204020204" pitchFamily="34" charset="-122"/>
-                <a:ea typeface="微软雅黑" panose="020B0503020204020204" pitchFamily="34" charset="-122"/>
-                <a:cs typeface="微软雅黑" panose="020B0503020204020204" pitchFamily="34" charset="-122"/>
-              </a:rPr>
-              <a:t>无人机和无人超市也属于智能系统的一部分</a:t>
-            </a:r>
-            <a:r>
-              <a:rPr lang="en-US" altLang="zh-CN" dirty="0" smtClean="0">
-                <a:latin typeface="微软雅黑" panose="020B0503020204020204" pitchFamily="34" charset="-122"/>
-                <a:ea typeface="微软雅黑" panose="020B0503020204020204" pitchFamily="34" charset="-122"/>
-                <a:cs typeface="微软雅黑" panose="020B0503020204020204" pitchFamily="34" charset="-122"/>
-              </a:rPr>
-              <a:t>”</a:t>
-            </a:r>
-            <a:r>
-              <a:rPr lang="zh-CN" altLang="en-US" dirty="0" smtClean="0">
-                <a:latin typeface="微软雅黑" panose="020B0503020204020204" pitchFamily="34" charset="-122"/>
-                <a:ea typeface="微软雅黑" panose="020B0503020204020204" pitchFamily="34" charset="-122"/>
-                <a:cs typeface="微软雅黑" panose="020B0503020204020204" pitchFamily="34" charset="-122"/>
-              </a:rPr>
-              <a:t>以及</a:t>
-            </a:r>
-            <a:r>
-              <a:rPr lang="en-US" altLang="zh-CN" dirty="0" smtClean="0">
-                <a:latin typeface="微软雅黑" panose="020B0503020204020204" pitchFamily="34" charset="-122"/>
-                <a:ea typeface="微软雅黑" panose="020B0503020204020204" pitchFamily="34" charset="-122"/>
-                <a:cs typeface="微软雅黑" panose="020B0503020204020204" pitchFamily="34" charset="-122"/>
-              </a:rPr>
-              <a:t>“</a:t>
-            </a:r>
-            <a:r>
-              <a:rPr lang="zh-CN" altLang="en-US" dirty="0" smtClean="0">
-                <a:latin typeface="微软雅黑" panose="020B0503020204020204" pitchFamily="34" charset="-122"/>
-                <a:ea typeface="微软雅黑" panose="020B0503020204020204" pitchFamily="34" charset="-122"/>
-                <a:cs typeface="微软雅黑" panose="020B0503020204020204" pitchFamily="34" charset="-122"/>
-              </a:rPr>
-              <a:t>驾驶是一项需要专注的技能</a:t>
-            </a:r>
-            <a:r>
-              <a:rPr lang="en-US" altLang="zh-CN" dirty="0" smtClean="0">
-                <a:latin typeface="微软雅黑" panose="020B0503020204020204" pitchFamily="34" charset="-122"/>
-                <a:ea typeface="微软雅黑" panose="020B0503020204020204" pitchFamily="34" charset="-122"/>
-                <a:cs typeface="微软雅黑" panose="020B0503020204020204" pitchFamily="34" charset="-122"/>
-              </a:rPr>
-              <a:t>”</a:t>
-            </a:r>
-            <a:r>
-              <a:rPr lang="zh-CN" altLang="en-US" dirty="0" smtClean="0">
-                <a:latin typeface="微软雅黑" panose="020B0503020204020204" pitchFamily="34" charset="-122"/>
-                <a:ea typeface="微软雅黑" panose="020B0503020204020204" pitchFamily="34" charset="-122"/>
-                <a:cs typeface="微软雅黑" panose="020B0503020204020204" pitchFamily="34" charset="-122"/>
-              </a:rPr>
-              <a:t>等句子。通过统计这些句子中字符或子词共现的频率，模型构建出一个子词表，其中收录了</a:t>
-            </a:r>
-            <a:r>
-              <a:rPr lang="en-US" altLang="zh-CN" dirty="0" smtClean="0">
-                <a:latin typeface="微软雅黑" panose="020B0503020204020204" pitchFamily="34" charset="-122"/>
-                <a:ea typeface="微软雅黑" panose="020B0503020204020204" pitchFamily="34" charset="-122"/>
-                <a:cs typeface="微软雅黑" panose="020B0503020204020204" pitchFamily="34" charset="-122"/>
-              </a:rPr>
-              <a:t>“</a:t>
-            </a:r>
-            <a:r>
-              <a:rPr lang="zh-CN" altLang="en-US" dirty="0" smtClean="0">
-                <a:latin typeface="微软雅黑" panose="020B0503020204020204" pitchFamily="34" charset="-122"/>
-                <a:ea typeface="微软雅黑" panose="020B0503020204020204" pitchFamily="34" charset="-122"/>
-                <a:cs typeface="微软雅黑" panose="020B0503020204020204" pitchFamily="34" charset="-122"/>
-              </a:rPr>
-              <a:t>无</a:t>
-            </a:r>
-            <a:r>
-              <a:rPr lang="en-US" altLang="zh-CN" dirty="0" smtClean="0">
-                <a:latin typeface="微软雅黑" panose="020B0503020204020204" pitchFamily="34" charset="-122"/>
-                <a:ea typeface="微软雅黑" panose="020B0503020204020204" pitchFamily="34" charset="-122"/>
-                <a:cs typeface="微软雅黑" panose="020B0503020204020204" pitchFamily="34" charset="-122"/>
-              </a:rPr>
-              <a:t>”</a:t>
-            </a:r>
-            <a:r>
-              <a:rPr lang="zh-CN" altLang="en-US" dirty="0" smtClean="0">
-                <a:latin typeface="微软雅黑" panose="020B0503020204020204" pitchFamily="34" charset="-122"/>
-                <a:ea typeface="微软雅黑" panose="020B0503020204020204" pitchFamily="34" charset="-122"/>
-                <a:cs typeface="微软雅黑" panose="020B0503020204020204" pitchFamily="34" charset="-122"/>
-              </a:rPr>
-              <a:t>、</a:t>
-            </a:r>
-            <a:r>
-              <a:rPr lang="en-US" altLang="zh-CN" dirty="0" smtClean="0">
-                <a:latin typeface="微软雅黑" panose="020B0503020204020204" pitchFamily="34" charset="-122"/>
-                <a:ea typeface="微软雅黑" panose="020B0503020204020204" pitchFamily="34" charset="-122"/>
-                <a:cs typeface="微软雅黑" panose="020B0503020204020204" pitchFamily="34" charset="-122"/>
-              </a:rPr>
-              <a:t>“</a:t>
-            </a:r>
-            <a:r>
-              <a:rPr lang="zh-CN" altLang="en-US" dirty="0" smtClean="0">
-                <a:latin typeface="微软雅黑" panose="020B0503020204020204" pitchFamily="34" charset="-122"/>
-                <a:ea typeface="微软雅黑" panose="020B0503020204020204" pitchFamily="34" charset="-122"/>
-                <a:cs typeface="微软雅黑" panose="020B0503020204020204" pitchFamily="34" charset="-122"/>
-              </a:rPr>
-              <a:t>人</a:t>
-            </a:r>
-            <a:r>
-              <a:rPr lang="en-US" altLang="zh-CN" dirty="0" smtClean="0">
-                <a:latin typeface="微软雅黑" panose="020B0503020204020204" pitchFamily="34" charset="-122"/>
-                <a:ea typeface="微软雅黑" panose="020B0503020204020204" pitchFamily="34" charset="-122"/>
-                <a:cs typeface="微软雅黑" panose="020B0503020204020204" pitchFamily="34" charset="-122"/>
-              </a:rPr>
-              <a:t>”</a:t>
-            </a:r>
-            <a:r>
-              <a:rPr lang="zh-CN" altLang="en-US" dirty="0" smtClean="0">
-                <a:latin typeface="微软雅黑" panose="020B0503020204020204" pitchFamily="34" charset="-122"/>
-                <a:ea typeface="微软雅黑" panose="020B0503020204020204" pitchFamily="34" charset="-122"/>
-                <a:cs typeface="微软雅黑" panose="020B0503020204020204" pitchFamily="34" charset="-122"/>
-              </a:rPr>
-              <a:t>、</a:t>
-            </a:r>
-            <a:r>
-              <a:rPr lang="en-US" altLang="zh-CN" dirty="0" smtClean="0">
-                <a:latin typeface="微软雅黑" panose="020B0503020204020204" pitchFamily="34" charset="-122"/>
-                <a:ea typeface="微软雅黑" panose="020B0503020204020204" pitchFamily="34" charset="-122"/>
-                <a:cs typeface="微软雅黑" panose="020B0503020204020204" pitchFamily="34" charset="-122"/>
-              </a:rPr>
-              <a:t>“</a:t>
-            </a:r>
-            <a:r>
-              <a:rPr lang="zh-CN" altLang="en-US" dirty="0" smtClean="0">
-                <a:latin typeface="微软雅黑" panose="020B0503020204020204" pitchFamily="34" charset="-122"/>
-                <a:ea typeface="微软雅黑" panose="020B0503020204020204" pitchFamily="34" charset="-122"/>
-                <a:cs typeface="微软雅黑" panose="020B0503020204020204" pitchFamily="34" charset="-122"/>
-              </a:rPr>
-              <a:t>无人</a:t>
-            </a:r>
-            <a:r>
-              <a:rPr lang="en-US" altLang="zh-CN" dirty="0" smtClean="0">
-                <a:latin typeface="微软雅黑" panose="020B0503020204020204" pitchFamily="34" charset="-122"/>
-                <a:ea typeface="微软雅黑" panose="020B0503020204020204" pitchFamily="34" charset="-122"/>
-                <a:cs typeface="微软雅黑" panose="020B0503020204020204" pitchFamily="34" charset="-122"/>
-              </a:rPr>
-              <a:t>”</a:t>
-            </a:r>
-            <a:r>
-              <a:rPr lang="zh-CN" altLang="en-US" dirty="0" smtClean="0">
-                <a:latin typeface="微软雅黑" panose="020B0503020204020204" pitchFamily="34" charset="-122"/>
-                <a:ea typeface="微软雅黑" panose="020B0503020204020204" pitchFamily="34" charset="-122"/>
-                <a:cs typeface="微软雅黑" panose="020B0503020204020204" pitchFamily="34" charset="-122"/>
-              </a:rPr>
-              <a:t>、</a:t>
-            </a:r>
-            <a:r>
-              <a:rPr lang="en-US" altLang="zh-CN" dirty="0" smtClean="0">
-                <a:latin typeface="微软雅黑" panose="020B0503020204020204" pitchFamily="34" charset="-122"/>
-                <a:ea typeface="微软雅黑" panose="020B0503020204020204" pitchFamily="34" charset="-122"/>
-                <a:cs typeface="微软雅黑" panose="020B0503020204020204" pitchFamily="34" charset="-122"/>
-              </a:rPr>
-              <a:t>“</a:t>
-            </a:r>
-            <a:r>
-              <a:rPr lang="zh-CN" altLang="en-US" dirty="0" smtClean="0">
-                <a:latin typeface="微软雅黑" panose="020B0503020204020204" pitchFamily="34" charset="-122"/>
-                <a:ea typeface="微软雅黑" panose="020B0503020204020204" pitchFamily="34" charset="-122"/>
-                <a:cs typeface="微软雅黑" panose="020B0503020204020204" pitchFamily="34" charset="-122"/>
-              </a:rPr>
-              <a:t>驾驶</a:t>
-            </a:r>
-            <a:r>
-              <a:rPr lang="en-US" altLang="zh-CN" dirty="0" smtClean="0">
-                <a:latin typeface="微软雅黑" panose="020B0503020204020204" pitchFamily="34" charset="-122"/>
-                <a:ea typeface="微软雅黑" panose="020B0503020204020204" pitchFamily="34" charset="-122"/>
-                <a:cs typeface="微软雅黑" panose="020B0503020204020204" pitchFamily="34" charset="-122"/>
-              </a:rPr>
-              <a:t>”</a:t>
-            </a:r>
-            <a:r>
-              <a:rPr lang="zh-CN" altLang="en-US" dirty="0" smtClean="0">
-                <a:latin typeface="微软雅黑" panose="020B0503020204020204" pitchFamily="34" charset="-122"/>
-                <a:ea typeface="微软雅黑" panose="020B0503020204020204" pitchFamily="34" charset="-122"/>
-                <a:cs typeface="微软雅黑" panose="020B0503020204020204" pitchFamily="34" charset="-122"/>
-              </a:rPr>
-              <a:t>、</a:t>
-            </a:r>
-            <a:r>
-              <a:rPr lang="en-US" altLang="zh-CN" dirty="0" smtClean="0">
-                <a:latin typeface="微软雅黑" panose="020B0503020204020204" pitchFamily="34" charset="-122"/>
-                <a:ea typeface="微软雅黑" panose="020B0503020204020204" pitchFamily="34" charset="-122"/>
-                <a:cs typeface="微软雅黑" panose="020B0503020204020204" pitchFamily="34" charset="-122"/>
-              </a:rPr>
-              <a:t>“</a:t>
-            </a:r>
-            <a:r>
-              <a:rPr lang="zh-CN" altLang="en-US" dirty="0" smtClean="0">
-                <a:latin typeface="微软雅黑" panose="020B0503020204020204" pitchFamily="34" charset="-122"/>
-                <a:ea typeface="微软雅黑" panose="020B0503020204020204" pitchFamily="34" charset="-122"/>
-                <a:cs typeface="微软雅黑" panose="020B0503020204020204" pitchFamily="34" charset="-122"/>
-              </a:rPr>
-              <a:t>汽车</a:t>
-            </a:r>
-            <a:r>
-              <a:rPr lang="en-US" altLang="zh-CN" dirty="0" smtClean="0">
-                <a:latin typeface="微软雅黑" panose="020B0503020204020204" pitchFamily="34" charset="-122"/>
-                <a:ea typeface="微软雅黑" panose="020B0503020204020204" pitchFamily="34" charset="-122"/>
-                <a:cs typeface="微软雅黑" panose="020B0503020204020204" pitchFamily="34" charset="-122"/>
-              </a:rPr>
-              <a:t>”</a:t>
-            </a:r>
-            <a:r>
-              <a:rPr lang="zh-CN" altLang="en-US" dirty="0" smtClean="0">
-                <a:latin typeface="微软雅黑" panose="020B0503020204020204" pitchFamily="34" charset="-122"/>
-                <a:ea typeface="微软雅黑" panose="020B0503020204020204" pitchFamily="34" charset="-122"/>
-                <a:cs typeface="微软雅黑" panose="020B0503020204020204" pitchFamily="34" charset="-122"/>
-              </a:rPr>
-              <a:t>、</a:t>
-            </a:r>
-            <a:r>
-              <a:rPr lang="en-US" altLang="zh-CN" dirty="0" smtClean="0">
-                <a:latin typeface="微软雅黑" panose="020B0503020204020204" pitchFamily="34" charset="-122"/>
-                <a:ea typeface="微软雅黑" panose="020B0503020204020204" pitchFamily="34" charset="-122"/>
-                <a:cs typeface="微软雅黑" panose="020B0503020204020204" pitchFamily="34" charset="-122"/>
-              </a:rPr>
-              <a:t>“</a:t>
-            </a:r>
-            <a:r>
-              <a:rPr lang="zh-CN" altLang="en-US" dirty="0" smtClean="0">
-                <a:latin typeface="微软雅黑" panose="020B0503020204020204" pitchFamily="34" charset="-122"/>
-                <a:ea typeface="微软雅黑" panose="020B0503020204020204" pitchFamily="34" charset="-122"/>
-                <a:cs typeface="微软雅黑" panose="020B0503020204020204" pitchFamily="34" charset="-122"/>
-              </a:rPr>
-              <a:t>交通</a:t>
-            </a:r>
-            <a:r>
-              <a:rPr lang="en-US" altLang="zh-CN" dirty="0" smtClean="0">
-                <a:latin typeface="微软雅黑" panose="020B0503020204020204" pitchFamily="34" charset="-122"/>
-                <a:ea typeface="微软雅黑" panose="020B0503020204020204" pitchFamily="34" charset="-122"/>
-                <a:cs typeface="微软雅黑" panose="020B0503020204020204" pitchFamily="34" charset="-122"/>
-              </a:rPr>
-              <a:t>”</a:t>
-            </a:r>
-            <a:r>
-              <a:rPr lang="zh-CN" altLang="en-US" dirty="0" smtClean="0">
-                <a:latin typeface="微软雅黑" panose="020B0503020204020204" pitchFamily="34" charset="-122"/>
-                <a:ea typeface="微软雅黑" panose="020B0503020204020204" pitchFamily="34" charset="-122"/>
-                <a:cs typeface="微软雅黑" panose="020B0503020204020204" pitchFamily="34" charset="-122"/>
-              </a:rPr>
-              <a:t>、</a:t>
-            </a:r>
-            <a:r>
-              <a:rPr lang="en-US" altLang="zh-CN" dirty="0" smtClean="0">
-                <a:latin typeface="微软雅黑" panose="020B0503020204020204" pitchFamily="34" charset="-122"/>
-                <a:ea typeface="微软雅黑" panose="020B0503020204020204" pitchFamily="34" charset="-122"/>
-                <a:cs typeface="微软雅黑" panose="020B0503020204020204" pitchFamily="34" charset="-122"/>
-              </a:rPr>
-              <a:t>“</a:t>
-            </a:r>
-            <a:r>
-              <a:rPr lang="zh-CN" altLang="en-US" dirty="0" smtClean="0">
-                <a:latin typeface="微软雅黑" panose="020B0503020204020204" pitchFamily="34" charset="-122"/>
-                <a:ea typeface="微软雅黑" panose="020B0503020204020204" pitchFamily="34" charset="-122"/>
-                <a:cs typeface="微软雅黑" panose="020B0503020204020204" pitchFamily="34" charset="-122"/>
-              </a:rPr>
-              <a:t>工具</a:t>
-            </a:r>
-            <a:r>
-              <a:rPr lang="en-US" altLang="zh-CN" dirty="0" smtClean="0">
-                <a:latin typeface="微软雅黑" panose="020B0503020204020204" pitchFamily="34" charset="-122"/>
-                <a:ea typeface="微软雅黑" panose="020B0503020204020204" pitchFamily="34" charset="-122"/>
-                <a:cs typeface="微软雅黑" panose="020B0503020204020204" pitchFamily="34" charset="-122"/>
-              </a:rPr>
-              <a:t>”</a:t>
-            </a:r>
-            <a:r>
-              <a:rPr lang="zh-CN" altLang="en-US" dirty="0" smtClean="0">
-                <a:latin typeface="微软雅黑" panose="020B0503020204020204" pitchFamily="34" charset="-122"/>
-                <a:ea typeface="微软雅黑" panose="020B0503020204020204" pitchFamily="34" charset="-122"/>
-                <a:cs typeface="微软雅黑" panose="020B0503020204020204" pitchFamily="34" charset="-122"/>
-              </a:rPr>
-              <a:t>、</a:t>
-            </a:r>
-            <a:r>
-              <a:rPr lang="en-US" altLang="zh-CN" dirty="0" smtClean="0">
-                <a:latin typeface="微软雅黑" panose="020B0503020204020204" pitchFamily="34" charset="-122"/>
-                <a:ea typeface="微软雅黑" panose="020B0503020204020204" pitchFamily="34" charset="-122"/>
-                <a:cs typeface="微软雅黑" panose="020B0503020204020204" pitchFamily="34" charset="-122"/>
-              </a:rPr>
-              <a:t>“</a:t>
-            </a:r>
-            <a:r>
-              <a:rPr lang="zh-CN" altLang="en-US" dirty="0" smtClean="0">
-                <a:latin typeface="微软雅黑" panose="020B0503020204020204" pitchFamily="34" charset="-122"/>
-                <a:ea typeface="微软雅黑" panose="020B0503020204020204" pitchFamily="34" charset="-122"/>
-                <a:cs typeface="微软雅黑" panose="020B0503020204020204" pitchFamily="34" charset="-122"/>
-              </a:rPr>
-              <a:t>未来</a:t>
-            </a:r>
-            <a:r>
-              <a:rPr lang="en-US" altLang="zh-CN" dirty="0" smtClean="0">
-                <a:latin typeface="微软雅黑" panose="020B0503020204020204" pitchFamily="34" charset="-122"/>
-                <a:ea typeface="微软雅黑" panose="020B0503020204020204" pitchFamily="34" charset="-122"/>
-                <a:cs typeface="微软雅黑" panose="020B0503020204020204" pitchFamily="34" charset="-122"/>
-              </a:rPr>
-              <a:t>”</a:t>
-            </a:r>
-            <a:r>
-              <a:rPr lang="zh-CN" altLang="en-US" dirty="0" smtClean="0">
-                <a:latin typeface="微软雅黑" panose="020B0503020204020204" pitchFamily="34" charset="-122"/>
-                <a:ea typeface="微软雅黑" panose="020B0503020204020204" pitchFamily="34" charset="-122"/>
-                <a:cs typeface="微软雅黑" panose="020B0503020204020204" pitchFamily="34" charset="-122"/>
-              </a:rPr>
-              <a:t>等常见组合。当模型进入推理阶段并遇到新句子</a:t>
-            </a:r>
-            <a:r>
-              <a:rPr lang="en-US" altLang="zh-CN" dirty="0" smtClean="0">
-                <a:latin typeface="微软雅黑" panose="020B0503020204020204" pitchFamily="34" charset="-122"/>
-                <a:ea typeface="微软雅黑" panose="020B0503020204020204" pitchFamily="34" charset="-122"/>
-                <a:cs typeface="微软雅黑" panose="020B0503020204020204" pitchFamily="34" charset="-122"/>
-              </a:rPr>
-              <a:t>“</a:t>
-            </a:r>
-            <a:r>
-              <a:rPr lang="zh-CN" altLang="en-US" dirty="0" smtClean="0">
-                <a:latin typeface="微软雅黑" panose="020B0503020204020204" pitchFamily="34" charset="-122"/>
-                <a:ea typeface="微软雅黑" panose="020B0503020204020204" pitchFamily="34" charset="-122"/>
-                <a:cs typeface="微软雅黑" panose="020B0503020204020204" pitchFamily="34" charset="-122"/>
-              </a:rPr>
-              <a:t>无人驾驶汽车</a:t>
-            </a:r>
-            <a:r>
-              <a:rPr lang="en-US" altLang="zh-CN" dirty="0" smtClean="0">
-                <a:latin typeface="微软雅黑" panose="020B0503020204020204" pitchFamily="34" charset="-122"/>
-                <a:ea typeface="微软雅黑" panose="020B0503020204020204" pitchFamily="34" charset="-122"/>
-                <a:cs typeface="微软雅黑" panose="020B0503020204020204" pitchFamily="34" charset="-122"/>
-              </a:rPr>
-              <a:t>”</a:t>
-            </a:r>
-            <a:r>
-              <a:rPr lang="zh-CN" altLang="en-US" dirty="0" smtClean="0">
-                <a:latin typeface="微软雅黑" panose="020B0503020204020204" pitchFamily="34" charset="-122"/>
-                <a:ea typeface="微软雅黑" panose="020B0503020204020204" pitchFamily="34" charset="-122"/>
-                <a:cs typeface="微软雅黑" panose="020B0503020204020204" pitchFamily="34" charset="-122"/>
-              </a:rPr>
-              <a:t>时，它会尝试多种可能的切分方式，比如</a:t>
-            </a:r>
-            <a:r>
-              <a:rPr lang="en-US" altLang="zh-CN" dirty="0" smtClean="0">
-                <a:latin typeface="微软雅黑" panose="020B0503020204020204" pitchFamily="34" charset="-122"/>
-                <a:ea typeface="微软雅黑" panose="020B0503020204020204" pitchFamily="34" charset="-122"/>
-                <a:cs typeface="微软雅黑" panose="020B0503020204020204" pitchFamily="34" charset="-122"/>
-              </a:rPr>
-              <a:t>“</a:t>
-            </a:r>
-            <a:r>
-              <a:rPr lang="zh-CN" altLang="en-US" dirty="0" smtClean="0">
-                <a:latin typeface="微软雅黑" panose="020B0503020204020204" pitchFamily="34" charset="-122"/>
-                <a:ea typeface="微软雅黑" panose="020B0503020204020204" pitchFamily="34" charset="-122"/>
-                <a:cs typeface="微软雅黑" panose="020B0503020204020204" pitchFamily="34" charset="-122"/>
-              </a:rPr>
-              <a:t>无</a:t>
-            </a:r>
-            <a:r>
-              <a:rPr lang="en-US" altLang="zh-CN" dirty="0" smtClean="0">
-                <a:latin typeface="微软雅黑" panose="020B0503020204020204" pitchFamily="34" charset="-122"/>
-                <a:ea typeface="微软雅黑" panose="020B0503020204020204" pitchFamily="34" charset="-122"/>
-                <a:cs typeface="微软雅黑" panose="020B0503020204020204" pitchFamily="34" charset="-122"/>
-              </a:rPr>
-              <a:t>/</a:t>
-            </a:r>
-            <a:r>
-              <a:rPr lang="zh-CN" altLang="en-US" dirty="0" smtClean="0">
-                <a:latin typeface="微软雅黑" panose="020B0503020204020204" pitchFamily="34" charset="-122"/>
-                <a:ea typeface="微软雅黑" panose="020B0503020204020204" pitchFamily="34" charset="-122"/>
-                <a:cs typeface="微软雅黑" panose="020B0503020204020204" pitchFamily="34" charset="-122"/>
-              </a:rPr>
-              <a:t>人</a:t>
-            </a:r>
-            <a:r>
-              <a:rPr lang="en-US" altLang="zh-CN" dirty="0" smtClean="0">
-                <a:latin typeface="微软雅黑" panose="020B0503020204020204" pitchFamily="34" charset="-122"/>
-                <a:ea typeface="微软雅黑" panose="020B0503020204020204" pitchFamily="34" charset="-122"/>
-                <a:cs typeface="微软雅黑" panose="020B0503020204020204" pitchFamily="34" charset="-122"/>
-              </a:rPr>
-              <a:t>/</a:t>
-            </a:r>
-            <a:r>
-              <a:rPr lang="zh-CN" altLang="en-US" dirty="0" smtClean="0">
-                <a:latin typeface="微软雅黑" panose="020B0503020204020204" pitchFamily="34" charset="-122"/>
-                <a:ea typeface="微软雅黑" panose="020B0503020204020204" pitchFamily="34" charset="-122"/>
-                <a:cs typeface="微软雅黑" panose="020B0503020204020204" pitchFamily="34" charset="-122"/>
-              </a:rPr>
-              <a:t>驾驶</a:t>
-            </a:r>
-            <a:r>
-              <a:rPr lang="en-US" altLang="zh-CN" dirty="0" smtClean="0">
-                <a:latin typeface="微软雅黑" panose="020B0503020204020204" pitchFamily="34" charset="-122"/>
-                <a:ea typeface="微软雅黑" panose="020B0503020204020204" pitchFamily="34" charset="-122"/>
-                <a:cs typeface="微软雅黑" panose="020B0503020204020204" pitchFamily="34" charset="-122"/>
-              </a:rPr>
-              <a:t>/</a:t>
-            </a:r>
-            <a:r>
-              <a:rPr lang="zh-CN" altLang="en-US" dirty="0" smtClean="0">
-                <a:latin typeface="微软雅黑" panose="020B0503020204020204" pitchFamily="34" charset="-122"/>
-                <a:ea typeface="微软雅黑" panose="020B0503020204020204" pitchFamily="34" charset="-122"/>
-                <a:cs typeface="微软雅黑" panose="020B0503020204020204" pitchFamily="34" charset="-122"/>
-              </a:rPr>
-              <a:t>汽车</a:t>
-            </a:r>
-            <a:r>
-              <a:rPr lang="en-US" altLang="zh-CN" dirty="0" smtClean="0">
-                <a:latin typeface="微软雅黑" panose="020B0503020204020204" pitchFamily="34" charset="-122"/>
-                <a:ea typeface="微软雅黑" panose="020B0503020204020204" pitchFamily="34" charset="-122"/>
-                <a:cs typeface="微软雅黑" panose="020B0503020204020204" pitchFamily="34" charset="-122"/>
-              </a:rPr>
-              <a:t>”</a:t>
-            </a:r>
-            <a:r>
-              <a:rPr lang="zh-CN" altLang="en-US" dirty="0" smtClean="0">
-                <a:latin typeface="微软雅黑" panose="020B0503020204020204" pitchFamily="34" charset="-122"/>
-                <a:ea typeface="微软雅黑" panose="020B0503020204020204" pitchFamily="34" charset="-122"/>
-                <a:cs typeface="微软雅黑" panose="020B0503020204020204" pitchFamily="34" charset="-122"/>
-              </a:rPr>
-              <a:t>、</a:t>
-            </a:r>
-            <a:endParaRPr lang="zh-CN" altLang="en-US" dirty="0" smtClean="0">
-              <a:latin typeface="微软雅黑" panose="020B0503020204020204" pitchFamily="34" charset="-122"/>
-              <a:ea typeface="微软雅黑" panose="020B0503020204020204" pitchFamily="34" charset="-122"/>
-              <a:cs typeface="微软雅黑" panose="020B0503020204020204" pitchFamily="34" charset="-122"/>
-            </a:endParaRPr>
-          </a:p>
-        </p:txBody>
-      </p:sp>
-      <p:sp>
-        <p:nvSpPr>
-          <p:cNvPr id="6" name="矩形 5"/>
-          <p:cNvSpPr/>
-          <p:nvPr/>
-        </p:nvSpPr>
-        <p:spPr>
-          <a:xfrm>
-            <a:off x="1954896" y="3657124"/>
-            <a:ext cx="8211454" cy="2991484"/>
-          </a:xfrm>
-          <a:prstGeom prst="rect">
-            <a:avLst/>
-          </a:prstGeom>
-          <a:noFill/>
-        </p:spPr>
-        <p:style>
-          <a:lnRef idx="2">
-            <a:schemeClr val="accent1">
-              <a:shade val="50000"/>
-            </a:schemeClr>
-          </a:lnRef>
-          <a:fillRef idx="1">
-            <a:schemeClr val="accent1"/>
-          </a:fillRef>
-          <a:effectRef idx="0">
-            <a:schemeClr val="accent1"/>
-          </a:effectRef>
-          <a:fontRef idx="minor">
-            <a:schemeClr val="lt1"/>
-          </a:fontRef>
-        </p:style>
-        <p:txBody>
-          <a:bodyPr rtlCol="0" anchor="ctr"/>
-          <a:lstStyle/>
-          <a:p>
-            <a:pPr algn="ctr"/>
-            <a:r>
-              <a:rPr lang="zh-CN" altLang="en-US" dirty="0">
-                <a:solidFill>
-                  <a:schemeClr val="tx1"/>
-                </a:solidFill>
-              </a:rPr>
-              <a:t>教材对步骤图片</a:t>
-            </a:r>
-            <a:endParaRPr lang="zh-CN" altLang="en-US" dirty="0">
-              <a:solidFill>
-                <a:schemeClr val="tx1"/>
-              </a:solidFill>
-            </a:endParaRPr>
-          </a:p>
-        </p:txBody>
-      </p:sp>
-      <p:sp>
-        <p:nvSpPr>
-          <p:cNvPr id="2" name="文本框 1"/>
-          <p:cNvSpPr txBox="1"/>
-          <p:nvPr/>
-        </p:nvSpPr>
-        <p:spPr>
-          <a:xfrm>
-            <a:off x="0" y="793750"/>
-            <a:ext cx="1351262" cy="583565"/>
-          </a:xfrm>
-          <a:prstGeom prst="rect">
-            <a:avLst/>
-          </a:prstGeom>
-          <a:noFill/>
-        </p:spPr>
-        <p:txBody>
-          <a:bodyPr wrap="square" rtlCol="0">
-            <a:spAutoFit/>
-            <a:scene3d>
-              <a:camera prst="orthographicFront"/>
-              <a:lightRig rig="threePt" dir="t"/>
-            </a:scene3d>
-            <a:sp3d contourW="12700"/>
-          </a:bodyPr>
-          <a:lstStyle/>
-          <a:p>
-            <a:pPr algn="ctr"/>
-            <a:r>
-              <a:rPr lang="en-US" sz="3200" dirty="0" smtClean="0">
-                <a:solidFill>
-                  <a:srgbClr val="3F396C"/>
-                </a:solidFill>
-                <a:latin typeface="思源宋体" panose="02020700000000000000" charset="-122"/>
-                <a:ea typeface="思源宋体" panose="02020700000000000000" charset="-122"/>
-              </a:rPr>
-              <a:t>04</a:t>
-            </a:r>
-            <a:endParaRPr lang="en-US" sz="3200" dirty="0" smtClean="0">
-              <a:solidFill>
-                <a:srgbClr val="3F396C"/>
-              </a:solidFill>
-              <a:latin typeface="思源宋体" panose="02020700000000000000" charset="-122"/>
-              <a:ea typeface="思源宋体" panose="02020700000000000000" charset="-122"/>
-            </a:endParaRPr>
-          </a:p>
-        </p:txBody>
-      </p:sp>
-      <p:sp>
-        <p:nvSpPr>
-          <p:cNvPr id="17" name="文本框 16"/>
-          <p:cNvSpPr txBox="1"/>
-          <p:nvPr/>
-        </p:nvSpPr>
-        <p:spPr>
-          <a:xfrm>
-            <a:off x="1278000" y="792000"/>
-            <a:ext cx="3932555" cy="583565"/>
-          </a:xfrm>
-          <a:prstGeom prst="rect">
-            <a:avLst/>
-          </a:prstGeom>
-          <a:noFill/>
-        </p:spPr>
-        <p:txBody>
-          <a:bodyPr wrap="square" rtlCol="0">
-            <a:spAutoFit/>
-            <a:scene3d>
-              <a:camera prst="orthographicFront"/>
-              <a:lightRig rig="threePt" dir="t"/>
-            </a:scene3d>
-            <a:sp3d contourW="12700"/>
-          </a:bodyPr>
-          <a:lstStyle>
-            <a:defPPr>
-              <a:defRPr lang="en-US"/>
-            </a:defPPr>
-            <a:lvl1pPr algn="ctr">
-              <a:defRPr sz="3200">
-                <a:gradFill>
-                  <a:gsLst>
-                    <a:gs pos="0">
-                      <a:schemeClr val="tx1">
-                        <a:lumMod val="50000"/>
-                        <a:lumOff val="50000"/>
-                      </a:schemeClr>
-                    </a:gs>
-                    <a:gs pos="100000">
-                      <a:schemeClr val="tx1">
-                        <a:lumMod val="85000"/>
-                        <a:lumOff val="15000"/>
-                      </a:schemeClr>
-                    </a:gs>
-                  </a:gsLst>
-                  <a:lin ang="5400000" scaled="1"/>
-                </a:gradFill>
-              </a:defRPr>
-            </a:lvl1pPr>
-          </a:lstStyle>
-          <a:p>
-            <a:pPr marL="0" marR="0" lvl="0" indent="0" algn="l" defTabSz="914400" rtl="0" eaLnBrk="1" fontAlgn="auto" latinLnBrk="0" hangingPunct="1">
-              <a:lnSpc>
-                <a:spcPct val="100000"/>
-              </a:lnSpc>
-              <a:spcBef>
-                <a:spcPts val="0"/>
-              </a:spcBef>
-              <a:spcAft>
-                <a:spcPts val="0"/>
-              </a:spcAft>
-              <a:buClrTx/>
-              <a:buSzTx/>
-              <a:buFontTx/>
-              <a:buNone/>
-              <a:defRPr/>
-            </a:pPr>
-            <a:r>
-              <a:rPr lang="zh-CN" altLang="en-US" b="1" dirty="0">
-                <a:solidFill>
-                  <a:schemeClr val="accent1">
-                    <a:lumMod val="75000"/>
-                  </a:schemeClr>
-                </a:solidFill>
-                <a:latin typeface="微软雅黑" panose="020B0503020204020204" pitchFamily="34" charset="-122"/>
-                <a:ea typeface="微软雅黑" panose="020B0503020204020204" pitchFamily="34" charset="-122"/>
-                <a:cs typeface="微软雅黑" panose="020B0503020204020204" pitchFamily="34" charset="-122"/>
-                <a:sym typeface="+mn-lt"/>
-              </a:rPr>
-              <a:t>任务</a:t>
-            </a:r>
-            <a:r>
-              <a:rPr lang="zh-CN" altLang="en-US" b="1" dirty="0">
-                <a:solidFill>
-                  <a:schemeClr val="accent1">
-                    <a:lumMod val="75000"/>
-                  </a:schemeClr>
-                </a:solidFill>
-                <a:latin typeface="微软雅黑" panose="020B0503020204020204" pitchFamily="34" charset="-122"/>
-                <a:ea typeface="微软雅黑" panose="020B0503020204020204" pitchFamily="34" charset="-122"/>
-                <a:cs typeface="微软雅黑" panose="020B0503020204020204" pitchFamily="34" charset="-122"/>
-                <a:sym typeface="+mn-lt"/>
-              </a:rPr>
-              <a:t>实施</a:t>
-            </a:r>
-            <a:endParaRPr lang="zh-CN" altLang="en-US" b="1" dirty="0">
-              <a:solidFill>
-                <a:schemeClr val="accent1">
-                  <a:lumMod val="75000"/>
-                </a:schemeClr>
-              </a:solidFill>
-              <a:latin typeface="微软雅黑" panose="020B0503020204020204" pitchFamily="34" charset="-122"/>
-              <a:ea typeface="微软雅黑" panose="020B0503020204020204" pitchFamily="34" charset="-122"/>
-              <a:cs typeface="微软雅黑" panose="020B0503020204020204" pitchFamily="34" charset="-122"/>
-              <a:sym typeface="+mn-lt"/>
-            </a:endParaRPr>
-          </a:p>
-        </p:txBody>
-      </p:sp>
-    </p:spTree>
-  </p:cSld>
-  <p:clrMapOvr>
-    <a:masterClrMapping/>
-  </p:clrMapOvr>
-</p:sld>
-</file>
-
-<file path=ppt/slides/slide13.xml><?xml version="1.0" encoding="utf-8"?>
-<p:sld xmlns:a="http://schemas.openxmlformats.org/drawingml/2006/main" xmlns:r="http://schemas.openxmlformats.org/officeDocument/2006/relationships" xmlns:p="http://schemas.openxmlformats.org/presentationml/2006/main">
-  <p:cSld>
-    <p:spTree>
-      <p:nvGrpSpPr>
-        <p:cNvPr id="1" name=""/>
-        <p:cNvGrpSpPr/>
-        <p:nvPr/>
-      </p:nvGrpSpPr>
-      <p:grpSpPr>
-        <a:xfrm>
-          <a:off x="0" y="0"/>
-          <a:ext cx="0" cy="0"/>
-          <a:chOff x="0" y="0"/>
-          <a:chExt cx="0" cy="0"/>
-        </a:xfrm>
-      </p:grpSpPr>
-      <p:sp>
-        <p:nvSpPr>
-          <p:cNvPr id="3" name="文本框 2"/>
-          <p:cNvSpPr txBox="1"/>
-          <p:nvPr/>
-        </p:nvSpPr>
-        <p:spPr>
-          <a:xfrm>
-            <a:off x="155575" y="1777365"/>
-            <a:ext cx="5502275" cy="4629150"/>
-          </a:xfrm>
-          <a:prstGeom prst="rect">
-            <a:avLst/>
-          </a:prstGeom>
-          <a:noFill/>
-        </p:spPr>
-        <p:txBody>
-          <a:bodyPr wrap="square" rtlCol="0" anchor="t">
-            <a:noAutofit/>
-          </a:bodyPr>
-          <a:lstStyle/>
-          <a:p>
-            <a:pPr indent="457200" fontAlgn="auto">
-              <a:lnSpc>
-                <a:spcPct val="150000"/>
-              </a:lnSpc>
-            </a:pPr>
-            <a:r>
-              <a:rPr lang="en-US" dirty="0" smtClean="0">
-                <a:latin typeface="微软雅黑" panose="020B0503020204020204" pitchFamily="34" charset="-122"/>
-                <a:ea typeface="微软雅黑" panose="020B0503020204020204" pitchFamily="34" charset="-122"/>
-                <a:cs typeface="微软雅黑" panose="020B0503020204020204" pitchFamily="34" charset="-122"/>
-              </a:rPr>
-              <a:t>“</a:t>
-            </a:r>
-            <a:r>
-              <a:rPr lang="zh-CN" altLang="en-US" dirty="0" smtClean="0">
-                <a:latin typeface="微软雅黑" panose="020B0503020204020204" pitchFamily="34" charset="-122"/>
-                <a:ea typeface="微软雅黑" panose="020B0503020204020204" pitchFamily="34" charset="-122"/>
-                <a:cs typeface="微软雅黑" panose="020B0503020204020204" pitchFamily="34" charset="-122"/>
-              </a:rPr>
-              <a:t>无人</a:t>
-            </a:r>
-            <a:r>
-              <a:rPr lang="en-US" altLang="zh-CN" dirty="0" smtClean="0">
-                <a:latin typeface="微软雅黑" panose="020B0503020204020204" pitchFamily="34" charset="-122"/>
-                <a:ea typeface="微软雅黑" panose="020B0503020204020204" pitchFamily="34" charset="-122"/>
-                <a:cs typeface="微软雅黑" panose="020B0503020204020204" pitchFamily="34" charset="-122"/>
-              </a:rPr>
-              <a:t>/</a:t>
-            </a:r>
-            <a:r>
-              <a:rPr lang="zh-CN" altLang="en-US" dirty="0" smtClean="0">
-                <a:latin typeface="微软雅黑" panose="020B0503020204020204" pitchFamily="34" charset="-122"/>
-                <a:ea typeface="微软雅黑" panose="020B0503020204020204" pitchFamily="34" charset="-122"/>
-                <a:cs typeface="微软雅黑" panose="020B0503020204020204" pitchFamily="34" charset="-122"/>
-              </a:rPr>
-              <a:t>驾驶</a:t>
-            </a:r>
-            <a:r>
-              <a:rPr lang="en-US" altLang="zh-CN" dirty="0" smtClean="0">
-                <a:latin typeface="微软雅黑" panose="020B0503020204020204" pitchFamily="34" charset="-122"/>
-                <a:ea typeface="微软雅黑" panose="020B0503020204020204" pitchFamily="34" charset="-122"/>
-                <a:cs typeface="微软雅黑" panose="020B0503020204020204" pitchFamily="34" charset="-122"/>
-              </a:rPr>
-              <a:t>/</a:t>
-            </a:r>
-            <a:r>
-              <a:rPr lang="zh-CN" altLang="en-US" dirty="0" smtClean="0">
-                <a:latin typeface="微软雅黑" panose="020B0503020204020204" pitchFamily="34" charset="-122"/>
-                <a:ea typeface="微软雅黑" panose="020B0503020204020204" pitchFamily="34" charset="-122"/>
-                <a:cs typeface="微软雅黑" panose="020B0503020204020204" pitchFamily="34" charset="-122"/>
-              </a:rPr>
-              <a:t>汽车</a:t>
-            </a:r>
-            <a:r>
-              <a:rPr lang="en-US" altLang="zh-CN" dirty="0" smtClean="0">
-                <a:latin typeface="微软雅黑" panose="020B0503020204020204" pitchFamily="34" charset="-122"/>
-                <a:ea typeface="微软雅黑" panose="020B0503020204020204" pitchFamily="34" charset="-122"/>
-                <a:cs typeface="微软雅黑" panose="020B0503020204020204" pitchFamily="34" charset="-122"/>
-              </a:rPr>
-              <a:t>”</a:t>
-            </a:r>
-            <a:r>
-              <a:rPr lang="zh-CN" altLang="en-US" dirty="0" smtClean="0">
-                <a:latin typeface="微软雅黑" panose="020B0503020204020204" pitchFamily="34" charset="-122"/>
-                <a:ea typeface="微软雅黑" panose="020B0503020204020204" pitchFamily="34" charset="-122"/>
-                <a:cs typeface="微软雅黑" panose="020B0503020204020204" pitchFamily="34" charset="-122"/>
-              </a:rPr>
-              <a:t>或</a:t>
-            </a:r>
-            <a:r>
-              <a:rPr lang="en-US" altLang="zh-CN" dirty="0" smtClean="0">
-                <a:latin typeface="微软雅黑" panose="020B0503020204020204" pitchFamily="34" charset="-122"/>
-                <a:ea typeface="微软雅黑" panose="020B0503020204020204" pitchFamily="34" charset="-122"/>
-                <a:cs typeface="微软雅黑" panose="020B0503020204020204" pitchFamily="34" charset="-122"/>
-              </a:rPr>
-              <a:t>“</a:t>
-            </a:r>
-            <a:r>
-              <a:rPr lang="zh-CN" altLang="en-US" dirty="0" smtClean="0">
-                <a:latin typeface="微软雅黑" panose="020B0503020204020204" pitchFamily="34" charset="-122"/>
-                <a:ea typeface="微软雅黑" panose="020B0503020204020204" pitchFamily="34" charset="-122"/>
-                <a:cs typeface="微软雅黑" panose="020B0503020204020204" pitchFamily="34" charset="-122"/>
-              </a:rPr>
-              <a:t>无人驾驶</a:t>
-            </a:r>
-            <a:r>
-              <a:rPr lang="en-US" altLang="zh-CN" dirty="0" smtClean="0">
-                <a:latin typeface="微软雅黑" panose="020B0503020204020204" pitchFamily="34" charset="-122"/>
-                <a:ea typeface="微软雅黑" panose="020B0503020204020204" pitchFamily="34" charset="-122"/>
-                <a:cs typeface="微软雅黑" panose="020B0503020204020204" pitchFamily="34" charset="-122"/>
-              </a:rPr>
-              <a:t>/</a:t>
-            </a:r>
-            <a:r>
-              <a:rPr lang="zh-CN" altLang="en-US" dirty="0" smtClean="0">
-                <a:latin typeface="微软雅黑" panose="020B0503020204020204" pitchFamily="34" charset="-122"/>
-                <a:ea typeface="微软雅黑" panose="020B0503020204020204" pitchFamily="34" charset="-122"/>
-                <a:cs typeface="微软雅黑" panose="020B0503020204020204" pitchFamily="34" charset="-122"/>
-              </a:rPr>
-              <a:t>汽车</a:t>
-            </a:r>
-            <a:r>
-              <a:rPr lang="en-US" altLang="zh-CN" dirty="0" smtClean="0">
-                <a:latin typeface="微软雅黑" panose="020B0503020204020204" pitchFamily="34" charset="-122"/>
-                <a:ea typeface="微软雅黑" panose="020B0503020204020204" pitchFamily="34" charset="-122"/>
-                <a:cs typeface="微软雅黑" panose="020B0503020204020204" pitchFamily="34" charset="-122"/>
-              </a:rPr>
-              <a:t>”</a:t>
-            </a:r>
-            <a:r>
-              <a:rPr lang="zh-CN" altLang="en-US" dirty="0" smtClean="0">
-                <a:latin typeface="微软雅黑" panose="020B0503020204020204" pitchFamily="34" charset="-122"/>
-                <a:ea typeface="微软雅黑" panose="020B0503020204020204" pitchFamily="34" charset="-122"/>
-                <a:cs typeface="微软雅黑" panose="020B0503020204020204" pitchFamily="34" charset="-122"/>
-              </a:rPr>
-              <a:t>等，然后根据训练阶段学到的概率分布，选择概率最高的切分结果。由于</a:t>
-            </a:r>
-            <a:r>
-              <a:rPr lang="en-US" altLang="zh-CN" dirty="0" smtClean="0">
-                <a:latin typeface="微软雅黑" panose="020B0503020204020204" pitchFamily="34" charset="-122"/>
-                <a:ea typeface="微软雅黑" panose="020B0503020204020204" pitchFamily="34" charset="-122"/>
-                <a:cs typeface="微软雅黑" panose="020B0503020204020204" pitchFamily="34" charset="-122"/>
-              </a:rPr>
-              <a:t>“</a:t>
-            </a:r>
-            <a:r>
-              <a:rPr lang="zh-CN" altLang="en-US" dirty="0" smtClean="0">
-                <a:latin typeface="微软雅黑" panose="020B0503020204020204" pitchFamily="34" charset="-122"/>
-                <a:ea typeface="微软雅黑" panose="020B0503020204020204" pitchFamily="34" charset="-122"/>
-                <a:cs typeface="微软雅黑" panose="020B0503020204020204" pitchFamily="34" charset="-122"/>
-              </a:rPr>
-              <a:t>无人</a:t>
-            </a:r>
-            <a:r>
-              <a:rPr lang="en-US" altLang="zh-CN" dirty="0" smtClean="0">
-                <a:latin typeface="微软雅黑" panose="020B0503020204020204" pitchFamily="34" charset="-122"/>
-                <a:ea typeface="微软雅黑" panose="020B0503020204020204" pitchFamily="34" charset="-122"/>
-                <a:cs typeface="微软雅黑" panose="020B0503020204020204" pitchFamily="34" charset="-122"/>
-              </a:rPr>
-              <a:t>”</a:t>
-            </a:r>
-            <a:r>
-              <a:rPr lang="zh-CN" altLang="en-US" dirty="0" smtClean="0">
-                <a:latin typeface="微软雅黑" panose="020B0503020204020204" pitchFamily="34" charset="-122"/>
-                <a:ea typeface="微软雅黑" panose="020B0503020204020204" pitchFamily="34" charset="-122"/>
-                <a:cs typeface="微软雅黑" panose="020B0503020204020204" pitchFamily="34" charset="-122"/>
-              </a:rPr>
-              <a:t>、</a:t>
-            </a:r>
-            <a:r>
-              <a:rPr lang="en-US" altLang="zh-CN" dirty="0" smtClean="0">
-                <a:latin typeface="微软雅黑" panose="020B0503020204020204" pitchFamily="34" charset="-122"/>
-                <a:ea typeface="微软雅黑" panose="020B0503020204020204" pitchFamily="34" charset="-122"/>
-                <a:cs typeface="微软雅黑" panose="020B0503020204020204" pitchFamily="34" charset="-122"/>
-              </a:rPr>
-              <a:t>“</a:t>
-            </a:r>
-            <a:r>
-              <a:rPr lang="zh-CN" altLang="en-US" dirty="0" smtClean="0">
-                <a:latin typeface="微软雅黑" panose="020B0503020204020204" pitchFamily="34" charset="-122"/>
-                <a:ea typeface="微软雅黑" panose="020B0503020204020204" pitchFamily="34" charset="-122"/>
-                <a:cs typeface="微软雅黑" panose="020B0503020204020204" pitchFamily="34" charset="-122"/>
-              </a:rPr>
-              <a:t>驾驶</a:t>
-            </a:r>
-            <a:r>
-              <a:rPr lang="en-US" altLang="zh-CN" dirty="0" smtClean="0">
-                <a:latin typeface="微软雅黑" panose="020B0503020204020204" pitchFamily="34" charset="-122"/>
-                <a:ea typeface="微软雅黑" panose="020B0503020204020204" pitchFamily="34" charset="-122"/>
-                <a:cs typeface="微软雅黑" panose="020B0503020204020204" pitchFamily="34" charset="-122"/>
-              </a:rPr>
-              <a:t>”</a:t>
-            </a:r>
-            <a:r>
-              <a:rPr lang="zh-CN" altLang="en-US" dirty="0" smtClean="0">
-                <a:latin typeface="微软雅黑" panose="020B0503020204020204" pitchFamily="34" charset="-122"/>
-                <a:ea typeface="微软雅黑" panose="020B0503020204020204" pitchFamily="34" charset="-122"/>
-                <a:cs typeface="微软雅黑" panose="020B0503020204020204" pitchFamily="34" charset="-122"/>
-              </a:rPr>
-              <a:t>和</a:t>
-            </a:r>
-            <a:r>
-              <a:rPr lang="en-US" altLang="zh-CN" dirty="0" smtClean="0">
-                <a:latin typeface="微软雅黑" panose="020B0503020204020204" pitchFamily="34" charset="-122"/>
-                <a:ea typeface="微软雅黑" panose="020B0503020204020204" pitchFamily="34" charset="-122"/>
-                <a:cs typeface="微软雅黑" panose="020B0503020204020204" pitchFamily="34" charset="-122"/>
-              </a:rPr>
-              <a:t>“</a:t>
-            </a:r>
-            <a:r>
-              <a:rPr lang="zh-CN" altLang="en-US" dirty="0" smtClean="0">
-                <a:latin typeface="微软雅黑" panose="020B0503020204020204" pitchFamily="34" charset="-122"/>
-                <a:ea typeface="微软雅黑" panose="020B0503020204020204" pitchFamily="34" charset="-122"/>
-                <a:cs typeface="微软雅黑" panose="020B0503020204020204" pitchFamily="34" charset="-122"/>
-              </a:rPr>
-              <a:t>汽车</a:t>
-            </a:r>
-            <a:r>
-              <a:rPr lang="en-US" altLang="zh-CN" dirty="0" smtClean="0">
-                <a:latin typeface="微软雅黑" panose="020B0503020204020204" pitchFamily="34" charset="-122"/>
-                <a:ea typeface="微软雅黑" panose="020B0503020204020204" pitchFamily="34" charset="-122"/>
-                <a:cs typeface="微软雅黑" panose="020B0503020204020204" pitchFamily="34" charset="-122"/>
-              </a:rPr>
-              <a:t>”</a:t>
-            </a:r>
-            <a:r>
-              <a:rPr lang="zh-CN" altLang="en-US" dirty="0" smtClean="0">
-                <a:latin typeface="微软雅黑" panose="020B0503020204020204" pitchFamily="34" charset="-122"/>
-                <a:ea typeface="微软雅黑" panose="020B0503020204020204" pitchFamily="34" charset="-122"/>
-                <a:cs typeface="微软雅黑" panose="020B0503020204020204" pitchFamily="34" charset="-122"/>
-              </a:rPr>
-              <a:t>在训练语料中频繁出现，模型最终会选择将它们各自作为一个子词进行切分，得到</a:t>
-            </a:r>
-            <a:r>
-              <a:rPr lang="en-US" altLang="zh-CN" dirty="0" smtClean="0">
-                <a:latin typeface="微软雅黑" panose="020B0503020204020204" pitchFamily="34" charset="-122"/>
-                <a:ea typeface="微软雅黑" panose="020B0503020204020204" pitchFamily="34" charset="-122"/>
-                <a:cs typeface="微软雅黑" panose="020B0503020204020204" pitchFamily="34" charset="-122"/>
-              </a:rPr>
-              <a:t>“</a:t>
-            </a:r>
-            <a:r>
-              <a:rPr lang="zh-CN" altLang="en-US" dirty="0" smtClean="0">
-                <a:latin typeface="微软雅黑" panose="020B0503020204020204" pitchFamily="34" charset="-122"/>
-                <a:ea typeface="微软雅黑" panose="020B0503020204020204" pitchFamily="34" charset="-122"/>
-                <a:cs typeface="微软雅黑" panose="020B0503020204020204" pitchFamily="34" charset="-122"/>
-              </a:rPr>
-              <a:t>无人</a:t>
-            </a:r>
-            <a:r>
-              <a:rPr lang="en-US" altLang="zh-CN" dirty="0" smtClean="0">
-                <a:latin typeface="微软雅黑" panose="020B0503020204020204" pitchFamily="34" charset="-122"/>
-                <a:ea typeface="微软雅黑" panose="020B0503020204020204" pitchFamily="34" charset="-122"/>
-                <a:cs typeface="微软雅黑" panose="020B0503020204020204" pitchFamily="34" charset="-122"/>
-              </a:rPr>
-              <a:t>”</a:t>
-            </a:r>
-            <a:r>
-              <a:rPr lang="zh-CN" altLang="en-US" dirty="0" smtClean="0">
-                <a:latin typeface="微软雅黑" panose="020B0503020204020204" pitchFamily="34" charset="-122"/>
-                <a:ea typeface="微软雅黑" panose="020B0503020204020204" pitchFamily="34" charset="-122"/>
-                <a:cs typeface="微软雅黑" panose="020B0503020204020204" pitchFamily="34" charset="-122"/>
-              </a:rPr>
-              <a:t>、</a:t>
-            </a:r>
-            <a:r>
-              <a:rPr lang="en-US" altLang="zh-CN" dirty="0" smtClean="0">
-                <a:latin typeface="微软雅黑" panose="020B0503020204020204" pitchFamily="34" charset="-122"/>
-                <a:ea typeface="微软雅黑" panose="020B0503020204020204" pitchFamily="34" charset="-122"/>
-                <a:cs typeface="微软雅黑" panose="020B0503020204020204" pitchFamily="34" charset="-122"/>
-              </a:rPr>
-              <a:t>“</a:t>
-            </a:r>
-            <a:r>
-              <a:rPr lang="zh-CN" altLang="en-US" dirty="0" smtClean="0">
-                <a:latin typeface="微软雅黑" panose="020B0503020204020204" pitchFamily="34" charset="-122"/>
-                <a:ea typeface="微软雅黑" panose="020B0503020204020204" pitchFamily="34" charset="-122"/>
-                <a:cs typeface="微软雅黑" panose="020B0503020204020204" pitchFamily="34" charset="-122"/>
-              </a:rPr>
-              <a:t>驾驶</a:t>
-            </a:r>
-            <a:r>
-              <a:rPr lang="en-US" altLang="zh-CN" dirty="0" smtClean="0">
-                <a:latin typeface="微软雅黑" panose="020B0503020204020204" pitchFamily="34" charset="-122"/>
-                <a:ea typeface="微软雅黑" panose="020B0503020204020204" pitchFamily="34" charset="-122"/>
-                <a:cs typeface="微软雅黑" panose="020B0503020204020204" pitchFamily="34" charset="-122"/>
-              </a:rPr>
-              <a:t>”</a:t>
-            </a:r>
-            <a:r>
-              <a:rPr lang="zh-CN" altLang="en-US" dirty="0" smtClean="0">
-                <a:latin typeface="微软雅黑" panose="020B0503020204020204" pitchFamily="34" charset="-122"/>
-                <a:ea typeface="微软雅黑" panose="020B0503020204020204" pitchFamily="34" charset="-122"/>
-                <a:cs typeface="微软雅黑" panose="020B0503020204020204" pitchFamily="34" charset="-122"/>
-              </a:rPr>
-              <a:t>、</a:t>
-            </a:r>
-            <a:r>
-              <a:rPr lang="en-US" altLang="zh-CN" dirty="0" smtClean="0">
-                <a:latin typeface="微软雅黑" panose="020B0503020204020204" pitchFamily="34" charset="-122"/>
-                <a:ea typeface="微软雅黑" panose="020B0503020204020204" pitchFamily="34" charset="-122"/>
-                <a:cs typeface="微软雅黑" panose="020B0503020204020204" pitchFamily="34" charset="-122"/>
-              </a:rPr>
-              <a:t>“</a:t>
-            </a:r>
-            <a:r>
-              <a:rPr lang="zh-CN" altLang="en-US" dirty="0" smtClean="0">
-                <a:latin typeface="微软雅黑" panose="020B0503020204020204" pitchFamily="34" charset="-122"/>
-                <a:ea typeface="微软雅黑" panose="020B0503020204020204" pitchFamily="34" charset="-122"/>
-                <a:cs typeface="微软雅黑" panose="020B0503020204020204" pitchFamily="34" charset="-122"/>
-              </a:rPr>
-              <a:t>汽车</a:t>
-            </a:r>
-            <a:r>
-              <a:rPr lang="en-US" altLang="zh-CN" dirty="0" smtClean="0">
-                <a:latin typeface="微软雅黑" panose="020B0503020204020204" pitchFamily="34" charset="-122"/>
-                <a:ea typeface="微软雅黑" panose="020B0503020204020204" pitchFamily="34" charset="-122"/>
-                <a:cs typeface="微软雅黑" panose="020B0503020204020204" pitchFamily="34" charset="-122"/>
-              </a:rPr>
-              <a:t>”</a:t>
-            </a:r>
-            <a:r>
-              <a:rPr lang="zh-CN" altLang="en-US" dirty="0" smtClean="0">
-                <a:latin typeface="微软雅黑" panose="020B0503020204020204" pitchFamily="34" charset="-122"/>
-                <a:ea typeface="微软雅黑" panose="020B0503020204020204" pitchFamily="34" charset="-122"/>
-                <a:cs typeface="微软雅黑" panose="020B0503020204020204" pitchFamily="34" charset="-122"/>
-              </a:rPr>
-              <a:t>这样的分词结果。</a:t>
-            </a:r>
-            <a:r>
-              <a:rPr lang="en-US" altLang="zh-CN" dirty="0" smtClean="0">
-                <a:latin typeface="微软雅黑" panose="020B0503020204020204" pitchFamily="34" charset="-122"/>
-                <a:ea typeface="微软雅黑" panose="020B0503020204020204" pitchFamily="34" charset="-122"/>
-                <a:cs typeface="微软雅黑" panose="020B0503020204020204" pitchFamily="34" charset="-122"/>
-              </a:rPr>
-              <a:t>
-</a:t>
-            </a:r>
-            <a:r>
-              <a:rPr lang="zh-CN" altLang="en-US" dirty="0" smtClean="0">
-                <a:latin typeface="微软雅黑" panose="020B0503020204020204" pitchFamily="34" charset="-122"/>
-                <a:ea typeface="微软雅黑" panose="020B0503020204020204" pitchFamily="34" charset="-122"/>
-                <a:cs typeface="微软雅黑" panose="020B0503020204020204" pitchFamily="34" charset="-122"/>
-              </a:rPr>
-              <a:t>利用</a:t>
-            </a:r>
-            <a:r>
-              <a:rPr lang="en-US" altLang="zh-CN" dirty="0" smtClean="0">
-                <a:latin typeface="微软雅黑" panose="020B0503020204020204" pitchFamily="34" charset="-122"/>
-                <a:ea typeface="微软雅黑" panose="020B0503020204020204" pitchFamily="34" charset="-122"/>
-                <a:cs typeface="微软雅黑" panose="020B0503020204020204" pitchFamily="34" charset="-122"/>
-              </a:rPr>
-              <a:t>Qwen tokenizer</a:t>
-            </a:r>
-            <a:r>
-              <a:rPr lang="zh-CN" altLang="en-US" dirty="0" smtClean="0">
-                <a:latin typeface="微软雅黑" panose="020B0503020204020204" pitchFamily="34" charset="-122"/>
-                <a:ea typeface="微软雅黑" panose="020B0503020204020204" pitchFamily="34" charset="-122"/>
-                <a:cs typeface="微软雅黑" panose="020B0503020204020204" pitchFamily="34" charset="-122"/>
-              </a:rPr>
-              <a:t>进行中文分词</a:t>
-            </a:r>
-            <a:r>
-              <a:rPr lang="en-US" altLang="zh-CN" dirty="0" smtClean="0">
-                <a:latin typeface="微软雅黑" panose="020B0503020204020204" pitchFamily="34" charset="-122"/>
-                <a:ea typeface="微软雅黑" panose="020B0503020204020204" pitchFamily="34" charset="-122"/>
-                <a:cs typeface="微软雅黑" panose="020B0503020204020204" pitchFamily="34" charset="-122"/>
-              </a:rPr>
-              <a:t>
-</a:t>
-            </a:r>
-            <a:r>
-              <a:rPr lang="zh-CN" altLang="en-US" dirty="0" smtClean="0">
-                <a:latin typeface="微软雅黑" panose="020B0503020204020204" pitchFamily="34" charset="-122"/>
-                <a:ea typeface="微软雅黑" panose="020B0503020204020204" pitchFamily="34" charset="-122"/>
-                <a:cs typeface="微软雅黑" panose="020B0503020204020204" pitchFamily="34" charset="-122"/>
-              </a:rPr>
-              <a:t>执行该脚本：</a:t>
-            </a:r>
-            <a:r>
-              <a:rPr lang="en-US" altLang="zh-CN" dirty="0" smtClean="0">
-                <a:latin typeface="微软雅黑" panose="020B0503020204020204" pitchFamily="34" charset="-122"/>
-                <a:ea typeface="微软雅黑" panose="020B0503020204020204" pitchFamily="34" charset="-122"/>
-                <a:cs typeface="微软雅黑" panose="020B0503020204020204" pitchFamily="34" charset="-122"/>
-              </a:rPr>
-              <a:t>
-</a:t>
-            </a:r>
-            <a:r>
-              <a:rPr lang="zh-CN" altLang="en-US" dirty="0" smtClean="0">
-                <a:latin typeface="微软雅黑" panose="020B0503020204020204" pitchFamily="34" charset="-122"/>
-                <a:ea typeface="微软雅黑" panose="020B0503020204020204" pitchFamily="34" charset="-122"/>
-                <a:cs typeface="微软雅黑" panose="020B0503020204020204" pitchFamily="34" charset="-122"/>
-              </a:rPr>
-              <a:t>得到如图</a:t>
-            </a:r>
-            <a:r>
-              <a:rPr lang="en-US" altLang="zh-CN" dirty="0" smtClean="0">
-                <a:latin typeface="微软雅黑" panose="020B0503020204020204" pitchFamily="34" charset="-122"/>
-                <a:ea typeface="微软雅黑" panose="020B0503020204020204" pitchFamily="34" charset="-122"/>
-                <a:cs typeface="微软雅黑" panose="020B0503020204020204" pitchFamily="34" charset="-122"/>
-              </a:rPr>
-              <a:t> 1-3-5</a:t>
-            </a:r>
-            <a:r>
-              <a:rPr lang="zh-CN" altLang="en-US" dirty="0" smtClean="0">
-                <a:latin typeface="微软雅黑" panose="020B0503020204020204" pitchFamily="34" charset="-122"/>
-                <a:ea typeface="微软雅黑" panose="020B0503020204020204" pitchFamily="34" charset="-122"/>
-                <a:cs typeface="微软雅黑" panose="020B0503020204020204" pitchFamily="34" charset="-122"/>
-              </a:rPr>
-              <a:t>分词结果：</a:t>
-            </a:r>
-            <a:r>
-              <a:rPr lang="en-US" altLang="zh-CN" dirty="0" smtClean="0">
-                <a:latin typeface="微软雅黑" panose="020B0503020204020204" pitchFamily="34" charset="-122"/>
-                <a:ea typeface="微软雅黑" panose="020B0503020204020204" pitchFamily="34" charset="-122"/>
-                <a:cs typeface="微软雅黑" panose="020B0503020204020204" pitchFamily="34" charset="-122"/>
-              </a:rPr>
-              <a:t>
-</a:t>
-            </a:r>
-            <a:r>
-              <a:rPr lang="zh-CN" altLang="en-US" dirty="0" smtClean="0">
-                <a:latin typeface="微软雅黑" panose="020B0503020204020204" pitchFamily="34" charset="-122"/>
-                <a:ea typeface="微软雅黑" panose="020B0503020204020204" pitchFamily="34" charset="-122"/>
-                <a:cs typeface="微软雅黑" panose="020B0503020204020204" pitchFamily="34" charset="-122"/>
-              </a:rPr>
-              <a:t>图</a:t>
-            </a:r>
-            <a:r>
-              <a:rPr lang="en-US" altLang="zh-CN" dirty="0" smtClean="0">
-                <a:latin typeface="微软雅黑" panose="020B0503020204020204" pitchFamily="34" charset="-122"/>
-                <a:ea typeface="微软雅黑" panose="020B0503020204020204" pitchFamily="34" charset="-122"/>
-                <a:cs typeface="微软雅黑" panose="020B0503020204020204" pitchFamily="34" charset="-122"/>
-              </a:rPr>
-              <a:t> 1-3-5 Qwen tokenizer</a:t>
-            </a:r>
-            <a:r>
-              <a:rPr lang="zh-CN" altLang="en-US" dirty="0" smtClean="0">
-                <a:latin typeface="微软雅黑" panose="020B0503020204020204" pitchFamily="34" charset="-122"/>
-                <a:ea typeface="微软雅黑" panose="020B0503020204020204" pitchFamily="34" charset="-122"/>
-                <a:cs typeface="微软雅黑" panose="020B0503020204020204" pitchFamily="34" charset="-122"/>
-              </a:rPr>
-              <a:t>分词结果</a:t>
-            </a:r>
-            <a:r>
-              <a:rPr lang="en-US" altLang="zh-CN" dirty="0" smtClean="0">
-                <a:latin typeface="微软雅黑" panose="020B0503020204020204" pitchFamily="34" charset="-122"/>
-                <a:ea typeface="微软雅黑" panose="020B0503020204020204" pitchFamily="34" charset="-122"/>
-                <a:cs typeface="微软雅黑" panose="020B0503020204020204" pitchFamily="34" charset="-122"/>
-              </a:rPr>
-              <a:t>
-</a:t>
-            </a:r>
-            <a:r>
-              <a:rPr lang="zh-CN" altLang="en-US" dirty="0" smtClean="0">
-                <a:latin typeface="微软雅黑" panose="020B0503020204020204" pitchFamily="34" charset="-122"/>
-                <a:ea typeface="微软雅黑" panose="020B0503020204020204" pitchFamily="34" charset="-122"/>
-                <a:cs typeface="微软雅黑" panose="020B0503020204020204" pitchFamily="34" charset="-122"/>
-              </a:rPr>
-              <a:t>可以看出</a:t>
-            </a:r>
-            <a:r>
-              <a:rPr lang="en-US" altLang="zh-CN" dirty="0" smtClean="0">
-                <a:latin typeface="微软雅黑" panose="020B0503020204020204" pitchFamily="34" charset="-122"/>
-                <a:ea typeface="微软雅黑" panose="020B0503020204020204" pitchFamily="34" charset="-122"/>
-                <a:cs typeface="微软雅黑" panose="020B0503020204020204" pitchFamily="34" charset="-122"/>
-              </a:rPr>
-              <a:t>Qwen</a:t>
-            </a:r>
-            <a:r>
-              <a:rPr lang="zh-CN" altLang="en-US" dirty="0" smtClean="0">
-                <a:latin typeface="微软雅黑" panose="020B0503020204020204" pitchFamily="34" charset="-122"/>
-                <a:ea typeface="微软雅黑" panose="020B0503020204020204" pitchFamily="34" charset="-122"/>
-                <a:cs typeface="微软雅黑" panose="020B0503020204020204" pitchFamily="34" charset="-122"/>
-              </a:rPr>
-              <a:t>分词器得到的分词结果，能够较好的将</a:t>
-            </a:r>
-            <a:r>
-              <a:rPr lang="en-US" altLang="zh-CN" dirty="0" smtClean="0">
-                <a:latin typeface="微软雅黑" panose="020B0503020204020204" pitchFamily="34" charset="-122"/>
-                <a:ea typeface="微软雅黑" panose="020B0503020204020204" pitchFamily="34" charset="-122"/>
-                <a:cs typeface="微软雅黑" panose="020B0503020204020204" pitchFamily="34" charset="-122"/>
-              </a:rPr>
-              <a:t>“</a:t>
-            </a:r>
-            <a:r>
-              <a:rPr lang="zh-CN" altLang="en-US" dirty="0" smtClean="0">
-                <a:latin typeface="微软雅黑" panose="020B0503020204020204" pitchFamily="34" charset="-122"/>
-                <a:ea typeface="微软雅黑" panose="020B0503020204020204" pitchFamily="34" charset="-122"/>
-                <a:cs typeface="微软雅黑" panose="020B0503020204020204" pitchFamily="34" charset="-122"/>
-              </a:rPr>
-              <a:t>人工智能</a:t>
-            </a:r>
-            <a:r>
-              <a:rPr lang="en-US" altLang="zh-CN" dirty="0" smtClean="0">
-                <a:latin typeface="微软雅黑" panose="020B0503020204020204" pitchFamily="34" charset="-122"/>
-                <a:ea typeface="微软雅黑" panose="020B0503020204020204" pitchFamily="34" charset="-122"/>
-                <a:cs typeface="微软雅黑" panose="020B0503020204020204" pitchFamily="34" charset="-122"/>
-              </a:rPr>
-              <a:t>”</a:t>
-            </a:r>
-            <a:r>
-              <a:rPr lang="zh-CN" altLang="en-US" dirty="0" smtClean="0">
-                <a:latin typeface="微软雅黑" panose="020B0503020204020204" pitchFamily="34" charset="-122"/>
-                <a:ea typeface="微软雅黑" panose="020B0503020204020204" pitchFamily="34" charset="-122"/>
-                <a:cs typeface="微软雅黑" panose="020B0503020204020204" pitchFamily="34" charset="-122"/>
-              </a:rPr>
-              <a:t>等特定名词</a:t>
-            </a:r>
-            <a:endParaRPr lang="zh-CN" altLang="en-US" dirty="0" smtClean="0">
-              <a:latin typeface="微软雅黑" panose="020B0503020204020204" pitchFamily="34" charset="-122"/>
-              <a:ea typeface="微软雅黑" panose="020B0503020204020204" pitchFamily="34" charset="-122"/>
-              <a:cs typeface="微软雅黑" panose="020B0503020204020204" pitchFamily="34" charset="-122"/>
-            </a:endParaRPr>
-          </a:p>
-        </p:txBody>
-      </p:sp>
-      <p:sp>
-        <p:nvSpPr>
-          <p:cNvPr id="6" name="矩形 5"/>
-          <p:cNvSpPr/>
-          <p:nvPr/>
-        </p:nvSpPr>
-        <p:spPr>
-          <a:xfrm>
-            <a:off x="5797550" y="1776888"/>
-            <a:ext cx="5911850" cy="4630261"/>
-          </a:xfrm>
-          <a:prstGeom prst="rect">
-            <a:avLst/>
-          </a:prstGeom>
-          <a:noFill/>
-        </p:spPr>
-        <p:style>
-          <a:lnRef idx="2">
-            <a:schemeClr val="accent1">
-              <a:shade val="50000"/>
-            </a:schemeClr>
-          </a:lnRef>
-          <a:fillRef idx="1">
-            <a:schemeClr val="accent1"/>
-          </a:fillRef>
-          <a:effectRef idx="0">
-            <a:schemeClr val="accent1"/>
-          </a:effectRef>
-          <a:fontRef idx="minor">
-            <a:schemeClr val="lt1"/>
-          </a:fontRef>
-        </p:style>
-        <p:txBody>
-          <a:bodyPr rtlCol="0" anchor="ctr"/>
-          <a:lstStyle/>
-          <a:p>
-            <a:pPr algn="ctr"/>
-            <a:r>
-              <a:rPr lang="zh-CN" altLang="en-US" dirty="0" smtClean="0">
-                <a:solidFill>
-                  <a:schemeClr val="tx1"/>
-                </a:solidFill>
-              </a:rPr>
-              <a:t>教材对步骤图片</a:t>
-            </a:r>
-            <a:endParaRPr lang="zh-CN" altLang="en-US" dirty="0">
-              <a:solidFill>
-                <a:schemeClr val="tx1"/>
-              </a:solidFill>
-            </a:endParaRPr>
-          </a:p>
-        </p:txBody>
-      </p:sp>
-      <p:sp>
-        <p:nvSpPr>
-          <p:cNvPr id="4" name="文本框 3"/>
-          <p:cNvSpPr txBox="1"/>
-          <p:nvPr/>
-        </p:nvSpPr>
-        <p:spPr>
-          <a:xfrm>
-            <a:off x="0" y="793750"/>
-            <a:ext cx="1351262" cy="583565"/>
-          </a:xfrm>
-          <a:prstGeom prst="rect">
-            <a:avLst/>
-          </a:prstGeom>
-          <a:noFill/>
-        </p:spPr>
-        <p:txBody>
-          <a:bodyPr wrap="square" rtlCol="0">
-            <a:spAutoFit/>
-            <a:scene3d>
-              <a:camera prst="orthographicFront"/>
-              <a:lightRig rig="threePt" dir="t"/>
-            </a:scene3d>
-            <a:sp3d contourW="12700"/>
-          </a:bodyPr>
-          <a:lstStyle/>
-          <a:p>
-            <a:pPr algn="ctr"/>
-            <a:r>
-              <a:rPr lang="en-US" sz="3200" dirty="0" smtClean="0">
-                <a:solidFill>
-                  <a:srgbClr val="3F396C"/>
-                </a:solidFill>
-                <a:latin typeface="思源宋体" panose="02020700000000000000" charset="-122"/>
-                <a:ea typeface="思源宋体" panose="02020700000000000000" charset="-122"/>
-              </a:rPr>
-              <a:t>04</a:t>
-            </a:r>
-            <a:endParaRPr lang="en-US" sz="3200" dirty="0" smtClean="0">
-              <a:solidFill>
-                <a:srgbClr val="3F396C"/>
-              </a:solidFill>
-              <a:latin typeface="思源宋体" panose="02020700000000000000" charset="-122"/>
-              <a:ea typeface="思源宋体" panose="02020700000000000000" charset="-122"/>
-            </a:endParaRPr>
-          </a:p>
-        </p:txBody>
-      </p:sp>
-      <p:sp>
-        <p:nvSpPr>
-          <p:cNvPr id="17" name="文本框 16"/>
-          <p:cNvSpPr txBox="1"/>
-          <p:nvPr/>
-        </p:nvSpPr>
-        <p:spPr>
-          <a:xfrm>
-            <a:off x="1278000" y="792000"/>
-            <a:ext cx="3932555" cy="583565"/>
-          </a:xfrm>
-          <a:prstGeom prst="rect">
-            <a:avLst/>
-          </a:prstGeom>
-          <a:noFill/>
-        </p:spPr>
-        <p:txBody>
-          <a:bodyPr wrap="square" rtlCol="0">
-            <a:spAutoFit/>
-            <a:scene3d>
-              <a:camera prst="orthographicFront"/>
-              <a:lightRig rig="threePt" dir="t"/>
-            </a:scene3d>
-            <a:sp3d contourW="12700"/>
-          </a:bodyPr>
-          <a:lstStyle>
-            <a:defPPr>
-              <a:defRPr lang="en-US"/>
-            </a:defPPr>
-            <a:lvl1pPr algn="ctr">
-              <a:defRPr sz="3200">
-                <a:gradFill>
-                  <a:gsLst>
-                    <a:gs pos="0">
-                      <a:schemeClr val="tx1">
-                        <a:lumMod val="50000"/>
-                        <a:lumOff val="50000"/>
-                      </a:schemeClr>
-                    </a:gs>
-                    <a:gs pos="100000">
-                      <a:schemeClr val="tx1">
-                        <a:lumMod val="85000"/>
-                        <a:lumOff val="15000"/>
-                      </a:schemeClr>
-                    </a:gs>
-                  </a:gsLst>
-                  <a:lin ang="5400000" scaled="1"/>
-                </a:gradFill>
-              </a:defRPr>
-            </a:lvl1pPr>
-          </a:lstStyle>
-          <a:p>
-            <a:pPr marL="0" marR="0" lvl="0" indent="0" algn="l" defTabSz="914400" rtl="0" eaLnBrk="1" fontAlgn="auto" latinLnBrk="0" hangingPunct="1">
-              <a:lnSpc>
-                <a:spcPct val="100000"/>
-              </a:lnSpc>
-              <a:spcBef>
-                <a:spcPts val="0"/>
-              </a:spcBef>
-              <a:spcAft>
-                <a:spcPts val="0"/>
-              </a:spcAft>
-              <a:buClrTx/>
-              <a:buSzTx/>
-              <a:buFontTx/>
-              <a:buNone/>
-              <a:defRPr/>
-            </a:pPr>
-            <a:r>
-              <a:rPr lang="zh-CN" altLang="en-US" b="1" dirty="0">
-                <a:solidFill>
-                  <a:schemeClr val="accent1">
-                    <a:lumMod val="75000"/>
-                  </a:schemeClr>
-                </a:solidFill>
-                <a:latin typeface="微软雅黑" panose="020B0503020204020204" pitchFamily="34" charset="-122"/>
-                <a:ea typeface="微软雅黑" panose="020B0503020204020204" pitchFamily="34" charset="-122"/>
-                <a:cs typeface="微软雅黑" panose="020B0503020204020204" pitchFamily="34" charset="-122"/>
-                <a:sym typeface="+mn-lt"/>
-              </a:rPr>
-              <a:t>任务</a:t>
-            </a:r>
-            <a:r>
-              <a:rPr lang="zh-CN" altLang="en-US" b="1" dirty="0">
-                <a:solidFill>
-                  <a:schemeClr val="accent1">
-                    <a:lumMod val="75000"/>
-                  </a:schemeClr>
-                </a:solidFill>
-                <a:latin typeface="微软雅黑" panose="020B0503020204020204" pitchFamily="34" charset="-122"/>
-                <a:ea typeface="微软雅黑" panose="020B0503020204020204" pitchFamily="34" charset="-122"/>
-                <a:cs typeface="微软雅黑" panose="020B0503020204020204" pitchFamily="34" charset="-122"/>
-                <a:sym typeface="+mn-lt"/>
-              </a:rPr>
-              <a:t>实施</a:t>
-            </a:r>
-            <a:endParaRPr lang="zh-CN" altLang="en-US" b="1" dirty="0">
-              <a:solidFill>
-                <a:schemeClr val="accent1">
-                  <a:lumMod val="75000"/>
-                </a:schemeClr>
-              </a:solidFill>
-              <a:latin typeface="微软雅黑" panose="020B0503020204020204" pitchFamily="34" charset="-122"/>
-              <a:ea typeface="微软雅黑" panose="020B0503020204020204" pitchFamily="34" charset="-122"/>
-              <a:cs typeface="微软雅黑" panose="020B0503020204020204" pitchFamily="34" charset="-122"/>
-              <a:sym typeface="+mn-lt"/>
-            </a:endParaRPr>
-          </a:p>
-        </p:txBody>
-      </p:sp>
-    </p:spTree>
-  </p:cSld>
-  <p:clrMapOvr>
-    <a:masterClrMapping/>
-  </p:clrMapOvr>
-</p:sld>
-</file>
-
-<file path=ppt/slides/slide14.xml><?xml version="1.0" encoding="utf-8"?>
-<p:sld xmlns:a="http://schemas.openxmlformats.org/drawingml/2006/main" xmlns:r="http://schemas.openxmlformats.org/officeDocument/2006/relationships" xmlns:p="http://schemas.openxmlformats.org/presentationml/2006/main">
-  <p:cSld>
-    <p:spTree>
-      <p:nvGrpSpPr>
-        <p:cNvPr id="1" name=""/>
-        <p:cNvGrpSpPr/>
-        <p:nvPr/>
-      </p:nvGrpSpPr>
-      <p:grpSpPr>
-        <a:xfrm>
-          <a:off x="0" y="0"/>
-          <a:ext cx="0" cy="0"/>
-          <a:chOff x="0" y="0"/>
-          <a:chExt cx="0" cy="0"/>
-        </a:xfrm>
-      </p:grpSpPr>
-      <p:sp>
-        <p:nvSpPr>
-          <p:cNvPr id="3" name="文本框 2"/>
-          <p:cNvSpPr txBox="1"/>
-          <p:nvPr/>
-        </p:nvSpPr>
-        <p:spPr>
-          <a:xfrm>
-            <a:off x="1175385" y="1377315"/>
-            <a:ext cx="9841230" cy="2282190"/>
-          </a:xfrm>
-          <a:prstGeom prst="rect">
-            <a:avLst/>
-          </a:prstGeom>
-          <a:noFill/>
-        </p:spPr>
-        <p:txBody>
-          <a:bodyPr wrap="square" rtlCol="0" anchor="t">
-            <a:noAutofit/>
-          </a:bodyPr>
-          <a:lstStyle/>
-          <a:p>
-            <a:pPr indent="457200" fontAlgn="auto">
-              <a:lnSpc>
-                <a:spcPct val="150000"/>
-              </a:lnSpc>
-            </a:pPr>
-            <a:r>
-              <a:rPr lang="zh-CN" dirty="0" smtClean="0">
-                <a:latin typeface="微软雅黑" panose="020B0503020204020204" pitchFamily="34" charset="-122"/>
-                <a:ea typeface="微软雅黑" panose="020B0503020204020204" pitchFamily="34" charset="-122"/>
-                <a:cs typeface="微软雅黑" panose="020B0503020204020204" pitchFamily="34" charset="-122"/>
-              </a:rPr>
-              <a:t>分为一个词汇，保持较好的切分粒度与分词结果。</a:t>
-            </a:r>
-            <a:endParaRPr lang="zh-CN" dirty="0" smtClean="0">
-              <a:latin typeface="微软雅黑" panose="020B0503020204020204" pitchFamily="34" charset="-122"/>
-              <a:ea typeface="微软雅黑" panose="020B0503020204020204" pitchFamily="34" charset="-122"/>
-              <a:cs typeface="微软雅黑" panose="020B0503020204020204" pitchFamily="34" charset="-122"/>
-            </a:endParaRPr>
-          </a:p>
-        </p:txBody>
-      </p:sp>
-      <p:sp>
-        <p:nvSpPr>
-          <p:cNvPr id="6" name="矩形 5"/>
-          <p:cNvSpPr/>
-          <p:nvPr/>
-        </p:nvSpPr>
-        <p:spPr>
-          <a:xfrm>
-            <a:off x="1954896" y="3657124"/>
-            <a:ext cx="8211454" cy="2991484"/>
-          </a:xfrm>
-          <a:prstGeom prst="rect">
-            <a:avLst/>
-          </a:prstGeom>
-          <a:noFill/>
-        </p:spPr>
-        <p:style>
-          <a:lnRef idx="2">
-            <a:schemeClr val="accent1">
-              <a:shade val="50000"/>
-            </a:schemeClr>
-          </a:lnRef>
-          <a:fillRef idx="1">
-            <a:schemeClr val="accent1"/>
-          </a:fillRef>
-          <a:effectRef idx="0">
-            <a:schemeClr val="accent1"/>
-          </a:effectRef>
-          <a:fontRef idx="minor">
-            <a:schemeClr val="lt1"/>
-          </a:fontRef>
-        </p:style>
-        <p:txBody>
-          <a:bodyPr rtlCol="0" anchor="ctr"/>
-          <a:lstStyle/>
-          <a:p>
-            <a:pPr algn="ctr"/>
-            <a:r>
-              <a:rPr lang="zh-CN" altLang="en-US" dirty="0">
-                <a:solidFill>
-                  <a:schemeClr val="tx1"/>
-                </a:solidFill>
-              </a:rPr>
-              <a:t>教材对步骤图片</a:t>
-            </a:r>
-            <a:endParaRPr lang="zh-CN" altLang="en-US" dirty="0">
-              <a:solidFill>
-                <a:schemeClr val="tx1"/>
-              </a:solidFill>
-            </a:endParaRPr>
-          </a:p>
-        </p:txBody>
-      </p:sp>
-      <p:sp>
-        <p:nvSpPr>
-          <p:cNvPr id="2" name="文本框 1"/>
-          <p:cNvSpPr txBox="1"/>
-          <p:nvPr/>
-        </p:nvSpPr>
-        <p:spPr>
-          <a:xfrm>
-            <a:off x="0" y="793750"/>
-            <a:ext cx="1351262" cy="583565"/>
-          </a:xfrm>
-          <a:prstGeom prst="rect">
-            <a:avLst/>
-          </a:prstGeom>
-          <a:noFill/>
-        </p:spPr>
-        <p:txBody>
-          <a:bodyPr wrap="square" rtlCol="0">
-            <a:spAutoFit/>
-            <a:scene3d>
-              <a:camera prst="orthographicFront"/>
-              <a:lightRig rig="threePt" dir="t"/>
-            </a:scene3d>
-            <a:sp3d contourW="12700"/>
-          </a:bodyPr>
-          <a:lstStyle/>
-          <a:p>
-            <a:pPr algn="ctr"/>
-            <a:r>
-              <a:rPr lang="en-US" sz="3200" dirty="0" smtClean="0">
-                <a:solidFill>
-                  <a:srgbClr val="3F396C"/>
-                </a:solidFill>
-                <a:latin typeface="思源宋体" panose="02020700000000000000" charset="-122"/>
-                <a:ea typeface="思源宋体" panose="02020700000000000000" charset="-122"/>
-              </a:rPr>
-              <a:t>04</a:t>
-            </a:r>
-            <a:endParaRPr lang="en-US" sz="3200" dirty="0" smtClean="0">
-              <a:solidFill>
-                <a:srgbClr val="3F396C"/>
-              </a:solidFill>
-              <a:latin typeface="思源宋体" panose="02020700000000000000" charset="-122"/>
-              <a:ea typeface="思源宋体" panose="02020700000000000000" charset="-122"/>
-            </a:endParaRPr>
-          </a:p>
-        </p:txBody>
-      </p:sp>
-      <p:sp>
-        <p:nvSpPr>
-          <p:cNvPr id="17" name="文本框 16"/>
-          <p:cNvSpPr txBox="1"/>
-          <p:nvPr/>
-        </p:nvSpPr>
-        <p:spPr>
-          <a:xfrm>
-            <a:off x="1278000" y="792000"/>
-            <a:ext cx="3932555" cy="583565"/>
-          </a:xfrm>
-          <a:prstGeom prst="rect">
-            <a:avLst/>
-          </a:prstGeom>
-          <a:noFill/>
-        </p:spPr>
-        <p:txBody>
-          <a:bodyPr wrap="square" rtlCol="0">
-            <a:spAutoFit/>
-            <a:scene3d>
-              <a:camera prst="orthographicFront"/>
-              <a:lightRig rig="threePt" dir="t"/>
-            </a:scene3d>
-            <a:sp3d contourW="12700"/>
-          </a:bodyPr>
-          <a:lstStyle>
-            <a:defPPr>
-              <a:defRPr lang="en-US"/>
-            </a:defPPr>
-            <a:lvl1pPr algn="ctr">
-              <a:defRPr sz="3200">
-                <a:gradFill>
-                  <a:gsLst>
-                    <a:gs pos="0">
-                      <a:schemeClr val="tx1">
-                        <a:lumMod val="50000"/>
-                        <a:lumOff val="50000"/>
-                      </a:schemeClr>
-                    </a:gs>
-                    <a:gs pos="100000">
-                      <a:schemeClr val="tx1">
-                        <a:lumMod val="85000"/>
-                        <a:lumOff val="15000"/>
-                      </a:schemeClr>
-                    </a:gs>
-                  </a:gsLst>
-                  <a:lin ang="5400000" scaled="1"/>
-                </a:gradFill>
-              </a:defRPr>
-            </a:lvl1pPr>
-          </a:lstStyle>
-          <a:p>
-            <a:pPr marL="0" marR="0" lvl="0" indent="0" algn="l" defTabSz="914400" rtl="0" eaLnBrk="1" fontAlgn="auto" latinLnBrk="0" hangingPunct="1">
-              <a:lnSpc>
-                <a:spcPct val="100000"/>
-              </a:lnSpc>
-              <a:spcBef>
-                <a:spcPts val="0"/>
-              </a:spcBef>
-              <a:spcAft>
-                <a:spcPts val="0"/>
-              </a:spcAft>
-              <a:buClrTx/>
-              <a:buSzTx/>
-              <a:buFontTx/>
-              <a:buNone/>
-              <a:defRPr/>
-            </a:pPr>
-            <a:r>
-              <a:rPr lang="zh-CN" altLang="en-US" b="1" dirty="0">
-                <a:solidFill>
-                  <a:schemeClr val="accent1">
-                    <a:lumMod val="75000"/>
-                  </a:schemeClr>
-                </a:solidFill>
-                <a:latin typeface="微软雅黑" panose="020B0503020204020204" pitchFamily="34" charset="-122"/>
-                <a:ea typeface="微软雅黑" panose="020B0503020204020204" pitchFamily="34" charset="-122"/>
-                <a:cs typeface="微软雅黑" panose="020B0503020204020204" pitchFamily="34" charset="-122"/>
-                <a:sym typeface="+mn-lt"/>
-              </a:rPr>
-              <a:t>任务</a:t>
-            </a:r>
-            <a:r>
-              <a:rPr lang="zh-CN" altLang="en-US" b="1" dirty="0">
-                <a:solidFill>
-                  <a:schemeClr val="accent1">
-                    <a:lumMod val="75000"/>
-                  </a:schemeClr>
-                </a:solidFill>
-                <a:latin typeface="微软雅黑" panose="020B0503020204020204" pitchFamily="34" charset="-122"/>
-                <a:ea typeface="微软雅黑" panose="020B0503020204020204" pitchFamily="34" charset="-122"/>
-                <a:cs typeface="微软雅黑" panose="020B0503020204020204" pitchFamily="34" charset="-122"/>
-                <a:sym typeface="+mn-lt"/>
-              </a:rPr>
-              <a:t>实施</a:t>
-            </a:r>
-            <a:endParaRPr lang="zh-CN" altLang="en-US" b="1" dirty="0">
-              <a:solidFill>
-                <a:schemeClr val="accent1">
-                  <a:lumMod val="75000"/>
-                </a:schemeClr>
-              </a:solidFill>
-              <a:latin typeface="微软雅黑" panose="020B0503020204020204" pitchFamily="34" charset="-122"/>
-              <a:ea typeface="微软雅黑" panose="020B0503020204020204" pitchFamily="34" charset="-122"/>
-              <a:cs typeface="微软雅黑" panose="020B0503020204020204" pitchFamily="34" charset="-122"/>
-              <a:sym typeface="+mn-lt"/>
-            </a:endParaRPr>
-          </a:p>
-        </p:txBody>
-      </p:sp>
-    </p:spTree>
-  </p:cSld>
-  <p:clrMapOvr>
-    <a:masterClrMapping/>
-  </p:clrMapOvr>
-</p:sld>
-</file>
-
-<file path=ppt/slides/slide15.xml><?xml version="1.0" encoding="utf-8"?>
-<p:sld xmlns:a="http://schemas.openxmlformats.org/drawingml/2006/main" xmlns:r="http://schemas.openxmlformats.org/officeDocument/2006/relationships" xmlns:p="http://schemas.openxmlformats.org/presentationml/2006/main">
-  <p:cSld>
-    <p:spTree>
-      <p:nvGrpSpPr>
-        <p:cNvPr id="1" name=""/>
-        <p:cNvGrpSpPr/>
-        <p:nvPr/>
-      </p:nvGrpSpPr>
-      <p:grpSpPr>
-        <a:xfrm>
-          <a:off x="0" y="0"/>
-          <a:ext cx="0" cy="0"/>
-          <a:chOff x="0" y="0"/>
-          <a:chExt cx="0" cy="0"/>
-        </a:xfrm>
-      </p:grpSpPr>
-      <p:sp>
-        <p:nvSpPr>
-          <p:cNvPr id="12" name="圆角矩形 34"/>
-          <p:cNvSpPr/>
-          <p:nvPr>
-            <p:custDataLst>
-              <p:tags r:id="rId1"/>
-            </p:custDataLst>
-          </p:nvPr>
-        </p:nvSpPr>
-        <p:spPr>
-          <a:xfrm rot="2700000">
-            <a:off x="4053840" y="2520315"/>
-            <a:ext cx="1509395" cy="1517015"/>
-          </a:xfrm>
-          <a:prstGeom prst="roundRect">
-            <a:avLst>
-              <a:gd name="adj" fmla="val 6319"/>
-            </a:avLst>
-          </a:prstGeom>
-          <a:solidFill>
-            <a:schemeClr val="bg1">
-              <a:lumMod val="95000"/>
-            </a:schemeClr>
-          </a:solidFill>
-          <a:ln>
-            <a:noFill/>
-          </a:ln>
-          <a:effectLst>
-            <a:outerShdw blurRad="152400" dist="63500" dir="8100000" algn="tl" rotWithShape="0">
-              <a:prstClr val="black">
-                <a:alpha val="30000"/>
-              </a:prstClr>
-            </a:outerShdw>
-          </a:effectLst>
-          <a:scene3d>
-            <a:camera prst="orthographicFront"/>
-            <a:lightRig rig="threePt" dir="t"/>
-          </a:scene3d>
-          <a:sp3d prstMaterial="softEdge">
-            <a:bevelT w="38100" h="6350"/>
-          </a:sp3d>
-        </p:spPr>
-        <p:style>
-          <a:lnRef idx="2">
-            <a:schemeClr val="accent1">
-              <a:shade val="50000"/>
-            </a:schemeClr>
-          </a:lnRef>
-          <a:fillRef idx="1">
-            <a:schemeClr val="accent1"/>
-          </a:fillRef>
-          <a:effectRef idx="0">
-            <a:schemeClr val="accent1"/>
-          </a:effectRef>
-          <a:fontRef idx="minor">
-            <a:schemeClr val="lt1"/>
-          </a:fontRef>
-        </p:style>
-        <p:txBody>
-          <a:bodyPr rtlCol="0" anchor="ctr"/>
-          <a:lstStyle/>
-          <a:p>
-            <a:pPr marL="0" marR="0" lvl="0" indent="0" algn="ctr" defTabSz="914400" rtl="0" eaLnBrk="1" fontAlgn="auto" latinLnBrk="0" hangingPunct="1">
-              <a:lnSpc>
-                <a:spcPct val="100000"/>
-              </a:lnSpc>
-              <a:spcBef>
-                <a:spcPts val="0"/>
-              </a:spcBef>
-              <a:spcAft>
-                <a:spcPts val="0"/>
-              </a:spcAft>
-              <a:buClrTx/>
-              <a:buSzTx/>
-              <a:buFontTx/>
-              <a:buNone/>
-              <a:defRPr/>
-            </a:pPr>
-            <a:endParaRPr kumimoji="0" lang="zh-CN" altLang="en-US" sz="2800" b="0" i="0" u="none" strike="noStrike" kern="1200" cap="none" spc="0" normalizeH="0" baseline="0" noProof="0" dirty="0">
-              <a:ln>
-                <a:noFill/>
-              </a:ln>
-              <a:solidFill>
-                <a:prstClr val="white"/>
-              </a:solidFill>
-              <a:effectLst/>
-              <a:uLnTx/>
-              <a:uFillTx/>
-              <a:latin typeface="DIN-BoldItalic" pitchFamily="50" charset="0"/>
-              <a:ea typeface="微软雅黑" panose="020B0503020204020204" pitchFamily="34" charset="-122"/>
-              <a:cs typeface="+mn-cs"/>
-            </a:endParaRPr>
-          </a:p>
-        </p:txBody>
-      </p:sp>
-      <p:sp>
-        <p:nvSpPr>
-          <p:cNvPr id="2" name="圆角矩形 38"/>
-          <p:cNvSpPr/>
+      <p:grpSp>
+        <p:nvGrpSpPr>
+          <p:cNvPr id="7" name="组合 6"/>
+          <p:cNvGrpSpPr/>
           <p:nvPr>
             <p:custDataLst>
               <p:tags r:id="rId2"/>
             </p:custDataLst>
           </p:nvPr>
-        </p:nvSpPr>
-        <p:spPr>
-          <a:xfrm rot="2700000">
-            <a:off x="4272915" y="2696845"/>
-            <a:ext cx="1068070" cy="1068070"/>
-          </a:xfrm>
-          <a:prstGeom prst="roundRect">
-            <a:avLst>
-              <a:gd name="adj" fmla="val 6319"/>
-            </a:avLst>
-          </a:prstGeom>
-          <a:solidFill>
-            <a:srgbClr val="0064D2"/>
-          </a:solidFill>
-          <a:ln>
-            <a:solidFill>
-              <a:schemeClr val="accent1"/>
-            </a:solidFill>
-          </a:ln>
-        </p:spPr>
-        <p:style>
-          <a:lnRef idx="2">
-            <a:schemeClr val="accent1">
-              <a:shade val="50000"/>
-            </a:schemeClr>
-          </a:lnRef>
-          <a:fillRef idx="1">
-            <a:schemeClr val="accent1"/>
-          </a:fillRef>
-          <a:effectRef idx="0">
-            <a:schemeClr val="accent1"/>
-          </a:effectRef>
-          <a:fontRef idx="minor">
-            <a:schemeClr val="lt1"/>
-          </a:fontRef>
-        </p:style>
-        <p:txBody>
-          <a:bodyPr rtlCol="0" anchor="ctr"/>
-          <a:lstStyle/>
-          <a:p>
-            <a:pPr marL="0" marR="0" lvl="0" indent="0" algn="ctr" defTabSz="914400" rtl="0" eaLnBrk="1" fontAlgn="auto" latinLnBrk="0" hangingPunct="1">
-              <a:lnSpc>
-                <a:spcPct val="100000"/>
-              </a:lnSpc>
-              <a:spcBef>
-                <a:spcPts val="0"/>
-              </a:spcBef>
-              <a:spcAft>
-                <a:spcPts val="0"/>
-              </a:spcAft>
-              <a:buClrTx/>
-              <a:buSzTx/>
-              <a:buFontTx/>
-              <a:buNone/>
-              <a:defRPr/>
-            </a:pPr>
-            <a:endParaRPr kumimoji="0" lang="zh-CN" altLang="en-US" sz="1800" b="0" i="0" u="none" strike="noStrike" kern="1200" cap="none" spc="0" normalizeH="0" baseline="0" noProof="0" dirty="0">
-              <a:ln>
-                <a:noFill/>
-              </a:ln>
-              <a:solidFill>
-                <a:prstClr val="white"/>
-              </a:solidFill>
-              <a:effectLst/>
-              <a:uLnTx/>
-              <a:uFillTx/>
-              <a:latin typeface="等线" panose="02010600030101010101" charset="-122"/>
-              <a:ea typeface="微软雅黑" panose="020B0503020204020204" pitchFamily="34" charset="-122"/>
-              <a:cs typeface="+mn-cs"/>
-            </a:endParaRPr>
-          </a:p>
-        </p:txBody>
-      </p:sp>
-      <p:sp>
-        <p:nvSpPr>
-          <p:cNvPr id="21" name="任意多边形 44"/>
-          <p:cNvSpPr/>
-          <p:nvPr>
-            <p:custDataLst>
-              <p:tags r:id="rId3"/>
-            </p:custDataLst>
-          </p:nvPr>
-        </p:nvSpPr>
-        <p:spPr>
-          <a:xfrm flipV="1">
-            <a:off x="4055110" y="3601085"/>
-            <a:ext cx="1842770" cy="1015365"/>
-          </a:xfrm>
-          <a:custGeom>
-            <a:avLst/>
-            <a:gdLst>
-              <a:gd name="connsiteX0" fmla="*/ 0 w 1940313"/>
-              <a:gd name="connsiteY0" fmla="*/ 791737 h 1148576"/>
-              <a:gd name="connsiteX1" fmla="*/ 791737 w 1940313"/>
-              <a:gd name="connsiteY1" fmla="*/ 0 h 1148576"/>
-              <a:gd name="connsiteX2" fmla="*/ 1940313 w 1940313"/>
-              <a:gd name="connsiteY2" fmla="*/ 1148576 h 1148576"/>
-            </a:gdLst>
-            <a:ahLst/>
-            <a:cxnLst>
-              <a:cxn ang="0">
-                <a:pos x="connsiteX0" y="connsiteY0"/>
-              </a:cxn>
-              <a:cxn ang="0">
-                <a:pos x="connsiteX1" y="connsiteY1"/>
-              </a:cxn>
-              <a:cxn ang="0">
-                <a:pos x="connsiteX2" y="connsiteY2"/>
-              </a:cxn>
-            </a:cxnLst>
-            <a:rect l="l" t="t" r="r" b="b"/>
-            <a:pathLst>
-              <a:path w="1940313" h="1148576">
-                <a:moveTo>
-                  <a:pt x="0" y="791737"/>
-                </a:moveTo>
-                <a:lnTo>
-                  <a:pt x="791737" y="0"/>
-                </a:lnTo>
-                <a:lnTo>
-                  <a:pt x="1940313" y="1148576"/>
-                </a:lnTo>
-              </a:path>
-            </a:pathLst>
-          </a:custGeom>
-          <a:noFill/>
-          <a:ln w="12700">
-            <a:solidFill>
-              <a:srgbClr val="8A8B8F"/>
-            </a:solidFill>
-            <a:prstDash val="dash"/>
-            <a:headEnd type="oval" w="med" len="med"/>
-            <a:tailEnd type="triangle" w="med" len="med"/>
-          </a:ln>
-        </p:spPr>
-        <p:style>
-          <a:lnRef idx="2">
-            <a:schemeClr val="accent1">
-              <a:shade val="50000"/>
-            </a:schemeClr>
-          </a:lnRef>
-          <a:fillRef idx="1">
-            <a:schemeClr val="accent1"/>
-          </a:fillRef>
-          <a:effectRef idx="0">
-            <a:schemeClr val="accent1"/>
-          </a:effectRef>
-          <a:fontRef idx="minor">
-            <a:schemeClr val="lt1"/>
-          </a:fontRef>
-        </p:style>
-        <p:txBody>
-          <a:bodyPr rtlCol="0" anchor="ctr"/>
-          <a:lstStyle/>
-          <a:p>
-            <a:pPr marL="0" marR="0" lvl="0" indent="0" algn="ctr" defTabSz="914400" rtl="0" eaLnBrk="1" fontAlgn="auto" latinLnBrk="0" hangingPunct="1">
-              <a:lnSpc>
-                <a:spcPct val="100000"/>
-              </a:lnSpc>
-              <a:spcBef>
-                <a:spcPts val="0"/>
-              </a:spcBef>
-              <a:spcAft>
-                <a:spcPts val="0"/>
-              </a:spcAft>
-              <a:buClrTx/>
-              <a:buSzTx/>
-              <a:buFontTx/>
-              <a:buNone/>
-              <a:defRPr/>
-            </a:pPr>
-            <a:endParaRPr kumimoji="0" lang="zh-CN" altLang="en-US" sz="1800" b="0" i="0" u="none" strike="noStrike" kern="1200" cap="none" spc="0" normalizeH="0" baseline="0" noProof="0" dirty="0">
-              <a:ln>
-                <a:noFill/>
-              </a:ln>
-              <a:solidFill>
-                <a:prstClr val="white"/>
-              </a:solidFill>
-              <a:effectLst/>
-              <a:uLnTx/>
-              <a:uFillTx/>
-              <a:latin typeface="等线" panose="02010600030101010101" charset="-122"/>
-              <a:ea typeface="微软雅黑" panose="020B0503020204020204" pitchFamily="34" charset="-122"/>
-              <a:cs typeface="+mn-cs"/>
-            </a:endParaRPr>
-          </a:p>
-        </p:txBody>
-      </p:sp>
-      <p:sp>
-        <p:nvSpPr>
-          <p:cNvPr id="10" name="文本框 9"/>
-          <p:cNvSpPr txBox="1"/>
-          <p:nvPr>
-            <p:custDataLst>
-              <p:tags r:id="rId4"/>
-            </p:custDataLst>
-          </p:nvPr>
-        </p:nvSpPr>
-        <p:spPr>
-          <a:xfrm>
-            <a:off x="4513479" y="2762250"/>
-            <a:ext cx="682625" cy="1014730"/>
-          </a:xfrm>
-          <a:prstGeom prst="rect">
-            <a:avLst/>
-          </a:prstGeom>
-          <a:noFill/>
-        </p:spPr>
-        <p:txBody>
-          <a:bodyPr wrap="square" rtlCol="0">
-            <a:spAutoFit/>
-          </a:bodyPr>
-          <a:lstStyle/>
-          <a:p>
-            <a:r>
-              <a:rPr lang="en-US" altLang="zh-CN" sz="6000" b="1">
-                <a:solidFill>
-                  <a:schemeClr val="bg1"/>
-                </a:solidFill>
-                <a:latin typeface="+mj-ea"/>
-                <a:ea typeface="+mj-ea"/>
-              </a:rPr>
-              <a:t>2</a:t>
-            </a:r>
-            <a:endParaRPr lang="en-US" altLang="zh-CN" sz="6000" b="1">
-              <a:solidFill>
-                <a:schemeClr val="bg1"/>
-              </a:solidFill>
-              <a:latin typeface="+mj-ea"/>
-              <a:ea typeface="+mj-ea"/>
-            </a:endParaRPr>
-          </a:p>
-        </p:txBody>
-      </p:sp>
-      <p:grpSp>
-        <p:nvGrpSpPr>
-          <p:cNvPr id="11" name="组合 10"/>
-          <p:cNvGrpSpPr/>
-          <p:nvPr>
-            <p:custDataLst>
-              <p:tags r:id="rId5"/>
-            </p:custDataLst>
-          </p:nvPr>
         </p:nvGrpSpPr>
         <p:grpSpPr>
           <a:xfrm>
-            <a:off x="1248410" y="2000885"/>
-            <a:ext cx="1597025" cy="1935480"/>
-            <a:chOff x="4536" y="3212"/>
-            <a:chExt cx="3287" cy="4048"/>
+            <a:off x="7391459" y="2641172"/>
+            <a:ext cx="1892947" cy="1892947"/>
+            <a:chOff x="4536" y="4280"/>
+            <a:chExt cx="2980" cy="2980"/>
           </a:xfrm>
         </p:grpSpPr>
         <p:sp>
           <p:nvSpPr>
-            <p:cNvPr id="13" name="圆角矩形 34"/>
+            <p:cNvPr id="12" name="圆角矩形 34"/>
             <p:cNvSpPr/>
             <p:nvPr>
               <p:custDataLst>
-                <p:tags r:id="rId6"/>
+                <p:tags r:id="rId3"/>
               </p:custDataLst>
             </p:nvPr>
           </p:nvSpPr>
@@ -11822,11 +10771,425 @@
         </p:sp>
         <p:sp>
           <p:nvSpPr>
-            <p:cNvPr id="14" name="圆角矩形 38"/>
+            <p:cNvPr id="16" name="圆角矩形 38"/>
             <p:cNvSpPr/>
             <p:nvPr>
               <p:custDataLst>
-                <p:tags r:id="rId7"/>
+                <p:tags r:id="rId4"/>
+              </p:custDataLst>
+            </p:nvPr>
+          </p:nvSpPr>
+          <p:spPr>
+            <a:xfrm rot="2700000">
+              <a:off x="4943" y="4671"/>
+              <a:ext cx="2185" cy="2185"/>
+            </a:xfrm>
+            <a:prstGeom prst="roundRect">
+              <a:avLst>
+                <a:gd name="adj" fmla="val 6319"/>
+              </a:avLst>
+            </a:prstGeom>
+            <a:solidFill>
+              <a:srgbClr val="0064D2"/>
+            </a:solidFill>
+            <a:ln>
+              <a:noFill/>
+            </a:ln>
+          </p:spPr>
+          <p:style>
+            <a:lnRef idx="2">
+              <a:schemeClr val="accent1">
+                <a:shade val="50000"/>
+              </a:schemeClr>
+            </a:lnRef>
+            <a:fillRef idx="1">
+              <a:schemeClr val="accent1"/>
+            </a:fillRef>
+            <a:effectRef idx="0">
+              <a:schemeClr val="accent1"/>
+            </a:effectRef>
+            <a:fontRef idx="minor">
+              <a:schemeClr val="lt1"/>
+            </a:fontRef>
+          </p:style>
+          <p:txBody>
+            <a:bodyPr rtlCol="0" anchor="ctr"/>
+            <a:lstStyle/>
+            <a:p>
+              <a:pPr marL="0" marR="0" lvl="0" indent="0" algn="ctr" defTabSz="914400" rtl="0" eaLnBrk="1" fontAlgn="auto" latinLnBrk="0" hangingPunct="1">
+                <a:lnSpc>
+                  <a:spcPct val="100000"/>
+                </a:lnSpc>
+                <a:spcBef>
+                  <a:spcPts val="0"/>
+                </a:spcBef>
+                <a:spcAft>
+                  <a:spcPts val="0"/>
+                </a:spcAft>
+                <a:buClrTx/>
+                <a:buSzTx/>
+                <a:buFontTx/>
+                <a:buNone/>
+                <a:defRPr/>
+              </a:pPr>
+              <a:endParaRPr kumimoji="0" lang="zh-CN" altLang="en-US" sz="1800" b="0" i="0" u="none" strike="noStrike" kern="1200" cap="none" spc="0" normalizeH="0" baseline="0" noProof="0" dirty="0">
+                <a:ln>
+                  <a:noFill/>
+                </a:ln>
+                <a:solidFill>
+                  <a:prstClr val="white"/>
+                </a:solidFill>
+                <a:effectLst/>
+                <a:uLnTx/>
+                <a:uFillTx/>
+                <a:latin typeface="等线" panose="02010600030101010101" charset="-122"/>
+                <a:ea typeface="微软雅黑" panose="020B0503020204020204" pitchFamily="34" charset="-122"/>
+                <a:cs typeface="+mn-cs"/>
+              </a:endParaRPr>
+            </a:p>
+          </p:txBody>
+        </p:sp>
+      </p:grpSp>
+      <p:sp>
+        <p:nvSpPr>
+          <p:cNvPr id="52" name="文本框1"/>
+          <p:cNvSpPr txBox="1"/>
+          <p:nvPr>
+            <p:custDataLst>
+              <p:tags r:id="rId5"/>
+            </p:custDataLst>
+          </p:nvPr>
+        </p:nvSpPr>
+        <p:spPr>
+          <a:xfrm>
+            <a:off x="6184076" y="5350373"/>
+            <a:ext cx="4320000" cy="460375"/>
+          </a:xfrm>
+          <a:prstGeom prst="rect">
+            <a:avLst/>
+          </a:prstGeom>
+          <a:noFill/>
+        </p:spPr>
+        <p:txBody>
+          <a:bodyPr wrap="square" rtlCol="0">
+            <a:spAutoFit/>
+          </a:bodyPr>
+          <a:lstStyle/>
+          <a:p>
+            <a:pPr lvl="0" algn="ctr">
+              <a:buClrTx/>
+              <a:buSzTx/>
+              <a:buFontTx/>
+            </a:pPr>
+            <a:r>
+              <a:rPr lang="en-US" sz="2400" b="1" dirty="0" smtClean="0">
+                <a:solidFill>
+                  <a:srgbClr val="0064D2"/>
+                </a:solidFill>
+                <a:cs typeface="+mn-ea"/>
+                <a:sym typeface="+mn-lt"/>
+              </a:rPr>
+              <a:t>Transformer </a:t>
+            </a:r>
+            <a:r>
+              <a:rPr lang="zh-CN" altLang="en-US" sz="2400" b="1" dirty="0" smtClean="0">
+                <a:solidFill>
+                  <a:srgbClr val="0064D2"/>
+                </a:solidFill>
+                <a:cs typeface="+mn-ea"/>
+                <a:sym typeface="+mn-lt"/>
+              </a:rPr>
+              <a:t>中的词嵌入与位置编码</a:t>
+            </a:r>
+            <a:endParaRPr lang="zh-CN" altLang="en-US" sz="2400" b="1" dirty="0" smtClean="0">
+              <a:solidFill>
+                <a:srgbClr val="0064D2"/>
+              </a:solidFill>
+              <a:cs typeface="+mn-ea"/>
+              <a:sym typeface="+mn-lt"/>
+            </a:endParaRPr>
+          </a:p>
+        </p:txBody>
+      </p:sp>
+      <p:sp>
+        <p:nvSpPr>
+          <p:cNvPr id="10" name="文本框 9"/>
+          <p:cNvSpPr txBox="1"/>
+          <p:nvPr>
+            <p:custDataLst>
+              <p:tags r:id="rId6"/>
+            </p:custDataLst>
+          </p:nvPr>
+        </p:nvSpPr>
+        <p:spPr>
+          <a:xfrm>
+            <a:off x="7981576" y="3119490"/>
+            <a:ext cx="682858" cy="1014730"/>
+          </a:xfrm>
+          <a:prstGeom prst="rect">
+            <a:avLst/>
+          </a:prstGeom>
+          <a:noFill/>
+        </p:spPr>
+        <p:txBody>
+          <a:bodyPr wrap="square" rtlCol="0">
+            <a:spAutoFit/>
+          </a:bodyPr>
+          <a:lstStyle/>
+          <a:p>
+            <a:r>
+              <a:rPr lang="en-US" altLang="zh-CN" sz="6000" b="1">
+                <a:solidFill>
+                  <a:schemeClr val="bg1"/>
+                </a:solidFill>
+                <a:latin typeface="+mj-ea"/>
+                <a:ea typeface="+mj-ea"/>
+              </a:rPr>
+              <a:t>2</a:t>
+            </a:r>
+            <a:endParaRPr lang="en-US" altLang="zh-CN" sz="6000" b="1">
+              <a:solidFill>
+                <a:schemeClr val="bg1"/>
+              </a:solidFill>
+              <a:latin typeface="+mj-ea"/>
+              <a:ea typeface="+mj-ea"/>
+            </a:endParaRPr>
+          </a:p>
+        </p:txBody>
+      </p:sp>
+      <p:sp>
+        <p:nvSpPr>
+          <p:cNvPr id="35" name="文本框 34"/>
+          <p:cNvSpPr txBox="1"/>
+          <p:nvPr/>
+        </p:nvSpPr>
+        <p:spPr>
+          <a:xfrm>
+            <a:off x="0" y="793750"/>
+            <a:ext cx="1351262" cy="2061210"/>
+          </a:xfrm>
+          <a:prstGeom prst="rect">
+            <a:avLst/>
+          </a:prstGeom>
+          <a:noFill/>
+        </p:spPr>
+        <p:txBody>
+          <a:bodyPr wrap="square" rtlCol="0">
+            <a:spAutoFit/>
+            <a:scene3d>
+              <a:camera prst="orthographicFront"/>
+              <a:lightRig rig="threePt" dir="t"/>
+            </a:scene3d>
+            <a:sp3d contourW="12700"/>
+          </a:bodyPr>
+          <a:lstStyle/>
+          <a:p>
+            <a:pPr algn="ctr"/>
+            <a:r>
+              <a:rPr lang="en-US" altLang="zh-CN" sz="3200" dirty="0" smtClean="0">
+                <a:solidFill>
+                  <a:srgbClr val="3F396C"/>
+                </a:solidFill>
+                <a:latin typeface="思源宋体" panose="02020700000000000000" charset="-122"/>
+                <a:ea typeface="思源宋体" panose="02020700000000000000" charset="-122"/>
+              </a:rPr>
+              <a:t>04</a:t>
+            </a:r>
+            <a:endParaRPr lang="en-US" altLang="zh-CN" sz="3200" dirty="0" smtClean="0">
+              <a:solidFill>
+                <a:srgbClr val="3F396C"/>
+              </a:solidFill>
+              <a:latin typeface="思源宋体" panose="02020700000000000000" charset="-122"/>
+              <a:ea typeface="思源宋体" panose="02020700000000000000" charset="-122"/>
+            </a:endParaRPr>
+          </a:p>
+        </p:txBody>
+      </p:sp>
+      <p:sp>
+        <p:nvSpPr>
+          <p:cNvPr id="8" name="文本框1"/>
+          <p:cNvSpPr txBox="1"/>
+          <p:nvPr>
+            <p:custDataLst>
+              <p:tags r:id="rId7"/>
+            </p:custDataLst>
+          </p:nvPr>
+        </p:nvSpPr>
+        <p:spPr>
+          <a:xfrm>
+            <a:off x="1483995" y="5350510"/>
+            <a:ext cx="4320000" cy="460375"/>
+          </a:xfrm>
+          <a:prstGeom prst="rect">
+            <a:avLst/>
+          </a:prstGeom>
+          <a:noFill/>
+        </p:spPr>
+        <p:txBody>
+          <a:bodyPr wrap="square" rtlCol="0">
+            <a:spAutoFit/>
+          </a:bodyPr>
+          <a:lstStyle/>
+          <a:p>
+            <a:pPr marL="0" marR="0" lvl="0" indent="0" algn="ctr" defTabSz="914400" rtl="0" eaLnBrk="1" fontAlgn="auto" latinLnBrk="0" hangingPunct="1">
+              <a:lnSpc>
+                <a:spcPct val="100000"/>
+              </a:lnSpc>
+              <a:spcBef>
+                <a:spcPts val="0"/>
+              </a:spcBef>
+              <a:spcAft>
+                <a:spcPts val="0"/>
+              </a:spcAft>
+              <a:buClrTx/>
+              <a:buSzTx/>
+              <a:buFontTx/>
+              <a:buNone/>
+              <a:defRPr/>
+            </a:pPr>
+            <a:r>
+              <a:rPr lang="zh-CN" altLang="zh-CN" sz="2400" dirty="0" smtClean="0">
+                <a:solidFill>
+                  <a:schemeClr val="tx1"/>
+                </a:solidFill>
+                <a:latin typeface="微软雅黑" panose="020B0503020204020204" pitchFamily="34" charset="-122"/>
+                <a:ea typeface="微软雅黑" panose="020B0503020204020204" pitchFamily="34" charset="-122"/>
+                <a:sym typeface="+mn-ea"/>
+              </a:rPr>
+              <a:t>使用不同的分词器实现分词</a:t>
+            </a:r>
+            <a:endParaRPr lang="zh-CN" altLang="zh-CN" sz="2400" dirty="0" smtClean="0">
+              <a:solidFill>
+                <a:schemeClr val="tx1"/>
+              </a:solidFill>
+              <a:latin typeface="微软雅黑" panose="020B0503020204020204" pitchFamily="34" charset="-122"/>
+              <a:ea typeface="微软雅黑" panose="020B0503020204020204" pitchFamily="34" charset="-122"/>
+              <a:sym typeface="+mn-ea"/>
+            </a:endParaRPr>
+          </a:p>
+        </p:txBody>
+      </p:sp>
+      <p:grpSp>
+        <p:nvGrpSpPr>
+          <p:cNvPr id="2" name="组合 1"/>
+          <p:cNvGrpSpPr/>
+          <p:nvPr>
+            <p:custDataLst>
+              <p:tags r:id="rId8"/>
+            </p:custDataLst>
+          </p:nvPr>
+        </p:nvGrpSpPr>
+        <p:grpSpPr>
+          <a:xfrm>
+            <a:off x="2691210" y="2004060"/>
+            <a:ext cx="2087958" cy="2571359"/>
+            <a:chOff x="4536" y="3212"/>
+            <a:chExt cx="3287" cy="4048"/>
+          </a:xfrm>
+        </p:grpSpPr>
+        <p:sp>
+          <p:nvSpPr>
+            <p:cNvPr id="3" name="圆角矩形 34"/>
+            <p:cNvSpPr/>
+            <p:nvPr>
+              <p:custDataLst>
+                <p:tags r:id="rId9"/>
+              </p:custDataLst>
+            </p:nvPr>
+          </p:nvSpPr>
+          <p:spPr>
+            <a:xfrm rot="2700000">
+              <a:off x="4536" y="4280"/>
+              <a:ext cx="2980" cy="2980"/>
+            </a:xfrm>
+            <a:prstGeom prst="roundRect">
+              <a:avLst>
+                <a:gd name="adj" fmla="val 6319"/>
+              </a:avLst>
+            </a:prstGeom>
+            <a:solidFill>
+              <a:schemeClr val="bg1">
+                <a:lumMod val="95000"/>
+              </a:schemeClr>
+            </a:solidFill>
+            <a:ln>
+              <a:noFill/>
+            </a:ln>
+            <a:effectLst>
+              <a:outerShdw blurRad="152400" dist="63500" dir="8100000" algn="tl" rotWithShape="0">
+                <a:prstClr val="black">
+                  <a:alpha val="30000"/>
+                </a:prstClr>
+              </a:outerShdw>
+            </a:effectLst>
+            <a:scene3d>
+              <a:camera prst="orthographicFront"/>
+              <a:lightRig rig="threePt" dir="t"/>
+            </a:scene3d>
+            <a:sp3d prstMaterial="softEdge">
+              <a:bevelT w="38100" h="6350"/>
+            </a:sp3d>
+          </p:spPr>
+          <p:style>
+            <a:lnRef idx="2">
+              <a:schemeClr val="accent1">
+                <a:shade val="50000"/>
+              </a:schemeClr>
+            </a:lnRef>
+            <a:fillRef idx="1">
+              <a:schemeClr val="accent1"/>
+            </a:fillRef>
+            <a:effectRef idx="0">
+              <a:schemeClr val="accent1"/>
+            </a:effectRef>
+            <a:fontRef idx="minor">
+              <a:schemeClr val="lt1"/>
+            </a:fontRef>
+          </p:style>
+          <p:txBody>
+            <a:bodyPr rtlCol="0" anchor="ctr"/>
+            <a:lstStyle/>
+            <a:p>
+              <a:pPr marL="0" marR="0" lvl="0" indent="0" algn="ctr" defTabSz="914400" rtl="0" eaLnBrk="1" fontAlgn="auto" latinLnBrk="0" hangingPunct="1">
+                <a:lnSpc>
+                  <a:spcPct val="100000"/>
+                </a:lnSpc>
+                <a:spcBef>
+                  <a:spcPts val="0"/>
+                </a:spcBef>
+                <a:spcAft>
+                  <a:spcPts val="0"/>
+                </a:spcAft>
+                <a:buClrTx/>
+                <a:buSzTx/>
+                <a:buFontTx/>
+                <a:buNone/>
+                <a:defRPr/>
+              </a:pPr>
+              <a:endParaRPr kumimoji="0" lang="zh-CN" altLang="en-US" sz="2800" b="0" i="0" u="none" strike="noStrike" kern="1200" cap="none" spc="0" normalizeH="0" baseline="0" noProof="0" dirty="0">
+                <a:ln>
+                  <a:noFill/>
+                </a:ln>
+                <a:solidFill>
+                  <a:prstClr val="white"/>
+                </a:solidFill>
+                <a:effectLst/>
+                <a:uLnTx/>
+                <a:uFillTx/>
+                <a:latin typeface="DIN-BoldItalic" pitchFamily="50" charset="0"/>
+                <a:ea typeface="微软雅黑" panose="020B0503020204020204" pitchFamily="34" charset="-122"/>
+                <a:cs typeface="+mn-cs"/>
+              </a:endParaRPr>
+            </a:p>
+          </p:txBody>
+        </p:sp>
+        <p:sp>
+          <p:nvSpPr>
+            <p:cNvPr id="4" name="圆角矩形 38"/>
+            <p:cNvSpPr/>
+            <p:nvPr>
+              <p:custDataLst>
+                <p:tags r:id="rId10"/>
               </p:custDataLst>
             </p:nvPr>
           </p:nvSpPr>
@@ -11891,7 +11254,10 @@
                   <a:noFill/>
                 </a:ln>
                 <a:solidFill>
-                  <a:prstClr val="white"/>
+                  <a:schemeClr val="tx1">
+                    <a:lumMod val="75000"/>
+                    <a:lumOff val="25000"/>
+                  </a:schemeClr>
                 </a:solidFill>
                 <a:effectLst/>
                 <a:uLnTx/>
@@ -11905,9 +11271,13 @@
         </p:sp>
         <p:sp>
           <p:nvSpPr>
-            <p:cNvPr id="15" name="任意多边形 42"/>
+            <p:cNvPr id="6" name="任意多边形 42"/>
             <p:cNvSpPr/>
-            <p:nvPr/>
+            <p:nvPr>
+              <p:custDataLst>
+                <p:tags r:id="rId11"/>
+              </p:custDataLst>
+            </p:nvPr>
           </p:nvSpPr>
           <p:spPr>
             <a:xfrm>
@@ -12017,18 +11387,18 @@
       </p:grpSp>
       <p:sp>
         <p:nvSpPr>
-          <p:cNvPr id="17" name="文本框 16"/>
+          <p:cNvPr id="9" name="文本框 8"/>
           <p:cNvSpPr txBox="1"/>
           <p:nvPr>
             <p:custDataLst>
-              <p:tags r:id="rId8"/>
+              <p:tags r:id="rId12"/>
             </p:custDataLst>
           </p:nvPr>
         </p:nvSpPr>
         <p:spPr>
           <a:xfrm>
-            <a:off x="1662430" y="2762250"/>
-            <a:ext cx="541020" cy="949325"/>
+            <a:off x="3281327" y="3153168"/>
+            <a:ext cx="682858" cy="1014730"/>
           </a:xfrm>
           <a:prstGeom prst="rect">
             <a:avLst/>
@@ -12037,7 +11407,7 @@
         </p:spPr>
         <p:txBody>
           <a:bodyPr wrap="square" rtlCol="0">
-            <a:noAutofit/>
+            <a:spAutoFit/>
           </a:bodyPr>
           <a:lstStyle/>
           <a:p>
@@ -12063,1019 +11433,7 @@
       </p:sp>
       <p:sp>
         <p:nvSpPr>
-          <p:cNvPr id="3" name="文本框1"/>
-          <p:cNvSpPr txBox="1"/>
-          <p:nvPr>
-            <p:custDataLst>
-              <p:tags r:id="rId9"/>
-            </p:custDataLst>
-          </p:nvPr>
-        </p:nvSpPr>
-        <p:spPr>
-          <a:xfrm>
-            <a:off x="3457869" y="4770120"/>
-            <a:ext cx="2700000" cy="829945"/>
-          </a:xfrm>
-          <a:prstGeom prst="rect">
-            <a:avLst/>
-          </a:prstGeom>
-          <a:noFill/>
-        </p:spPr>
-        <p:txBody>
-          <a:bodyPr wrap="square" rtlCol="0">
-            <a:spAutoFit/>
-          </a:bodyPr>
-          <a:lstStyle/>
-          <a:p>
-            <a:pPr marL="0" marR="0" lvl="0" indent="0" algn="ctr" defTabSz="914400" rtl="0" eaLnBrk="1" fontAlgn="auto" latinLnBrk="0" hangingPunct="1">
-              <a:lnSpc>
-                <a:spcPct val="100000"/>
-              </a:lnSpc>
-              <a:spcBef>
-                <a:spcPts val="0"/>
-              </a:spcBef>
-              <a:spcAft>
-                <a:spcPts val="0"/>
-              </a:spcAft>
-              <a:buClrTx/>
-              <a:buSzTx/>
-              <a:buFontTx/>
-              <a:buNone/>
-              <a:defRPr/>
-            </a:pPr>
-            <a:r>
-              <a:rPr lang="en-US" altLang="zh-CN" sz="2400" b="1" dirty="0" smtClean="0">
-                <a:solidFill>
-                  <a:srgbClr val="0064D2"/>
-                </a:solidFill>
-                <a:latin typeface="微软雅黑" panose="020B0503020204020204" pitchFamily="34" charset="-122"/>
-                <a:ea typeface="微软雅黑" panose="020B0503020204020204" pitchFamily="34" charset="-122"/>
-                <a:sym typeface="+mn-ea"/>
-              </a:rPr>
-              <a:t>Transformer </a:t>
-            </a:r>
-            <a:r>
-              <a:rPr lang="zh-CN" altLang="en-US" sz="2400" b="1" dirty="0" smtClean="0">
-                <a:solidFill>
-                  <a:srgbClr val="0064D2"/>
-                </a:solidFill>
-                <a:latin typeface="微软雅黑" panose="020B0503020204020204" pitchFamily="34" charset="-122"/>
-                <a:ea typeface="微软雅黑" panose="020B0503020204020204" pitchFamily="34" charset="-122"/>
-                <a:sym typeface="+mn-ea"/>
-              </a:rPr>
-              <a:t>中的词嵌入与位置编码</a:t>
-            </a:r>
-            <a:endParaRPr lang="zh-CN" altLang="en-US" sz="2400" b="1" dirty="0" smtClean="0">
-              <a:solidFill>
-                <a:srgbClr val="0064D2"/>
-              </a:solidFill>
-              <a:latin typeface="微软雅黑" panose="020B0503020204020204" pitchFamily="34" charset="-122"/>
-              <a:ea typeface="微软雅黑" panose="020B0503020204020204" pitchFamily="34" charset="-122"/>
-              <a:sym typeface="+mn-ea"/>
-            </a:endParaRPr>
-          </a:p>
-        </p:txBody>
-      </p:sp>
-      <p:sp>
-        <p:nvSpPr>
-          <p:cNvPr id="4" name="文本框1"/>
-          <p:cNvSpPr txBox="1"/>
-          <p:nvPr>
-            <p:custDataLst>
-              <p:tags r:id="rId10"/>
-            </p:custDataLst>
-          </p:nvPr>
-        </p:nvSpPr>
-        <p:spPr>
-          <a:xfrm>
-            <a:off x="622292" y="4770120"/>
-            <a:ext cx="2700000" cy="460800"/>
-          </a:xfrm>
-          <a:prstGeom prst="rect">
-            <a:avLst/>
-          </a:prstGeom>
-          <a:noFill/>
-        </p:spPr>
-        <p:txBody>
-          <a:bodyPr wrap="square" rtlCol="0">
-            <a:noAutofit/>
-          </a:bodyPr>
-          <a:lstStyle/>
-          <a:p>
-            <a:pPr marL="0" marR="0" lvl="0" indent="0" algn="ctr" defTabSz="914400" rtl="0" eaLnBrk="1" fontAlgn="auto" latinLnBrk="0" hangingPunct="1">
-              <a:lnSpc>
-                <a:spcPct val="100000"/>
-              </a:lnSpc>
-              <a:spcBef>
-                <a:spcPts val="0"/>
-              </a:spcBef>
-              <a:spcAft>
-                <a:spcPts val="0"/>
-              </a:spcAft>
-              <a:buClrTx/>
-              <a:buSzTx/>
-              <a:buFontTx/>
-              <a:buNone/>
-              <a:defRPr/>
-            </a:pPr>
-            <a:r>
-              <a:rPr lang="zh-CN" altLang="zh-CN" sz="2400" dirty="0" smtClean="0">
-                <a:solidFill>
-                  <a:schemeClr val="tx1"/>
-                </a:solidFill>
-                <a:latin typeface="微软雅黑" panose="020B0503020204020204" pitchFamily="34" charset="-122"/>
-                <a:ea typeface="微软雅黑" panose="020B0503020204020204" pitchFamily="34" charset="-122"/>
-                <a:sym typeface="+mn-ea"/>
-              </a:rPr>
-              <a:t>使用不同的分词器实现分词</a:t>
-            </a:r>
-            <a:endParaRPr lang="zh-CN" altLang="zh-CN" sz="2400" dirty="0" smtClean="0">
-              <a:solidFill>
-                <a:schemeClr val="tx1"/>
-              </a:solidFill>
-              <a:latin typeface="微软雅黑" panose="020B0503020204020204" pitchFamily="34" charset="-122"/>
-              <a:ea typeface="微软雅黑" panose="020B0503020204020204" pitchFamily="34" charset="-122"/>
-              <a:sym typeface="+mn-ea"/>
-            </a:endParaRPr>
-          </a:p>
-        </p:txBody>
-      </p:sp>
-      <p:sp>
-        <p:nvSpPr>
-          <p:cNvPr id="5" name="圆角矩形 34"/>
-          <p:cNvSpPr/>
-          <p:nvPr>
-            <p:custDataLst>
-              <p:tags r:id="rId11"/>
-            </p:custDataLst>
-          </p:nvPr>
-        </p:nvSpPr>
-        <p:spPr>
-          <a:xfrm rot="2700000">
-            <a:off x="6995795" y="2531745"/>
-            <a:ext cx="1492885" cy="1393825"/>
-          </a:xfrm>
-          <a:prstGeom prst="roundRect">
-            <a:avLst>
-              <a:gd name="adj" fmla="val 6319"/>
-            </a:avLst>
-          </a:prstGeom>
-          <a:solidFill>
-            <a:schemeClr val="bg1">
-              <a:lumMod val="95000"/>
-            </a:schemeClr>
-          </a:solidFill>
-          <a:ln>
-            <a:noFill/>
-          </a:ln>
-          <a:effectLst>
-            <a:outerShdw blurRad="152400" dist="63500" dir="8100000" algn="tl" rotWithShape="0">
-              <a:prstClr val="black">
-                <a:alpha val="30000"/>
-              </a:prstClr>
-            </a:outerShdw>
-          </a:effectLst>
-          <a:scene3d>
-            <a:camera prst="orthographicFront"/>
-            <a:lightRig rig="threePt" dir="t"/>
-          </a:scene3d>
-          <a:sp3d prstMaterial="softEdge">
-            <a:bevelT w="38100" h="6350"/>
-          </a:sp3d>
-        </p:spPr>
-        <p:style>
-          <a:lnRef idx="2">
-            <a:schemeClr val="accent1">
-              <a:shade val="50000"/>
-            </a:schemeClr>
-          </a:lnRef>
-          <a:fillRef idx="1">
-            <a:schemeClr val="accent1"/>
-          </a:fillRef>
-          <a:effectRef idx="0">
-            <a:schemeClr val="accent1"/>
-          </a:effectRef>
-          <a:fontRef idx="minor">
-            <a:schemeClr val="lt1"/>
-          </a:fontRef>
-        </p:style>
-        <p:txBody>
-          <a:bodyPr rtlCol="0" anchor="ctr"/>
-          <a:lstStyle/>
-          <a:p>
-            <a:pPr marL="0" marR="0" lvl="0" indent="0" algn="ctr" defTabSz="914400" rtl="0" eaLnBrk="1" fontAlgn="auto" latinLnBrk="0" hangingPunct="1">
-              <a:lnSpc>
-                <a:spcPct val="100000"/>
-              </a:lnSpc>
-              <a:spcBef>
-                <a:spcPts val="0"/>
-              </a:spcBef>
-              <a:spcAft>
-                <a:spcPts val="0"/>
-              </a:spcAft>
-              <a:buClrTx/>
-              <a:buSzTx/>
-              <a:buFontTx/>
-              <a:buNone/>
-              <a:defRPr/>
-            </a:pPr>
-            <a:endParaRPr kumimoji="0" lang="zh-CN" altLang="en-US" sz="2800" b="0" i="0" u="none" strike="noStrike" kern="1200" cap="none" spc="0" normalizeH="0" baseline="0" noProof="0" dirty="0">
-              <a:ln>
-                <a:noFill/>
-              </a:ln>
-              <a:solidFill>
-                <a:prstClr val="white"/>
-              </a:solidFill>
-              <a:effectLst/>
-              <a:uLnTx/>
-              <a:uFillTx/>
-              <a:latin typeface="DIN-BoldItalic" pitchFamily="50" charset="0"/>
-              <a:ea typeface="微软雅黑" panose="020B0503020204020204" pitchFamily="34" charset="-122"/>
-              <a:cs typeface="+mn-cs"/>
-            </a:endParaRPr>
-          </a:p>
-        </p:txBody>
-      </p:sp>
-      <p:sp>
-        <p:nvSpPr>
-          <p:cNvPr id="6" name="圆角矩形 38"/>
-          <p:cNvSpPr/>
-          <p:nvPr>
-            <p:custDataLst>
-              <p:tags r:id="rId12"/>
-            </p:custDataLst>
-          </p:nvPr>
-        </p:nvSpPr>
-        <p:spPr>
-          <a:xfrm rot="2700000">
-            <a:off x="7209155" y="2696845"/>
-            <a:ext cx="1068070" cy="1068070"/>
-          </a:xfrm>
-          <a:prstGeom prst="roundRect">
-            <a:avLst>
-              <a:gd name="adj" fmla="val 6319"/>
-            </a:avLst>
-          </a:prstGeom>
-          <a:solidFill>
-            <a:schemeClr val="tx1">
-              <a:lumMod val="65000"/>
-              <a:lumOff val="35000"/>
-            </a:schemeClr>
-          </a:solidFill>
-          <a:ln>
-            <a:solidFill>
-              <a:schemeClr val="accent1"/>
-            </a:solidFill>
-          </a:ln>
-        </p:spPr>
-        <p:style>
-          <a:lnRef idx="2">
-            <a:schemeClr val="accent1">
-              <a:shade val="50000"/>
-            </a:schemeClr>
-          </a:lnRef>
-          <a:fillRef idx="1">
-            <a:schemeClr val="accent1"/>
-          </a:fillRef>
-          <a:effectRef idx="0">
-            <a:schemeClr val="accent1"/>
-          </a:effectRef>
-          <a:fontRef idx="minor">
-            <a:schemeClr val="lt1"/>
-          </a:fontRef>
-        </p:style>
-        <p:txBody>
-          <a:bodyPr rtlCol="0" anchor="ctr"/>
-          <a:lstStyle/>
-          <a:p>
-            <a:pPr marL="0" marR="0" lvl="0" indent="0" algn="ctr" defTabSz="914400" rtl="0" eaLnBrk="1" fontAlgn="auto" latinLnBrk="0" hangingPunct="1">
-              <a:lnSpc>
-                <a:spcPct val="100000"/>
-              </a:lnSpc>
-              <a:spcBef>
-                <a:spcPts val="0"/>
-              </a:spcBef>
-              <a:spcAft>
-                <a:spcPts val="0"/>
-              </a:spcAft>
-              <a:buClrTx/>
-              <a:buSzTx/>
-              <a:buFontTx/>
-              <a:buNone/>
-              <a:defRPr/>
-            </a:pPr>
-            <a:endParaRPr kumimoji="0" lang="zh-CN" altLang="en-US" sz="1800" b="0" i="0" u="none" strike="noStrike" kern="1200" cap="none" spc="0" normalizeH="0" baseline="0" noProof="0" dirty="0">
-              <a:ln>
-                <a:noFill/>
-              </a:ln>
-              <a:solidFill>
-                <a:prstClr val="white"/>
-              </a:solidFill>
-              <a:effectLst/>
-              <a:uLnTx/>
-              <a:uFillTx/>
-              <a:latin typeface="等线" panose="02010600030101010101" charset="-122"/>
-              <a:ea typeface="微软雅黑" panose="020B0503020204020204" pitchFamily="34" charset="-122"/>
-              <a:cs typeface="+mn-cs"/>
-            </a:endParaRPr>
-          </a:p>
-        </p:txBody>
-      </p:sp>
-      <p:sp>
-        <p:nvSpPr>
-          <p:cNvPr id="8" name="圆角矩形 34"/>
-          <p:cNvSpPr/>
-          <p:nvPr>
-            <p:custDataLst>
-              <p:tags r:id="rId13"/>
-            </p:custDataLst>
-          </p:nvPr>
-        </p:nvSpPr>
-        <p:spPr>
-          <a:xfrm rot="2700000">
-            <a:off x="9720580" y="2510790"/>
-            <a:ext cx="1454785" cy="1449070"/>
-          </a:xfrm>
-          <a:prstGeom prst="roundRect">
-            <a:avLst>
-              <a:gd name="adj" fmla="val 6319"/>
-            </a:avLst>
-          </a:prstGeom>
-          <a:solidFill>
-            <a:schemeClr val="bg1">
-              <a:lumMod val="95000"/>
-            </a:schemeClr>
-          </a:solidFill>
-          <a:ln>
-            <a:noFill/>
-          </a:ln>
-          <a:effectLst>
-            <a:outerShdw blurRad="152400" dist="63500" dir="8100000" algn="tl" rotWithShape="0">
-              <a:prstClr val="black">
-                <a:alpha val="30000"/>
-              </a:prstClr>
-            </a:outerShdw>
-          </a:effectLst>
-          <a:scene3d>
-            <a:camera prst="orthographicFront"/>
-            <a:lightRig rig="threePt" dir="t"/>
-          </a:scene3d>
-          <a:sp3d prstMaterial="softEdge">
-            <a:bevelT w="38100" h="6350"/>
-          </a:sp3d>
-        </p:spPr>
-        <p:style>
-          <a:lnRef idx="2">
-            <a:schemeClr val="accent1">
-              <a:shade val="50000"/>
-            </a:schemeClr>
-          </a:lnRef>
-          <a:fillRef idx="1">
-            <a:schemeClr val="accent1"/>
-          </a:fillRef>
-          <a:effectRef idx="0">
-            <a:schemeClr val="accent1"/>
-          </a:effectRef>
-          <a:fontRef idx="minor">
-            <a:schemeClr val="lt1"/>
-          </a:fontRef>
-        </p:style>
-        <p:txBody>
-          <a:bodyPr rtlCol="0" anchor="ctr"/>
-          <a:lstStyle/>
-          <a:p>
-            <a:pPr marL="0" marR="0" lvl="0" indent="0" algn="ctr" defTabSz="914400" rtl="0" eaLnBrk="1" fontAlgn="auto" latinLnBrk="0" hangingPunct="1">
-              <a:lnSpc>
-                <a:spcPct val="100000"/>
-              </a:lnSpc>
-              <a:spcBef>
-                <a:spcPts val="0"/>
-              </a:spcBef>
-              <a:spcAft>
-                <a:spcPts val="0"/>
-              </a:spcAft>
-              <a:buClrTx/>
-              <a:buSzTx/>
-              <a:buFontTx/>
-              <a:buNone/>
-              <a:defRPr/>
-            </a:pPr>
-            <a:endParaRPr kumimoji="0" lang="zh-CN" altLang="en-US" sz="2800" b="0" i="0" u="none" strike="noStrike" kern="1200" cap="none" spc="0" normalizeH="0" baseline="0" noProof="0" dirty="0">
-              <a:ln>
-                <a:noFill/>
-              </a:ln>
-              <a:solidFill>
-                <a:prstClr val="white"/>
-              </a:solidFill>
-              <a:effectLst/>
-              <a:uLnTx/>
-              <a:uFillTx/>
-              <a:latin typeface="DIN-BoldItalic" pitchFamily="50" charset="0"/>
-              <a:ea typeface="微软雅黑" panose="020B0503020204020204" pitchFamily="34" charset="-122"/>
-              <a:cs typeface="+mn-cs"/>
-            </a:endParaRPr>
-          </a:p>
-        </p:txBody>
-      </p:sp>
-      <p:sp>
-        <p:nvSpPr>
-          <p:cNvPr id="7" name="圆角矩形 38"/>
-          <p:cNvSpPr/>
-          <p:nvPr>
-            <p:custDataLst>
-              <p:tags r:id="rId14"/>
-            </p:custDataLst>
-          </p:nvPr>
-        </p:nvSpPr>
-        <p:spPr>
-          <a:xfrm rot="2700000">
-            <a:off x="9920605" y="2696210"/>
-            <a:ext cx="1068070" cy="1068070"/>
-          </a:xfrm>
-          <a:prstGeom prst="roundRect">
-            <a:avLst>
-              <a:gd name="adj" fmla="val 6319"/>
-            </a:avLst>
-          </a:prstGeom>
-          <a:solidFill>
-            <a:schemeClr val="tx1">
-              <a:lumMod val="65000"/>
-              <a:lumOff val="35000"/>
-            </a:schemeClr>
-          </a:solidFill>
-          <a:ln>
-            <a:solidFill>
-              <a:schemeClr val="accent1"/>
-            </a:solidFill>
-          </a:ln>
-        </p:spPr>
-        <p:style>
-          <a:lnRef idx="2">
-            <a:schemeClr val="accent1">
-              <a:shade val="50000"/>
-            </a:schemeClr>
-          </a:lnRef>
-          <a:fillRef idx="1">
-            <a:schemeClr val="accent1"/>
-          </a:fillRef>
-          <a:effectRef idx="0">
-            <a:schemeClr val="accent1"/>
-          </a:effectRef>
-          <a:fontRef idx="minor">
-            <a:schemeClr val="lt1"/>
-          </a:fontRef>
-        </p:style>
-        <p:txBody>
-          <a:bodyPr rtlCol="0" anchor="ctr"/>
-          <a:lstStyle/>
-          <a:p>
-            <a:pPr marL="0" marR="0" lvl="0" indent="0" algn="ctr" defTabSz="914400" rtl="0" eaLnBrk="1" fontAlgn="auto" latinLnBrk="0" hangingPunct="1">
-              <a:lnSpc>
-                <a:spcPct val="100000"/>
-              </a:lnSpc>
-              <a:spcBef>
-                <a:spcPts val="0"/>
-              </a:spcBef>
-              <a:spcAft>
-                <a:spcPts val="0"/>
-              </a:spcAft>
-              <a:buClrTx/>
-              <a:buSzTx/>
-              <a:buFontTx/>
-              <a:buNone/>
-              <a:defRPr/>
-            </a:pPr>
-            <a:endParaRPr kumimoji="0" lang="zh-CN" altLang="en-US" sz="1800" b="0" i="0" u="none" strike="noStrike" kern="1200" cap="none" spc="0" normalizeH="0" baseline="0" noProof="0" dirty="0">
-              <a:ln>
-                <a:noFill/>
-              </a:ln>
-              <a:solidFill>
-                <a:prstClr val="white"/>
-              </a:solidFill>
-              <a:effectLst/>
-              <a:uLnTx/>
-              <a:uFillTx/>
-              <a:latin typeface="等线" panose="02010600030101010101" charset="-122"/>
-              <a:ea typeface="微软雅黑" panose="020B0503020204020204" pitchFamily="34" charset="-122"/>
-              <a:cs typeface="+mn-cs"/>
-            </a:endParaRPr>
-          </a:p>
-        </p:txBody>
-      </p:sp>
-      <p:sp>
-        <p:nvSpPr>
-          <p:cNvPr id="9" name="文本框 8"/>
-          <p:cNvSpPr txBox="1"/>
-          <p:nvPr>
-            <p:custDataLst>
-              <p:tags r:id="rId15"/>
-            </p:custDataLst>
-          </p:nvPr>
-        </p:nvSpPr>
-        <p:spPr>
-          <a:xfrm>
-            <a:off x="7457339" y="2762250"/>
-            <a:ext cx="682625" cy="1014730"/>
-          </a:xfrm>
-          <a:prstGeom prst="rect">
-            <a:avLst/>
-          </a:prstGeom>
-          <a:noFill/>
-        </p:spPr>
-        <p:txBody>
-          <a:bodyPr wrap="square" rtlCol="0">
-            <a:spAutoFit/>
-          </a:bodyPr>
-          <a:lstStyle/>
-          <a:p>
-            <a:r>
-              <a:rPr lang="en-US" altLang="zh-CN" sz="6000" b="1" dirty="0">
-                <a:solidFill>
-                  <a:schemeClr val="bg1"/>
-                </a:solidFill>
-                <a:latin typeface="+mj-ea"/>
-                <a:ea typeface="+mj-ea"/>
-              </a:rPr>
-              <a:t>3</a:t>
-            </a:r>
-            <a:endParaRPr lang="en-US" altLang="zh-CN" sz="6000" b="1" dirty="0">
-              <a:solidFill>
-                <a:schemeClr val="bg1"/>
-              </a:solidFill>
-              <a:latin typeface="+mj-ea"/>
-              <a:ea typeface="+mj-ea"/>
-            </a:endParaRPr>
-          </a:p>
-        </p:txBody>
-      </p:sp>
-      <p:sp>
-        <p:nvSpPr>
-          <p:cNvPr id="16" name="文本框 15"/>
-          <p:cNvSpPr txBox="1"/>
-          <p:nvPr>
-            <p:custDataLst>
-              <p:tags r:id="rId16"/>
-            </p:custDataLst>
-          </p:nvPr>
-        </p:nvSpPr>
-        <p:spPr>
-          <a:xfrm>
-            <a:off x="10102114" y="2696845"/>
-            <a:ext cx="682625" cy="1014730"/>
-          </a:xfrm>
-          <a:prstGeom prst="rect">
-            <a:avLst/>
-          </a:prstGeom>
-          <a:noFill/>
-        </p:spPr>
-        <p:txBody>
-          <a:bodyPr wrap="square" rtlCol="0">
-            <a:spAutoFit/>
-          </a:bodyPr>
-          <a:lstStyle/>
-          <a:p>
-            <a:r>
-              <a:rPr lang="en-US" altLang="zh-CN" sz="6000" b="1">
-                <a:solidFill>
-                  <a:schemeClr val="bg1"/>
-                </a:solidFill>
-                <a:latin typeface="+mj-ea"/>
-                <a:ea typeface="+mj-ea"/>
-              </a:rPr>
-              <a:t>4</a:t>
-            </a:r>
-            <a:endParaRPr lang="en-US" altLang="zh-CN" sz="6000" b="1">
-              <a:solidFill>
-                <a:schemeClr val="bg1"/>
-              </a:solidFill>
-              <a:latin typeface="+mj-ea"/>
-              <a:ea typeface="+mj-ea"/>
-            </a:endParaRPr>
-          </a:p>
-        </p:txBody>
-      </p:sp>
-      <p:sp>
-        <p:nvSpPr>
-          <p:cNvPr id="20" name="任意多边形 42"/>
-          <p:cNvSpPr/>
-          <p:nvPr>
-            <p:custDataLst>
-              <p:tags r:id="rId17"/>
-            </p:custDataLst>
-          </p:nvPr>
-        </p:nvSpPr>
-        <p:spPr>
-          <a:xfrm>
-            <a:off x="7089614" y="2000885"/>
-            <a:ext cx="1484791" cy="864942"/>
-          </a:xfrm>
-          <a:custGeom>
-            <a:avLst/>
-            <a:gdLst>
-              <a:gd name="connsiteX0" fmla="*/ 0 w 1940313"/>
-              <a:gd name="connsiteY0" fmla="*/ 791737 h 1148576"/>
-              <a:gd name="connsiteX1" fmla="*/ 791737 w 1940313"/>
-              <a:gd name="connsiteY1" fmla="*/ 0 h 1148576"/>
-              <a:gd name="connsiteX2" fmla="*/ 1940313 w 1940313"/>
-              <a:gd name="connsiteY2" fmla="*/ 1148576 h 1148576"/>
-            </a:gdLst>
-            <a:ahLst/>
-            <a:cxnLst>
-              <a:cxn ang="0">
-                <a:pos x="connsiteX0" y="connsiteY0"/>
-              </a:cxn>
-              <a:cxn ang="0">
-                <a:pos x="connsiteX1" y="connsiteY1"/>
-              </a:cxn>
-              <a:cxn ang="0">
-                <a:pos x="connsiteX2" y="connsiteY2"/>
-              </a:cxn>
-            </a:cxnLst>
-            <a:rect l="l" t="t" r="r" b="b"/>
-            <a:pathLst>
-              <a:path w="1940313" h="1148576">
-                <a:moveTo>
-                  <a:pt x="0" y="791737"/>
-                </a:moveTo>
-                <a:lnTo>
-                  <a:pt x="791737" y="0"/>
-                </a:lnTo>
-                <a:lnTo>
-                  <a:pt x="1940313" y="1148576"/>
-                </a:lnTo>
-              </a:path>
-            </a:pathLst>
-          </a:custGeom>
-          <a:noFill/>
-          <a:ln w="12700">
-            <a:solidFill>
-              <a:srgbClr val="8A8B8F"/>
-            </a:solidFill>
-            <a:prstDash val="dash"/>
-            <a:headEnd type="oval" w="med" len="med"/>
-            <a:tailEnd type="triangle" w="med" len="med"/>
-          </a:ln>
-        </p:spPr>
-        <p:style>
-          <a:lnRef idx="2">
-            <a:schemeClr val="accent1">
-              <a:shade val="50000"/>
-            </a:schemeClr>
-          </a:lnRef>
-          <a:fillRef idx="1">
-            <a:schemeClr val="accent1"/>
-          </a:fillRef>
-          <a:effectRef idx="0">
-            <a:schemeClr val="accent1"/>
-          </a:effectRef>
-          <a:fontRef idx="minor">
-            <a:schemeClr val="lt1"/>
-          </a:fontRef>
-        </p:style>
-        <p:txBody>
-          <a:bodyPr rtlCol="0" anchor="ctr"/>
-          <a:lstStyle/>
-          <a:p>
-            <a:pPr marL="0" marR="0" lvl="0" indent="0" algn="ctr" defTabSz="914400" rtl="0" eaLnBrk="1" fontAlgn="auto" latinLnBrk="0" hangingPunct="1">
-              <a:lnSpc>
-                <a:spcPct val="100000"/>
-              </a:lnSpc>
-              <a:spcBef>
-                <a:spcPts val="0"/>
-              </a:spcBef>
-              <a:spcAft>
-                <a:spcPts val="0"/>
-              </a:spcAft>
-              <a:buClrTx/>
-              <a:buSzTx/>
-              <a:buFontTx/>
-              <a:buNone/>
-              <a:defRPr/>
-            </a:pPr>
-            <a:endParaRPr kumimoji="0" lang="zh-CN" altLang="en-US" sz="1800" b="0" i="0" u="none" strike="noStrike" kern="1200" cap="none" spc="0" normalizeH="0" baseline="0" noProof="0" dirty="0">
-              <a:ln>
-                <a:noFill/>
-              </a:ln>
-              <a:solidFill>
-                <a:prstClr val="white"/>
-              </a:solidFill>
-              <a:effectLst/>
-              <a:uLnTx/>
-              <a:uFillTx/>
-              <a:latin typeface="等线" panose="02010600030101010101" charset="-122"/>
-              <a:ea typeface="微软雅黑" panose="020B0503020204020204" pitchFamily="34" charset="-122"/>
-              <a:cs typeface="+mn-cs"/>
-            </a:endParaRPr>
-          </a:p>
-        </p:txBody>
-      </p:sp>
-      <p:sp>
-        <p:nvSpPr>
-          <p:cNvPr id="23" name="任意多边形 44"/>
-          <p:cNvSpPr/>
-          <p:nvPr>
-            <p:custDataLst>
-              <p:tags r:id="rId18"/>
-            </p:custDataLst>
-          </p:nvPr>
-        </p:nvSpPr>
-        <p:spPr>
-          <a:xfrm flipV="1">
-            <a:off x="9700260" y="3601085"/>
-            <a:ext cx="1842770" cy="1015365"/>
-          </a:xfrm>
-          <a:custGeom>
-            <a:avLst/>
-            <a:gdLst>
-              <a:gd name="connsiteX0" fmla="*/ 0 w 1940313"/>
-              <a:gd name="connsiteY0" fmla="*/ 791737 h 1148576"/>
-              <a:gd name="connsiteX1" fmla="*/ 791737 w 1940313"/>
-              <a:gd name="connsiteY1" fmla="*/ 0 h 1148576"/>
-              <a:gd name="connsiteX2" fmla="*/ 1940313 w 1940313"/>
-              <a:gd name="connsiteY2" fmla="*/ 1148576 h 1148576"/>
-            </a:gdLst>
-            <a:ahLst/>
-            <a:cxnLst>
-              <a:cxn ang="0">
-                <a:pos x="connsiteX0" y="connsiteY0"/>
-              </a:cxn>
-              <a:cxn ang="0">
-                <a:pos x="connsiteX1" y="connsiteY1"/>
-              </a:cxn>
-              <a:cxn ang="0">
-                <a:pos x="connsiteX2" y="connsiteY2"/>
-              </a:cxn>
-            </a:cxnLst>
-            <a:rect l="l" t="t" r="r" b="b"/>
-            <a:pathLst>
-              <a:path w="1940313" h="1148576">
-                <a:moveTo>
-                  <a:pt x="0" y="791737"/>
-                </a:moveTo>
-                <a:lnTo>
-                  <a:pt x="791737" y="0"/>
-                </a:lnTo>
-                <a:lnTo>
-                  <a:pt x="1940313" y="1148576"/>
-                </a:lnTo>
-              </a:path>
-            </a:pathLst>
-          </a:custGeom>
-          <a:noFill/>
-          <a:ln w="12700">
-            <a:solidFill>
-              <a:srgbClr val="8A8B8F"/>
-            </a:solidFill>
-            <a:prstDash val="dash"/>
-            <a:headEnd type="oval" w="med" len="med"/>
-            <a:tailEnd type="triangle" w="med" len="med"/>
-          </a:ln>
-        </p:spPr>
-        <p:style>
-          <a:lnRef idx="2">
-            <a:schemeClr val="accent1">
-              <a:shade val="50000"/>
-            </a:schemeClr>
-          </a:lnRef>
-          <a:fillRef idx="1">
-            <a:schemeClr val="accent1"/>
-          </a:fillRef>
-          <a:effectRef idx="0">
-            <a:schemeClr val="accent1"/>
-          </a:effectRef>
-          <a:fontRef idx="minor">
-            <a:schemeClr val="lt1"/>
-          </a:fontRef>
-        </p:style>
-        <p:txBody>
-          <a:bodyPr rtlCol="0" anchor="ctr"/>
-          <a:lstStyle/>
-          <a:p>
-            <a:pPr marL="0" marR="0" lvl="0" indent="0" algn="ctr" defTabSz="914400" rtl="0" eaLnBrk="1" fontAlgn="auto" latinLnBrk="0" hangingPunct="1">
-              <a:lnSpc>
-                <a:spcPct val="100000"/>
-              </a:lnSpc>
-              <a:spcBef>
-                <a:spcPts val="0"/>
-              </a:spcBef>
-              <a:spcAft>
-                <a:spcPts val="0"/>
-              </a:spcAft>
-              <a:buClrTx/>
-              <a:buSzTx/>
-              <a:buFontTx/>
-              <a:buNone/>
-              <a:defRPr/>
-            </a:pPr>
-            <a:endParaRPr kumimoji="0" lang="zh-CN" altLang="en-US" sz="1800" b="0" i="0" u="none" strike="noStrike" kern="1200" cap="none" spc="0" normalizeH="0" baseline="0" noProof="0" dirty="0">
-              <a:ln>
-                <a:noFill/>
-              </a:ln>
-              <a:solidFill>
-                <a:prstClr val="white"/>
-              </a:solidFill>
-              <a:effectLst/>
-              <a:uLnTx/>
-              <a:uFillTx/>
-              <a:latin typeface="等线" panose="02010600030101010101" charset="-122"/>
-              <a:ea typeface="微软雅黑" panose="020B0503020204020204" pitchFamily="34" charset="-122"/>
-              <a:cs typeface="+mn-cs"/>
-            </a:endParaRPr>
-          </a:p>
-        </p:txBody>
-      </p:sp>
-      <p:sp>
-        <p:nvSpPr>
-          <p:cNvPr id="24" name="文本框1"/>
-          <p:cNvSpPr txBox="1"/>
-          <p:nvPr>
-            <p:custDataLst>
-              <p:tags r:id="rId19"/>
-            </p:custDataLst>
-          </p:nvPr>
-        </p:nvSpPr>
-        <p:spPr>
-          <a:xfrm>
-            <a:off x="6392065" y="4769465"/>
-            <a:ext cx="2700000" cy="460800"/>
-          </a:xfrm>
-          <a:prstGeom prst="rect">
-            <a:avLst/>
-          </a:prstGeom>
-          <a:noFill/>
-        </p:spPr>
-        <p:txBody>
-          <a:bodyPr wrap="square" rtlCol="0">
-            <a:noAutofit/>
-          </a:bodyPr>
-          <a:lstStyle/>
-          <a:p>
-            <a:pPr marL="0" marR="0" lvl="0" indent="0" algn="ctr" defTabSz="914400" rtl="0" eaLnBrk="1" fontAlgn="auto" latinLnBrk="0" hangingPunct="1">
-              <a:lnSpc>
-                <a:spcPct val="100000"/>
-              </a:lnSpc>
-              <a:spcBef>
-                <a:spcPts val="0"/>
-              </a:spcBef>
-              <a:spcAft>
-                <a:spcPts val="0"/>
-              </a:spcAft>
-              <a:buClrTx/>
-              <a:buSzTx/>
-              <a:buFontTx/>
-              <a:buNone/>
-              <a:defRPr/>
-            </a:pPr>
-            <a:r>
-              <a:rPr lang="en-US" altLang="zh-CN" sz="2400" dirty="0" smtClean="0">
-                <a:solidFill>
-                  <a:schemeClr val="tx1"/>
-                </a:solidFill>
-                <a:latin typeface="微软雅黑" panose="020B0503020204020204" pitchFamily="34" charset="-122"/>
-                <a:ea typeface="微软雅黑" panose="020B0503020204020204" pitchFamily="34" charset="-122"/>
-                <a:sym typeface="+mn-ea"/>
-              </a:rPr>
-              <a:t>{{text:point_</a:t>
-            </a:r>
-            <a:r>
-              <a:rPr lang="en-US" altLang="zh-CN" sz="2400" dirty="0" smtClean="0">
-                <a:solidFill>
-                  <a:schemeClr val="tx1"/>
-                </a:solidFill>
-                <a:latin typeface="微软雅黑" panose="020B0503020204020204" pitchFamily="34" charset="-122"/>
-                <a:ea typeface="微软雅黑" panose="020B0503020204020204" pitchFamily="34" charset="-122"/>
-                <a:sym typeface="+mn-ea"/>
-              </a:rPr>
-              <a:t>three}}</a:t>
-            </a:r>
-            <a:endParaRPr lang="en-US" altLang="zh-CN" sz="2400" dirty="0" smtClean="0">
-              <a:solidFill>
-                <a:schemeClr val="tx1"/>
-              </a:solidFill>
-              <a:latin typeface="微软雅黑" panose="020B0503020204020204" pitchFamily="34" charset="-122"/>
-              <a:ea typeface="微软雅黑" panose="020B0503020204020204" pitchFamily="34" charset="-122"/>
-              <a:sym typeface="+mn-ea"/>
-            </a:endParaRPr>
-          </a:p>
-        </p:txBody>
-      </p:sp>
-      <p:sp>
-        <p:nvSpPr>
-          <p:cNvPr id="25" name="文本框1"/>
-          <p:cNvSpPr txBox="1"/>
-          <p:nvPr>
-            <p:custDataLst>
-              <p:tags r:id="rId20"/>
-            </p:custDataLst>
-          </p:nvPr>
-        </p:nvSpPr>
-        <p:spPr>
-          <a:xfrm>
-            <a:off x="9104439" y="4770120"/>
-            <a:ext cx="2700000" cy="460800"/>
-          </a:xfrm>
-          <a:prstGeom prst="rect">
-            <a:avLst/>
-          </a:prstGeom>
-          <a:noFill/>
-        </p:spPr>
-        <p:txBody>
-          <a:bodyPr wrap="square" rtlCol="0">
-            <a:noAutofit/>
-          </a:bodyPr>
-          <a:lstStyle/>
-          <a:p>
-            <a:pPr marL="0" marR="0" lvl="0" indent="0" algn="ctr" defTabSz="914400" rtl="0" eaLnBrk="1" fontAlgn="auto" latinLnBrk="0" hangingPunct="1">
-              <a:lnSpc>
-                <a:spcPct val="100000"/>
-              </a:lnSpc>
-              <a:spcBef>
-                <a:spcPts val="0"/>
-              </a:spcBef>
-              <a:spcAft>
-                <a:spcPts val="0"/>
-              </a:spcAft>
-              <a:buClrTx/>
-              <a:buSzTx/>
-              <a:buFontTx/>
-              <a:buNone/>
-              <a:defRPr/>
-            </a:pPr>
-            <a:r>
-              <a:rPr lang="en-US" altLang="zh-CN" sz="2400" dirty="0" smtClean="0">
-                <a:latin typeface="微软雅黑" panose="020B0503020204020204" pitchFamily="34" charset="-122"/>
-                <a:ea typeface="微软雅黑" panose="020B0503020204020204" pitchFamily="34" charset="-122"/>
-                <a:sym typeface="+mn-ea"/>
-              </a:rPr>
-              <a:t>{{text:point_</a:t>
-            </a:r>
-            <a:r>
-              <a:rPr lang="en-US" altLang="zh-CN" sz="2400" dirty="0" smtClean="0">
-                <a:latin typeface="微软雅黑" panose="020B0503020204020204" pitchFamily="34" charset="-122"/>
-                <a:ea typeface="微软雅黑" panose="020B0503020204020204" pitchFamily="34" charset="-122"/>
-                <a:sym typeface="+mn-ea"/>
-              </a:rPr>
-              <a:t>four}}</a:t>
-            </a:r>
-            <a:endParaRPr lang="zh-CN" altLang="en-US" sz="2400" dirty="0">
-              <a:latin typeface="微软雅黑" panose="020B0503020204020204" pitchFamily="34" charset="-122"/>
-              <a:ea typeface="微软雅黑" panose="020B0503020204020204" pitchFamily="34" charset="-122"/>
-              <a:sym typeface="+mn-lt"/>
-            </a:endParaRPr>
-          </a:p>
-        </p:txBody>
-      </p:sp>
-      <p:sp>
-        <p:nvSpPr>
-          <p:cNvPr id="19" name="文本框 18"/>
-          <p:cNvSpPr txBox="1"/>
-          <p:nvPr/>
-        </p:nvSpPr>
-        <p:spPr>
-          <a:xfrm>
-            <a:off x="0" y="793750"/>
-            <a:ext cx="1351262" cy="2061210"/>
-          </a:xfrm>
-          <a:prstGeom prst="rect">
-            <a:avLst/>
-          </a:prstGeom>
-          <a:noFill/>
-        </p:spPr>
-        <p:txBody>
-          <a:bodyPr wrap="square" rtlCol="0">
-            <a:spAutoFit/>
-            <a:scene3d>
-              <a:camera prst="orthographicFront"/>
-              <a:lightRig rig="threePt" dir="t"/>
-            </a:scene3d>
-            <a:sp3d contourW="12700"/>
-          </a:bodyPr>
-          <a:lstStyle/>
-          <a:p>
-            <a:pPr algn="ctr"/>
-            <a:r>
-              <a:rPr lang="en-US" altLang="zh-CN" sz="3200" dirty="0" smtClean="0">
-                <a:solidFill>
-                  <a:srgbClr val="3F396C"/>
-                </a:solidFill>
-                <a:latin typeface="思源宋体" panose="02020700000000000000" charset="-122"/>
-                <a:ea typeface="思源宋体" panose="02020700000000000000" charset="-122"/>
-              </a:rPr>
-              <a:t>04</a:t>
-            </a:r>
-            <a:endParaRPr lang="en-US" altLang="zh-CN" sz="3200" dirty="0" smtClean="0">
-              <a:solidFill>
-                <a:srgbClr val="3F396C"/>
-              </a:solidFill>
-              <a:latin typeface="思源宋体" panose="02020700000000000000" charset="-122"/>
-              <a:ea typeface="思源宋体" panose="02020700000000000000" charset="-122"/>
-            </a:endParaRPr>
-          </a:p>
-        </p:txBody>
-      </p:sp>
-      <p:sp>
-        <p:nvSpPr>
-          <p:cNvPr id="22" name="文本框 21"/>
+          <p:cNvPr id="17" name="文本框 16"/>
           <p:cNvSpPr txBox="1"/>
           <p:nvPr/>
         </p:nvSpPr>
@@ -31736,75 +30094,6 @@
 </p:tagLst>
 </file>
 
-<file path=ppt/tags/tag100.xml><?xml version="1.0" encoding="utf-8"?>
-<p:tagLst xmlns:p="http://schemas.openxmlformats.org/presentationml/2006/main">
-  <p:tag name="KSO_WM_BEAUTIFY_FLAG" val=""/>
-  <p:tag name="KSO_WM_DIAGRAM_VIRTUALLY_FRAME" val="{&quot;height&quot;:283.4,&quot;left&quot;:42.29937007874014,&quot;top&quot;:157.55,&quot;width&quot;:912.1340097406343}"/>
-</p:tagLst>
-</file>
-
-<file path=ppt/tags/tag101.xml><?xml version="1.0" encoding="utf-8"?>
-<p:tagLst xmlns:p="http://schemas.openxmlformats.org/presentationml/2006/main">
-  <p:tag name="KSO_WM_BEAUTIFY_FLAG" val=""/>
-  <p:tag name="KSO_WM_DIAGRAM_VIRTUALLY_FRAME" val="{&quot;height&quot;:283.4,&quot;left&quot;:42.29937007874014,&quot;top&quot;:157.55,&quot;width&quot;:912.1340097406343}"/>
-</p:tagLst>
-</file>
-
-<file path=ppt/tags/tag102.xml><?xml version="1.0" encoding="utf-8"?>
-<p:tagLst xmlns:p="http://schemas.openxmlformats.org/presentationml/2006/main">
-  <p:tag name="KSO_WM_BEAUTIFY_FLAG" val=""/>
-  <p:tag name="KSO_WM_DIAGRAM_VIRTUALLY_FRAME" val="{&quot;height&quot;:283.4,&quot;left&quot;:42.29937007874014,&quot;top&quot;:157.55,&quot;width&quot;:912.1340097406343}"/>
-</p:tagLst>
-</file>
-
-<file path=ppt/tags/tag103.xml><?xml version="1.0" encoding="utf-8"?>
-<p:tagLst xmlns:p="http://schemas.openxmlformats.org/presentationml/2006/main">
-  <p:tag name="KSO_WM_BEAUTIFY_FLAG" val=""/>
-  <p:tag name="KSO_WM_DIAGRAM_VIRTUALLY_FRAME" val="{&quot;height&quot;:283.4,&quot;left&quot;:42.29937007874014,&quot;top&quot;:157.55,&quot;width&quot;:912.1340097406343}"/>
-</p:tagLst>
-</file>
-
-<file path=ppt/tags/tag104.xml><?xml version="1.0" encoding="utf-8"?>
-<p:tagLst xmlns:p="http://schemas.openxmlformats.org/presentationml/2006/main">
-  <p:tag name="KSO_WM_BEAUTIFY_FLAG" val=""/>
-  <p:tag name="KSO_WM_DIAGRAM_VIRTUALLY_FRAME" val="{&quot;height&quot;:283.4,&quot;left&quot;:42.29937007874014,&quot;top&quot;:157.55,&quot;width&quot;:912.1340097406343}"/>
-</p:tagLst>
-</file>
-
-<file path=ppt/tags/tag105.xml><?xml version="1.0" encoding="utf-8"?>
-<p:tagLst xmlns:p="http://schemas.openxmlformats.org/presentationml/2006/main">
-  <p:tag name="KSO_WM_BEAUTIFY_FLAG" val=""/>
-  <p:tag name="KSO_WM_DIAGRAM_VIRTUALLY_FRAME" val="{&quot;height&quot;:283.4,&quot;left&quot;:42.29937007874014,&quot;top&quot;:157.55,&quot;width&quot;:912.1340097406343}"/>
-</p:tagLst>
-</file>
-
-<file path=ppt/tags/tag106.xml><?xml version="1.0" encoding="utf-8"?>
-<p:tagLst xmlns:p="http://schemas.openxmlformats.org/presentationml/2006/main">
-  <p:tag name="KSO_WM_BEAUTIFY_FLAG" val=""/>
-</p:tagLst>
-</file>
-
-<file path=ppt/tags/tag107.xml><?xml version="1.0" encoding="utf-8"?>
-<p:tagLst xmlns:p="http://schemas.openxmlformats.org/presentationml/2006/main">
-  <p:tag name="KSO_WM_BEAUTIFY_FLAG" val=""/>
-  <p:tag name="KSO_WM_DIAGRAM_VIRTUALLY_FRAME" val="{&quot;height&quot;:283.4,&quot;left&quot;:42.29937007874014,&quot;top&quot;:157.55,&quot;width&quot;:912.1340097406343}"/>
-</p:tagLst>
-</file>
-
-<file path=ppt/tags/tag108.xml><?xml version="1.0" encoding="utf-8"?>
-<p:tagLst xmlns:p="http://schemas.openxmlformats.org/presentationml/2006/main">
-  <p:tag name="KSO_WM_BEAUTIFY_FLAG" val=""/>
-  <p:tag name="KSO_WM_DIAGRAM_VIRTUALLY_FRAME" val="{&quot;height&quot;:283.4,&quot;left&quot;:42.29937007874014,&quot;top&quot;:157.55,&quot;width&quot;:912.1340097406343}"/>
-</p:tagLst>
-</file>
-
-<file path=ppt/tags/tag109.xml><?xml version="1.0" encoding="utf-8"?>
-<p:tagLst xmlns:p="http://schemas.openxmlformats.org/presentationml/2006/main">
-  <p:tag name="KSO_WM_BEAUTIFY_FLAG" val=""/>
-  <p:tag name="KSO_WM_DIAGRAM_VIRTUALLY_FRAME" val="{&quot;height&quot;:283.4,&quot;left&quot;:42.29937007874014,&quot;top&quot;:157.55,&quot;width&quot;:912.1340097406343}"/>
-</p:tagLst>
-</file>
-
 <file path=ppt/tags/tag11.xml><?xml version="1.0" encoding="utf-8"?>
 <p:tagLst xmlns:p="http://schemas.openxmlformats.org/presentationml/2006/main">
   <p:tag name="KSO_WM_UNIT_HIGHLIGHT" val="0"/>
@@ -31815,13 +30104,6 @@
   <p:tag name="KSO_WM_UNIT_LAYERLEVEL" val="1"/>
   <p:tag name="KSO_WM_TAG_VERSION" val="1.0"/>
   <p:tag name="KSO_WM_BEAUTIFY_FLAG" val="#wm#"/>
-</p:tagLst>
-</file>
-
-<file path=ppt/tags/tag110.xml><?xml version="1.0" encoding="utf-8"?>
-<p:tagLst xmlns:p="http://schemas.openxmlformats.org/presentationml/2006/main">
-  <p:tag name="COMMONDATA" val="eyJoZGlkIjoiYzZkNzQ4ZWFiZmQ4NTRhOWRkZTk3YTMwMjlmMmZhYmUifQ=="/>
-  <p:tag name="KSO_WPP_MARK_KEY" val="3c15e236-6e17-4788-8b7a-5fd2c15b6c5c"/>
 </p:tagLst>
 </file>
 
@@ -32659,61 +30941,61 @@
 
 <file path=ppt/tags/tag70.xml><?xml version="1.0" encoding="utf-8"?>
 <p:tagLst xmlns:p="http://schemas.openxmlformats.org/presentationml/2006/main">
-  <p:tag name="KSO_WM_DIAGRAM_VIRTUALLY_FRAME" val="{&quot;height&quot;:283.4,&quot;left&quot;:42.29937007874014,&quot;top&quot;:157.55,&quot;width&quot;:912.1340097406343}"/>
+  <p:tag name="KSO_WM_DIAGRAM_VIRTUALLY_FRAME" val="{&quot;height&quot;:333.7,&quot;left&quot;:181.0367716535433,&quot;top&quot;:150.5,&quot;width&quot;:585.2126771653544}"/>
 </p:tagLst>
 </file>
 
 <file path=ppt/tags/tag71.xml><?xml version="1.0" encoding="utf-8"?>
 <p:tagLst xmlns:p="http://schemas.openxmlformats.org/presentationml/2006/main">
-  <p:tag name="KSO_WM_DIAGRAM_VIRTUALLY_FRAME" val="{&quot;height&quot;:283.4,&quot;left&quot;:42.29937007874014,&quot;top&quot;:157.55,&quot;width&quot;:912.1340097406343}"/>
+  <p:tag name="KSO_WM_DIAGRAM_VIRTUALLY_FRAME" val="{&quot;height&quot;:333.6891855480546,&quot;left&quot;:181.0367716535433,&quot;top&quot;:150.5,&quot;width&quot;:585.2126771653544}"/>
 </p:tagLst>
 </file>
 
 <file path=ppt/tags/tag72.xml><?xml version="1.0" encoding="utf-8"?>
 <p:tagLst xmlns:p="http://schemas.openxmlformats.org/presentationml/2006/main">
-  <p:tag name="KSO_WM_DIAGRAM_VIRTUALLY_FRAME" val="{&quot;height&quot;:283.4,&quot;left&quot;:42.29937007874014,&quot;top&quot;:157.55,&quot;width&quot;:912.1340097406343}"/>
+  <p:tag name="KSO_WM_DIAGRAM_VIRTUALLY_FRAME" val="{&quot;height&quot;:333.7,&quot;left&quot;:181.0367716535433,&quot;top&quot;:150.5,&quot;width&quot;:585.2126771653544}"/>
 </p:tagLst>
 </file>
 
 <file path=ppt/tags/tag73.xml><?xml version="1.0" encoding="utf-8"?>
 <p:tagLst xmlns:p="http://schemas.openxmlformats.org/presentationml/2006/main">
-  <p:tag name="KSO_WM_DIAGRAM_VIRTUALLY_FRAME" val="{&quot;height&quot;:283.4,&quot;left&quot;:42.29937007874014,&quot;top&quot;:157.55,&quot;width&quot;:912.1340097406343}"/>
+  <p:tag name="KSO_WM_DIAGRAM_VIRTUALLY_FRAME" val="{&quot;height&quot;:333.7,&quot;left&quot;:181.0367716535433,&quot;top&quot;:150.5,&quot;width&quot;:585.2126771653544}"/>
 </p:tagLst>
 </file>
 
 <file path=ppt/tags/tag74.xml><?xml version="1.0" encoding="utf-8"?>
 <p:tagLst xmlns:p="http://schemas.openxmlformats.org/presentationml/2006/main">
-  <p:tag name="KSO_WM_DIAGRAM_VIRTUALLY_FRAME" val="{&quot;height&quot;:283.4,&quot;left&quot;:42.29937007874014,&quot;top&quot;:157.55,&quot;width&quot;:912.1340097406343}"/>
+  <p:tag name="KSO_WM_DIAGRAM_VIRTUALLY_FRAME" val="{&quot;height&quot;:333.7,&quot;left&quot;:181.0367716535433,&quot;top&quot;:150.5,&quot;width&quot;:585.2126771653544}"/>
 </p:tagLst>
 </file>
 
 <file path=ppt/tags/tag75.xml><?xml version="1.0" encoding="utf-8"?>
 <p:tagLst xmlns:p="http://schemas.openxmlformats.org/presentationml/2006/main">
-  <p:tag name="KSO_WM_DIAGRAM_VIRTUALLY_FRAME" val="{&quot;height&quot;:283.4,&quot;left&quot;:42.29937007874014,&quot;top&quot;:157.55,&quot;width&quot;:912.1340097406343}"/>
+  <p:tag name="KSO_WM_DIAGRAM_VIRTUALLY_FRAME" val="{&quot;height&quot;:333.7,&quot;left&quot;:181.0367716535433,&quot;top&quot;:150.5,&quot;width&quot;:585.2126771653544}"/>
 </p:tagLst>
 </file>
 
 <file path=ppt/tags/tag76.xml><?xml version="1.0" encoding="utf-8"?>
 <p:tagLst xmlns:p="http://schemas.openxmlformats.org/presentationml/2006/main">
-  <p:tag name="KSO_WM_DIAGRAM_VIRTUALLY_FRAME" val="{&quot;height&quot;:283.4,&quot;left&quot;:42.29937007874014,&quot;top&quot;:157.55,&quot;width&quot;:912.1340097406343}"/>
+  <p:tag name="KSO_WM_DIAGRAM_VIRTUALLY_FRAME" val="{&quot;height&quot;:333.7,&quot;left&quot;:181.0367716535433,&quot;top&quot;:150.5,&quot;width&quot;:585.2126771653544}"/>
 </p:tagLst>
 </file>
 
 <file path=ppt/tags/tag77.xml><?xml version="1.0" encoding="utf-8"?>
 <p:tagLst xmlns:p="http://schemas.openxmlformats.org/presentationml/2006/main">
-  <p:tag name="KSO_WM_DIAGRAM_VIRTUALLY_FRAME" val="{&quot;height&quot;:283.4,&quot;left&quot;:42.29937007874014,&quot;top&quot;:157.55,&quot;width&quot;:912.1340097406343}"/>
+  <p:tag name="KSO_WM_DIAGRAM_VIRTUALLY_FRAME" val="{&quot;height&quot;:333.6891855480546,&quot;left&quot;:181.0367716535433,&quot;top&quot;:150.5,&quot;width&quot;:585.2126771653544}"/>
 </p:tagLst>
 </file>
 
 <file path=ppt/tags/tag78.xml><?xml version="1.0" encoding="utf-8"?>
 <p:tagLst xmlns:p="http://schemas.openxmlformats.org/presentationml/2006/main">
-  <p:tag name="KSO_WM_DIAGRAM_VIRTUALLY_FRAME" val="{&quot;height&quot;:283.4,&quot;left&quot;:42.29937007874014,&quot;top&quot;:157.55,&quot;width&quot;:912.1340097406343}"/>
+  <p:tag name="KSO_WM_DIAGRAM_VIRTUALLY_FRAME" val="{&quot;height&quot;:333.7,&quot;left&quot;:181.0367716535433,&quot;top&quot;:150.5,&quot;width&quot;:585.2126771653544}"/>
 </p:tagLst>
 </file>
 
 <file path=ppt/tags/tag79.xml><?xml version="1.0" encoding="utf-8"?>
 <p:tagLst xmlns:p="http://schemas.openxmlformats.org/presentationml/2006/main">
-  <p:tag name="KSO_WM_DIAGRAM_VIRTUALLY_FRAME" val="{&quot;height&quot;:283.4,&quot;left&quot;:42.29937007874014,&quot;top&quot;:157.55,&quot;width&quot;:912.1340097406343}"/>
+  <p:tag name="KSO_WM_DIAGRAM_VIRTUALLY_FRAME" val="{&quot;height&quot;:333.7,&quot;left&quot;:181.0367716535433,&quot;top&quot;:150.5,&quot;width&quot;:585.2126771653544}"/>
 </p:tagLst>
 </file>
 
@@ -32732,70 +31014,61 @@
 
 <file path=ppt/tags/tag80.xml><?xml version="1.0" encoding="utf-8"?>
 <p:tagLst xmlns:p="http://schemas.openxmlformats.org/presentationml/2006/main">
-  <p:tag name="KSO_WM_BEAUTIFY_FLAG" val=""/>
-  <p:tag name="KSO_WM_DIAGRAM_VIRTUALLY_FRAME" val="{&quot;height&quot;:283.4,&quot;left&quot;:42.29937007874014,&quot;top&quot;:157.55,&quot;width&quot;:912.1340097406343}"/>
+  <p:tag name="KSO_WM_DIAGRAM_VIRTUALLY_FRAME" val="{&quot;height&quot;:333.7,&quot;left&quot;:181.0367716535433,&quot;top&quot;:150.5,&quot;width&quot;:585.2126771653544}"/>
 </p:tagLst>
 </file>
 
 <file path=ppt/tags/tag81.xml><?xml version="1.0" encoding="utf-8"?>
 <p:tagLst xmlns:p="http://schemas.openxmlformats.org/presentationml/2006/main">
-  <p:tag name="KSO_WM_BEAUTIFY_FLAG" val=""/>
-  <p:tag name="KSO_WM_DIAGRAM_VIRTUALLY_FRAME" val="{&quot;height&quot;:283.4,&quot;left&quot;:42.29937007874014,&quot;top&quot;:157.55,&quot;width&quot;:912.1340097406343}"/>
+  <p:tag name="KSO_WM_DIAGRAM_VIRTUALLY_FRAME" val="{&quot;height&quot;:333.7,&quot;left&quot;:181.0367716535433,&quot;top&quot;:150.5,&quot;width&quot;:585.2126771653544}"/>
 </p:tagLst>
 </file>
 
 <file path=ppt/tags/tag82.xml><?xml version="1.0" encoding="utf-8"?>
 <p:tagLst xmlns:p="http://schemas.openxmlformats.org/presentationml/2006/main">
-  <p:tag name="KSO_WM_BEAUTIFY_FLAG" val=""/>
-  <p:tag name="KSO_WM_DIAGRAM_VIRTUALLY_FRAME" val="{&quot;height&quot;:283.4,&quot;left&quot;:42.29937007874014,&quot;top&quot;:157.55,&quot;width&quot;:912.1340097406343}"/>
+  <p:tag name="KSO_WM_DIAGRAM_VIRTUALLY_FRAME" val="{&quot;height&quot;:333.7,&quot;left&quot;:116.85,&quot;top&quot;:150.5,&quot;width&quot;:710.2425984251968}"/>
 </p:tagLst>
 </file>
 
 <file path=ppt/tags/tag83.xml><?xml version="1.0" encoding="utf-8"?>
 <p:tagLst xmlns:p="http://schemas.openxmlformats.org/presentationml/2006/main">
-  <p:tag name="KSO_WM_BEAUTIFY_FLAG" val=""/>
-  <p:tag name="KSO_WM_DIAGRAM_VIRTUALLY_FRAME" val="{&quot;height&quot;:283.4,&quot;left&quot;:42.29937007874014,&quot;top&quot;:157.55,&quot;width&quot;:912.1340097406343}"/>
+  <p:tag name="KSO_WM_DIAGRAM_VIRTUALLY_FRAME" val="{&quot;height&quot;:333.7,&quot;left&quot;:116.85,&quot;top&quot;:150.5,&quot;width&quot;:710.2425984251968}"/>
 </p:tagLst>
 </file>
 
 <file path=ppt/tags/tag84.xml><?xml version="1.0" encoding="utf-8"?>
 <p:tagLst xmlns:p="http://schemas.openxmlformats.org/presentationml/2006/main">
-  <p:tag name="KSO_WM_BEAUTIFY_FLAG" val=""/>
-  <p:tag name="KSO_WM_DIAGRAM_VIRTUALLY_FRAME" val="{&quot;height&quot;:283.4,&quot;left&quot;:42.29937007874014,&quot;top&quot;:157.55,&quot;width&quot;:912.1340097406343}"/>
+  <p:tag name="KSO_WM_DIAGRAM_VIRTUALLY_FRAME" val="{&quot;height&quot;:333.7,&quot;left&quot;:116.85,&quot;top&quot;:150.5,&quot;width&quot;:710.2425984251968}"/>
 </p:tagLst>
 </file>
 
 <file path=ppt/tags/tag85.xml><?xml version="1.0" encoding="utf-8"?>
 <p:tagLst xmlns:p="http://schemas.openxmlformats.org/presentationml/2006/main">
-  <p:tag name="KSO_WM_BEAUTIFY_FLAG" val=""/>
-  <p:tag name="KSO_WM_DIAGRAM_VIRTUALLY_FRAME" val="{&quot;height&quot;:283.4,&quot;left&quot;:42.29937007874014,&quot;top&quot;:157.55,&quot;width&quot;:912.1340097406343}"/>
+  <p:tag name="KSO_WM_DIAGRAM_VIRTUALLY_FRAME" val="{&quot;height&quot;:333.7,&quot;left&quot;:116.85,&quot;top&quot;:150.5,&quot;width&quot;:710.2425984251968}"/>
 </p:tagLst>
 </file>
 
 <file path=ppt/tags/tag86.xml><?xml version="1.0" encoding="utf-8"?>
 <p:tagLst xmlns:p="http://schemas.openxmlformats.org/presentationml/2006/main">
-  <p:tag name="KSO_WM_BEAUTIFY_FLAG" val=""/>
+  <p:tag name="KSO_WM_DIAGRAM_VIRTUALLY_FRAME" val="{&quot;height&quot;:333.7,&quot;left&quot;:116.85,&quot;top&quot;:150.5,&quot;width&quot;:710.2425984251968}"/>
 </p:tagLst>
 </file>
 
 <file path=ppt/tags/tag87.xml><?xml version="1.0" encoding="utf-8"?>
 <p:tagLst xmlns:p="http://schemas.openxmlformats.org/presentationml/2006/main">
-  <p:tag name="KSO_WM_BEAUTIFY_FLAG" val=""/>
-  <p:tag name="KSO_WM_DIAGRAM_VIRTUALLY_FRAME" val="{&quot;height&quot;:283.4,&quot;left&quot;:42.29937007874014,&quot;top&quot;:157.55,&quot;width&quot;:912.1340097406343}"/>
+  <p:tag name="KSO_WM_DIAGRAM_VIRTUALLY_FRAME" val="{&quot;height&quot;:333.7,&quot;left&quot;:116.85,&quot;top&quot;:150.5,&quot;width&quot;:710.2425984251968}"/>
 </p:tagLst>
 </file>
 
 <file path=ppt/tags/tag88.xml><?xml version="1.0" encoding="utf-8"?>
 <p:tagLst xmlns:p="http://schemas.openxmlformats.org/presentationml/2006/main">
-  <p:tag name="KSO_WM_BEAUTIFY_FLAG" val=""/>
-  <p:tag name="KSO_WM_DIAGRAM_VIRTUALLY_FRAME" val="{&quot;height&quot;:283.4,&quot;left&quot;:42.29937007874014,&quot;top&quot;:157.55,&quot;width&quot;:912.1340097406343}"/>
+  <p:tag name="KSO_WM_DIAGRAM_VIRTUALLY_FRAME" val="{&quot;height&quot;:333.7,&quot;left&quot;:116.85,&quot;top&quot;:150.5,&quot;width&quot;:710.2425984251968}"/>
 </p:tagLst>
 </file>
 
 <file path=ppt/tags/tag89.xml><?xml version="1.0" encoding="utf-8"?>
 <p:tagLst xmlns:p="http://schemas.openxmlformats.org/presentationml/2006/main">
-  <p:tag name="KSO_WM_BEAUTIFY_FLAG" val=""/>
-  <p:tag name="KSO_WM_DIAGRAM_VIRTUALLY_FRAME" val="{&quot;height&quot;:283.4,&quot;left&quot;:42.29937007874014,&quot;top&quot;:157.55,&quot;width&quot;:912.1340097406343}"/>
+  <p:tag name="KSO_WM_DIAGRAM_VIRTUALLY_FRAME" val="{&quot;height&quot;:333.7,&quot;left&quot;:116.85,&quot;top&quot;:150.5,&quot;width&quot;:710.2425984251968}"/>
 </p:tagLst>
 </file>
 
@@ -32814,61 +31087,32 @@
 
 <file path=ppt/tags/tag90.xml><?xml version="1.0" encoding="utf-8"?>
 <p:tagLst xmlns:p="http://schemas.openxmlformats.org/presentationml/2006/main">
-  <p:tag name="KSO_WM_DIAGRAM_VIRTUALLY_FRAME" val="{&quot;height&quot;:283.4,&quot;left&quot;:42.29937007874014,&quot;top&quot;:157.55,&quot;width&quot;:912.1340097406343}"/>
+  <p:tag name="KSO_WM_DIAGRAM_VIRTUALLY_FRAME" val="{&quot;height&quot;:333.7,&quot;left&quot;:116.85,&quot;top&quot;:150.5,&quot;width&quot;:710.2425984251968}"/>
 </p:tagLst>
 </file>
 
 <file path=ppt/tags/tag91.xml><?xml version="1.0" encoding="utf-8"?>
 <p:tagLst xmlns:p="http://schemas.openxmlformats.org/presentationml/2006/main">
-  <p:tag name="KSO_WM_DIAGRAM_VIRTUALLY_FRAME" val="{&quot;height&quot;:283.4,&quot;left&quot;:42.29937007874014,&quot;top&quot;:157.55,&quot;width&quot;:912.1340097406343}"/>
+  <p:tag name="KSO_WM_DIAGRAM_VIRTUALLY_FRAME" val="{&quot;height&quot;:333.7,&quot;left&quot;:116.85,&quot;top&quot;:150.5,&quot;width&quot;:710.2425984251968}"/>
 </p:tagLst>
 </file>
 
 <file path=ppt/tags/tag92.xml><?xml version="1.0" encoding="utf-8"?>
 <p:tagLst xmlns:p="http://schemas.openxmlformats.org/presentationml/2006/main">
-  <p:tag name="KSO_WM_DIAGRAM_VIRTUALLY_FRAME" val="{&quot;height&quot;:283.4,&quot;left&quot;:42.29937007874014,&quot;top&quot;:157.55,&quot;width&quot;:912.1340097406343}"/>
+  <p:tag name="KSO_WM_DIAGRAM_VIRTUALLY_FRAME" val="{&quot;height&quot;:333.7,&quot;left&quot;:116.85,&quot;top&quot;:150.5,&quot;width&quot;:710.2425984251968}"/>
 </p:tagLst>
 </file>
 
 <file path=ppt/tags/tag93.xml><?xml version="1.0" encoding="utf-8"?>
 <p:tagLst xmlns:p="http://schemas.openxmlformats.org/presentationml/2006/main">
-  <p:tag name="KSO_WM_DIAGRAM_VIRTUALLY_FRAME" val="{&quot;height&quot;:283.4,&quot;left&quot;:42.29937007874014,&quot;top&quot;:157.55,&quot;width&quot;:912.1340097406343}"/>
+  <p:tag name="KSO_WM_DIAGRAM_VIRTUALLY_FRAME" val="{&quot;height&quot;:333.7,&quot;left&quot;:116.85,&quot;top&quot;:150.5,&quot;width&quot;:710.2425984251968}"/>
 </p:tagLst>
 </file>
 
 <file path=ppt/tags/tag94.xml><?xml version="1.0" encoding="utf-8"?>
 <p:tagLst xmlns:p="http://schemas.openxmlformats.org/presentationml/2006/main">
-  <p:tag name="KSO_WM_DIAGRAM_VIRTUALLY_FRAME" val="{&quot;height&quot;:283.4,&quot;left&quot;:42.29937007874014,&quot;top&quot;:157.55,&quot;width&quot;:912.1340097406343}"/>
-</p:tagLst>
-</file>
-
-<file path=ppt/tags/tag95.xml><?xml version="1.0" encoding="utf-8"?>
-<p:tagLst xmlns:p="http://schemas.openxmlformats.org/presentationml/2006/main">
-  <p:tag name="KSO_WM_DIAGRAM_VIRTUALLY_FRAME" val="{&quot;height&quot;:283.4,&quot;left&quot;:42.29937007874014,&quot;top&quot;:157.55,&quot;width&quot;:912.1340097406343}"/>
-</p:tagLst>
-</file>
-
-<file path=ppt/tags/tag96.xml><?xml version="1.0" encoding="utf-8"?>
-<p:tagLst xmlns:p="http://schemas.openxmlformats.org/presentationml/2006/main">
-  <p:tag name="KSO_WM_DIAGRAM_VIRTUALLY_FRAME" val="{&quot;height&quot;:283.4,&quot;left&quot;:42.29937007874014,&quot;top&quot;:157.55,&quot;width&quot;:912.1340097406343}"/>
-</p:tagLst>
-</file>
-
-<file path=ppt/tags/tag97.xml><?xml version="1.0" encoding="utf-8"?>
-<p:tagLst xmlns:p="http://schemas.openxmlformats.org/presentationml/2006/main">
-  <p:tag name="KSO_WM_DIAGRAM_VIRTUALLY_FRAME" val="{&quot;height&quot;:283.4,&quot;left&quot;:42.29937007874014,&quot;top&quot;:157.55,&quot;width&quot;:912.1340097406343}"/>
-</p:tagLst>
-</file>
-
-<file path=ppt/tags/tag98.xml><?xml version="1.0" encoding="utf-8"?>
-<p:tagLst xmlns:p="http://schemas.openxmlformats.org/presentationml/2006/main">
-  <p:tag name="KSO_WM_DIAGRAM_VIRTUALLY_FRAME" val="{&quot;height&quot;:283.4,&quot;left&quot;:42.29937007874014,&quot;top&quot;:157.55,&quot;width&quot;:912.1340097406343}"/>
-</p:tagLst>
-</file>
-
-<file path=ppt/tags/tag99.xml><?xml version="1.0" encoding="utf-8"?>
-<p:tagLst xmlns:p="http://schemas.openxmlformats.org/presentationml/2006/main">
-  <p:tag name="KSO_WM_DIAGRAM_VIRTUALLY_FRAME" val="{&quot;height&quot;:283.4,&quot;left&quot;:42.29937007874014,&quot;top&quot;:157.55,&quot;width&quot;:912.1340097406343}"/>
+  <p:tag name="COMMONDATA" val="eyJoZGlkIjoiYzZkNzQ4ZWFiZmQ4NTRhOWRkZTk3YTMwMjlmMmZhYmUifQ=="/>
+  <p:tag name="KSO_WPP_MARK_KEY" val="3c15e236-6e17-4788-8b7a-5fd2c15b6c5c"/>
 </p:tagLst>
 </file>
 
